--- a/presentation/AVM_발표.pptx
+++ b/presentation/AVM_발표.pptx
@@ -23131,7 +23131,7 @@
                           <a:ea typeface="Malgun Gothic" pitchFamily="34" charset="-122"/>
                           <a:cs typeface="Malgun Gothic" pitchFamily="34" charset="-120"/>
                         </a:rPr>
-                        <a:t>법정동코드</a:t>
+                        <a:t>법정동코드·행정동 연계</a:t>
                       </a:r>
                       <a:endParaRPr lang="en-US" sz="1200" dirty="0">
                         <a:latin typeface="Malgun Gothic" charset="0"/>
@@ -23199,7 +23199,7 @@
                           <a:ea typeface="Malgun Gothic" pitchFamily="34" charset="-122"/>
                           <a:cs typeface="Malgun Gothic" pitchFamily="34" charset="-120"/>
                         </a:rPr>
-                        <a:t>공공데이터 파일</a:t>
+                        <a:t>공공데이터·행정안전부 파일</a:t>
                       </a:r>
                       <a:endParaRPr lang="en-US" sz="1200" dirty="0">
                         <a:latin typeface="Malgun Gothic" charset="0"/>
@@ -23267,7 +23267,7 @@
                           <a:ea typeface="Malgun Gothic" pitchFamily="34" charset="-122"/>
                           <a:cs typeface="Malgun Gothic" pitchFamily="34" charset="-120"/>
                         </a:rPr>
-                        <a:t>2026-06-30</a:t>
+                        <a:t>2026-06-30 · 2026-09-30</a:t>
                       </a:r>
                       <a:endParaRPr lang="en-US" sz="1200" dirty="0">
                         <a:latin typeface="Malgun Gothic" charset="0"/>
@@ -23403,7 +23403,7 @@
                           <a:ea typeface="Malgun Gothic" pitchFamily="34" charset="-122"/>
                           <a:cs typeface="Malgun Gothic" pitchFamily="34" charset="-120"/>
                         </a:rPr>
-                        <a:t>3개 구 30개 동</a:t>
+                        <a:t>30개 법정동 · 63개 행정동</a:t>
                       </a:r>
                       <a:endParaRPr lang="en-US" sz="1200" dirty="0">
                         <a:latin typeface="Malgun Gothic" charset="0"/>
@@ -31520,7 +31520,7 @@
                 <a:ea typeface="Malgun Gothic" pitchFamily="34" charset="-122"/>
                 <a:cs typeface="Malgun Gothic" pitchFamily="34" charset="-120"/>
               </a:rPr>
-              <a:t>정부가 공개한 데이터 7가지를 주소(지번)로 하나로 묶었다</a:t>
+              <a:t>정부가 공개한 데이터 8가지를 주소(지번)로 하나로 묶었다</a:t>
             </a:r>
             <a:endParaRPr lang="en-US" sz="2600" dirty="0"/>
           </a:p>
@@ -32345,7 +32345,7 @@
                 <a:ea typeface="Malgun Gothic" pitchFamily="34" charset="-122"/>
                 <a:cs typeface="Malgun Gothic" pitchFamily="34" charset="-120"/>
               </a:rPr>
-              <a:t>법정동코드</a:t>
+              <a:t>법정동·행정동 코드</a:t>
             </a:r>
             <a:endParaRPr lang="en-US" sz="2000" dirty="0"/>
           </a:p>
@@ -32423,7 +32423,7 @@
                 <a:ea typeface="Malgun Gothic" pitchFamily="34" charset="-122"/>
                 <a:cs typeface="Malgun Gothic" pitchFamily="34" charset="-120"/>
               </a:rPr>
-              <a:t>3개 구 30개 동</a:t>
+              <a:t>30개 법정동, 행정동 63개 연결</a:t>
             </a:r>
             <a:endParaRPr lang="en-US" sz="1300" dirty="0"/>
           </a:p>

--- a/presentation/AVM_발표.pptx
+++ b/presentation/AVM_발표.pptx
@@ -6059,7 +6059,7 @@
                           <a:ea typeface="Malgun Gothic" pitchFamily="34" charset="-122"/>
                           <a:cs typeface="Malgun Gothic" pitchFamily="34" charset="-120"/>
                         </a:rPr>
-                        <a:t>9.3%</a:t>
+                        <a:t>9.4%</a:t>
                       </a:r>
                       <a:endParaRPr lang="en-US" sz="1500" dirty="0">
                         <a:latin typeface="Malgun Gothic" charset="0"/>
@@ -6127,7 +6127,7 @@
                           <a:ea typeface="Malgun Gothic" pitchFamily="34" charset="-122"/>
                           <a:cs typeface="Malgun Gothic" pitchFamily="34" charset="-120"/>
                         </a:rPr>
-                        <a:t>79.0%</a:t>
+                        <a:t>78.5%</a:t>
                       </a:r>
                       <a:endParaRPr lang="en-US" sz="1500" dirty="0">
                         <a:latin typeface="Malgun Gothic" charset="0"/>
@@ -6195,7 +6195,7 @@
                           <a:ea typeface="Malgun Gothic" pitchFamily="34" charset="-122"/>
                           <a:cs typeface="Malgun Gothic" pitchFamily="34" charset="-120"/>
                         </a:rPr>
-                        <a:t>82.0%</a:t>
+                        <a:t>82.9%</a:t>
                       </a:r>
                       <a:endParaRPr lang="en-US" sz="1500" dirty="0">
                         <a:latin typeface="Malgun Gothic" charset="0"/>
@@ -6333,7 +6333,7 @@
                           <a:ea typeface="Malgun Gothic" pitchFamily="34" charset="-122"/>
                           <a:cs typeface="Malgun Gothic" pitchFamily="34" charset="-120"/>
                         </a:rPr>
-                        <a:t>9.0%</a:t>
+                        <a:t>8.6%</a:t>
                       </a:r>
                       <a:endParaRPr lang="en-US" sz="1500" dirty="0">
                         <a:latin typeface="Malgun Gothic" charset="0"/>
@@ -6401,7 +6401,7 @@
                           <a:ea typeface="Malgun Gothic" pitchFamily="34" charset="-122"/>
                           <a:cs typeface="Malgun Gothic" pitchFamily="34" charset="-120"/>
                         </a:rPr>
-                        <a:t>80.2%</a:t>
+                        <a:t>80.1%</a:t>
                       </a:r>
                       <a:endParaRPr lang="en-US" sz="1500" dirty="0">
                         <a:latin typeface="Malgun Gothic" charset="0"/>
@@ -6469,7 +6469,7 @@
                           <a:ea typeface="Malgun Gothic" pitchFamily="34" charset="-122"/>
                           <a:cs typeface="Malgun Gothic" pitchFamily="34" charset="-120"/>
                         </a:rPr>
-                        <a:t>79.7%</a:t>
+                        <a:t>80.7%</a:t>
                       </a:r>
                       <a:endParaRPr lang="en-US" sz="1500" dirty="0">
                         <a:latin typeface="Malgun Gothic" charset="0"/>
@@ -6607,7 +6607,7 @@
                           <a:ea typeface="Malgun Gothic" pitchFamily="34" charset="-122"/>
                           <a:cs typeface="Malgun Gothic" pitchFamily="34" charset="-120"/>
                         </a:rPr>
-                        <a:t>11.1% / 10.6%</a:t>
+                        <a:t>11.1% / 10.7%</a:t>
                       </a:r>
                       <a:endParaRPr lang="en-US" sz="1500" dirty="0">
                         <a:latin typeface="Malgun Gothic" charset="0"/>
@@ -6743,7 +6743,7 @@
                           <a:ea typeface="Malgun Gothic" pitchFamily="34" charset="-122"/>
                           <a:cs typeface="Malgun Gothic" pitchFamily="34" charset="-120"/>
                         </a:rPr>
-                        <a:t>69.8% / 67.6%</a:t>
+                        <a:t>69.8% / 67.7%</a:t>
                       </a:r>
                       <a:endParaRPr lang="en-US" sz="1500" dirty="0">
                         <a:latin typeface="Malgun Gothic" charset="0"/>
@@ -6937,7 +6937,7 @@
                 <a:ea typeface="Malgun Gothic" pitchFamily="34" charset="-122"/>
                 <a:cs typeface="Malgun Gothic" pitchFamily="34" charset="-120"/>
               </a:rPr>
-              <a:t>8.6%  ·  80%</a:t>
+              <a:t>8.4%  ·  80%</a:t>
             </a:r>
             <a:endParaRPr lang="en-US" sz="1800" dirty="0"/>
           </a:p>
@@ -7042,7 +7042,7 @@
                 <a:ea typeface="Malgun Gothic" pitchFamily="34" charset="-122"/>
                 <a:cs typeface="Malgun Gothic" pitchFamily="34" charset="-120"/>
               </a:rPr>
-              <a:t>9.0%  ·  84%</a:t>
+              <a:t>8.3%  ·  84%</a:t>
             </a:r>
             <a:endParaRPr lang="en-US" sz="1800" dirty="0"/>
           </a:p>
@@ -7147,7 +7147,7 @@
                 <a:ea typeface="Malgun Gothic" pitchFamily="34" charset="-122"/>
                 <a:cs typeface="Malgun Gothic" pitchFamily="34" charset="-120"/>
               </a:rPr>
-              <a:t>9.3%  ·  75%</a:t>
+              <a:t>9.7%  ·  73%</a:t>
             </a:r>
             <a:endParaRPr lang="en-US" sz="1800" dirty="0"/>
           </a:p>
@@ -7407,7 +7407,7 @@
                 <a:ea typeface="Malgun Gothic" pitchFamily="34" charset="-122"/>
                 <a:cs typeface="Malgun Gothic" pitchFamily="34" charset="-120"/>
               </a:rPr>
-              <a:t>신뢰도가 정직하다 — 0.87이라고 한 물건은 실제로 86%가 맞았다</a:t>
+              <a:t>신뢰도가 정직하다 — 0.86이라고 한 물건은 실제로 86%가 맞았다</a:t>
             </a:r>
             <a:endParaRPr lang="en-US" sz="2600" dirty="0"/>
           </a:p>
@@ -7603,7 +7603,7 @@
                 <a:ea typeface="Malgun Gothic" pitchFamily="34" charset="-122"/>
                 <a:cs typeface="Malgun Gothic" pitchFamily="34" charset="-120"/>
               </a:rPr>
-              <a:t>신뢰도 0.57 → 실제 59%, 0.78 → 81%, 0.87 → 86%</a:t>
+              <a:t>신뢰도 0.56 → 실제 62%, 0.77 → 77%, 0.86 → 86%</a:t>
             </a:r>
             <a:endParaRPr lang="en-US" sz="1300" dirty="0"/>
           </a:p>
@@ -7863,7 +7863,7 @@
                 <a:ea typeface="Malgun Gothic" pitchFamily="34" charset="-122"/>
                 <a:cs typeface="Malgun Gothic" pitchFamily="34" charset="-120"/>
               </a:rPr>
-              <a:t>77%</a:t>
+              <a:t>78%</a:t>
             </a:r>
             <a:endParaRPr lang="en-US" sz="3600" dirty="0"/>
           </a:p>
@@ -7902,7 +7902,7 @@
                 <a:ea typeface="Malgun Gothic" pitchFamily="34" charset="-122"/>
                 <a:cs typeface="Malgun Gothic" pitchFamily="34" charset="-120"/>
               </a:rPr>
-              <a:t>±20% 밖으로 틀린 125건 중 공시가격에 비해 유난히 싸거나 비싸게 거래된 비율</a:t>
+              <a:t>±20% 밖으로 틀린 126건 중 공시가격에 비해 유난히 싸거나 비싸게 거래된 비율</a:t>
             </a:r>
             <a:endParaRPr lang="en-US" sz="1200" dirty="0"/>
           </a:p>
@@ -7968,7 +7968,7 @@
                 <a:ea typeface="Malgun Gothic" pitchFamily="34" charset="-122"/>
                 <a:cs typeface="Malgun Gothic" pitchFamily="34" charset="-120"/>
               </a:rPr>
-              <a:t>10 / 15</a:t>
+              <a:t>11 / 15</a:t>
             </a:r>
             <a:endParaRPr lang="en-US" sz="3600" dirty="0"/>
           </a:p>
@@ -8538,7 +8538,7 @@
                           <a:ea typeface="Malgun Gothic" pitchFamily="34" charset="-122"/>
                           <a:cs typeface="Malgun Gothic" pitchFamily="34" charset="-120"/>
                         </a:rPr>
-                        <a:t>3.65억</a:t>
+                        <a:t>3.87억</a:t>
                       </a:r>
                       <a:endParaRPr lang="en-US" sz="1200" dirty="0">
                         <a:latin typeface="Malgun Gothic" charset="0"/>
@@ -8606,7 +8606,7 @@
                           <a:ea typeface="Malgun Gothic" pitchFamily="34" charset="-122"/>
                           <a:cs typeface="Malgun Gothic" pitchFamily="34" charset="-120"/>
                         </a:rPr>
-                        <a:t>+103%</a:t>
+                        <a:t>+115%</a:t>
                       </a:r>
                       <a:endParaRPr lang="en-US" sz="1200" dirty="0">
                         <a:latin typeface="Malgun Gothic" charset="0"/>
@@ -8880,7 +8880,7 @@
                           <a:ea typeface="Malgun Gothic" pitchFamily="34" charset="-122"/>
                           <a:cs typeface="Malgun Gothic" pitchFamily="34" charset="-120"/>
                         </a:rPr>
-                        <a:t>7.49억</a:t>
+                        <a:t>7.41억</a:t>
                       </a:r>
                       <a:endParaRPr lang="en-US" sz="1200" dirty="0">
                         <a:latin typeface="Malgun Gothic" charset="0"/>
@@ -8948,7 +8948,7 @@
                           <a:ea typeface="Malgun Gothic" pitchFamily="34" charset="-122"/>
                           <a:cs typeface="Malgun Gothic" pitchFamily="34" charset="-120"/>
                         </a:rPr>
-                        <a:t>+93%</a:t>
+                        <a:t>+91%</a:t>
                       </a:r>
                       <a:endParaRPr lang="en-US" sz="1200" dirty="0">
                         <a:latin typeface="Malgun Gothic" charset="0"/>
@@ -9222,7 +9222,7 @@
                           <a:ea typeface="Malgun Gothic" pitchFamily="34" charset="-122"/>
                           <a:cs typeface="Malgun Gothic" pitchFamily="34" charset="-120"/>
                         </a:rPr>
-                        <a:t>3.88억</a:t>
+                        <a:t>3.82억</a:t>
                       </a:r>
                       <a:endParaRPr lang="en-US" sz="1200" dirty="0">
                         <a:latin typeface="Malgun Gothic" charset="0"/>
@@ -9290,7 +9290,7 @@
                           <a:ea typeface="Malgun Gothic" pitchFamily="34" charset="-122"/>
                           <a:cs typeface="Malgun Gothic" pitchFamily="34" charset="-120"/>
                         </a:rPr>
-                        <a:t>+84%</a:t>
+                        <a:t>+82%</a:t>
                       </a:r>
                       <a:endParaRPr lang="en-US" sz="1200" dirty="0">
                         <a:latin typeface="Malgun Gothic" charset="0"/>
@@ -9564,7 +9564,7 @@
                           <a:ea typeface="Malgun Gothic" pitchFamily="34" charset="-122"/>
                           <a:cs typeface="Malgun Gothic" pitchFamily="34" charset="-120"/>
                         </a:rPr>
-                        <a:t>3.30억</a:t>
+                        <a:t>3.32억</a:t>
                       </a:r>
                       <a:endParaRPr lang="en-US" sz="1200" dirty="0">
                         <a:latin typeface="Malgun Gothic" charset="0"/>
@@ -9632,7 +9632,7 @@
                           <a:ea typeface="Malgun Gothic" pitchFamily="34" charset="-122"/>
                           <a:cs typeface="Malgun Gothic" pitchFamily="34" charset="-120"/>
                         </a:rPr>
-                        <a:t>+79%</a:t>
+                        <a:t>+80%</a:t>
                       </a:r>
                       <a:endParaRPr lang="en-US" sz="1200" dirty="0">
                         <a:latin typeface="Malgun Gothic" charset="0"/>
@@ -9770,7 +9770,7 @@
                           <a:ea typeface="Malgun Gothic" pitchFamily="34" charset="-122"/>
                           <a:cs typeface="Malgun Gothic" pitchFamily="34" charset="-120"/>
                         </a:rPr>
-                        <a:t>강서 화곡동 32.66㎡ 2층</a:t>
+                        <a:t>강서 화곡동 30.00㎡ 7층</a:t>
                       </a:r>
                       <a:endParaRPr lang="en-US" sz="1200" dirty="0">
                         <a:latin typeface="Malgun Gothic" charset="0"/>
@@ -9838,7 +9838,7 @@
                           <a:ea typeface="Malgun Gothic" pitchFamily="34" charset="-122"/>
                           <a:cs typeface="Malgun Gothic" pitchFamily="34" charset="-120"/>
                         </a:rPr>
-                        <a:t>0.81억</a:t>
+                        <a:t>1.24억</a:t>
                       </a:r>
                       <a:endParaRPr lang="en-US" sz="1200" dirty="0">
                         <a:latin typeface="Malgun Gothic" charset="0"/>
@@ -9906,7 +9906,7 @@
                           <a:ea typeface="Malgun Gothic" pitchFamily="34" charset="-122"/>
                           <a:cs typeface="Malgun Gothic" pitchFamily="34" charset="-120"/>
                         </a:rPr>
-                        <a:t>1.44억</a:t>
+                        <a:t>2.19억</a:t>
                       </a:r>
                       <a:endParaRPr lang="en-US" sz="1200" dirty="0">
                         <a:latin typeface="Malgun Gothic" charset="0"/>
@@ -9974,7 +9974,7 @@
                           <a:ea typeface="Malgun Gothic" pitchFamily="34" charset="-122"/>
                           <a:cs typeface="Malgun Gothic" pitchFamily="34" charset="-120"/>
                         </a:rPr>
-                        <a:t>+78%</a:t>
+                        <a:t>+76%</a:t>
                       </a:r>
                       <a:endParaRPr lang="en-US" sz="1200" dirty="0">
                         <a:latin typeface="Malgun Gothic" charset="0"/>
@@ -10042,7 +10042,7 @@
                           <a:ea typeface="Malgun Gothic" pitchFamily="34" charset="-122"/>
                           <a:cs typeface="Malgun Gothic" pitchFamily="34" charset="-120"/>
                         </a:rPr>
-                        <a:t>공시가격보다 싸게, 36년 된 건물</a:t>
+                        <a:t>직거래, 공시가격보다 싸게</a:t>
                       </a:r>
                       <a:endParaRPr lang="en-US" sz="1200" dirty="0">
                         <a:latin typeface="Malgun Gothic" charset="0"/>
@@ -10515,7 +10515,7 @@
                 <a:ea typeface="Malgun Gothic" pitchFamily="34" charset="-122"/>
                 <a:cs typeface="Malgun Gothic" pitchFamily="34" charset="-120"/>
               </a:rPr>
-              <a:t>2.43억</a:t>
+              <a:t>2.41억</a:t>
             </a:r>
             <a:endParaRPr lang="en-US" sz="3400" dirty="0"/>
           </a:p>
@@ -10554,7 +10554,7 @@
                 <a:ea typeface="Malgun Gothic" pitchFamily="34" charset="-122"/>
                 <a:cs typeface="Malgun Gothic" pitchFamily="34" charset="-120"/>
               </a:rPr>
-              <a:t>80% 범위 1.97 ~ 2.98억</a:t>
+              <a:t>80% 범위 1.99 ~ 2.84억</a:t>
             </a:r>
             <a:endParaRPr lang="en-US" sz="1300" dirty="0"/>
           </a:p>
@@ -10593,7 +10593,7 @@
                 <a:ea typeface="Malgun Gothic" pitchFamily="34" charset="-122"/>
                 <a:cs typeface="Malgun Gothic" pitchFamily="34" charset="-120"/>
               </a:rPr>
-              <a:t>신뢰도 0.80</a:t>
+              <a:t>신뢰도 0.83</a:t>
             </a:r>
             <a:endParaRPr lang="en-US" sz="1300" dirty="0"/>
           </a:p>
@@ -10671,7 +10671,7 @@
                 <a:ea typeface="Malgun Gothic" pitchFamily="34" charset="-122"/>
                 <a:cs typeface="Malgun Gothic" pitchFamily="34" charset="-120"/>
               </a:rPr>
-              <a:t>공시가격 1.34억 × 동네 배율 1.78 = 2.38억, 건물 특징으로 2% 올림</a:t>
+              <a:t>공시가격 1.34억 × 동네 배율 1.78 = 2.38억, 건물 특징으로 1% 올림</a:t>
             </a:r>
             <a:endParaRPr lang="en-US" sz="1200" dirty="0"/>
           </a:p>
@@ -10710,7 +10710,7 @@
                 <a:ea typeface="Malgun Gothic" pitchFamily="34" charset="-122"/>
                 <a:cs typeface="Malgun Gothic" pitchFamily="34" charset="-120"/>
               </a:rPr>
-              <a:t>참고: 이 집의 실제 최근 거래를 빼고 계산했을 때 차이 −13.6%</a:t>
+              <a:t>참고: 이 집의 실제 최근 거래를 빼고 계산했을 때 차이 −13.4%</a:t>
             </a:r>
             <a:endParaRPr lang="en-US" sz="1100" dirty="0"/>
           </a:p>
@@ -10854,7 +10854,7 @@
                 <a:ea typeface="Malgun Gothic" pitchFamily="34" charset="-122"/>
                 <a:cs typeface="Malgun Gothic" pitchFamily="34" charset="-120"/>
               </a:rPr>
-              <a:t>2.47억</a:t>
+              <a:t>2.45억</a:t>
             </a:r>
             <a:endParaRPr lang="en-US" sz="3400" dirty="0"/>
           </a:p>
@@ -10893,7 +10893,7 @@
                 <a:ea typeface="Malgun Gothic" pitchFamily="34" charset="-122"/>
                 <a:cs typeface="Malgun Gothic" pitchFamily="34" charset="-120"/>
               </a:rPr>
-              <a:t>80% 범위 2.00 ~ 3.03억</a:t>
+              <a:t>80% 범위 2.04 ~ 2.95억</a:t>
             </a:r>
             <a:endParaRPr lang="en-US" sz="1300" dirty="0"/>
           </a:p>
@@ -10932,7 +10932,7 @@
                 <a:ea typeface="Malgun Gothic" pitchFamily="34" charset="-122"/>
                 <a:cs typeface="Malgun Gothic" pitchFamily="34" charset="-120"/>
               </a:rPr>
-              <a:t>신뢰도 0.80</a:t>
+              <a:t>신뢰도 0.83</a:t>
             </a:r>
             <a:endParaRPr lang="en-US" sz="1300" dirty="0"/>
           </a:p>
@@ -11010,7 +11010,7 @@
                 <a:ea typeface="Malgun Gothic" pitchFamily="34" charset="-122"/>
                 <a:cs typeface="Malgun Gothic" pitchFamily="34" charset="-120"/>
               </a:rPr>
-              <a:t>공시가격 1.28억 × 배율 1.88 = 2.40억, 3% 올림. 면적은 공시가격 자료(39.76㎡)로 채움</a:t>
+              <a:t>공시가격 1.28억 × 배율 1.88 = 2.40억, 2% 올림. 면적은 공시가격 자료(39.76㎡)로 채움</a:t>
             </a:r>
             <a:endParaRPr lang="en-US" sz="1200" dirty="0"/>
           </a:p>
@@ -11049,7 +11049,7 @@
                 <a:ea typeface="Malgun Gothic" pitchFamily="34" charset="-122"/>
                 <a:cs typeface="Malgun Gothic" pitchFamily="34" charset="-120"/>
               </a:rPr>
-              <a:t>참고: 이 집의 실제 최근 거래를 빼고 계산했을 때 차이 +7.3%</a:t>
+              <a:t>참고: 이 집의 실제 최근 거래를 빼고 계산했을 때 차이 +6.3%</a:t>
             </a:r>
             <a:endParaRPr lang="en-US" sz="1100" dirty="0"/>
           </a:p>
@@ -11193,7 +11193,7 @@
                 <a:ea typeface="Malgun Gothic" pitchFamily="34" charset="-122"/>
                 <a:cs typeface="Malgun Gothic" pitchFamily="34" charset="-120"/>
               </a:rPr>
-              <a:t>5.30억</a:t>
+              <a:t>5.45억</a:t>
             </a:r>
             <a:endParaRPr lang="en-US" sz="3400" dirty="0"/>
           </a:p>
@@ -11232,7 +11232,7 @@
                 <a:ea typeface="Malgun Gothic" pitchFamily="34" charset="-122"/>
                 <a:cs typeface="Malgun Gothic" pitchFamily="34" charset="-120"/>
               </a:rPr>
-              <a:t>80% 범위 3.81 ~ 7.53억</a:t>
+              <a:t>80% 범위 4.00 ~ 7.95억</a:t>
             </a:r>
             <a:endParaRPr lang="en-US" sz="1300" dirty="0"/>
           </a:p>
@@ -11271,7 +11271,7 @@
                 <a:ea typeface="Malgun Gothic" pitchFamily="34" charset="-122"/>
                 <a:cs typeface="Malgun Gothic" pitchFamily="34" charset="-120"/>
               </a:rPr>
-              <a:t>신뢰도 0.59</a:t>
+              <a:t>신뢰도 0.58</a:t>
             </a:r>
             <a:endParaRPr lang="en-US" sz="1300" dirty="0"/>
           </a:p>
@@ -11349,7 +11349,7 @@
                 <a:ea typeface="Malgun Gothic" pitchFamily="34" charset="-122"/>
                 <a:cs typeface="Malgun Gothic" pitchFamily="34" charset="-120"/>
               </a:rPr>
-              <a:t>공시가격 2.05억 × 배율 2.42 = 4.96억, 7% 올림. 지하·강남이라 신뢰도 낮고 범위가 넓다</a:t>
+              <a:t>공시가격 2.05억 × 배율 2.42 = 4.96억, 10% 올림. 지하·강남이라 신뢰도 낮고 범위가 넓다</a:t>
             </a:r>
             <a:endParaRPr lang="en-US" sz="1200" dirty="0"/>
           </a:p>
@@ -11388,7 +11388,7 @@
                 <a:ea typeface="Malgun Gothic" pitchFamily="34" charset="-122"/>
                 <a:cs typeface="Malgun Gothic" pitchFamily="34" charset="-120"/>
               </a:rPr>
-              <a:t>참고: 이 집의 실제 최근 거래를 빼고 계산했을 때 차이 −14.2%</a:t>
+              <a:t>참고: 이 집의 실제 최근 거래를 빼고 계산했을 때 차이 −13.7%</a:t>
             </a:r>
             <a:endParaRPr lang="en-US" sz="1100" dirty="0"/>
           </a:p>
@@ -11751,7 +11751,7 @@
                 <a:ea typeface="Malgun Gothic" pitchFamily="34" charset="-122"/>
                 <a:cs typeface="Malgun Gothic" pitchFamily="34" charset="-120"/>
               </a:rPr>
-              <a:t>결정마다 선택지·이유를 문서로(19건)</a:t>
+              <a:t>결정마다 선택지·이유를 문서로(21건)</a:t>
             </a:r>
             <a:endParaRPr lang="en-US" sz="1300" dirty="0"/>
           </a:p>
@@ -11793,7 +11793,7 @@
                 <a:ea typeface="Malgun Gothic" pitchFamily="34" charset="-122"/>
                 <a:cs typeface="Malgun Gothic" pitchFamily="34" charset="-120"/>
               </a:rPr>
-              <a:t>AI의 결과는 내가 확인한 뒤 반영 — PR 14건</a:t>
+              <a:t>AI의 결과는 내가 확인한 뒤 반영 — PR 17건</a:t>
             </a:r>
             <a:endParaRPr lang="en-US" sz="1300" dirty="0"/>
           </a:p>
@@ -16875,7 +16875,7 @@
                 <a:ea typeface="Malgun Gothic" pitchFamily="34" charset="-122"/>
                 <a:cs typeface="Malgun Gothic" pitchFamily="34" charset="-120"/>
               </a:rPr>
-              <a:t>80%</a:t>
+              <a:t>79%</a:t>
             </a:r>
             <a:endParaRPr lang="en-US" sz="3600" dirty="0"/>
           </a:p>
@@ -17019,7 +17019,7 @@
                 <a:ea typeface="Malgun Gothic" pitchFamily="34" charset="-122"/>
                 <a:cs typeface="Malgun Gothic" pitchFamily="34" charset="-120"/>
               </a:rPr>
-              <a:t>신뢰도 0.87이라 한 물건이 실제로 맞은 비율</a:t>
+              <a:t>신뢰도 0.86이라 한 물건이 실제로 맞은 비율</a:t>
             </a:r>
             <a:endParaRPr lang="en-US" sz="1200" dirty="0"/>
           </a:p>
@@ -21351,7 +21351,7 @@
                           <a:ea typeface="Malgun Gothic" pitchFamily="34" charset="-122"/>
                           <a:cs typeface="Malgun Gothic" pitchFamily="34" charset="-120"/>
                         </a:rPr>
-                        <a:t>33,886건 · 학습 최근 3년 14,520건</a:t>
+                        <a:t>33,363건 · 학습 최근 3년 14,401건</a:t>
                       </a:r>
                       <a:endParaRPr lang="en-US" sz="1200" dirty="0">
                         <a:latin typeface="Malgun Gothic" charset="0"/>
@@ -24316,7 +24316,7 @@
                           <a:ea typeface="Malgun Gothic" pitchFamily="34" charset="-122"/>
                           <a:cs typeface="Malgun Gothic" pitchFamily="34" charset="-120"/>
                         </a:rPr>
-                        <a:t>9.3%</a:t>
+                        <a:t>9.4%</a:t>
                       </a:r>
                       <a:endParaRPr lang="en-US" sz="1200" dirty="0">
                         <a:latin typeface="Malgun Gothic" charset="0"/>
@@ -24452,7 +24452,7 @@
                           <a:ea typeface="Malgun Gothic" pitchFamily="34" charset="-122"/>
                           <a:cs typeface="Malgun Gothic" pitchFamily="34" charset="-120"/>
                         </a:rPr>
-                        <a:t>52.8%</a:t>
+                        <a:t>52.7%</a:t>
                       </a:r>
                       <a:endParaRPr lang="en-US" sz="1200" dirty="0">
                         <a:latin typeface="Malgun Gothic" charset="0"/>
@@ -24520,7 +24520,7 @@
                           <a:ea typeface="Malgun Gothic" pitchFamily="34" charset="-122"/>
                           <a:cs typeface="Malgun Gothic" pitchFamily="34" charset="-120"/>
                         </a:rPr>
-                        <a:t>79.0%</a:t>
+                        <a:t>78.5%</a:t>
                       </a:r>
                       <a:endParaRPr lang="en-US" sz="1200" dirty="0">
                         <a:latin typeface="Malgun Gothic" charset="0"/>
@@ -24588,7 +24588,7 @@
                           <a:ea typeface="Malgun Gothic" pitchFamily="34" charset="-122"/>
                           <a:cs typeface="Malgun Gothic" pitchFamily="34" charset="-120"/>
                         </a:rPr>
-                        <a:t>82.0%</a:t>
+                        <a:t>82.9%</a:t>
                       </a:r>
                       <a:endParaRPr lang="en-US" sz="1200" dirty="0">
                         <a:latin typeface="Malgun Gothic" charset="0"/>
@@ -24794,7 +24794,7 @@
                           <a:ea typeface="Malgun Gothic" pitchFamily="34" charset="-122"/>
                           <a:cs typeface="Malgun Gothic" pitchFamily="34" charset="-120"/>
                         </a:rPr>
-                        <a:t>10.9%</a:t>
+                        <a:t>11.0%</a:t>
                       </a:r>
                       <a:endParaRPr lang="en-US" sz="1200" dirty="0">
                         <a:latin typeface="Malgun Gothic" charset="0"/>
@@ -24862,7 +24862,7 @@
                           <a:ea typeface="Malgun Gothic" pitchFamily="34" charset="-122"/>
                           <a:cs typeface="Malgun Gothic" pitchFamily="34" charset="-120"/>
                         </a:rPr>
-                        <a:t>16.1%</a:t>
+                        <a:t>16.2%</a:t>
                       </a:r>
                       <a:endParaRPr lang="en-US" sz="1200" dirty="0">
                         <a:latin typeface="Malgun Gothic" charset="0"/>
@@ -24930,7 +24930,7 @@
                           <a:ea typeface="Malgun Gothic" pitchFamily="34" charset="-122"/>
                           <a:cs typeface="Malgun Gothic" pitchFamily="34" charset="-120"/>
                         </a:rPr>
-                        <a:t>46.7%</a:t>
+                        <a:t>46.4%</a:t>
                       </a:r>
                       <a:endParaRPr lang="en-US" sz="1200" dirty="0">
                         <a:latin typeface="Malgun Gothic" charset="0"/>
@@ -24998,7 +24998,7 @@
                           <a:ea typeface="Malgun Gothic" pitchFamily="34" charset="-122"/>
                           <a:cs typeface="Malgun Gothic" pitchFamily="34" charset="-120"/>
                         </a:rPr>
-                        <a:t>73.7%</a:t>
+                        <a:t>73.3%</a:t>
                       </a:r>
                       <a:endParaRPr lang="en-US" sz="1200" dirty="0">
                         <a:latin typeface="Malgun Gothic" charset="0"/>
@@ -25066,7 +25066,7 @@
                           <a:ea typeface="Malgun Gothic" pitchFamily="34" charset="-122"/>
                           <a:cs typeface="Malgun Gothic" pitchFamily="34" charset="-120"/>
                         </a:rPr>
-                        <a:t>80.2%</a:t>
+                        <a:t>80.1%</a:t>
                       </a:r>
                       <a:endParaRPr lang="en-US" sz="1200" dirty="0">
                         <a:latin typeface="Malgun Gothic" charset="0"/>
@@ -25272,7 +25272,7 @@
                           <a:ea typeface="Malgun Gothic" pitchFamily="34" charset="-122"/>
                           <a:cs typeface="Malgun Gothic" pitchFamily="34" charset="-120"/>
                         </a:rPr>
-                        <a:t>9.0%</a:t>
+                        <a:t>8.6%</a:t>
                       </a:r>
                       <a:endParaRPr lang="en-US" sz="1200" dirty="0">
                         <a:latin typeface="Malgun Gothic" charset="0"/>
@@ -25408,7 +25408,7 @@
                           <a:ea typeface="Malgun Gothic" pitchFamily="34" charset="-122"/>
                           <a:cs typeface="Malgun Gothic" pitchFamily="34" charset="-120"/>
                         </a:rPr>
-                        <a:t>54.6%</a:t>
+                        <a:t>55.7%</a:t>
                       </a:r>
                       <a:endParaRPr lang="en-US" sz="1200" dirty="0">
                         <a:latin typeface="Malgun Gothic" charset="0"/>
@@ -25476,7 +25476,7 @@
                           <a:ea typeface="Malgun Gothic" pitchFamily="34" charset="-122"/>
                           <a:cs typeface="Malgun Gothic" pitchFamily="34" charset="-120"/>
                         </a:rPr>
-                        <a:t>80.2%</a:t>
+                        <a:t>80.1%</a:t>
                       </a:r>
                       <a:endParaRPr lang="en-US" sz="1200" dirty="0">
                         <a:latin typeface="Malgun Gothic" charset="0"/>
@@ -25544,7 +25544,7 @@
                           <a:ea typeface="Malgun Gothic" pitchFamily="34" charset="-122"/>
                           <a:cs typeface="Malgun Gothic" pitchFamily="34" charset="-120"/>
                         </a:rPr>
-                        <a:t>79.7%</a:t>
+                        <a:t>80.7%</a:t>
                       </a:r>
                       <a:endParaRPr lang="en-US" sz="1200" dirty="0">
                         <a:latin typeface="Malgun Gothic" charset="0"/>
@@ -25750,7 +25750,7 @@
                           <a:ea typeface="Malgun Gothic" pitchFamily="34" charset="-122"/>
                           <a:cs typeface="Malgun Gothic" pitchFamily="34" charset="-120"/>
                         </a:rPr>
-                        <a:t>10.7%</a:t>
+                        <a:t>10.5%</a:t>
                       </a:r>
                       <a:endParaRPr lang="en-US" sz="1200" dirty="0">
                         <a:latin typeface="Malgun Gothic" charset="0"/>
@@ -25886,7 +25886,7 @@
                           <a:ea typeface="Malgun Gothic" pitchFamily="34" charset="-122"/>
                           <a:cs typeface="Malgun Gothic" pitchFamily="34" charset="-120"/>
                         </a:rPr>
-                        <a:t>47.5%</a:t>
+                        <a:t>48.6%</a:t>
                       </a:r>
                       <a:endParaRPr lang="en-US" sz="1200" dirty="0">
                         <a:latin typeface="Malgun Gothic" charset="0"/>
@@ -25954,7 +25954,7 @@
                           <a:ea typeface="Malgun Gothic" pitchFamily="34" charset="-122"/>
                           <a:cs typeface="Malgun Gothic" pitchFamily="34" charset="-120"/>
                         </a:rPr>
-                        <a:t>75.0%</a:t>
+                        <a:t>74.1%</a:t>
                       </a:r>
                       <a:endParaRPr lang="en-US" sz="1200" dirty="0">
                         <a:latin typeface="Malgun Gothic" charset="0"/>
@@ -26022,7 +26022,7 @@
                           <a:ea typeface="Malgun Gothic" pitchFamily="34" charset="-122"/>
                           <a:cs typeface="Malgun Gothic" pitchFamily="34" charset="-120"/>
                         </a:rPr>
-                        <a:t>77.8%</a:t>
+                        <a:t>77.2%</a:t>
                       </a:r>
                       <a:endParaRPr lang="en-US" sz="1200" dirty="0">
                         <a:latin typeface="Malgun Gothic" charset="0"/>
@@ -26228,7 +26228,7 @@
                           <a:ea typeface="Malgun Gothic" pitchFamily="34" charset="-122"/>
                           <a:cs typeface="Malgun Gothic" pitchFamily="34" charset="-120"/>
                         </a:rPr>
-                        <a:t>11.1% / 10.6%</a:t>
+                        <a:t>11.1% / 10.7%</a:t>
                       </a:r>
                       <a:endParaRPr lang="en-US" sz="1200" dirty="0">
                         <a:latin typeface="Malgun Gothic" charset="0"/>
@@ -26364,7 +26364,7 @@
                           <a:ea typeface="Malgun Gothic" pitchFamily="34" charset="-122"/>
                           <a:cs typeface="Malgun Gothic" pitchFamily="34" charset="-120"/>
                         </a:rPr>
-                        <a:t>45.1% / 48.3%</a:t>
+                        <a:t>45.3% / 48.1%</a:t>
                       </a:r>
                       <a:endParaRPr lang="en-US" sz="1200" dirty="0">
                         <a:latin typeface="Malgun Gothic" charset="0"/>
@@ -26500,7 +26500,7 @@
                           <a:ea typeface="Malgun Gothic" pitchFamily="34" charset="-122"/>
                           <a:cs typeface="Malgun Gothic" pitchFamily="34" charset="-120"/>
                         </a:rPr>
-                        <a:t>69.8% / 67.6%</a:t>
+                        <a:t>69.8% / 67.7%</a:t>
                       </a:r>
                       <a:endParaRPr lang="en-US" sz="1200" dirty="0">
                         <a:latin typeface="Malgun Gothic" charset="0"/>
@@ -26875,7 +26875,7 @@
                           <a:ea typeface="Malgun Gothic" pitchFamily="34" charset="-122"/>
                           <a:cs typeface="Malgun Gothic" pitchFamily="34" charset="-120"/>
                         </a:rPr>
-                        <a:t>53 / 0.57 / 66.0%</a:t>
+                        <a:t>73 / 0.57 / 58.9%</a:t>
                       </a:r>
                       <a:endParaRPr lang="en-US" sz="1200" dirty="0">
                         <a:latin typeface="Malgun Gothic" charset="0"/>
@@ -26943,7 +26943,7 @@
                           <a:ea typeface="Malgun Gothic" pitchFamily="34" charset="-122"/>
                           <a:cs typeface="Malgun Gothic" pitchFamily="34" charset="-120"/>
                         </a:rPr>
-                        <a:t>44 / 0.57 / 59.1%</a:t>
+                        <a:t>47 / 0.56 / 61.7%</a:t>
                       </a:r>
                       <a:endParaRPr lang="en-US" sz="1200" dirty="0">
                         <a:latin typeface="Malgun Gothic" charset="0"/>
@@ -27081,7 +27081,7 @@
                           <a:ea typeface="Malgun Gothic" pitchFamily="34" charset="-122"/>
                           <a:cs typeface="Malgun Gothic" pitchFamily="34" charset="-120"/>
                         </a:rPr>
-                        <a:t>136 / 0.65 / 64.7%</a:t>
+                        <a:t>120 / 0.67 / 70.8%</a:t>
                       </a:r>
                       <a:endParaRPr lang="en-US" sz="1200" dirty="0">
                         <a:latin typeface="Malgun Gothic" charset="0"/>
@@ -27149,7 +27149,7 @@
                           <a:ea typeface="Malgun Gothic" pitchFamily="34" charset="-122"/>
                           <a:cs typeface="Malgun Gothic" pitchFamily="34" charset="-120"/>
                         </a:rPr>
-                        <a:t>97 / 0.65 / 70.1%</a:t>
+                        <a:t>94 / 0.66 / 70.2%</a:t>
                       </a:r>
                       <a:endParaRPr lang="en-US" sz="1200" dirty="0">
                         <a:latin typeface="Malgun Gothic" charset="0"/>
@@ -27287,7 +27287,7 @@
                           <a:ea typeface="Malgun Gothic" pitchFamily="34" charset="-122"/>
                           <a:cs typeface="Malgun Gothic" pitchFamily="34" charset="-120"/>
                         </a:rPr>
-                        <a:t>247 / 0.78 / 83.4%</a:t>
+                        <a:t>171 / 0.77 / 77.2%</a:t>
                       </a:r>
                       <a:endParaRPr lang="en-US" sz="1200" dirty="0">
                         <a:latin typeface="Malgun Gothic" charset="0"/>
@@ -27355,7 +27355,7 @@
                           <a:ea typeface="Malgun Gothic" pitchFamily="34" charset="-122"/>
                           <a:cs typeface="Malgun Gothic" pitchFamily="34" charset="-120"/>
                         </a:rPr>
-                        <a:t>185 / 0.78 / 81.1%</a:t>
+                        <a:t>137 / 0.77 / 77.4%</a:t>
                       </a:r>
                       <a:endParaRPr lang="en-US" sz="1200" dirty="0">
                         <a:latin typeface="Malgun Gothic" charset="0"/>
@@ -27493,7 +27493,7 @@
                           <a:ea typeface="Malgun Gothic" pitchFamily="34" charset="-122"/>
                           <a:cs typeface="Malgun Gothic" pitchFamily="34" charset="-120"/>
                         </a:rPr>
-                        <a:t>196 / 0.86 / 86.7%</a:t>
+                        <a:t>268 / 0.84 / 88.1%</a:t>
                       </a:r>
                       <a:endParaRPr lang="en-US" sz="1200" dirty="0">
                         <a:latin typeface="Malgun Gothic" charset="0"/>
@@ -27561,7 +27561,7 @@
                           <a:ea typeface="Malgun Gothic" pitchFamily="34" charset="-122"/>
                           <a:cs typeface="Malgun Gothic" pitchFamily="34" charset="-120"/>
                         </a:rPr>
-                        <a:t>306 / 0.87 / 85.9%</a:t>
+                        <a:t>354 / 0.86 / 86.2%</a:t>
                       </a:r>
                       <a:endParaRPr lang="en-US" sz="1200" dirty="0">
                         <a:latin typeface="Malgun Gothic" charset="0"/>
@@ -29159,7 +29159,7 @@
                 <a:ea typeface="Malgun Gothic" pitchFamily="34" charset="-122"/>
                 <a:cs typeface="Malgun Gothic" pitchFamily="34" charset="-120"/>
               </a:rPr>
-              <a:t>출처: docs/의사결정/1007_10_ML_비교.md, 1007_13_오차_분석.md</a:t>
+              <a:t>출처: docs/의사결정/1007_10_ML_비교.md, 1007_13_오차_분석.md · 학습 기간 표는 철거된 건물 거래를 빼기 전(1008_02) 비교 당시 값</a:t>
             </a:r>
             <a:endParaRPr lang="en-US" sz="1000" dirty="0"/>
           </a:p>
@@ -29695,7 +29695,7 @@
                 <a:ea typeface="Malgun Gothic" pitchFamily="34" charset="-122"/>
                 <a:cs typeface="Malgun Gothic" pitchFamily="34" charset="-120"/>
               </a:rPr>
-              <a:t>예시: 화곡동 빌라 1채를 넣으면 이렇게 나온다 — 추정 2.43억, 범위 1.97억 ~ 2.98억, 신뢰도 0.80</a:t>
+              <a:t>예시: 화곡동 빌라 1채를 넣으면 이렇게 나온다 — 추정 2.41억, 범위 1.99억 ~ 2.84억, 신뢰도 0.83</a:t>
             </a:r>
             <a:endParaRPr lang="en-US" sz="1500" dirty="0"/>
           </a:p>
@@ -29732,8 +29732,8 @@
         </p:nvSpPr>
         <p:spPr>
           <a:xfrm>
-            <a:off x="2774290" y="2240280"/>
-            <a:ext cx="6957365" cy="365760"/>
+            <a:off x="2912059" y="2240280"/>
+            <a:ext cx="5855208" cy="365760"/>
           </a:xfrm>
           <a:prstGeom prst="roundRect">
             <a:avLst>
@@ -29759,7 +29759,7 @@
         </p:nvSpPr>
         <p:spPr>
           <a:xfrm>
-            <a:off x="5796686" y="2276856"/>
+            <a:off x="5658917" y="2276856"/>
             <a:ext cx="292608" cy="292608"/>
           </a:xfrm>
           <a:prstGeom prst="ellipse">
@@ -29784,7 +29784,7 @@
         </p:nvSpPr>
         <p:spPr>
           <a:xfrm>
-            <a:off x="5028590" y="1783080"/>
+            <a:off x="4890821" y="1783080"/>
             <a:ext cx="1828800" cy="320040"/>
           </a:xfrm>
           <a:prstGeom prst="rect">
@@ -29809,7 +29809,7 @@
                 <a:ea typeface="Malgun Gothic" pitchFamily="34" charset="-122"/>
                 <a:cs typeface="Malgun Gothic" pitchFamily="34" charset="-120"/>
               </a:rPr>
-              <a:t>추정 2.43억</a:t>
+              <a:t>추정 2.41억</a:t>
             </a:r>
             <a:endParaRPr lang="en-US" sz="1400" dirty="0"/>
           </a:p>
@@ -29823,7 +29823,7 @@
         </p:nvSpPr>
         <p:spPr>
           <a:xfrm>
-            <a:off x="2225650" y="2697480"/>
+            <a:off x="2363419" y="2697480"/>
             <a:ext cx="1097280" cy="274320"/>
           </a:xfrm>
           <a:prstGeom prst="rect">
@@ -29848,7 +29848,7 @@
                 <a:ea typeface="Malgun Gothic" pitchFamily="34" charset="-122"/>
                 <a:cs typeface="Malgun Gothic" pitchFamily="34" charset="-120"/>
               </a:rPr>
-              <a:t>1.97억</a:t>
+              <a:t>1.99억</a:t>
             </a:r>
             <a:endParaRPr lang="en-US" sz="1200" dirty="0"/>
           </a:p>
@@ -29862,7 +29862,7 @@
         </p:nvSpPr>
         <p:spPr>
           <a:xfrm>
-            <a:off x="9183014" y="2697480"/>
+            <a:off x="8218627" y="2697480"/>
             <a:ext cx="1097280" cy="274320"/>
           </a:xfrm>
           <a:prstGeom prst="rect">
@@ -29887,7 +29887,7 @@
                 <a:ea typeface="Malgun Gothic" pitchFamily="34" charset="-122"/>
                 <a:cs typeface="Malgun Gothic" pitchFamily="34" charset="-120"/>
               </a:rPr>
-              <a:t>2.98억</a:t>
+              <a:t>2.84억</a:t>
             </a:r>
             <a:endParaRPr lang="en-US" sz="1200" dirty="0"/>
           </a:p>
@@ -33054,7 +33054,7 @@
                 <a:ea typeface="Malgun Gothic" pitchFamily="34" charset="-122"/>
                 <a:cs typeface="Malgun Gothic" pitchFamily="34" charset="-120"/>
               </a:rPr>
-              <a:t>−592</a:t>
+              <a:t>−1,115</a:t>
             </a:r>
             <a:endParaRPr lang="en-US" sz="2000" dirty="0"/>
           </a:p>
@@ -33093,7 +33093,7 @@
                 <a:ea typeface="Malgun Gothic" pitchFamily="34" charset="-122"/>
                 <a:cs typeface="Malgun Gothic" pitchFamily="34" charset="-120"/>
               </a:rPr>
-              <a:t>재건축 전 옛 건물의 거래,</a:t>
+              <a:t>헐린 옛 건물의 거래,</a:t>
             </a:r>
             <a:endParaRPr lang="en-US" sz="1200" dirty="0"/>
           </a:p>
@@ -33176,7 +33176,7 @@
                 <a:ea typeface="Malgun Gothic" pitchFamily="34" charset="-122"/>
                 <a:cs typeface="Malgun Gothic" pitchFamily="34" charset="-120"/>
               </a:rPr>
-              <a:t>33,886</a:t>
+              <a:t>33,363</a:t>
             </a:r>
             <a:endParaRPr lang="en-US" sz="2000" dirty="0"/>
           </a:p>
@@ -33281,7 +33281,7 @@
                 <a:ea typeface="Malgun Gothic" pitchFamily="34" charset="-122"/>
                 <a:cs typeface="Malgun Gothic" pitchFamily="34" charset="-120"/>
               </a:rPr>
-              <a:t>14,520</a:t>
+              <a:t>14,401</a:t>
             </a:r>
             <a:endParaRPr lang="en-US" sz="2000" dirty="0"/>
           </a:p>
@@ -34068,7 +34068,7 @@
                 <a:ea typeface="Malgun Gothic" pitchFamily="34" charset="-122"/>
                 <a:cs typeface="Malgun Gothic" pitchFamily="34" charset="-120"/>
               </a:rPr>
-              <a:t>오른쪽 그래프: 그런데 '실제 가격 ÷ 공시가격' 배율은 오래된 건물이 더 높다(강남 1.76배 → 2.12배). 재개발 기대가 공시가격에 덜 들어 있다</a:t>
+              <a:t>오른쪽 그래프: 그런데 '실제 가격 ÷ 공시가격' 배율은 오래된 건물이 더 높다(강남 1.77배 → 2.12배). 재개발 기대가 공시가격에 덜 들어 있다</a:t>
             </a:r>
             <a:endParaRPr lang="en-US" sz="1300" dirty="0"/>
           </a:p>

--- a/presentation/AVM_발표.pptx
+++ b/presentation/AVM_발표.pptx
@@ -30,9 +30,10 @@
     <p:sldId id="278" r:id="rId24"/>
     <p:sldId id="279" r:id="rId25"/>
     <p:sldId id="280" r:id="rId26"/>
+    <p:sldId id="281" r:id="rId27"/>
   </p:sldIdLst>
   <p:notesMasterIdLst>
-    <p:notesMasterId r:id="rId27"/>
+    <p:notesMasterId r:id="rId28"/>
   </p:notesMasterIdLst>
   <p:sldSz cx="12192000" cy="6858000"/>
   <p:notesSz cx="6858000" cy="12192000"/>
@@ -2373,6 +2374,94 @@
             <a:fld id="{F7021451-1387-4CA6-816F-3879F97B5CBC}" type="slidenum">
               <a:rPr lang="en-US"/>
               <a:t>25</a:t>
+            </a:fld>
+            <a:endParaRPr lang="en-US"/>
+          </a:p>
+        </p:txBody>
+      </p:sp>
+    </p:spTree>
+    <p:extLst>
+      <p:ext uri="{BB962C8B-B14F-4D97-AF65-F5344CB8AC3E}">
+        <p14:creationId xmlns:p14="http://schemas.microsoft.com/office/powerpoint/2010/main" val="1024086991"/>
+      </p:ext>
+    </p:extLst>
+  </p:cSld>
+  <p:clrMapOvr>
+    <a:masterClrMapping/>
+  </p:clrMapOvr>
+</p:notes>
+</file>
+
+<file path=ppt/notesSlides/notesSlide26.xml><?xml version="1.0" encoding="utf-8"?>
+<p:notes xmlns:a="http://schemas.openxmlformats.org/drawingml/2006/main" xmlns:r="http://schemas.openxmlformats.org/officeDocument/2006/relationships" xmlns:p="http://schemas.openxmlformats.org/presentationml/2006/main">
+  <p:cSld>
+    <p:spTree>
+      <p:nvGrpSpPr>
+        <p:cNvPr id="1" name=""/>
+        <p:cNvGrpSpPr/>
+        <p:nvPr/>
+      </p:nvGrpSpPr>
+      <p:grpSpPr>
+        <a:xfrm>
+          <a:off x="0" y="0"/>
+          <a:ext cx="0" cy="0"/>
+          <a:chOff x="0" y="0"/>
+          <a:chExt cx="0" cy="0"/>
+        </a:xfrm>
+      </p:grpSpPr>
+      <p:sp>
+        <p:nvSpPr>
+          <p:cNvPr id="2" name="Slide Image Placeholder 1"/>
+          <p:cNvSpPr>
+            <a:spLocks noGrp="1" noRot="1" noChangeAspect="1"/>
+          </p:cNvSpPr>
+          <p:nvPr>
+            <p:ph type="sldImg"/>
+          </p:nvPr>
+        </p:nvSpPr>
+        <p:spPr/>
+      </p:sp>
+      <p:sp>
+        <p:nvSpPr>
+          <p:cNvPr id="3" name="Notes Placeholder 2"/>
+          <p:cNvSpPr>
+            <a:spLocks noGrp="1"/>
+          </p:cNvSpPr>
+          <p:nvPr>
+            <p:ph type="body" idx="1"/>
+          </p:nvPr>
+        </p:nvSpPr>
+        <p:spPr/>
+        <p:txBody>
+          <a:bodyPr/>
+          <a:lstStyle/>
+          <a:p>
+            <a:r>
+              <a:rPr lang="en-US" dirty="0"/>
+              <a:t/>
+            </a:r>
+            <a:endParaRPr lang="en-US" dirty="0"/>
+          </a:p>
+        </p:txBody>
+      </p:sp>
+      <p:sp>
+        <p:nvSpPr>
+          <p:cNvPr id="4" name="Slide Number Placeholder 3"/>
+          <p:cNvSpPr>
+            <a:spLocks noGrp="1"/>
+          </p:cNvSpPr>
+          <p:nvPr>
+            <p:ph type="sldNum" sz="quarter" idx="10"/>
+          </p:nvPr>
+        </p:nvSpPr>
+        <p:spPr/>
+        <p:txBody>
+          <a:bodyPr/>
+          <a:lstStyle/>
+          <a:p>
+            <a:fld id="{F7021451-1387-4CA6-816F-3879F97B5CBC}" type="slidenum">
+              <a:rPr lang="en-US"/>
+              <a:t>26</a:t>
             </a:fld>
             <a:endParaRPr lang="en-US"/>
           </a:p>
@@ -11751,7 +11840,7 @@
                 <a:ea typeface="Malgun Gothic" pitchFamily="34" charset="-122"/>
                 <a:cs typeface="Malgun Gothic" pitchFamily="34" charset="-120"/>
               </a:rPr>
-              <a:t>결정마다 선택지·이유를 문서로(21건)</a:t>
+              <a:t>결정마다 선택지·이유를 문서로(22건)</a:t>
             </a:r>
             <a:endParaRPr lang="en-US" sz="1300" dirty="0"/>
           </a:p>
@@ -11793,7 +11882,7 @@
                 <a:ea typeface="Malgun Gothic" pitchFamily="34" charset="-122"/>
                 <a:cs typeface="Malgun Gothic" pitchFamily="34" charset="-120"/>
               </a:rPr>
-              <a:t>AI의 결과는 내가 확인한 뒤 반영 — PR 17건</a:t>
+              <a:t>AI의 결과는 내가 확인한 뒤 반영 — PR 18건</a:t>
             </a:r>
             <a:endParaRPr lang="en-US" sz="1300" dirty="0"/>
           </a:p>
@@ -16087,7 +16176,7 @@
                 <a:ea typeface="Malgun Gothic" pitchFamily="34" charset="-122"/>
                 <a:cs typeface="Malgun Gothic" pitchFamily="34" charset="-120"/>
               </a:rPr>
-              <a:t>1년이 지나면 3~5% 낮게 추정한다 — 갱신이 필요</a:t>
+              <a:t>시세 흐름은 3달 평균이라 늦게 따라가고, 신고가 덜 들어온 최근 2달(9·10월)은 반영 못 한다. 1년이 지나면 3~5% 낮게 추정 — 갱신 필요</a:t>
             </a:r>
             <a:endParaRPr lang="en-US" sz="1300" dirty="0"/>
           </a:p>
@@ -18016,7 +18105,7 @@
                 <a:ea typeface="Malgun Gothic" pitchFamily="34" charset="-122"/>
                 <a:cs typeface="Malgun Gothic" pitchFamily="34" charset="-120"/>
               </a:rPr>
-              <a:t>용어 풀이 · 기술 스택과 데이터 상세 · 검증 상세표 · 모델 비교 방법 · 신뢰도 계산 방법</a:t>
+              <a:t>용어 풀이 · 기술 스택과 데이터 상세 · 검증 상세표 · 모델 비교 방법 · 신뢰도 계산 방법 · 시점 지수 검증</a:t>
             </a:r>
             <a:endParaRPr lang="en-US" sz="1600" dirty="0"/>
           </a:p>
@@ -29357,7 +29446,7 @@
                 <a:ea typeface="Malgun Gothic" pitchFamily="34" charset="-122"/>
                 <a:cs typeface="Malgun Gothic" pitchFamily="34" charset="-120"/>
               </a:rPr>
-              <a:t>보정 표본: 최종 검증 632개를 뺀 나머지 후보 건물 2,527개를 5묶음으로 나눠 돌아가며 시험 → 약 1만 건의 오차</a:t>
+              <a:t>보정 표본: 최종 검증 632개를 뺀 나머지 후보 건물 2,524개를 5묶음으로 나눠 돌아가며 시험 → 약 1만 건의 오차</a:t>
             </a:r>
             <a:endParaRPr lang="en-US" sz="1400" dirty="0"/>
           </a:p>
@@ -29550,6 +29639,1625 @@
             <a:fld id="{F7021451-1387-4CA6-816F-3879F97B5CBC}" type="slidenum">
               <a:rPr b="0" lang="en-US"/>
               <a:t>25</a:t>
+            </a:fld>
+            <a:endParaRPr lang="en-US"/>
+          </a:p>
+        </p:txBody>
+      </p:sp>
+    </p:spTree>
+  </p:cSld>
+  <p:clrMapOvr>
+    <a:masterClrMapping/>
+  </p:clrMapOvr>
+</p:sld>
+</file>
+
+<file path=ppt/slides/slide26.xml><?xml version="1.0" encoding="utf-8"?>
+<p:sld xmlns:a="http://schemas.openxmlformats.org/drawingml/2006/main" xmlns:r="http://schemas.openxmlformats.org/officeDocument/2006/relationships" xmlns:p="http://schemas.openxmlformats.org/presentationml/2006/main">
+  <p:cSld name="Slide 26">
+    <p:spTree>
+      <p:nvGrpSpPr>
+        <p:cNvPr id="1" name=""/>
+        <p:cNvGrpSpPr/>
+        <p:nvPr/>
+      </p:nvGrpSpPr>
+      <p:grpSpPr>
+        <a:xfrm>
+          <a:off x="0" y="0"/>
+          <a:ext cx="0" cy="0"/>
+          <a:chOff x="0" y="0"/>
+          <a:chExt cx="0" cy="0"/>
+        </a:xfrm>
+      </p:grpSpPr>
+      <p:sp>
+        <p:nvSpPr>
+          <p:cNvPr id="2" name="Text 0"/>
+          <p:cNvSpPr/>
+          <p:nvPr>
+            <p:ph idx="101" type="body" hasCustomPrompt="1"/>
+          </p:nvPr>
+        </p:nvSpPr>
+        <p:spPr>
+          <a:xfrm>
+            <a:off x="548640" y="109728"/>
+            <a:ext cx="5486400" cy="274320"/>
+          </a:xfrm>
+          <a:prstGeom prst="rect">
+            <a:avLst/>
+          </a:prstGeom>
+          <a:noFill/>
+          <a:ln/>
+        </p:spPr>
+        <p:txBody>
+          <a:bodyPr wrap="square" lIns="0" tIns="0" rIns="0" bIns="0" rtlCol="0"/>
+          <a:lstStyle/>
+          <a:p>
+            <a:pPr indent="0" marL="0">
+              <a:buNone/>
+            </a:pPr>
+            <a:r>
+              <a:rPr lang="en-US" sz="1100" b="1" dirty="0">
+                <a:solidFill>
+                  <a:srgbClr val="EB6834"/>
+                </a:solidFill>
+                <a:latin typeface="Malgun Gothic" pitchFamily="34" charset="0"/>
+                <a:ea typeface="Malgun Gothic" pitchFamily="34" charset="-122"/>
+                <a:cs typeface="Malgun Gothic" pitchFamily="34" charset="-120"/>
+              </a:rPr>
+              <a:t>부록 F</a:t>
+            </a:r>
+            <a:endParaRPr lang="en-US" sz="1100" dirty="0"/>
+          </a:p>
+        </p:txBody>
+      </p:sp>
+      <p:sp>
+        <p:nvSpPr>
+          <p:cNvPr id="3" name="Text 0"/>
+          <p:cNvSpPr/>
+          <p:nvPr>
+            <p:ph idx="100" type="title" hasCustomPrompt="1"/>
+          </p:nvPr>
+        </p:nvSpPr>
+        <p:spPr>
+          <a:xfrm>
+            <a:off x="548640" y="320040"/>
+            <a:ext cx="11094415" cy="731520"/>
+          </a:xfrm>
+          <a:prstGeom prst="rect">
+            <a:avLst/>
+          </a:prstGeom>
+          <a:noFill/>
+          <a:ln/>
+        </p:spPr>
+        <p:txBody>
+          <a:bodyPr wrap="square" lIns="0" tIns="0" rIns="0" bIns="0" rtlCol="0" anchor="ctr"/>
+          <a:lstStyle/>
+          <a:p>
+            <a:pPr algn="l" indent="0" marL="0">
+              <a:buNone/>
+            </a:pPr>
+            <a:r>
+              <a:rPr lang="en-US" sz="2600" b="1" dirty="0">
+                <a:solidFill>
+                  <a:srgbClr val="1F2328"/>
+                </a:solidFill>
+                <a:latin typeface="Malgun Gothic" pitchFamily="34" charset="0"/>
+                <a:ea typeface="Malgun Gothic" pitchFamily="34" charset="-122"/>
+                <a:cs typeface="Malgun Gothic" pitchFamily="34" charset="-120"/>
+              </a:rPr>
+              <a:t>직접 만든 시점 지수를 한국부동산원 지수와 비교</a:t>
+            </a:r>
+            <a:endParaRPr lang="en-US" sz="2600" dirty="0"/>
+          </a:p>
+        </p:txBody>
+      </p:sp>
+      <p:pic>
+        <p:nvPicPr>
+          <p:cNvPr id="4" name="Image 0" descr="C:\DA_WorkSpace\DA_Seoul_Villa_AVM\outputs\figures\reb_index_compare.png">    </p:cNvPr>
+          <p:cNvPicPr>
+            <a:picLocks noChangeAspect="1"/>
+          </p:cNvPicPr>
+          <p:nvPr/>
+        </p:nvPicPr>
+        <p:blipFill>
+          <a:blip r:embed="rId1"/>
+          <a:stretch>
+            <a:fillRect/>
+          </a:stretch>
+        </p:blipFill>
+        <p:spPr>
+          <a:xfrm>
+            <a:off x="548640" y="1188720"/>
+            <a:ext cx="11094415" cy="3246419"/>
+          </a:xfrm>
+          <a:prstGeom prst="rect">
+            <a:avLst/>
+          </a:prstGeom>
+        </p:spPr>
+      </p:pic>
+      <p:graphicFrame>
+        <p:nvGraphicFramePr>
+          <p:cNvPr id="27" name="Table 0"/>
+          <p:cNvGraphicFramePr>
+            <a:graphicFrameLocks noGrp="1"/>
+          </p:cNvGraphicFramePr>
+          <p:nvPr>
+            <p:extLst>
+              <p:ext uri="{D42A27DB-BD31-4B8C-83A1-F6EECF244321}">
+                <p14:modId xmlns:p14="http://schemas.microsoft.com/office/powerpoint/2010/main" val="1579011935"/>
+              </p:ext>
+            </p:extLst>
+          </p:nvPr>
+        </p:nvGraphicFramePr>
+        <p:xfrm>
+          <a:off x="548640" y="4572299"/>
+          <a:ext cx="11094415" cy="914400"/>
+        </p:xfrm>
+        <a:graphic>
+          <a:graphicData uri="http://schemas.openxmlformats.org/drawingml/2006/table">
+            <a:tbl>
+              <a:tblPr/>
+              <a:tblGrid>
+                <a:gridCol w="2377440"/>
+                <a:gridCol w="2651760"/>
+                <a:gridCol w="1463040"/>
+                <a:gridCol w="2103120"/>
+                <a:gridCol w="2499055"/>
+              </a:tblGrid>
+              <a:tr h="329184">
+                <a:tc>
+                  <a:txBody>
+                    <a:bodyPr/>
+                    <a:lstStyle/>
+                    <a:p>
+                      <a:pPr indent="0" marL="0">
+                        <a:buNone/>
+                      </a:pPr>
+                      <a:r>
+                        <a:rPr lang="en-US" sz="1200" b="1" dirty="0">
+                          <a:solidFill>
+                            <a:srgbClr val="FFFFFF"/>
+                          </a:solidFill>
+                          <a:latin typeface="Malgun Gothic" pitchFamily="34" charset="0"/>
+                          <a:ea typeface="Malgun Gothic" pitchFamily="34" charset="-122"/>
+                          <a:cs typeface="Malgun Gothic" pitchFamily="34" charset="-120"/>
+                        </a:rPr>
+                        <a:t>최근 3년(모델 학습 기간)</a:t>
+                      </a:r>
+                      <a:endParaRPr lang="en-US" sz="1200" dirty="0">
+                        <a:latin typeface="Malgun Gothic" charset="0"/>
+                        <a:ea typeface="Malgun Gothic" charset="0"/>
+                        <a:cs typeface="Malgun Gothic" charset="0"/>
+                      </a:endParaRPr>
+                    </a:p>
+                  </a:txBody>
+                  <a:tcPr marL="76200" marR="76200" marT="38100" marB="38100" anchor="ctr">
+                    <a:lnL w="6350" cap="flat" cmpd="sng" algn="ctr">
+                      <a:solidFill>
+                        <a:srgbClr val="D9DCE3"/>
+                      </a:solidFill>
+                      <a:prstDash val="solid"/>
+                      <a:round/>
+                      <a:headEnd type="none" w="med" len="med"/>
+                      <a:tailEnd type="none" w="med" len="med"/>
+                    </a:lnL>
+                    <a:lnR w="6350" cap="flat" cmpd="sng" algn="ctr">
+                      <a:solidFill>
+                        <a:srgbClr val="D9DCE3"/>
+                      </a:solidFill>
+                      <a:prstDash val="solid"/>
+                      <a:round/>
+                      <a:headEnd type="none" w="med" len="med"/>
+                      <a:tailEnd type="none" w="med" len="med"/>
+                    </a:lnR>
+                    <a:lnT w="6350" cap="flat" cmpd="sng" algn="ctr">
+                      <a:solidFill>
+                        <a:srgbClr val="D9DCE3"/>
+                      </a:solidFill>
+                      <a:prstDash val="solid"/>
+                      <a:round/>
+                      <a:headEnd type="none" w="med" len="med"/>
+                      <a:tailEnd type="none" w="med" len="med"/>
+                    </a:lnT>
+                    <a:lnB w="6350" cap="flat" cmpd="sng" algn="ctr">
+                      <a:solidFill>
+                        <a:srgbClr val="D9DCE3"/>
+                      </a:solidFill>
+                      <a:prstDash val="solid"/>
+                      <a:round/>
+                      <a:headEnd type="none" w="med" len="med"/>
+                      <a:tailEnd type="none" w="med" len="med"/>
+                    </a:lnB>
+                    <a:solidFill>
+                      <a:srgbClr val="2C3A5C"/>
+                    </a:solidFill>
+                  </a:tcPr>
+                </a:tc>
+                <a:tc>
+                  <a:txBody>
+                    <a:bodyPr/>
+                    <a:lstStyle/>
+                    <a:p>
+                      <a:pPr indent="0" marL="0">
+                        <a:buNone/>
+                      </a:pPr>
+                      <a:r>
+                        <a:rPr lang="en-US" sz="1200" b="1" dirty="0">
+                          <a:solidFill>
+                            <a:srgbClr val="FFFFFF"/>
+                          </a:solidFill>
+                          <a:latin typeface="Malgun Gothic" pitchFamily="34" charset="0"/>
+                          <a:ea typeface="Malgun Gothic" pitchFamily="34" charset="-122"/>
+                          <a:cs typeface="Malgun Gothic" pitchFamily="34" charset="-120"/>
+                        </a:rPr>
+                        <a:t>비교 대상</a:t>
+                      </a:r>
+                      <a:endParaRPr lang="en-US" sz="1200" dirty="0">
+                        <a:latin typeface="Malgun Gothic" charset="0"/>
+                        <a:ea typeface="Malgun Gothic" charset="0"/>
+                        <a:cs typeface="Malgun Gothic" charset="0"/>
+                      </a:endParaRPr>
+                    </a:p>
+                  </a:txBody>
+                  <a:tcPr marL="76200" marR="76200" marT="38100" marB="38100" anchor="ctr">
+                    <a:lnL w="6350" cap="flat" cmpd="sng" algn="ctr">
+                      <a:solidFill>
+                        <a:srgbClr val="D9DCE3"/>
+                      </a:solidFill>
+                      <a:prstDash val="solid"/>
+                      <a:round/>
+                      <a:headEnd type="none" w="med" len="med"/>
+                      <a:tailEnd type="none" w="med" len="med"/>
+                    </a:lnL>
+                    <a:lnR w="6350" cap="flat" cmpd="sng" algn="ctr">
+                      <a:solidFill>
+                        <a:srgbClr val="D9DCE3"/>
+                      </a:solidFill>
+                      <a:prstDash val="solid"/>
+                      <a:round/>
+                      <a:headEnd type="none" w="med" len="med"/>
+                      <a:tailEnd type="none" w="med" len="med"/>
+                    </a:lnR>
+                    <a:lnT w="6350" cap="flat" cmpd="sng" algn="ctr">
+                      <a:solidFill>
+                        <a:srgbClr val="D9DCE3"/>
+                      </a:solidFill>
+                      <a:prstDash val="solid"/>
+                      <a:round/>
+                      <a:headEnd type="none" w="med" len="med"/>
+                      <a:tailEnd type="none" w="med" len="med"/>
+                    </a:lnT>
+                    <a:lnB w="6350" cap="flat" cmpd="sng" algn="ctr">
+                      <a:solidFill>
+                        <a:srgbClr val="D9DCE3"/>
+                      </a:solidFill>
+                      <a:prstDash val="solid"/>
+                      <a:round/>
+                      <a:headEnd type="none" w="med" len="med"/>
+                      <a:tailEnd type="none" w="med" len="med"/>
+                    </a:lnB>
+                    <a:solidFill>
+                      <a:srgbClr val="2C3A5C"/>
+                    </a:solidFill>
+                  </a:tcPr>
+                </a:tc>
+                <a:tc>
+                  <a:txBody>
+                    <a:bodyPr/>
+                    <a:lstStyle/>
+                    <a:p>
+                      <a:pPr indent="0" marL="0">
+                        <a:buNone/>
+                      </a:pPr>
+                      <a:r>
+                        <a:rPr lang="en-US" sz="1200" b="1" dirty="0">
+                          <a:solidFill>
+                            <a:srgbClr val="FFFFFF"/>
+                          </a:solidFill>
+                          <a:latin typeface="Malgun Gothic" pitchFamily="34" charset="0"/>
+                          <a:ea typeface="Malgun Gothic" pitchFamily="34" charset="-122"/>
+                          <a:cs typeface="Malgun Gothic" pitchFamily="34" charset="-120"/>
+                        </a:rPr>
+                        <a:t>수준 상관</a:t>
+                      </a:r>
+                      <a:endParaRPr lang="en-US" sz="1200" dirty="0">
+                        <a:latin typeface="Malgun Gothic" charset="0"/>
+                        <a:ea typeface="Malgun Gothic" charset="0"/>
+                        <a:cs typeface="Malgun Gothic" charset="0"/>
+                      </a:endParaRPr>
+                    </a:p>
+                  </a:txBody>
+                  <a:tcPr marL="76200" marR="76200" marT="38100" marB="38100" anchor="ctr">
+                    <a:lnL w="6350" cap="flat" cmpd="sng" algn="ctr">
+                      <a:solidFill>
+                        <a:srgbClr val="D9DCE3"/>
+                      </a:solidFill>
+                      <a:prstDash val="solid"/>
+                      <a:round/>
+                      <a:headEnd type="none" w="med" len="med"/>
+                      <a:tailEnd type="none" w="med" len="med"/>
+                    </a:lnL>
+                    <a:lnR w="6350" cap="flat" cmpd="sng" algn="ctr">
+                      <a:solidFill>
+                        <a:srgbClr val="D9DCE3"/>
+                      </a:solidFill>
+                      <a:prstDash val="solid"/>
+                      <a:round/>
+                      <a:headEnd type="none" w="med" len="med"/>
+                      <a:tailEnd type="none" w="med" len="med"/>
+                    </a:lnR>
+                    <a:lnT w="6350" cap="flat" cmpd="sng" algn="ctr">
+                      <a:solidFill>
+                        <a:srgbClr val="D9DCE3"/>
+                      </a:solidFill>
+                      <a:prstDash val="solid"/>
+                      <a:round/>
+                      <a:headEnd type="none" w="med" len="med"/>
+                      <a:tailEnd type="none" w="med" len="med"/>
+                    </a:lnT>
+                    <a:lnB w="6350" cap="flat" cmpd="sng" algn="ctr">
+                      <a:solidFill>
+                        <a:srgbClr val="D9DCE3"/>
+                      </a:solidFill>
+                      <a:prstDash val="solid"/>
+                      <a:round/>
+                      <a:headEnd type="none" w="med" len="med"/>
+                      <a:tailEnd type="none" w="med" len="med"/>
+                    </a:lnB>
+                    <a:solidFill>
+                      <a:srgbClr val="2C3A5C"/>
+                    </a:solidFill>
+                  </a:tcPr>
+                </a:tc>
+                <a:tc>
+                  <a:txBody>
+                    <a:bodyPr/>
+                    <a:lstStyle/>
+                    <a:p>
+                      <a:pPr indent="0" marL="0">
+                        <a:buNone/>
+                      </a:pPr>
+                      <a:r>
+                        <a:rPr lang="en-US" sz="1200" b="1" dirty="0">
+                          <a:solidFill>
+                            <a:srgbClr val="FFFFFF"/>
+                          </a:solidFill>
+                          <a:latin typeface="Malgun Gothic" pitchFamily="34" charset="0"/>
+                          <a:ea typeface="Malgun Gothic" pitchFamily="34" charset="-122"/>
+                          <a:cs typeface="Malgun Gothic" pitchFamily="34" charset="-120"/>
+                        </a:rPr>
+                        <a:t>3개월 변화 같은 방향</a:t>
+                      </a:r>
+                      <a:endParaRPr lang="en-US" sz="1200" dirty="0">
+                        <a:latin typeface="Malgun Gothic" charset="0"/>
+                        <a:ea typeface="Malgun Gothic" charset="0"/>
+                        <a:cs typeface="Malgun Gothic" charset="0"/>
+                      </a:endParaRPr>
+                    </a:p>
+                  </a:txBody>
+                  <a:tcPr marL="76200" marR="76200" marT="38100" marB="38100" anchor="ctr">
+                    <a:lnL w="6350" cap="flat" cmpd="sng" algn="ctr">
+                      <a:solidFill>
+                        <a:srgbClr val="D9DCE3"/>
+                      </a:solidFill>
+                      <a:prstDash val="solid"/>
+                      <a:round/>
+                      <a:headEnd type="none" w="med" len="med"/>
+                      <a:tailEnd type="none" w="med" len="med"/>
+                    </a:lnL>
+                    <a:lnR w="6350" cap="flat" cmpd="sng" algn="ctr">
+                      <a:solidFill>
+                        <a:srgbClr val="D9DCE3"/>
+                      </a:solidFill>
+                      <a:prstDash val="solid"/>
+                      <a:round/>
+                      <a:headEnd type="none" w="med" len="med"/>
+                      <a:tailEnd type="none" w="med" len="med"/>
+                    </a:lnR>
+                    <a:lnT w="6350" cap="flat" cmpd="sng" algn="ctr">
+                      <a:solidFill>
+                        <a:srgbClr val="D9DCE3"/>
+                      </a:solidFill>
+                      <a:prstDash val="solid"/>
+                      <a:round/>
+                      <a:headEnd type="none" w="med" len="med"/>
+                      <a:tailEnd type="none" w="med" len="med"/>
+                    </a:lnT>
+                    <a:lnB w="6350" cap="flat" cmpd="sng" algn="ctr">
+                      <a:solidFill>
+                        <a:srgbClr val="D9DCE3"/>
+                      </a:solidFill>
+                      <a:prstDash val="solid"/>
+                      <a:round/>
+                      <a:headEnd type="none" w="med" len="med"/>
+                      <a:tailEnd type="none" w="med" len="med"/>
+                    </a:lnB>
+                    <a:solidFill>
+                      <a:srgbClr val="2C3A5C"/>
+                    </a:solidFill>
+                  </a:tcPr>
+                </a:tc>
+                <a:tc>
+                  <a:txBody>
+                    <a:bodyPr/>
+                    <a:lstStyle/>
+                    <a:p>
+                      <a:pPr indent="0" marL="0">
+                        <a:buNone/>
+                      </a:pPr>
+                      <a:r>
+                        <a:rPr lang="en-US" sz="1200" b="1" dirty="0">
+                          <a:solidFill>
+                            <a:srgbClr val="FFFFFF"/>
+                          </a:solidFill>
+                          <a:latin typeface="Malgun Gothic" pitchFamily="34" charset="0"/>
+                          <a:ea typeface="Malgun Gothic" pitchFamily="34" charset="-122"/>
+                          <a:cs typeface="Malgun Gothic" pitchFamily="34" charset="-120"/>
+                        </a:rPr>
+                        <a:t>3년 변화(우리 / 부동산원)</a:t>
+                      </a:r>
+                      <a:endParaRPr lang="en-US" sz="1200" dirty="0">
+                        <a:latin typeface="Malgun Gothic" charset="0"/>
+                        <a:ea typeface="Malgun Gothic" charset="0"/>
+                        <a:cs typeface="Malgun Gothic" charset="0"/>
+                      </a:endParaRPr>
+                    </a:p>
+                  </a:txBody>
+                  <a:tcPr marL="76200" marR="76200" marT="38100" marB="38100" anchor="ctr">
+                    <a:lnL w="6350" cap="flat" cmpd="sng" algn="ctr">
+                      <a:solidFill>
+                        <a:srgbClr val="D9DCE3"/>
+                      </a:solidFill>
+                      <a:prstDash val="solid"/>
+                      <a:round/>
+                      <a:headEnd type="none" w="med" len="med"/>
+                      <a:tailEnd type="none" w="med" len="med"/>
+                    </a:lnL>
+                    <a:lnR w="6350" cap="flat" cmpd="sng" algn="ctr">
+                      <a:solidFill>
+                        <a:srgbClr val="D9DCE3"/>
+                      </a:solidFill>
+                      <a:prstDash val="solid"/>
+                      <a:round/>
+                      <a:headEnd type="none" w="med" len="med"/>
+                      <a:tailEnd type="none" w="med" len="med"/>
+                    </a:lnR>
+                    <a:lnT w="6350" cap="flat" cmpd="sng" algn="ctr">
+                      <a:solidFill>
+                        <a:srgbClr val="D9DCE3"/>
+                      </a:solidFill>
+                      <a:prstDash val="solid"/>
+                      <a:round/>
+                      <a:headEnd type="none" w="med" len="med"/>
+                      <a:tailEnd type="none" w="med" len="med"/>
+                    </a:lnT>
+                    <a:lnB w="6350" cap="flat" cmpd="sng" algn="ctr">
+                      <a:solidFill>
+                        <a:srgbClr val="D9DCE3"/>
+                      </a:solidFill>
+                      <a:prstDash val="solid"/>
+                      <a:round/>
+                      <a:headEnd type="none" w="med" len="med"/>
+                      <a:tailEnd type="none" w="med" len="med"/>
+                    </a:lnB>
+                    <a:solidFill>
+                      <a:srgbClr val="2C3A5C"/>
+                    </a:solidFill>
+                  </a:tcPr>
+                </a:tc>
+              </a:tr>
+              <a:tr h="329184">
+                <a:tc>
+                  <a:txBody>
+                    <a:bodyPr/>
+                    <a:lstStyle/>
+                    <a:p>
+                      <a:pPr indent="0" marL="0">
+                        <a:buNone/>
+                      </a:pPr>
+                      <a:r>
+                        <a:rPr lang="en-US" sz="1200" dirty="0">
+                          <a:solidFill>
+                            <a:srgbClr val="1F2328"/>
+                          </a:solidFill>
+                          <a:latin typeface="Malgun Gothic" pitchFamily="34" charset="0"/>
+                          <a:ea typeface="Malgun Gothic" pitchFamily="34" charset="-122"/>
+                          <a:cs typeface="Malgun Gothic" pitchFamily="34" charset="-120"/>
+                        </a:rPr>
+                        <a:t>강서구</a:t>
+                      </a:r>
+                      <a:endParaRPr lang="en-US" sz="1200" dirty="0">
+                        <a:latin typeface="Malgun Gothic" charset="0"/>
+                        <a:ea typeface="Malgun Gothic" charset="0"/>
+                        <a:cs typeface="Malgun Gothic" charset="0"/>
+                      </a:endParaRPr>
+                    </a:p>
+                  </a:txBody>
+                  <a:tcPr marL="76200" marR="76200" marT="38100" marB="38100" anchor="ctr">
+                    <a:lnL w="6350" cap="flat" cmpd="sng" algn="ctr">
+                      <a:solidFill>
+                        <a:srgbClr val="D9DCE3"/>
+                      </a:solidFill>
+                      <a:prstDash val="solid"/>
+                      <a:round/>
+                      <a:headEnd type="none" w="med" len="med"/>
+                      <a:tailEnd type="none" w="med" len="med"/>
+                    </a:lnL>
+                    <a:lnR w="6350" cap="flat" cmpd="sng" algn="ctr">
+                      <a:solidFill>
+                        <a:srgbClr val="D9DCE3"/>
+                      </a:solidFill>
+                      <a:prstDash val="solid"/>
+                      <a:round/>
+                      <a:headEnd type="none" w="med" len="med"/>
+                      <a:tailEnd type="none" w="med" len="med"/>
+                    </a:lnR>
+                    <a:lnT w="6350" cap="flat" cmpd="sng" algn="ctr">
+                      <a:solidFill>
+                        <a:srgbClr val="D9DCE3"/>
+                      </a:solidFill>
+                      <a:prstDash val="solid"/>
+                      <a:round/>
+                      <a:headEnd type="none" w="med" len="med"/>
+                      <a:tailEnd type="none" w="med" len="med"/>
+                    </a:lnT>
+                    <a:lnB w="6350" cap="flat" cmpd="sng" algn="ctr">
+                      <a:solidFill>
+                        <a:srgbClr val="D9DCE3"/>
+                      </a:solidFill>
+                      <a:prstDash val="solid"/>
+                      <a:round/>
+                      <a:headEnd type="none" w="med" len="med"/>
+                      <a:tailEnd type="none" w="med" len="med"/>
+                    </a:lnB>
+                    <a:solidFill>
+                      <a:srgbClr val="FFFFFF"/>
+                    </a:solidFill>
+                  </a:tcPr>
+                </a:tc>
+                <a:tc>
+                  <a:txBody>
+                    <a:bodyPr/>
+                    <a:lstStyle/>
+                    <a:p>
+                      <a:pPr indent="0" marL="0">
+                        <a:buNone/>
+                      </a:pPr>
+                      <a:r>
+                        <a:rPr lang="en-US" sz="1200" dirty="0">
+                          <a:solidFill>
+                            <a:srgbClr val="1F2328"/>
+                          </a:solidFill>
+                          <a:latin typeface="Malgun Gothic" pitchFamily="34" charset="0"/>
+                          <a:ea typeface="Malgun Gothic" pitchFamily="34" charset="-122"/>
+                          <a:cs typeface="Malgun Gothic" pitchFamily="34" charset="-120"/>
+                        </a:rPr>
+                        <a:t>서남권(주택가격동향조사)</a:t>
+                      </a:r>
+                      <a:endParaRPr lang="en-US" sz="1200" dirty="0">
+                        <a:latin typeface="Malgun Gothic" charset="0"/>
+                        <a:ea typeface="Malgun Gothic" charset="0"/>
+                        <a:cs typeface="Malgun Gothic" charset="0"/>
+                      </a:endParaRPr>
+                    </a:p>
+                  </a:txBody>
+                  <a:tcPr marL="76200" marR="76200" marT="38100" marB="38100" anchor="ctr">
+                    <a:lnL w="6350" cap="flat" cmpd="sng" algn="ctr">
+                      <a:solidFill>
+                        <a:srgbClr val="D9DCE3"/>
+                      </a:solidFill>
+                      <a:prstDash val="solid"/>
+                      <a:round/>
+                      <a:headEnd type="none" w="med" len="med"/>
+                      <a:tailEnd type="none" w="med" len="med"/>
+                    </a:lnL>
+                    <a:lnR w="6350" cap="flat" cmpd="sng" algn="ctr">
+                      <a:solidFill>
+                        <a:srgbClr val="D9DCE3"/>
+                      </a:solidFill>
+                      <a:prstDash val="solid"/>
+                      <a:round/>
+                      <a:headEnd type="none" w="med" len="med"/>
+                      <a:tailEnd type="none" w="med" len="med"/>
+                    </a:lnR>
+                    <a:lnT w="6350" cap="flat" cmpd="sng" algn="ctr">
+                      <a:solidFill>
+                        <a:srgbClr val="D9DCE3"/>
+                      </a:solidFill>
+                      <a:prstDash val="solid"/>
+                      <a:round/>
+                      <a:headEnd type="none" w="med" len="med"/>
+                      <a:tailEnd type="none" w="med" len="med"/>
+                    </a:lnT>
+                    <a:lnB w="6350" cap="flat" cmpd="sng" algn="ctr">
+                      <a:solidFill>
+                        <a:srgbClr val="D9DCE3"/>
+                      </a:solidFill>
+                      <a:prstDash val="solid"/>
+                      <a:round/>
+                      <a:headEnd type="none" w="med" len="med"/>
+                      <a:tailEnd type="none" w="med" len="med"/>
+                    </a:lnB>
+                    <a:solidFill>
+                      <a:srgbClr val="FFFFFF"/>
+                    </a:solidFill>
+                  </a:tcPr>
+                </a:tc>
+                <a:tc>
+                  <a:txBody>
+                    <a:bodyPr/>
+                    <a:lstStyle/>
+                    <a:p>
+                      <a:pPr indent="0" marL="0">
+                        <a:buNone/>
+                      </a:pPr>
+                      <a:r>
+                        <a:rPr lang="en-US" sz="1200" dirty="0">
+                          <a:solidFill>
+                            <a:srgbClr val="1F2328"/>
+                          </a:solidFill>
+                          <a:latin typeface="Malgun Gothic" pitchFamily="34" charset="0"/>
+                          <a:ea typeface="Malgun Gothic" pitchFamily="34" charset="-122"/>
+                          <a:cs typeface="Malgun Gothic" pitchFamily="34" charset="-120"/>
+                        </a:rPr>
+                        <a:t>0.72</a:t>
+                      </a:r>
+                      <a:endParaRPr lang="en-US" sz="1200" dirty="0">
+                        <a:latin typeface="Malgun Gothic" charset="0"/>
+                        <a:ea typeface="Malgun Gothic" charset="0"/>
+                        <a:cs typeface="Malgun Gothic" charset="0"/>
+                      </a:endParaRPr>
+                    </a:p>
+                  </a:txBody>
+                  <a:tcPr marL="76200" marR="76200" marT="38100" marB="38100" anchor="ctr">
+                    <a:lnL w="6350" cap="flat" cmpd="sng" algn="ctr">
+                      <a:solidFill>
+                        <a:srgbClr val="D9DCE3"/>
+                      </a:solidFill>
+                      <a:prstDash val="solid"/>
+                      <a:round/>
+                      <a:headEnd type="none" w="med" len="med"/>
+                      <a:tailEnd type="none" w="med" len="med"/>
+                    </a:lnL>
+                    <a:lnR w="6350" cap="flat" cmpd="sng" algn="ctr">
+                      <a:solidFill>
+                        <a:srgbClr val="D9DCE3"/>
+                      </a:solidFill>
+                      <a:prstDash val="solid"/>
+                      <a:round/>
+                      <a:headEnd type="none" w="med" len="med"/>
+                      <a:tailEnd type="none" w="med" len="med"/>
+                    </a:lnR>
+                    <a:lnT w="6350" cap="flat" cmpd="sng" algn="ctr">
+                      <a:solidFill>
+                        <a:srgbClr val="D9DCE3"/>
+                      </a:solidFill>
+                      <a:prstDash val="solid"/>
+                      <a:round/>
+                      <a:headEnd type="none" w="med" len="med"/>
+                      <a:tailEnd type="none" w="med" len="med"/>
+                    </a:lnT>
+                    <a:lnB w="6350" cap="flat" cmpd="sng" algn="ctr">
+                      <a:solidFill>
+                        <a:srgbClr val="D9DCE3"/>
+                      </a:solidFill>
+                      <a:prstDash val="solid"/>
+                      <a:round/>
+                      <a:headEnd type="none" w="med" len="med"/>
+                      <a:tailEnd type="none" w="med" len="med"/>
+                    </a:lnB>
+                    <a:solidFill>
+                      <a:srgbClr val="FFFFFF"/>
+                    </a:solidFill>
+                  </a:tcPr>
+                </a:tc>
+                <a:tc>
+                  <a:txBody>
+                    <a:bodyPr/>
+                    <a:lstStyle/>
+                    <a:p>
+                      <a:pPr indent="0" marL="0">
+                        <a:buNone/>
+                      </a:pPr>
+                      <a:r>
+                        <a:rPr lang="en-US" sz="1200" dirty="0">
+                          <a:solidFill>
+                            <a:srgbClr val="1F2328"/>
+                          </a:solidFill>
+                          <a:latin typeface="Malgun Gothic" pitchFamily="34" charset="0"/>
+                          <a:ea typeface="Malgun Gothic" pitchFamily="34" charset="-122"/>
+                          <a:cs typeface="Malgun Gothic" pitchFamily="34" charset="-120"/>
+                        </a:rPr>
+                        <a:t>56%</a:t>
+                      </a:r>
+                      <a:endParaRPr lang="en-US" sz="1200" dirty="0">
+                        <a:latin typeface="Malgun Gothic" charset="0"/>
+                        <a:ea typeface="Malgun Gothic" charset="0"/>
+                        <a:cs typeface="Malgun Gothic" charset="0"/>
+                      </a:endParaRPr>
+                    </a:p>
+                  </a:txBody>
+                  <a:tcPr marL="76200" marR="76200" marT="38100" marB="38100" anchor="ctr">
+                    <a:lnL w="6350" cap="flat" cmpd="sng" algn="ctr">
+                      <a:solidFill>
+                        <a:srgbClr val="D9DCE3"/>
+                      </a:solidFill>
+                      <a:prstDash val="solid"/>
+                      <a:round/>
+                      <a:headEnd type="none" w="med" len="med"/>
+                      <a:tailEnd type="none" w="med" len="med"/>
+                    </a:lnL>
+                    <a:lnR w="6350" cap="flat" cmpd="sng" algn="ctr">
+                      <a:solidFill>
+                        <a:srgbClr val="D9DCE3"/>
+                      </a:solidFill>
+                      <a:prstDash val="solid"/>
+                      <a:round/>
+                      <a:headEnd type="none" w="med" len="med"/>
+                      <a:tailEnd type="none" w="med" len="med"/>
+                    </a:lnR>
+                    <a:lnT w="6350" cap="flat" cmpd="sng" algn="ctr">
+                      <a:solidFill>
+                        <a:srgbClr val="D9DCE3"/>
+                      </a:solidFill>
+                      <a:prstDash val="solid"/>
+                      <a:round/>
+                      <a:headEnd type="none" w="med" len="med"/>
+                      <a:tailEnd type="none" w="med" len="med"/>
+                    </a:lnT>
+                    <a:lnB w="6350" cap="flat" cmpd="sng" algn="ctr">
+                      <a:solidFill>
+                        <a:srgbClr val="D9DCE3"/>
+                      </a:solidFill>
+                      <a:prstDash val="solid"/>
+                      <a:round/>
+                      <a:headEnd type="none" w="med" len="med"/>
+                      <a:tailEnd type="none" w="med" len="med"/>
+                    </a:lnB>
+                    <a:solidFill>
+                      <a:srgbClr val="FFFFFF"/>
+                    </a:solidFill>
+                  </a:tcPr>
+                </a:tc>
+                <a:tc>
+                  <a:txBody>
+                    <a:bodyPr/>
+                    <a:lstStyle/>
+                    <a:p>
+                      <a:pPr indent="0" marL="0">
+                        <a:buNone/>
+                      </a:pPr>
+                      <a:r>
+                        <a:rPr lang="en-US" sz="1200" dirty="0">
+                          <a:solidFill>
+                            <a:srgbClr val="1F2328"/>
+                          </a:solidFill>
+                          <a:latin typeface="Malgun Gothic" pitchFamily="34" charset="0"/>
+                          <a:ea typeface="Malgun Gothic" pitchFamily="34" charset="-122"/>
+                          <a:cs typeface="Malgun Gothic" pitchFamily="34" charset="-120"/>
+                        </a:rPr>
+                        <a:t>+2.7% / +10.8%</a:t>
+                      </a:r>
+                      <a:endParaRPr lang="en-US" sz="1200" dirty="0">
+                        <a:latin typeface="Malgun Gothic" charset="0"/>
+                        <a:ea typeface="Malgun Gothic" charset="0"/>
+                        <a:cs typeface="Malgun Gothic" charset="0"/>
+                      </a:endParaRPr>
+                    </a:p>
+                  </a:txBody>
+                  <a:tcPr marL="76200" marR="76200" marT="38100" marB="38100" anchor="ctr">
+                    <a:lnL w="6350" cap="flat" cmpd="sng" algn="ctr">
+                      <a:solidFill>
+                        <a:srgbClr val="D9DCE3"/>
+                      </a:solidFill>
+                      <a:prstDash val="solid"/>
+                      <a:round/>
+                      <a:headEnd type="none" w="med" len="med"/>
+                      <a:tailEnd type="none" w="med" len="med"/>
+                    </a:lnL>
+                    <a:lnR w="6350" cap="flat" cmpd="sng" algn="ctr">
+                      <a:solidFill>
+                        <a:srgbClr val="D9DCE3"/>
+                      </a:solidFill>
+                      <a:prstDash val="solid"/>
+                      <a:round/>
+                      <a:headEnd type="none" w="med" len="med"/>
+                      <a:tailEnd type="none" w="med" len="med"/>
+                    </a:lnR>
+                    <a:lnT w="6350" cap="flat" cmpd="sng" algn="ctr">
+                      <a:solidFill>
+                        <a:srgbClr val="D9DCE3"/>
+                      </a:solidFill>
+                      <a:prstDash val="solid"/>
+                      <a:round/>
+                      <a:headEnd type="none" w="med" len="med"/>
+                      <a:tailEnd type="none" w="med" len="med"/>
+                    </a:lnT>
+                    <a:lnB w="6350" cap="flat" cmpd="sng" algn="ctr">
+                      <a:solidFill>
+                        <a:srgbClr val="D9DCE3"/>
+                      </a:solidFill>
+                      <a:prstDash val="solid"/>
+                      <a:round/>
+                      <a:headEnd type="none" w="med" len="med"/>
+                      <a:tailEnd type="none" w="med" len="med"/>
+                    </a:lnB>
+                    <a:solidFill>
+                      <a:srgbClr val="FFFFFF"/>
+                    </a:solidFill>
+                  </a:tcPr>
+                </a:tc>
+              </a:tr>
+              <a:tr h="329184">
+                <a:tc>
+                  <a:txBody>
+                    <a:bodyPr/>
+                    <a:lstStyle/>
+                    <a:p>
+                      <a:pPr indent="0" marL="0">
+                        <a:buNone/>
+                      </a:pPr>
+                      <a:r>
+                        <a:rPr lang="en-US" sz="1200" dirty="0">
+                          <a:solidFill>
+                            <a:srgbClr val="1F2328"/>
+                          </a:solidFill>
+                          <a:latin typeface="Malgun Gothic" pitchFamily="34" charset="0"/>
+                          <a:ea typeface="Malgun Gothic" pitchFamily="34" charset="-122"/>
+                          <a:cs typeface="Malgun Gothic" pitchFamily="34" charset="-120"/>
+                        </a:rPr>
+                        <a:t>관악구</a:t>
+                      </a:r>
+                      <a:endParaRPr lang="en-US" sz="1200" dirty="0">
+                        <a:latin typeface="Malgun Gothic" charset="0"/>
+                        <a:ea typeface="Malgun Gothic" charset="0"/>
+                        <a:cs typeface="Malgun Gothic" charset="0"/>
+                      </a:endParaRPr>
+                    </a:p>
+                  </a:txBody>
+                  <a:tcPr marL="76200" marR="76200" marT="38100" marB="38100" anchor="ctr">
+                    <a:lnL w="6350" cap="flat" cmpd="sng" algn="ctr">
+                      <a:solidFill>
+                        <a:srgbClr val="D9DCE3"/>
+                      </a:solidFill>
+                      <a:prstDash val="solid"/>
+                      <a:round/>
+                      <a:headEnd type="none" w="med" len="med"/>
+                      <a:tailEnd type="none" w="med" len="med"/>
+                    </a:lnL>
+                    <a:lnR w="6350" cap="flat" cmpd="sng" algn="ctr">
+                      <a:solidFill>
+                        <a:srgbClr val="D9DCE3"/>
+                      </a:solidFill>
+                      <a:prstDash val="solid"/>
+                      <a:round/>
+                      <a:headEnd type="none" w="med" len="med"/>
+                      <a:tailEnd type="none" w="med" len="med"/>
+                    </a:lnR>
+                    <a:lnT w="6350" cap="flat" cmpd="sng" algn="ctr">
+                      <a:solidFill>
+                        <a:srgbClr val="D9DCE3"/>
+                      </a:solidFill>
+                      <a:prstDash val="solid"/>
+                      <a:round/>
+                      <a:headEnd type="none" w="med" len="med"/>
+                      <a:tailEnd type="none" w="med" len="med"/>
+                    </a:lnT>
+                    <a:lnB w="6350" cap="flat" cmpd="sng" algn="ctr">
+                      <a:solidFill>
+                        <a:srgbClr val="D9DCE3"/>
+                      </a:solidFill>
+                      <a:prstDash val="solid"/>
+                      <a:round/>
+                      <a:headEnd type="none" w="med" len="med"/>
+                      <a:tailEnd type="none" w="med" len="med"/>
+                    </a:lnB>
+                    <a:solidFill>
+                      <a:srgbClr val="F2F4F8"/>
+                    </a:solidFill>
+                  </a:tcPr>
+                </a:tc>
+                <a:tc>
+                  <a:txBody>
+                    <a:bodyPr/>
+                    <a:lstStyle/>
+                    <a:p>
+                      <a:pPr indent="0" marL="0">
+                        <a:buNone/>
+                      </a:pPr>
+                      <a:r>
+                        <a:rPr lang="en-US" sz="1200" dirty="0">
+                          <a:solidFill>
+                            <a:srgbClr val="1F2328"/>
+                          </a:solidFill>
+                          <a:latin typeface="Malgun Gothic" pitchFamily="34" charset="0"/>
+                          <a:ea typeface="Malgun Gothic" pitchFamily="34" charset="-122"/>
+                          <a:cs typeface="Malgun Gothic" pitchFamily="34" charset="-120"/>
+                        </a:rPr>
+                        <a:t>서남권(주택가격동향조사)</a:t>
+                      </a:r>
+                      <a:endParaRPr lang="en-US" sz="1200" dirty="0">
+                        <a:latin typeface="Malgun Gothic" charset="0"/>
+                        <a:ea typeface="Malgun Gothic" charset="0"/>
+                        <a:cs typeface="Malgun Gothic" charset="0"/>
+                      </a:endParaRPr>
+                    </a:p>
+                  </a:txBody>
+                  <a:tcPr marL="76200" marR="76200" marT="38100" marB="38100" anchor="ctr">
+                    <a:lnL w="6350" cap="flat" cmpd="sng" algn="ctr">
+                      <a:solidFill>
+                        <a:srgbClr val="D9DCE3"/>
+                      </a:solidFill>
+                      <a:prstDash val="solid"/>
+                      <a:round/>
+                      <a:headEnd type="none" w="med" len="med"/>
+                      <a:tailEnd type="none" w="med" len="med"/>
+                    </a:lnL>
+                    <a:lnR w="6350" cap="flat" cmpd="sng" algn="ctr">
+                      <a:solidFill>
+                        <a:srgbClr val="D9DCE3"/>
+                      </a:solidFill>
+                      <a:prstDash val="solid"/>
+                      <a:round/>
+                      <a:headEnd type="none" w="med" len="med"/>
+                      <a:tailEnd type="none" w="med" len="med"/>
+                    </a:lnR>
+                    <a:lnT w="6350" cap="flat" cmpd="sng" algn="ctr">
+                      <a:solidFill>
+                        <a:srgbClr val="D9DCE3"/>
+                      </a:solidFill>
+                      <a:prstDash val="solid"/>
+                      <a:round/>
+                      <a:headEnd type="none" w="med" len="med"/>
+                      <a:tailEnd type="none" w="med" len="med"/>
+                    </a:lnT>
+                    <a:lnB w="6350" cap="flat" cmpd="sng" algn="ctr">
+                      <a:solidFill>
+                        <a:srgbClr val="D9DCE3"/>
+                      </a:solidFill>
+                      <a:prstDash val="solid"/>
+                      <a:round/>
+                      <a:headEnd type="none" w="med" len="med"/>
+                      <a:tailEnd type="none" w="med" len="med"/>
+                    </a:lnB>
+                    <a:solidFill>
+                      <a:srgbClr val="F2F4F8"/>
+                    </a:solidFill>
+                  </a:tcPr>
+                </a:tc>
+                <a:tc>
+                  <a:txBody>
+                    <a:bodyPr/>
+                    <a:lstStyle/>
+                    <a:p>
+                      <a:pPr indent="0" marL="0">
+                        <a:buNone/>
+                      </a:pPr>
+                      <a:r>
+                        <a:rPr lang="en-US" sz="1200" dirty="0">
+                          <a:solidFill>
+                            <a:srgbClr val="1F2328"/>
+                          </a:solidFill>
+                          <a:latin typeface="Malgun Gothic" pitchFamily="34" charset="0"/>
+                          <a:ea typeface="Malgun Gothic" pitchFamily="34" charset="-122"/>
+                          <a:cs typeface="Malgun Gothic" pitchFamily="34" charset="-120"/>
+                        </a:rPr>
+                        <a:t>0.92</a:t>
+                      </a:r>
+                      <a:endParaRPr lang="en-US" sz="1200" dirty="0">
+                        <a:latin typeface="Malgun Gothic" charset="0"/>
+                        <a:ea typeface="Malgun Gothic" charset="0"/>
+                        <a:cs typeface="Malgun Gothic" charset="0"/>
+                      </a:endParaRPr>
+                    </a:p>
+                  </a:txBody>
+                  <a:tcPr marL="76200" marR="76200" marT="38100" marB="38100" anchor="ctr">
+                    <a:lnL w="6350" cap="flat" cmpd="sng" algn="ctr">
+                      <a:solidFill>
+                        <a:srgbClr val="D9DCE3"/>
+                      </a:solidFill>
+                      <a:prstDash val="solid"/>
+                      <a:round/>
+                      <a:headEnd type="none" w="med" len="med"/>
+                      <a:tailEnd type="none" w="med" len="med"/>
+                    </a:lnL>
+                    <a:lnR w="6350" cap="flat" cmpd="sng" algn="ctr">
+                      <a:solidFill>
+                        <a:srgbClr val="D9DCE3"/>
+                      </a:solidFill>
+                      <a:prstDash val="solid"/>
+                      <a:round/>
+                      <a:headEnd type="none" w="med" len="med"/>
+                      <a:tailEnd type="none" w="med" len="med"/>
+                    </a:lnR>
+                    <a:lnT w="6350" cap="flat" cmpd="sng" algn="ctr">
+                      <a:solidFill>
+                        <a:srgbClr val="D9DCE3"/>
+                      </a:solidFill>
+                      <a:prstDash val="solid"/>
+                      <a:round/>
+                      <a:headEnd type="none" w="med" len="med"/>
+                      <a:tailEnd type="none" w="med" len="med"/>
+                    </a:lnT>
+                    <a:lnB w="6350" cap="flat" cmpd="sng" algn="ctr">
+                      <a:solidFill>
+                        <a:srgbClr val="D9DCE3"/>
+                      </a:solidFill>
+                      <a:prstDash val="solid"/>
+                      <a:round/>
+                      <a:headEnd type="none" w="med" len="med"/>
+                      <a:tailEnd type="none" w="med" len="med"/>
+                    </a:lnB>
+                    <a:solidFill>
+                      <a:srgbClr val="F2F4F8"/>
+                    </a:solidFill>
+                  </a:tcPr>
+                </a:tc>
+                <a:tc>
+                  <a:txBody>
+                    <a:bodyPr/>
+                    <a:lstStyle/>
+                    <a:p>
+                      <a:pPr indent="0" marL="0">
+                        <a:buNone/>
+                      </a:pPr>
+                      <a:r>
+                        <a:rPr lang="en-US" sz="1200" dirty="0">
+                          <a:solidFill>
+                            <a:srgbClr val="1F2328"/>
+                          </a:solidFill>
+                          <a:latin typeface="Malgun Gothic" pitchFamily="34" charset="0"/>
+                          <a:ea typeface="Malgun Gothic" pitchFamily="34" charset="-122"/>
+                          <a:cs typeface="Malgun Gothic" pitchFamily="34" charset="-120"/>
+                        </a:rPr>
+                        <a:t>69%</a:t>
+                      </a:r>
+                      <a:endParaRPr lang="en-US" sz="1200" dirty="0">
+                        <a:latin typeface="Malgun Gothic" charset="0"/>
+                        <a:ea typeface="Malgun Gothic" charset="0"/>
+                        <a:cs typeface="Malgun Gothic" charset="0"/>
+                      </a:endParaRPr>
+                    </a:p>
+                  </a:txBody>
+                  <a:tcPr marL="76200" marR="76200" marT="38100" marB="38100" anchor="ctr">
+                    <a:lnL w="6350" cap="flat" cmpd="sng" algn="ctr">
+                      <a:solidFill>
+                        <a:srgbClr val="D9DCE3"/>
+                      </a:solidFill>
+                      <a:prstDash val="solid"/>
+                      <a:round/>
+                      <a:headEnd type="none" w="med" len="med"/>
+                      <a:tailEnd type="none" w="med" len="med"/>
+                    </a:lnL>
+                    <a:lnR w="6350" cap="flat" cmpd="sng" algn="ctr">
+                      <a:solidFill>
+                        <a:srgbClr val="D9DCE3"/>
+                      </a:solidFill>
+                      <a:prstDash val="solid"/>
+                      <a:round/>
+                      <a:headEnd type="none" w="med" len="med"/>
+                      <a:tailEnd type="none" w="med" len="med"/>
+                    </a:lnR>
+                    <a:lnT w="6350" cap="flat" cmpd="sng" algn="ctr">
+                      <a:solidFill>
+                        <a:srgbClr val="D9DCE3"/>
+                      </a:solidFill>
+                      <a:prstDash val="solid"/>
+                      <a:round/>
+                      <a:headEnd type="none" w="med" len="med"/>
+                      <a:tailEnd type="none" w="med" len="med"/>
+                    </a:lnT>
+                    <a:lnB w="6350" cap="flat" cmpd="sng" algn="ctr">
+                      <a:solidFill>
+                        <a:srgbClr val="D9DCE3"/>
+                      </a:solidFill>
+                      <a:prstDash val="solid"/>
+                      <a:round/>
+                      <a:headEnd type="none" w="med" len="med"/>
+                      <a:tailEnd type="none" w="med" len="med"/>
+                    </a:lnB>
+                    <a:solidFill>
+                      <a:srgbClr val="F2F4F8"/>
+                    </a:solidFill>
+                  </a:tcPr>
+                </a:tc>
+                <a:tc>
+                  <a:txBody>
+                    <a:bodyPr/>
+                    <a:lstStyle/>
+                    <a:p>
+                      <a:pPr indent="0" marL="0">
+                        <a:buNone/>
+                      </a:pPr>
+                      <a:r>
+                        <a:rPr lang="en-US" sz="1200" dirty="0">
+                          <a:solidFill>
+                            <a:srgbClr val="1F2328"/>
+                          </a:solidFill>
+                          <a:latin typeface="Malgun Gothic" pitchFamily="34" charset="0"/>
+                          <a:ea typeface="Malgun Gothic" pitchFamily="34" charset="-122"/>
+                          <a:cs typeface="Malgun Gothic" pitchFamily="34" charset="-120"/>
+                        </a:rPr>
+                        <a:t>+8.9% / +10.8%</a:t>
+                      </a:r>
+                      <a:endParaRPr lang="en-US" sz="1200" dirty="0">
+                        <a:latin typeface="Malgun Gothic" charset="0"/>
+                        <a:ea typeface="Malgun Gothic" charset="0"/>
+                        <a:cs typeface="Malgun Gothic" charset="0"/>
+                      </a:endParaRPr>
+                    </a:p>
+                  </a:txBody>
+                  <a:tcPr marL="76200" marR="76200" marT="38100" marB="38100" anchor="ctr">
+                    <a:lnL w="6350" cap="flat" cmpd="sng" algn="ctr">
+                      <a:solidFill>
+                        <a:srgbClr val="D9DCE3"/>
+                      </a:solidFill>
+                      <a:prstDash val="solid"/>
+                      <a:round/>
+                      <a:headEnd type="none" w="med" len="med"/>
+                      <a:tailEnd type="none" w="med" len="med"/>
+                    </a:lnL>
+                    <a:lnR w="6350" cap="flat" cmpd="sng" algn="ctr">
+                      <a:solidFill>
+                        <a:srgbClr val="D9DCE3"/>
+                      </a:solidFill>
+                      <a:prstDash val="solid"/>
+                      <a:round/>
+                      <a:headEnd type="none" w="med" len="med"/>
+                      <a:tailEnd type="none" w="med" len="med"/>
+                    </a:lnR>
+                    <a:lnT w="6350" cap="flat" cmpd="sng" algn="ctr">
+                      <a:solidFill>
+                        <a:srgbClr val="D9DCE3"/>
+                      </a:solidFill>
+                      <a:prstDash val="solid"/>
+                      <a:round/>
+                      <a:headEnd type="none" w="med" len="med"/>
+                      <a:tailEnd type="none" w="med" len="med"/>
+                    </a:lnT>
+                    <a:lnB w="6350" cap="flat" cmpd="sng" algn="ctr">
+                      <a:solidFill>
+                        <a:srgbClr val="D9DCE3"/>
+                      </a:solidFill>
+                      <a:prstDash val="solid"/>
+                      <a:round/>
+                      <a:headEnd type="none" w="med" len="med"/>
+                      <a:tailEnd type="none" w="med" len="med"/>
+                    </a:lnB>
+                    <a:solidFill>
+                      <a:srgbClr val="F2F4F8"/>
+                    </a:solidFill>
+                  </a:tcPr>
+                </a:tc>
+              </a:tr>
+              <a:tr h="329184">
+                <a:tc>
+                  <a:txBody>
+                    <a:bodyPr/>
+                    <a:lstStyle/>
+                    <a:p>
+                      <a:pPr indent="0" marL="0">
+                        <a:buNone/>
+                      </a:pPr>
+                      <a:r>
+                        <a:rPr lang="en-US" sz="1200" dirty="0">
+                          <a:solidFill>
+                            <a:srgbClr val="1F2328"/>
+                          </a:solidFill>
+                          <a:latin typeface="Malgun Gothic" pitchFamily="34" charset="0"/>
+                          <a:ea typeface="Malgun Gothic" pitchFamily="34" charset="-122"/>
+                          <a:cs typeface="Malgun Gothic" pitchFamily="34" charset="-120"/>
+                        </a:rPr>
+                        <a:t>강남구</a:t>
+                      </a:r>
+                      <a:endParaRPr lang="en-US" sz="1200" dirty="0">
+                        <a:latin typeface="Malgun Gothic" charset="0"/>
+                        <a:ea typeface="Malgun Gothic" charset="0"/>
+                        <a:cs typeface="Malgun Gothic" charset="0"/>
+                      </a:endParaRPr>
+                    </a:p>
+                  </a:txBody>
+                  <a:tcPr marL="76200" marR="76200" marT="38100" marB="38100" anchor="ctr">
+                    <a:lnL w="6350" cap="flat" cmpd="sng" algn="ctr">
+                      <a:solidFill>
+                        <a:srgbClr val="D9DCE3"/>
+                      </a:solidFill>
+                      <a:prstDash val="solid"/>
+                      <a:round/>
+                      <a:headEnd type="none" w="med" len="med"/>
+                      <a:tailEnd type="none" w="med" len="med"/>
+                    </a:lnL>
+                    <a:lnR w="6350" cap="flat" cmpd="sng" algn="ctr">
+                      <a:solidFill>
+                        <a:srgbClr val="D9DCE3"/>
+                      </a:solidFill>
+                      <a:prstDash val="solid"/>
+                      <a:round/>
+                      <a:headEnd type="none" w="med" len="med"/>
+                      <a:tailEnd type="none" w="med" len="med"/>
+                    </a:lnR>
+                    <a:lnT w="6350" cap="flat" cmpd="sng" algn="ctr">
+                      <a:solidFill>
+                        <a:srgbClr val="D9DCE3"/>
+                      </a:solidFill>
+                      <a:prstDash val="solid"/>
+                      <a:round/>
+                      <a:headEnd type="none" w="med" len="med"/>
+                      <a:tailEnd type="none" w="med" len="med"/>
+                    </a:lnT>
+                    <a:lnB w="6350" cap="flat" cmpd="sng" algn="ctr">
+                      <a:solidFill>
+                        <a:srgbClr val="D9DCE3"/>
+                      </a:solidFill>
+                      <a:prstDash val="solid"/>
+                      <a:round/>
+                      <a:headEnd type="none" w="med" len="med"/>
+                      <a:tailEnd type="none" w="med" len="med"/>
+                    </a:lnB>
+                    <a:solidFill>
+                      <a:srgbClr val="FFFFFF"/>
+                    </a:solidFill>
+                  </a:tcPr>
+                </a:tc>
+                <a:tc>
+                  <a:txBody>
+                    <a:bodyPr/>
+                    <a:lstStyle/>
+                    <a:p>
+                      <a:pPr indent="0" marL="0">
+                        <a:buNone/>
+                      </a:pPr>
+                      <a:r>
+                        <a:rPr lang="en-US" sz="1200" dirty="0">
+                          <a:solidFill>
+                            <a:srgbClr val="1F2328"/>
+                          </a:solidFill>
+                          <a:latin typeface="Malgun Gothic" pitchFamily="34" charset="0"/>
+                          <a:ea typeface="Malgun Gothic" pitchFamily="34" charset="-122"/>
+                          <a:cs typeface="Malgun Gothic" pitchFamily="34" charset="-120"/>
+                        </a:rPr>
+                        <a:t>동남권(주택가격동향조사)</a:t>
+                      </a:r>
+                      <a:endParaRPr lang="en-US" sz="1200" dirty="0">
+                        <a:latin typeface="Malgun Gothic" charset="0"/>
+                        <a:ea typeface="Malgun Gothic" charset="0"/>
+                        <a:cs typeface="Malgun Gothic" charset="0"/>
+                      </a:endParaRPr>
+                    </a:p>
+                  </a:txBody>
+                  <a:tcPr marL="76200" marR="76200" marT="38100" marB="38100" anchor="ctr">
+                    <a:lnL w="6350" cap="flat" cmpd="sng" algn="ctr">
+                      <a:solidFill>
+                        <a:srgbClr val="D9DCE3"/>
+                      </a:solidFill>
+                      <a:prstDash val="solid"/>
+                      <a:round/>
+                      <a:headEnd type="none" w="med" len="med"/>
+                      <a:tailEnd type="none" w="med" len="med"/>
+                    </a:lnL>
+                    <a:lnR w="6350" cap="flat" cmpd="sng" algn="ctr">
+                      <a:solidFill>
+                        <a:srgbClr val="D9DCE3"/>
+                      </a:solidFill>
+                      <a:prstDash val="solid"/>
+                      <a:round/>
+                      <a:headEnd type="none" w="med" len="med"/>
+                      <a:tailEnd type="none" w="med" len="med"/>
+                    </a:lnR>
+                    <a:lnT w="6350" cap="flat" cmpd="sng" algn="ctr">
+                      <a:solidFill>
+                        <a:srgbClr val="D9DCE3"/>
+                      </a:solidFill>
+                      <a:prstDash val="solid"/>
+                      <a:round/>
+                      <a:headEnd type="none" w="med" len="med"/>
+                      <a:tailEnd type="none" w="med" len="med"/>
+                    </a:lnT>
+                    <a:lnB w="6350" cap="flat" cmpd="sng" algn="ctr">
+                      <a:solidFill>
+                        <a:srgbClr val="D9DCE3"/>
+                      </a:solidFill>
+                      <a:prstDash val="solid"/>
+                      <a:round/>
+                      <a:headEnd type="none" w="med" len="med"/>
+                      <a:tailEnd type="none" w="med" len="med"/>
+                    </a:lnB>
+                    <a:solidFill>
+                      <a:srgbClr val="FFFFFF"/>
+                    </a:solidFill>
+                  </a:tcPr>
+                </a:tc>
+                <a:tc>
+                  <a:txBody>
+                    <a:bodyPr/>
+                    <a:lstStyle/>
+                    <a:p>
+                      <a:pPr indent="0" marL="0">
+                        <a:buNone/>
+                      </a:pPr>
+                      <a:r>
+                        <a:rPr lang="en-US" sz="1200" dirty="0">
+                          <a:solidFill>
+                            <a:srgbClr val="1F2328"/>
+                          </a:solidFill>
+                          <a:latin typeface="Malgun Gothic" pitchFamily="34" charset="0"/>
+                          <a:ea typeface="Malgun Gothic" pitchFamily="34" charset="-122"/>
+                          <a:cs typeface="Malgun Gothic" pitchFamily="34" charset="-120"/>
+                        </a:rPr>
+                        <a:t>0.90</a:t>
+                      </a:r>
+                      <a:endParaRPr lang="en-US" sz="1200" dirty="0">
+                        <a:latin typeface="Malgun Gothic" charset="0"/>
+                        <a:ea typeface="Malgun Gothic" charset="0"/>
+                        <a:cs typeface="Malgun Gothic" charset="0"/>
+                      </a:endParaRPr>
+                    </a:p>
+                  </a:txBody>
+                  <a:tcPr marL="76200" marR="76200" marT="38100" marB="38100" anchor="ctr">
+                    <a:lnL w="6350" cap="flat" cmpd="sng" algn="ctr">
+                      <a:solidFill>
+                        <a:srgbClr val="D9DCE3"/>
+                      </a:solidFill>
+                      <a:prstDash val="solid"/>
+                      <a:round/>
+                      <a:headEnd type="none" w="med" len="med"/>
+                      <a:tailEnd type="none" w="med" len="med"/>
+                    </a:lnL>
+                    <a:lnR w="6350" cap="flat" cmpd="sng" algn="ctr">
+                      <a:solidFill>
+                        <a:srgbClr val="D9DCE3"/>
+                      </a:solidFill>
+                      <a:prstDash val="solid"/>
+                      <a:round/>
+                      <a:headEnd type="none" w="med" len="med"/>
+                      <a:tailEnd type="none" w="med" len="med"/>
+                    </a:lnR>
+                    <a:lnT w="6350" cap="flat" cmpd="sng" algn="ctr">
+                      <a:solidFill>
+                        <a:srgbClr val="D9DCE3"/>
+                      </a:solidFill>
+                      <a:prstDash val="solid"/>
+                      <a:round/>
+                      <a:headEnd type="none" w="med" len="med"/>
+                      <a:tailEnd type="none" w="med" len="med"/>
+                    </a:lnT>
+                    <a:lnB w="6350" cap="flat" cmpd="sng" algn="ctr">
+                      <a:solidFill>
+                        <a:srgbClr val="D9DCE3"/>
+                      </a:solidFill>
+                      <a:prstDash val="solid"/>
+                      <a:round/>
+                      <a:headEnd type="none" w="med" len="med"/>
+                      <a:tailEnd type="none" w="med" len="med"/>
+                    </a:lnB>
+                    <a:solidFill>
+                      <a:srgbClr val="FFFFFF"/>
+                    </a:solidFill>
+                  </a:tcPr>
+                </a:tc>
+                <a:tc>
+                  <a:txBody>
+                    <a:bodyPr/>
+                    <a:lstStyle/>
+                    <a:p>
+                      <a:pPr indent="0" marL="0">
+                        <a:buNone/>
+                      </a:pPr>
+                      <a:r>
+                        <a:rPr lang="en-US" sz="1200" dirty="0">
+                          <a:solidFill>
+                            <a:srgbClr val="1F2328"/>
+                          </a:solidFill>
+                          <a:latin typeface="Malgun Gothic" pitchFamily="34" charset="0"/>
+                          <a:ea typeface="Malgun Gothic" pitchFamily="34" charset="-122"/>
+                          <a:cs typeface="Malgun Gothic" pitchFamily="34" charset="-120"/>
+                        </a:rPr>
+                        <a:t>72%</a:t>
+                      </a:r>
+                      <a:endParaRPr lang="en-US" sz="1200" dirty="0">
+                        <a:latin typeface="Malgun Gothic" charset="0"/>
+                        <a:ea typeface="Malgun Gothic" charset="0"/>
+                        <a:cs typeface="Malgun Gothic" charset="0"/>
+                      </a:endParaRPr>
+                    </a:p>
+                  </a:txBody>
+                  <a:tcPr marL="76200" marR="76200" marT="38100" marB="38100" anchor="ctr">
+                    <a:lnL w="6350" cap="flat" cmpd="sng" algn="ctr">
+                      <a:solidFill>
+                        <a:srgbClr val="D9DCE3"/>
+                      </a:solidFill>
+                      <a:prstDash val="solid"/>
+                      <a:round/>
+                      <a:headEnd type="none" w="med" len="med"/>
+                      <a:tailEnd type="none" w="med" len="med"/>
+                    </a:lnL>
+                    <a:lnR w="6350" cap="flat" cmpd="sng" algn="ctr">
+                      <a:solidFill>
+                        <a:srgbClr val="D9DCE3"/>
+                      </a:solidFill>
+                      <a:prstDash val="solid"/>
+                      <a:round/>
+                      <a:headEnd type="none" w="med" len="med"/>
+                      <a:tailEnd type="none" w="med" len="med"/>
+                    </a:lnR>
+                    <a:lnT w="6350" cap="flat" cmpd="sng" algn="ctr">
+                      <a:solidFill>
+                        <a:srgbClr val="D9DCE3"/>
+                      </a:solidFill>
+                      <a:prstDash val="solid"/>
+                      <a:round/>
+                      <a:headEnd type="none" w="med" len="med"/>
+                      <a:tailEnd type="none" w="med" len="med"/>
+                    </a:lnT>
+                    <a:lnB w="6350" cap="flat" cmpd="sng" algn="ctr">
+                      <a:solidFill>
+                        <a:srgbClr val="D9DCE3"/>
+                      </a:solidFill>
+                      <a:prstDash val="solid"/>
+                      <a:round/>
+                      <a:headEnd type="none" w="med" len="med"/>
+                      <a:tailEnd type="none" w="med" len="med"/>
+                    </a:lnB>
+                    <a:solidFill>
+                      <a:srgbClr val="FFFFFF"/>
+                    </a:solidFill>
+                  </a:tcPr>
+                </a:tc>
+                <a:tc>
+                  <a:txBody>
+                    <a:bodyPr/>
+                    <a:lstStyle/>
+                    <a:p>
+                      <a:pPr indent="0" marL="0">
+                        <a:buNone/>
+                      </a:pPr>
+                      <a:r>
+                        <a:rPr lang="en-US" sz="1200" dirty="0">
+                          <a:solidFill>
+                            <a:srgbClr val="1F2328"/>
+                          </a:solidFill>
+                          <a:latin typeface="Malgun Gothic" pitchFamily="34" charset="0"/>
+                          <a:ea typeface="Malgun Gothic" pitchFamily="34" charset="-122"/>
+                          <a:cs typeface="Malgun Gothic" pitchFamily="34" charset="-120"/>
+                        </a:rPr>
+                        <a:t>+13.1% / +15.9%</a:t>
+                      </a:r>
+                      <a:endParaRPr lang="en-US" sz="1200" dirty="0">
+                        <a:latin typeface="Malgun Gothic" charset="0"/>
+                        <a:ea typeface="Malgun Gothic" charset="0"/>
+                        <a:cs typeface="Malgun Gothic" charset="0"/>
+                      </a:endParaRPr>
+                    </a:p>
+                  </a:txBody>
+                  <a:tcPr marL="76200" marR="76200" marT="38100" marB="38100" anchor="ctr">
+                    <a:lnL w="6350" cap="flat" cmpd="sng" algn="ctr">
+                      <a:solidFill>
+                        <a:srgbClr val="D9DCE3"/>
+                      </a:solidFill>
+                      <a:prstDash val="solid"/>
+                      <a:round/>
+                      <a:headEnd type="none" w="med" len="med"/>
+                      <a:tailEnd type="none" w="med" len="med"/>
+                    </a:lnL>
+                    <a:lnR w="6350" cap="flat" cmpd="sng" algn="ctr">
+                      <a:solidFill>
+                        <a:srgbClr val="D9DCE3"/>
+                      </a:solidFill>
+                      <a:prstDash val="solid"/>
+                      <a:round/>
+                      <a:headEnd type="none" w="med" len="med"/>
+                      <a:tailEnd type="none" w="med" len="med"/>
+                    </a:lnR>
+                    <a:lnT w="6350" cap="flat" cmpd="sng" algn="ctr">
+                      <a:solidFill>
+                        <a:srgbClr val="D9DCE3"/>
+                      </a:solidFill>
+                      <a:prstDash val="solid"/>
+                      <a:round/>
+                      <a:headEnd type="none" w="med" len="med"/>
+                      <a:tailEnd type="none" w="med" len="med"/>
+                    </a:lnT>
+                    <a:lnB w="6350" cap="flat" cmpd="sng" algn="ctr">
+                      <a:solidFill>
+                        <a:srgbClr val="D9DCE3"/>
+                      </a:solidFill>
+                      <a:prstDash val="solid"/>
+                      <a:round/>
+                      <a:headEnd type="none" w="med" len="med"/>
+                      <a:tailEnd type="none" w="med" len="med"/>
+                    </a:lnB>
+                    <a:solidFill>
+                      <a:srgbClr val="FFFFFF"/>
+                    </a:solidFill>
+                  </a:tcPr>
+                </a:tc>
+              </a:tr>
+            </a:tbl>
+          </a:graphicData>
+        </a:graphic>
+      </p:graphicFrame>
+      <p:sp>
+        <p:nvSpPr>
+          <p:cNvPr id="6" name="Text 2"/>
+          <p:cNvSpPr txBox="1"/>
+          <p:nvPr/>
+        </p:nvSpPr>
+        <p:spPr>
+          <a:xfrm>
+            <a:off x="548640" y="6355080"/>
+            <a:ext cx="10180015" cy="320040"/>
+          </a:xfrm>
+          <a:prstGeom prst="rect">
+            <a:avLst/>
+          </a:prstGeom>
+          <a:noFill/>
+          <a:ln/>
+        </p:spPr>
+        <p:txBody>
+          <a:bodyPr wrap="square" lIns="0" tIns="0" rIns="0" bIns="0" rtlCol="0" anchor="ctr"/>
+          <a:lstStyle/>
+          <a:p>
+            <a:pPr indent="0" marL="0">
+              <a:buNone/>
+            </a:pPr>
+            <a:r>
+              <a:rPr lang="en-US" sz="1000" dirty="0">
+                <a:solidFill>
+                  <a:srgbClr val="8A8984"/>
+                </a:solidFill>
+                <a:latin typeface="Malgun Gothic" pitchFamily="34" charset="0"/>
+                <a:ea typeface="Malgun Gothic" pitchFamily="34" charset="-122"/>
+                <a:cs typeface="Malgun Gothic" pitchFamily="34" charset="-120"/>
+              </a:rPr>
+              <a:t>감정평가 실무의 시점수정(구분건물은 다세대 매매가격지수)과 같은 역할. 공식 지수는 권역 단위라 구 단위인 우리 지수를 모델에 쓰고, 공식 지수는 검증에만 썼다. 강서는 회복을 덜 잡지만 검증에서 강서 추정이 낮게 치우치지 않았다(치우침 −1%) · 출처: 한국부동산원 R-ONE, docs/의사결정/1008_03</a:t>
+            </a:r>
+            <a:endParaRPr lang="en-US" sz="1000" dirty="0"/>
+          </a:p>
+        </p:txBody>
+      </p:sp>
+      <p:sp>
+        <p:nvSpPr>
+          <p:cNvPr id="25" name="Slide Number Placeholder 0"/>
+          <p:cNvSpPr>
+            <a:spLocks noGrp="1"/>
+          </p:cNvSpPr>
+          <p:nvPr>
+            <p:ph type="sldNum" sz="quarter" idx="4294967295"/>
+          </p:nvPr>
+        </p:nvSpPr>
+        <p:spPr>
+          <a:xfrm>
+            <a:off x="11277295" y="6446520"/>
+            <a:ext cx="457200" cy="274320"/>
+          </a:xfrm>
+          <a:prstGeom prst="rect">
+            <a:avLst/>
+          </a:prstGeom>
+          <a:extLst>
+            <a:ext uri="{C572A759-6A51-4108-AA02-DFA0A04FC94B}">
+              <ma14:wrappingTextBoxFlag xmlns:ma14="http://schemas.microsoft.com/office/mac/drawingml/2011/main" val="0"/>
+            </a:ext>
+          </a:extLst>
+        </p:spPr>
+        <p:txBody>
+          <a:bodyPr/>
+          <a:lstStyle>
+            <a:lvl1pPr>
+              <a:defRPr sz="1000">
+                <a:solidFill>
+                  <a:srgbClr val="8A8984"/>
+                </a:solidFill>
+                <a:latin typeface="Malgun Gothic"/>
+                <a:ea typeface="Malgun Gothic"/>
+                <a:cs typeface="Malgun Gothic"/>
+              </a:defRPr>
+            </a:lvl1pPr>
+          </a:lstStyle>
+          <a:p>
+            <a:pPr algn="r"/>
+            <a:fld id="{F7021451-1387-4CA6-816F-3879F97B5CBC}" type="slidenum">
+              <a:rPr b="0" lang="en-US"/>
+              <a:t>26</a:t>
             </a:fld>
             <a:endParaRPr lang="en-US"/>
           </a:p>

--- a/presentation/AVM_발표.pptx
+++ b/presentation/AVM_발표.pptx
@@ -31,9 +31,10 @@
     <p:sldId id="279" r:id="rId25"/>
     <p:sldId id="280" r:id="rId26"/>
     <p:sldId id="281" r:id="rId27"/>
+    <p:sldId id="282" r:id="rId28"/>
   </p:sldIdLst>
   <p:notesMasterIdLst>
-    <p:notesMasterId r:id="rId28"/>
+    <p:notesMasterId r:id="rId29"/>
   </p:notesMasterIdLst>
   <p:sldSz cx="12192000" cy="6858000"/>
   <p:notesSz cx="6858000" cy="12192000"/>
@@ -158,7 +159,7 @@
                 </a:solidFill>
                 <a:latin typeface="+mn-lt"/>
               </a:rPr>
-              <a:t>±20% 안에 맞힌 비율(같은 건물 거래가 있는 경우, 방법별 최고)</a:t>
+              <a:t>±20% 안에 맞힌 비율(같은 건물 거래가 있는 경우, 방법마다 세 시험 종합 순위가 가장 좋은 방식)</a:t>
             </a:r>
           </a:p>
         </c:rich>
@@ -2480,6 +2481,94 @@
 </p:notes>
 </file>
 
+<file path=ppt/notesSlides/notesSlide27.xml><?xml version="1.0" encoding="utf-8"?>
+<p:notes xmlns:a="http://schemas.openxmlformats.org/drawingml/2006/main" xmlns:r="http://schemas.openxmlformats.org/officeDocument/2006/relationships" xmlns:p="http://schemas.openxmlformats.org/presentationml/2006/main">
+  <p:cSld>
+    <p:spTree>
+      <p:nvGrpSpPr>
+        <p:cNvPr id="1" name=""/>
+        <p:cNvGrpSpPr/>
+        <p:nvPr/>
+      </p:nvGrpSpPr>
+      <p:grpSpPr>
+        <a:xfrm>
+          <a:off x="0" y="0"/>
+          <a:ext cx="0" cy="0"/>
+          <a:chOff x="0" y="0"/>
+          <a:chExt cx="0" cy="0"/>
+        </a:xfrm>
+      </p:grpSpPr>
+      <p:sp>
+        <p:nvSpPr>
+          <p:cNvPr id="2" name="Slide Image Placeholder 1"/>
+          <p:cNvSpPr>
+            <a:spLocks noGrp="1" noRot="1" noChangeAspect="1"/>
+          </p:cNvSpPr>
+          <p:nvPr>
+            <p:ph type="sldImg"/>
+          </p:nvPr>
+        </p:nvSpPr>
+        <p:spPr/>
+      </p:sp>
+      <p:sp>
+        <p:nvSpPr>
+          <p:cNvPr id="3" name="Notes Placeholder 2"/>
+          <p:cNvSpPr>
+            <a:spLocks noGrp="1"/>
+          </p:cNvSpPr>
+          <p:nvPr>
+            <p:ph type="body" idx="1"/>
+          </p:nvPr>
+        </p:nvSpPr>
+        <p:spPr/>
+        <p:txBody>
+          <a:bodyPr/>
+          <a:lstStyle/>
+          <a:p>
+            <a:r>
+              <a:rPr lang="en-US" dirty="0"/>
+              <a:t/>
+            </a:r>
+            <a:endParaRPr lang="en-US" dirty="0"/>
+          </a:p>
+        </p:txBody>
+      </p:sp>
+      <p:sp>
+        <p:nvSpPr>
+          <p:cNvPr id="4" name="Slide Number Placeholder 3"/>
+          <p:cNvSpPr>
+            <a:spLocks noGrp="1"/>
+          </p:cNvSpPr>
+          <p:nvPr>
+            <p:ph type="sldNum" sz="quarter" idx="10"/>
+          </p:nvPr>
+        </p:nvSpPr>
+        <p:spPr/>
+        <p:txBody>
+          <a:bodyPr/>
+          <a:lstStyle/>
+          <a:p>
+            <a:fld id="{F7021451-1387-4CA6-816F-3879F97B5CBC}" type="slidenum">
+              <a:rPr lang="en-US"/>
+              <a:t>27</a:t>
+            </a:fld>
+            <a:endParaRPr lang="en-US"/>
+          </a:p>
+        </p:txBody>
+      </p:sp>
+    </p:spTree>
+    <p:extLst>
+      <p:ext uri="{BB962C8B-B14F-4D97-AF65-F5344CB8AC3E}">
+        <p14:creationId xmlns:p14="http://schemas.microsoft.com/office/powerpoint/2010/main" val="1024086991"/>
+      </p:ext>
+    </p:extLst>
+  </p:cSld>
+  <p:clrMapOvr>
+    <a:masterClrMapping/>
+  </p:clrMapOvr>
+</p:notes>
+</file>
+
 <file path=ppt/notesSlides/notesSlide3.xml><?xml version="1.0" encoding="utf-8"?>
 <p:notes xmlns:a="http://schemas.openxmlformats.org/drawingml/2006/main" xmlns:r="http://schemas.openxmlformats.org/officeDocument/2006/relationships" xmlns:p="http://schemas.openxmlformats.org/presentationml/2006/main">
   <p:cSld>
@@ -5521,7 +5610,7 @@
                 <a:ea typeface="Malgun Gothic" pitchFamily="34" charset="-122"/>
                 <a:cs typeface="Malgun Gothic" pitchFamily="34" charset="-120"/>
               </a:rPr>
-              <a:t>XGBoost(두 방식의 평균)가 세 시험 모두에서 상위권이라 선택</a:t>
+              <a:t>XGBoost(두 방식의 평균)가 세 시험 모두에서 상위권이라 선택. 한 시험만 보면 랜덤포레스트의 다른 방식(78.8%)도 비슷했지만 다른 시험에서 밀렸다</a:t>
             </a:r>
             <a:endParaRPr lang="en-US" sz="1300" dirty="0"/>
           </a:p>
@@ -8217,7 +8306,7 @@
                           <a:ea typeface="Malgun Gothic" pitchFamily="34" charset="-122"/>
                           <a:cs typeface="Malgun Gothic" pitchFamily="34" charset="-120"/>
                         </a:rPr>
-                        <a:t>실제 거래가</a:t>
+                        <a:t>실제 거래가*</a:t>
                       </a:r>
                       <a:endParaRPr lang="en-US" sz="1200" dirty="0">
                         <a:latin typeface="Malgun Gothic" charset="0"/>
@@ -10266,9 +10355,48 @@
                 <a:ea typeface="Malgun Gothic" pitchFamily="34" charset="-122"/>
                 <a:cs typeface="Malgun Gothic" pitchFamily="34" charset="-120"/>
               </a:rPr>
-              <a:t>비싼 집은 조금 낮게, 싼 집은 조금 높게 추정하는 경향도 있다(강남이 평균 5% 낮게 나오는 이유)</a:t>
+              <a:t>비싼 집은 조금 낮게, 싼 집은 조금 높게 추정하는 경향도 있다(강남이 보통 5% 낮게 나오는 이유)</a:t>
             </a:r>
             <a:endParaRPr lang="en-US" sz="1300" dirty="0"/>
+          </a:p>
+        </p:txBody>
+      </p:sp>
+      <p:sp>
+        <p:nvSpPr>
+          <p:cNvPr id="13" name="Text 10"/>
+          <p:cNvSpPr txBox="1"/>
+          <p:nvPr/>
+        </p:nvSpPr>
+        <p:spPr>
+          <a:xfrm>
+            <a:off x="548640" y="6355080"/>
+            <a:ext cx="10180015" cy="320040"/>
+          </a:xfrm>
+          <a:prstGeom prst="rect">
+            <a:avLst/>
+          </a:prstGeom>
+          <a:noFill/>
+          <a:ln/>
+        </p:spPr>
+        <p:txBody>
+          <a:bodyPr wrap="square" lIns="0" tIns="0" rIns="0" bIns="0" rtlCol="0" anchor="ctr"/>
+          <a:lstStyle/>
+          <a:p>
+            <a:pPr indent="0" marL="0">
+              <a:buNone/>
+            </a:pPr>
+            <a:r>
+              <a:rPr lang="en-US" sz="1000" dirty="0">
+                <a:solidFill>
+                  <a:srgbClr val="8A8984"/>
+                </a:solidFill>
+                <a:latin typeface="Malgun Gothic" pitchFamily="34" charset="0"/>
+                <a:ea typeface="Malgun Gothic" pitchFamily="34" charset="-122"/>
+                <a:cs typeface="Malgun Gothic" pitchFamily="34" charset="-120"/>
+              </a:rPr>
+              <a:t>* 실제 거래가는 시점 지수로 기준일(2026-10-06) 가격으로 환산한 값(신고 금액과 조금 다름) · 출처: docs/의사결정/1007_13_오차_분석.md, outputs/error_top_cases.csv</a:t>
+            </a:r>
+            <a:endParaRPr lang="en-US" sz="1000" dirty="0"/>
           </a:p>
         </p:txBody>
       </p:sp>
@@ -10760,7 +10888,7 @@
                 <a:ea typeface="Malgun Gothic" pitchFamily="34" charset="-122"/>
                 <a:cs typeface="Malgun Gothic" pitchFamily="34" charset="-120"/>
               </a:rPr>
-              <a:t>공시가격 1.34억 × 동네 배율 1.78 = 2.38억, 건물 특징으로 1% 올림</a:t>
+              <a:t>공시가격 1.34억 × 실거래 배율 1.78(같은 건물 거래 2건 + 동네) = 2.38억, 건물 특징으로 1% 올림</a:t>
             </a:r>
             <a:endParaRPr lang="en-US" sz="1200" dirty="0"/>
           </a:p>
@@ -11840,7 +11968,7 @@
                 <a:ea typeface="Malgun Gothic" pitchFamily="34" charset="-122"/>
                 <a:cs typeface="Malgun Gothic" pitchFamily="34" charset="-120"/>
               </a:rPr>
-              <a:t>결정마다 선택지·이유를 문서로(22건)</a:t>
+              <a:t>결정마다 선택지·이유를 문서로(23건)</a:t>
             </a:r>
             <a:endParaRPr lang="en-US" sz="1300" dirty="0"/>
           </a:p>
@@ -11882,7 +12010,7 @@
                 <a:ea typeface="Malgun Gothic" pitchFamily="34" charset="-122"/>
                 <a:cs typeface="Malgun Gothic" pitchFamily="34" charset="-120"/>
               </a:rPr>
-              <a:t>AI의 결과는 내가 확인한 뒤 반영 — PR 18건</a:t>
+              <a:t>AI의 결과는 내가 확인한 뒤 반영 — PR 19건</a:t>
             </a:r>
             <a:endParaRPr lang="en-US" sz="1300" dirty="0"/>
           </a:p>
@@ -17174,7 +17302,7 @@
                 <a:ea typeface="Malgun Gothic" pitchFamily="34" charset="-122"/>
                 <a:cs typeface="Malgun Gothic" pitchFamily="34" charset="-120"/>
               </a:rPr>
-              <a:t>17초</a:t>
+              <a:t>20초</a:t>
             </a:r>
             <a:endParaRPr lang="en-US" sz="3600" dirty="0"/>
           </a:p>
@@ -18105,7 +18233,7 @@
                 <a:ea typeface="Malgun Gothic" pitchFamily="34" charset="-122"/>
                 <a:cs typeface="Malgun Gothic" pitchFamily="34" charset="-120"/>
               </a:rPr>
-              <a:t>용어 풀이 · 기술 스택과 데이터 상세 · 검증 상세표 · 모델 비교 방법 · 신뢰도 계산 방법 · 시점 지수 검증</a:t>
+              <a:t>용어 풀이 · 기술 스택과 데이터 상세 · 검증 상세표 · 모델 비교 방법 · 신뢰도 계산 방법 · 시점 지수 검증 · 하우스머치 참고 비교</a:t>
             </a:r>
             <a:endParaRPr lang="en-US" sz="1600" dirty="0"/>
           </a:p>
@@ -20223,7 +20351,7 @@
                 <a:gridCol w="1645920"/>
                 <a:gridCol w="9448495"/>
               </a:tblGrid>
-              <a:tr h="365760">
+              <a:tr h="329184">
                 <a:tc>
                   <a:txBody>
                     <a:bodyPr/>
@@ -20233,7 +20361,7 @@
                         <a:buNone/>
                       </a:pPr>
                       <a:r>
-                        <a:rPr lang="en-US" sz="1200" b="1" dirty="0">
+                        <a:rPr lang="en-US" sz="1100" b="1" dirty="0">
                           <a:solidFill>
                             <a:srgbClr val="FFFFFF"/>
                           </a:solidFill>
@@ -20243,7 +20371,7 @@
                         </a:rPr>
                         <a:t>구분</a:t>
                       </a:r>
-                      <a:endParaRPr lang="en-US" sz="1200" dirty="0">
+                      <a:endParaRPr lang="en-US" sz="1100" dirty="0">
                         <a:latin typeface="Malgun Gothic" charset="0"/>
                         <a:ea typeface="Malgun Gothic" charset="0"/>
                         <a:cs typeface="Malgun Gothic" charset="0"/>
@@ -20301,7 +20429,7 @@
                         <a:buNone/>
                       </a:pPr>
                       <a:r>
-                        <a:rPr lang="en-US" sz="1200" b="1" dirty="0">
+                        <a:rPr lang="en-US" sz="1100" b="1" dirty="0">
                           <a:solidFill>
                             <a:srgbClr val="FFFFFF"/>
                           </a:solidFill>
@@ -20311,7 +20439,7 @@
                         </a:rPr>
                         <a:t>사용</a:t>
                       </a:r>
-                      <a:endParaRPr lang="en-US" sz="1200" dirty="0">
+                      <a:endParaRPr lang="en-US" sz="1100" dirty="0">
                         <a:latin typeface="Malgun Gothic" charset="0"/>
                         <a:ea typeface="Malgun Gothic" charset="0"/>
                         <a:cs typeface="Malgun Gothic" charset="0"/>
@@ -20361,7 +20489,7 @@
                   </a:tcPr>
                 </a:tc>
               </a:tr>
-              <a:tr h="365760">
+              <a:tr h="329184">
                 <a:tc>
                   <a:txBody>
                     <a:bodyPr/>
@@ -20371,7 +20499,7 @@
                         <a:buNone/>
                       </a:pPr>
                       <a:r>
-                        <a:rPr lang="en-US" sz="1200" dirty="0">
+                        <a:rPr lang="en-US" sz="1100" dirty="0">
                           <a:solidFill>
                             <a:srgbClr val="1F2328"/>
                           </a:solidFill>
@@ -20381,7 +20509,7 @@
                         </a:rPr>
                         <a:t>언어·환경</a:t>
                       </a:r>
-                      <a:endParaRPr lang="en-US" sz="1200" dirty="0">
+                      <a:endParaRPr lang="en-US" sz="1100" dirty="0">
                         <a:latin typeface="Malgun Gothic" charset="0"/>
                         <a:ea typeface="Malgun Gothic" charset="0"/>
                         <a:cs typeface="Malgun Gothic" charset="0"/>
@@ -20439,7 +20567,7 @@
                         <a:buNone/>
                       </a:pPr>
                       <a:r>
-                        <a:rPr lang="en-US" sz="1200" dirty="0">
+                        <a:rPr lang="en-US" sz="1100" dirty="0">
                           <a:solidFill>
                             <a:srgbClr val="1F2328"/>
                           </a:solidFill>
@@ -20449,7 +20577,7 @@
                         </a:rPr>
                         <a:t>Python 3.12+ (개발 3.14.5), uv + requirements.txt — 3.12·3.13·3.14 새 환경에서 같은 출력</a:t>
                       </a:r>
-                      <a:endParaRPr lang="en-US" sz="1200" dirty="0">
+                      <a:endParaRPr lang="en-US" sz="1100" dirty="0">
                         <a:latin typeface="Malgun Gothic" charset="0"/>
                         <a:ea typeface="Malgun Gothic" charset="0"/>
                         <a:cs typeface="Malgun Gothic" charset="0"/>
@@ -20499,7 +20627,7 @@
                   </a:tcPr>
                 </a:tc>
               </a:tr>
-              <a:tr h="365760">
+              <a:tr h="329184">
                 <a:tc>
                   <a:txBody>
                     <a:bodyPr/>
@@ -20509,7 +20637,7 @@
                         <a:buNone/>
                       </a:pPr>
                       <a:r>
-                        <a:rPr lang="en-US" sz="1200" dirty="0">
+                        <a:rPr lang="en-US" sz="1100" dirty="0">
                           <a:solidFill>
                             <a:srgbClr val="1F2328"/>
                           </a:solidFill>
@@ -20519,7 +20647,7 @@
                         </a:rPr>
                         <a:t>라이브러리</a:t>
                       </a:r>
-                      <a:endParaRPr lang="en-US" sz="1200" dirty="0">
+                      <a:endParaRPr lang="en-US" sz="1100" dirty="0">
                         <a:latin typeface="Malgun Gothic" charset="0"/>
                         <a:ea typeface="Malgun Gothic" charset="0"/>
                         <a:cs typeface="Malgun Gothic" charset="0"/>
@@ -20577,7 +20705,7 @@
                         <a:buNone/>
                       </a:pPr>
                       <a:r>
-                        <a:rPr lang="en-US" sz="1200" dirty="0">
+                        <a:rPr lang="en-US" sz="1100" dirty="0">
                           <a:solidFill>
                             <a:srgbClr val="1F2328"/>
                           </a:solidFill>
@@ -20587,7 +20715,7 @@
                         </a:rPr>
                         <a:t>pandas 3.0.6, numpy 2.5.3, XGBoost 3.4.1, scikit-learn 1.9.1, requests, python-dotenv, Jupyter, matplotlib</a:t>
                       </a:r>
-                      <a:endParaRPr lang="en-US" sz="1200" dirty="0">
+                      <a:endParaRPr lang="en-US" sz="1100" dirty="0">
                         <a:latin typeface="Malgun Gothic" charset="0"/>
                         <a:ea typeface="Malgun Gothic" charset="0"/>
                         <a:cs typeface="Malgun Gothic" charset="0"/>
@@ -20637,7 +20765,7 @@
                   </a:tcPr>
                 </a:tc>
               </a:tr>
-              <a:tr h="365760">
+              <a:tr h="329184">
                 <a:tc>
                   <a:txBody>
                     <a:bodyPr/>
@@ -20647,7 +20775,7 @@
                         <a:buNone/>
                       </a:pPr>
                       <a:r>
-                        <a:rPr lang="en-US" sz="1200" dirty="0">
+                        <a:rPr lang="en-US" sz="1100" dirty="0">
                           <a:solidFill>
                             <a:srgbClr val="1F2328"/>
                           </a:solidFill>
@@ -20657,7 +20785,7 @@
                         </a:rPr>
                         <a:t>API 키</a:t>
                       </a:r>
-                      <a:endParaRPr lang="en-US" sz="1200" dirty="0">
+                      <a:endParaRPr lang="en-US" sz="1100" dirty="0">
                         <a:latin typeface="Malgun Gothic" charset="0"/>
                         <a:ea typeface="Malgun Gothic" charset="0"/>
                         <a:cs typeface="Malgun Gothic" charset="0"/>
@@ -20715,7 +20843,7 @@
                         <a:buNone/>
                       </a:pPr>
                       <a:r>
-                        <a:rPr lang="en-US" sz="1200" dirty="0">
+                        <a:rPr lang="en-US" sz="1100" dirty="0">
                           <a:solidFill>
                             <a:srgbClr val="1F2328"/>
                           </a:solidFill>
@@ -20723,9 +20851,9 @@
                           <a:ea typeface="Malgun Gothic" pitchFamily="34" charset="-122"/>
                           <a:cs typeface="Malgun Gothic" pitchFamily="34" charset="-120"/>
                         </a:rPr>
-                        <a:t>DATA_GO_KR_API_KEY(실거래·건축물대장), VWORLD_API_KEY(공시가격·연속지적도) — 환경변수</a:t>
+                        <a:t>DATA_GO_KR_API_KEY(실거래·건축물대장), VWORLD_API_KEY(공시가격·연속지적도), SEOUL_OPEN_API_KEY(폐쇄말소대장)·REB_API_KEY(부동산원 지수, 검증용) — 환경변수, predict.py는 키 없이도 실행</a:t>
                       </a:r>
-                      <a:endParaRPr lang="en-US" sz="1200" dirty="0">
+                      <a:endParaRPr lang="en-US" sz="1100" dirty="0">
                         <a:latin typeface="Malgun Gothic" charset="0"/>
                         <a:ea typeface="Malgun Gothic" charset="0"/>
                         <a:cs typeface="Malgun Gothic" charset="0"/>
@@ -20794,7 +20922,7 @@
           </p:nvPr>
         </p:nvGraphicFramePr>
         <p:xfrm>
-          <a:off x="548640" y="2971800"/>
+          <a:off x="548640" y="2743200"/>
           <a:ext cx="11094415" cy="914400"/>
         </p:xfrm>
         <a:graphic>
@@ -20808,7 +20936,7 @@
                 <a:gridCol w="1463040"/>
                 <a:gridCol w="2819095"/>
               </a:tblGrid>
-              <a:tr h="365760">
+              <a:tr h="301752">
                 <a:tc>
                   <a:txBody>
                     <a:bodyPr/>
@@ -20818,7 +20946,7 @@
                         <a:buNone/>
                       </a:pPr>
                       <a:r>
-                        <a:rPr lang="en-US" sz="1200" b="1" dirty="0">
+                        <a:rPr lang="en-US" sz="1100" b="1" dirty="0">
                           <a:solidFill>
                             <a:srgbClr val="FFFFFF"/>
                           </a:solidFill>
@@ -20828,7 +20956,7 @@
                         </a:rPr>
                         <a:t>데이터</a:t>
                       </a:r>
-                      <a:endParaRPr lang="en-US" sz="1200" dirty="0">
+                      <a:endParaRPr lang="en-US" sz="1100" dirty="0">
                         <a:latin typeface="Malgun Gothic" charset="0"/>
                         <a:ea typeface="Malgun Gothic" charset="0"/>
                         <a:cs typeface="Malgun Gothic" charset="0"/>
@@ -20886,7 +21014,7 @@
                         <a:buNone/>
                       </a:pPr>
                       <a:r>
-                        <a:rPr lang="en-US" sz="1200" b="1" dirty="0">
+                        <a:rPr lang="en-US" sz="1100" b="1" dirty="0">
                           <a:solidFill>
                             <a:srgbClr val="FFFFFF"/>
                           </a:solidFill>
@@ -20896,7 +21024,7 @@
                         </a:rPr>
                         <a:t>수집 방식</a:t>
                       </a:r>
-                      <a:endParaRPr lang="en-US" sz="1200" dirty="0">
+                      <a:endParaRPr lang="en-US" sz="1100" dirty="0">
                         <a:latin typeface="Malgun Gothic" charset="0"/>
                         <a:ea typeface="Malgun Gothic" charset="0"/>
                         <a:cs typeface="Malgun Gothic" charset="0"/>
@@ -20954,7 +21082,7 @@
                         <a:buNone/>
                       </a:pPr>
                       <a:r>
-                        <a:rPr lang="en-US" sz="1200" b="1" dirty="0">
+                        <a:rPr lang="en-US" sz="1100" b="1" dirty="0">
                           <a:solidFill>
                             <a:srgbClr val="FFFFFF"/>
                           </a:solidFill>
@@ -20964,7 +21092,7 @@
                         </a:rPr>
                         <a:t>기간·기준</a:t>
                       </a:r>
-                      <a:endParaRPr lang="en-US" sz="1200" dirty="0">
+                      <a:endParaRPr lang="en-US" sz="1100" dirty="0">
                         <a:latin typeface="Malgun Gothic" charset="0"/>
                         <a:ea typeface="Malgun Gothic" charset="0"/>
                         <a:cs typeface="Malgun Gothic" charset="0"/>
@@ -21022,7 +21150,7 @@
                         <a:buNone/>
                       </a:pPr>
                       <a:r>
-                        <a:rPr lang="en-US" sz="1200" b="1" dirty="0">
+                        <a:rPr lang="en-US" sz="1100" b="1" dirty="0">
                           <a:solidFill>
                             <a:srgbClr val="FFFFFF"/>
                           </a:solidFill>
@@ -21032,7 +21160,7 @@
                         </a:rPr>
                         <a:t>받은 건수</a:t>
                       </a:r>
-                      <a:endParaRPr lang="en-US" sz="1200" dirty="0">
+                      <a:endParaRPr lang="en-US" sz="1100" dirty="0">
                         <a:latin typeface="Malgun Gothic" charset="0"/>
                         <a:ea typeface="Malgun Gothic" charset="0"/>
                         <a:cs typeface="Malgun Gothic" charset="0"/>
@@ -21090,7 +21218,7 @@
                         <a:buNone/>
                       </a:pPr>
                       <a:r>
-                        <a:rPr lang="en-US" sz="1200" b="1" dirty="0">
+                        <a:rPr lang="en-US" sz="1100" b="1" dirty="0">
                           <a:solidFill>
                             <a:srgbClr val="FFFFFF"/>
                           </a:solidFill>
@@ -21100,7 +21228,7 @@
                         </a:rPr>
                         <a:t>정제 후 · 사용</a:t>
                       </a:r>
-                      <a:endParaRPr lang="en-US" sz="1200" dirty="0">
+                      <a:endParaRPr lang="en-US" sz="1100" dirty="0">
                         <a:latin typeface="Malgun Gothic" charset="0"/>
                         <a:ea typeface="Malgun Gothic" charset="0"/>
                         <a:cs typeface="Malgun Gothic" charset="0"/>
@@ -21150,7 +21278,7 @@
                   </a:tcPr>
                 </a:tc>
               </a:tr>
-              <a:tr h="365760">
+              <a:tr h="301752">
                 <a:tc>
                   <a:txBody>
                     <a:bodyPr/>
@@ -21160,7 +21288,7 @@
                         <a:buNone/>
                       </a:pPr>
                       <a:r>
-                        <a:rPr lang="en-US" sz="1200" dirty="0">
+                        <a:rPr lang="en-US" sz="1100" dirty="0">
                           <a:solidFill>
                             <a:srgbClr val="1F2328"/>
                           </a:solidFill>
@@ -21170,7 +21298,7 @@
                         </a:rPr>
                         <a:t>연립다세대 매매 실거래</a:t>
                       </a:r>
-                      <a:endParaRPr lang="en-US" sz="1200" dirty="0">
+                      <a:endParaRPr lang="en-US" sz="1100" dirty="0">
                         <a:latin typeface="Malgun Gothic" charset="0"/>
                         <a:ea typeface="Malgun Gothic" charset="0"/>
                         <a:cs typeface="Malgun Gothic" charset="0"/>
@@ -21228,7 +21356,7 @@
                         <a:buNone/>
                       </a:pPr>
                       <a:r>
-                        <a:rPr lang="en-US" sz="1200" dirty="0">
+                        <a:rPr lang="en-US" sz="1100" dirty="0">
                           <a:solidFill>
                             <a:srgbClr val="1F2328"/>
                           </a:solidFill>
@@ -21238,7 +21366,7 @@
                         </a:rPr>
                         <a:t>API, 구·월별 전수</a:t>
                       </a:r>
-                      <a:endParaRPr lang="en-US" sz="1200" dirty="0">
+                      <a:endParaRPr lang="en-US" sz="1100" dirty="0">
                         <a:latin typeface="Malgun Gothic" charset="0"/>
                         <a:ea typeface="Malgun Gothic" charset="0"/>
                         <a:cs typeface="Malgun Gothic" charset="0"/>
@@ -21296,7 +21424,7 @@
                         <a:buNone/>
                       </a:pPr>
                       <a:r>
-                        <a:rPr lang="en-US" sz="1200" dirty="0">
+                        <a:rPr lang="en-US" sz="1100" dirty="0">
                           <a:solidFill>
                             <a:srgbClr val="1F2328"/>
                           </a:solidFill>
@@ -21306,7 +21434,7 @@
                         </a:rPr>
                         <a:t>2020-10~2026-10</a:t>
                       </a:r>
-                      <a:endParaRPr lang="en-US" sz="1200" dirty="0">
+                      <a:endParaRPr lang="en-US" sz="1100" dirty="0">
                         <a:latin typeface="Malgun Gothic" charset="0"/>
                         <a:ea typeface="Malgun Gothic" charset="0"/>
                         <a:cs typeface="Malgun Gothic" charset="0"/>
@@ -21364,7 +21492,7 @@
                         <a:buNone/>
                       </a:pPr>
                       <a:r>
-                        <a:rPr lang="en-US" sz="1200" dirty="0">
+                        <a:rPr lang="en-US" sz="1100" dirty="0">
                           <a:solidFill>
                             <a:srgbClr val="1F2328"/>
                           </a:solidFill>
@@ -21374,7 +21502,7 @@
                         </a:rPr>
                         <a:t>36,997건</a:t>
                       </a:r>
-                      <a:endParaRPr lang="en-US" sz="1200" dirty="0">
+                      <a:endParaRPr lang="en-US" sz="1100" dirty="0">
                         <a:latin typeface="Malgun Gothic" charset="0"/>
                         <a:ea typeface="Malgun Gothic" charset="0"/>
                         <a:cs typeface="Malgun Gothic" charset="0"/>
@@ -21432,7 +21560,7 @@
                         <a:buNone/>
                       </a:pPr>
                       <a:r>
-                        <a:rPr lang="en-US" sz="1200" dirty="0">
+                        <a:rPr lang="en-US" sz="1100" dirty="0">
                           <a:solidFill>
                             <a:srgbClr val="1F2328"/>
                           </a:solidFill>
@@ -21442,7 +21570,7 @@
                         </a:rPr>
                         <a:t>33,363건 · 학습 최근 3년 14,401건</a:t>
                       </a:r>
-                      <a:endParaRPr lang="en-US" sz="1200" dirty="0">
+                      <a:endParaRPr lang="en-US" sz="1100" dirty="0">
                         <a:latin typeface="Malgun Gothic" charset="0"/>
                         <a:ea typeface="Malgun Gothic" charset="0"/>
                         <a:cs typeface="Malgun Gothic" charset="0"/>
@@ -21492,7 +21620,7 @@
                   </a:tcPr>
                 </a:tc>
               </a:tr>
-              <a:tr h="365760">
+              <a:tr h="301752">
                 <a:tc>
                   <a:txBody>
                     <a:bodyPr/>
@@ -21502,7 +21630,7 @@
                         <a:buNone/>
                       </a:pPr>
                       <a:r>
-                        <a:rPr lang="en-US" sz="1200" dirty="0">
+                        <a:rPr lang="en-US" sz="1100" dirty="0">
                           <a:solidFill>
                             <a:srgbClr val="1F2328"/>
                           </a:solidFill>
@@ -21512,7 +21640,7 @@
                         </a:rPr>
                         <a:t>연립다세대 전월세</a:t>
                       </a:r>
-                      <a:endParaRPr lang="en-US" sz="1200" dirty="0">
+                      <a:endParaRPr lang="en-US" sz="1100" dirty="0">
                         <a:latin typeface="Malgun Gothic" charset="0"/>
                         <a:ea typeface="Malgun Gothic" charset="0"/>
                         <a:cs typeface="Malgun Gothic" charset="0"/>
@@ -21570,7 +21698,7 @@
                         <a:buNone/>
                       </a:pPr>
                       <a:r>
-                        <a:rPr lang="en-US" sz="1200" dirty="0">
+                        <a:rPr lang="en-US" sz="1100" dirty="0">
                           <a:solidFill>
                             <a:srgbClr val="1F2328"/>
                           </a:solidFill>
@@ -21580,7 +21708,7 @@
                         </a:rPr>
                         <a:t>API</a:t>
                       </a:r>
-                      <a:endParaRPr lang="en-US" sz="1200" dirty="0">
+                      <a:endParaRPr lang="en-US" sz="1100" dirty="0">
                         <a:latin typeface="Malgun Gothic" charset="0"/>
                         <a:ea typeface="Malgun Gothic" charset="0"/>
                         <a:cs typeface="Malgun Gothic" charset="0"/>
@@ -21638,7 +21766,7 @@
                         <a:buNone/>
                       </a:pPr>
                       <a:r>
-                        <a:rPr lang="en-US" sz="1200" dirty="0">
+                        <a:rPr lang="en-US" sz="1100" dirty="0">
                           <a:solidFill>
                             <a:srgbClr val="1F2328"/>
                           </a:solidFill>
@@ -21648,7 +21776,7 @@
                         </a:rPr>
                         <a:t>2020-10~2026-10</a:t>
                       </a:r>
-                      <a:endParaRPr lang="en-US" sz="1200" dirty="0">
+                      <a:endParaRPr lang="en-US" sz="1100" dirty="0">
                         <a:latin typeface="Malgun Gothic" charset="0"/>
                         <a:ea typeface="Malgun Gothic" charset="0"/>
                         <a:cs typeface="Malgun Gothic" charset="0"/>
@@ -21706,7 +21834,7 @@
                         <a:buNone/>
                       </a:pPr>
                       <a:r>
-                        <a:rPr lang="en-US" sz="1200" dirty="0">
+                        <a:rPr lang="en-US" sz="1100" dirty="0">
                           <a:solidFill>
                             <a:srgbClr val="1F2328"/>
                           </a:solidFill>
@@ -21716,7 +21844,7 @@
                         </a:rPr>
                         <a:t>143,109건</a:t>
                       </a:r>
-                      <a:endParaRPr lang="en-US" sz="1200" dirty="0">
+                      <a:endParaRPr lang="en-US" sz="1100" dirty="0">
                         <a:latin typeface="Malgun Gothic" charset="0"/>
                         <a:ea typeface="Malgun Gothic" charset="0"/>
                         <a:cs typeface="Malgun Gothic" charset="0"/>
@@ -21774,7 +21902,7 @@
                         <a:buNone/>
                       </a:pPr>
                       <a:r>
-                        <a:rPr lang="en-US" sz="1200" dirty="0">
+                        <a:rPr lang="en-US" sz="1100" dirty="0">
                           <a:solidFill>
                             <a:srgbClr val="1F2328"/>
                           </a:solidFill>
@@ -21784,7 +21912,7 @@
                         </a:rPr>
                         <a:t>사용 안 함</a:t>
                       </a:r>
-                      <a:endParaRPr lang="en-US" sz="1200" dirty="0">
+                      <a:endParaRPr lang="en-US" sz="1100" dirty="0">
                         <a:latin typeface="Malgun Gothic" charset="0"/>
                         <a:ea typeface="Malgun Gothic" charset="0"/>
                         <a:cs typeface="Malgun Gothic" charset="0"/>
@@ -21834,7 +21962,7 @@
                   </a:tcPr>
                 </a:tc>
               </a:tr>
-              <a:tr h="365760">
+              <a:tr h="301752">
                 <a:tc>
                   <a:txBody>
                     <a:bodyPr/>
@@ -21844,7 +21972,7 @@
                         <a:buNone/>
                       </a:pPr>
                       <a:r>
-                        <a:rPr lang="en-US" sz="1200" dirty="0">
+                        <a:rPr lang="en-US" sz="1100" dirty="0">
                           <a:solidFill>
                             <a:srgbClr val="1F2328"/>
                           </a:solidFill>
@@ -21854,7 +21982,7 @@
                         </a:rPr>
                         <a:t>공동주택가격(호별)</a:t>
                       </a:r>
-                      <a:endParaRPr lang="en-US" sz="1200" dirty="0">
+                      <a:endParaRPr lang="en-US" sz="1100" dirty="0">
                         <a:latin typeface="Malgun Gothic" charset="0"/>
                         <a:ea typeface="Malgun Gothic" charset="0"/>
                         <a:cs typeface="Malgun Gothic" charset="0"/>
@@ -21912,7 +22040,7 @@
                         <a:buNone/>
                       </a:pPr>
                       <a:r>
-                        <a:rPr lang="en-US" sz="1200" dirty="0">
+                        <a:rPr lang="en-US" sz="1100" dirty="0">
                           <a:solidFill>
                             <a:srgbClr val="1F2328"/>
                           </a:solidFill>
@@ -21922,7 +22050,7 @@
                         </a:rPr>
                         <a:t>API, 거래 지번마다</a:t>
                       </a:r>
-                      <a:endParaRPr lang="en-US" sz="1200" dirty="0">
+                      <a:endParaRPr lang="en-US" sz="1100" dirty="0">
                         <a:latin typeface="Malgun Gothic" charset="0"/>
                         <a:ea typeface="Malgun Gothic" charset="0"/>
                         <a:cs typeface="Malgun Gothic" charset="0"/>
@@ -21980,7 +22108,7 @@
                         <a:buNone/>
                       </a:pPr>
                       <a:r>
-                        <a:rPr lang="en-US" sz="1200" dirty="0">
+                        <a:rPr lang="en-US" sz="1100" dirty="0">
                           <a:solidFill>
                             <a:srgbClr val="1F2328"/>
                           </a:solidFill>
@@ -21990,7 +22118,7 @@
                         </a:rPr>
                         <a:t>2026(없으면 최근 연도)</a:t>
                       </a:r>
-                      <a:endParaRPr lang="en-US" sz="1200" dirty="0">
+                      <a:endParaRPr lang="en-US" sz="1100" dirty="0">
                         <a:latin typeface="Malgun Gothic" charset="0"/>
                         <a:ea typeface="Malgun Gothic" charset="0"/>
                         <a:cs typeface="Malgun Gothic" charset="0"/>
@@ -22048,7 +22176,7 @@
                         <a:buNone/>
                       </a:pPr>
                       <a:r>
-                        <a:rPr lang="en-US" sz="1200" dirty="0">
+                        <a:rPr lang="en-US" sz="1100" dirty="0">
                           <a:solidFill>
                             <a:srgbClr val="1F2328"/>
                           </a:solidFill>
@@ -22058,7 +22186,7 @@
                         </a:rPr>
                         <a:t>9,928개 지번</a:t>
                       </a:r>
-                      <a:endParaRPr lang="en-US" sz="1200" dirty="0">
+                      <a:endParaRPr lang="en-US" sz="1100" dirty="0">
                         <a:latin typeface="Malgun Gothic" charset="0"/>
                         <a:ea typeface="Malgun Gothic" charset="0"/>
                         <a:cs typeface="Malgun Gothic" charset="0"/>
@@ -22116,7 +22244,7 @@
                         <a:buNone/>
                       </a:pPr>
                       <a:r>
-                        <a:rPr lang="en-US" sz="1200" dirty="0">
+                        <a:rPr lang="en-US" sz="1100" dirty="0">
                           <a:solidFill>
                             <a:srgbClr val="1F2328"/>
                           </a:solidFill>
@@ -22126,7 +22254,7 @@
                         </a:rPr>
                         <a:t>107,236호</a:t>
                       </a:r>
-                      <a:endParaRPr lang="en-US" sz="1200" dirty="0">
+                      <a:endParaRPr lang="en-US" sz="1100" dirty="0">
                         <a:latin typeface="Malgun Gothic" charset="0"/>
                         <a:ea typeface="Malgun Gothic" charset="0"/>
                         <a:cs typeface="Malgun Gothic" charset="0"/>
@@ -22176,7 +22304,7 @@
                   </a:tcPr>
                 </a:tc>
               </a:tr>
-              <a:tr h="365760">
+              <a:tr h="301752">
                 <a:tc>
                   <a:txBody>
                     <a:bodyPr/>
@@ -22186,7 +22314,7 @@
                         <a:buNone/>
                       </a:pPr>
                       <a:r>
-                        <a:rPr lang="en-US" sz="1200" dirty="0">
+                        <a:rPr lang="en-US" sz="1100" dirty="0">
                           <a:solidFill>
                             <a:srgbClr val="1F2328"/>
                           </a:solidFill>
@@ -22196,7 +22324,7 @@
                         </a:rPr>
                         <a:t>건축물대장 표제부</a:t>
                       </a:r>
-                      <a:endParaRPr lang="en-US" sz="1200" dirty="0">
+                      <a:endParaRPr lang="en-US" sz="1100" dirty="0">
                         <a:latin typeface="Malgun Gothic" charset="0"/>
                         <a:ea typeface="Malgun Gothic" charset="0"/>
                         <a:cs typeface="Malgun Gothic" charset="0"/>
@@ -22254,7 +22382,7 @@
                         <a:buNone/>
                       </a:pPr>
                       <a:r>
-                        <a:rPr lang="en-US" sz="1200" dirty="0">
+                        <a:rPr lang="en-US" sz="1100" dirty="0">
                           <a:solidFill>
                             <a:srgbClr val="1F2328"/>
                           </a:solidFill>
@@ -22264,7 +22392,7 @@
                         </a:rPr>
                         <a:t>API, 거래 지번마다</a:t>
                       </a:r>
-                      <a:endParaRPr lang="en-US" sz="1200" dirty="0">
+                      <a:endParaRPr lang="en-US" sz="1100" dirty="0">
                         <a:latin typeface="Malgun Gothic" charset="0"/>
                         <a:ea typeface="Malgun Gothic" charset="0"/>
                         <a:cs typeface="Malgun Gothic" charset="0"/>
@@ -22322,7 +22450,7 @@
                         <a:buNone/>
                       </a:pPr>
                       <a:r>
-                        <a:rPr lang="en-US" sz="1200" dirty="0">
+                        <a:rPr lang="en-US" sz="1100" dirty="0">
                           <a:solidFill>
                             <a:srgbClr val="1F2328"/>
                           </a:solidFill>
@@ -22332,7 +22460,7 @@
                         </a:rPr>
                         <a:t>수집일 현행</a:t>
                       </a:r>
-                      <a:endParaRPr lang="en-US" sz="1200" dirty="0">
+                      <a:endParaRPr lang="en-US" sz="1100" dirty="0">
                         <a:latin typeface="Malgun Gothic" charset="0"/>
                         <a:ea typeface="Malgun Gothic" charset="0"/>
                         <a:cs typeface="Malgun Gothic" charset="0"/>
@@ -22390,7 +22518,7 @@
                         <a:buNone/>
                       </a:pPr>
                       <a:r>
-                        <a:rPr lang="en-US" sz="1200" dirty="0">
+                        <a:rPr lang="en-US" sz="1100" dirty="0">
                           <a:solidFill>
                             <a:srgbClr val="1F2328"/>
                           </a:solidFill>
@@ -22400,7 +22528,7 @@
                         </a:rPr>
                         <a:t>9,928개 지번</a:t>
                       </a:r>
-                      <a:endParaRPr lang="en-US" sz="1200" dirty="0">
+                      <a:endParaRPr lang="en-US" sz="1100" dirty="0">
                         <a:latin typeface="Malgun Gothic" charset="0"/>
                         <a:ea typeface="Malgun Gothic" charset="0"/>
                         <a:cs typeface="Malgun Gothic" charset="0"/>
@@ -22458,7 +22586,7 @@
                         <a:buNone/>
                       </a:pPr>
                       <a:r>
-                        <a:rPr lang="en-US" sz="1200" dirty="0">
+                        <a:rPr lang="en-US" sz="1100" dirty="0">
                           <a:solidFill>
                             <a:srgbClr val="1F2328"/>
                           </a:solidFill>
@@ -22468,7 +22596,7 @@
                         </a:rPr>
                         <a:t>연식·승강기·층수·세대수·주차</a:t>
                       </a:r>
-                      <a:endParaRPr lang="en-US" sz="1200" dirty="0">
+                      <a:endParaRPr lang="en-US" sz="1100" dirty="0">
                         <a:latin typeface="Malgun Gothic" charset="0"/>
                         <a:ea typeface="Malgun Gothic" charset="0"/>
                         <a:cs typeface="Malgun Gothic" charset="0"/>
@@ -22518,7 +22646,7 @@
                   </a:tcPr>
                 </a:tc>
               </a:tr>
-              <a:tr h="365760">
+              <a:tr h="301752">
                 <a:tc>
                   <a:txBody>
                     <a:bodyPr/>
@@ -22528,7 +22656,7 @@
                         <a:buNone/>
                       </a:pPr>
                       <a:r>
-                        <a:rPr lang="en-US" sz="1200" dirty="0">
+                        <a:rPr lang="en-US" sz="1100" dirty="0">
                           <a:solidFill>
                             <a:srgbClr val="1F2328"/>
                           </a:solidFill>
@@ -22538,7 +22666,7 @@
                         </a:rPr>
                         <a:t>필지 좌표·공시지가</a:t>
                       </a:r>
-                      <a:endParaRPr lang="en-US" sz="1200" dirty="0">
+                      <a:endParaRPr lang="en-US" sz="1100" dirty="0">
                         <a:latin typeface="Malgun Gothic" charset="0"/>
                         <a:ea typeface="Malgun Gothic" charset="0"/>
                         <a:cs typeface="Malgun Gothic" charset="0"/>
@@ -22596,7 +22724,7 @@
                         <a:buNone/>
                       </a:pPr>
                       <a:r>
-                        <a:rPr lang="en-US" sz="1200" dirty="0">
+                        <a:rPr lang="en-US" sz="1100" dirty="0">
                           <a:solidFill>
                             <a:srgbClr val="1F2328"/>
                           </a:solidFill>
@@ -22606,7 +22734,7 @@
                         </a:rPr>
                         <a:t>API(연속지적도), 3개 구 전체</a:t>
                       </a:r>
-                      <a:endParaRPr lang="en-US" sz="1200" dirty="0">
+                      <a:endParaRPr lang="en-US" sz="1100" dirty="0">
                         <a:latin typeface="Malgun Gothic" charset="0"/>
                         <a:ea typeface="Malgun Gothic" charset="0"/>
                         <a:cs typeface="Malgun Gothic" charset="0"/>
@@ -22664,7 +22792,7 @@
                         <a:buNone/>
                       </a:pPr>
                       <a:r>
-                        <a:rPr lang="en-US" sz="1200" dirty="0">
+                        <a:rPr lang="en-US" sz="1100" dirty="0">
                           <a:solidFill>
                             <a:srgbClr val="1F2328"/>
                           </a:solidFill>
@@ -22674,7 +22802,7 @@
                         </a:rPr>
                         <a:t>2025 공시지가</a:t>
                       </a:r>
-                      <a:endParaRPr lang="en-US" sz="1200" dirty="0">
+                      <a:endParaRPr lang="en-US" sz="1100" dirty="0">
                         <a:latin typeface="Malgun Gothic" charset="0"/>
                         <a:ea typeface="Malgun Gothic" charset="0"/>
                         <a:cs typeface="Malgun Gothic" charset="0"/>
@@ -22732,7 +22860,7 @@
                         <a:buNone/>
                       </a:pPr>
                       <a:r>
-                        <a:rPr lang="en-US" sz="1200" dirty="0">
+                        <a:rPr lang="en-US" sz="1100" dirty="0">
                           <a:solidFill>
                             <a:srgbClr val="1F2328"/>
                           </a:solidFill>
@@ -22742,7 +22870,7 @@
                         </a:rPr>
                         <a:t>123,615필지</a:t>
                       </a:r>
-                      <a:endParaRPr lang="en-US" sz="1200" dirty="0">
+                      <a:endParaRPr lang="en-US" sz="1100" dirty="0">
                         <a:latin typeface="Malgun Gothic" charset="0"/>
                         <a:ea typeface="Malgun Gothic" charset="0"/>
                         <a:cs typeface="Malgun Gothic" charset="0"/>
@@ -22800,7 +22928,7 @@
                         <a:buNone/>
                       </a:pPr>
                       <a:r>
-                        <a:rPr lang="en-US" sz="1200" dirty="0">
+                        <a:rPr lang="en-US" sz="1100" dirty="0">
                           <a:solidFill>
                             <a:srgbClr val="1F2328"/>
                           </a:solidFill>
@@ -22810,7 +22938,7 @@
                         </a:rPr>
                         <a:t>좌표·땅값·역 거리</a:t>
                       </a:r>
-                      <a:endParaRPr lang="en-US" sz="1200" dirty="0">
+                      <a:endParaRPr lang="en-US" sz="1100" dirty="0">
                         <a:latin typeface="Malgun Gothic" charset="0"/>
                         <a:ea typeface="Malgun Gothic" charset="0"/>
                         <a:cs typeface="Malgun Gothic" charset="0"/>
@@ -22860,7 +22988,7 @@
                   </a:tcPr>
                 </a:tc>
               </a:tr>
-              <a:tr h="365760">
+              <a:tr h="301752">
                 <a:tc>
                   <a:txBody>
                     <a:bodyPr/>
@@ -22870,7 +22998,7 @@
                         <a:buNone/>
                       </a:pPr>
                       <a:r>
-                        <a:rPr lang="en-US" sz="1200" dirty="0">
+                        <a:rPr lang="en-US" sz="1100" dirty="0">
                           <a:solidFill>
                             <a:srgbClr val="1F2328"/>
                           </a:solidFill>
@@ -22880,7 +23008,7 @@
                         </a:rPr>
                         <a:t>지하철역</a:t>
                       </a:r>
-                      <a:endParaRPr lang="en-US" sz="1200" dirty="0">
+                      <a:endParaRPr lang="en-US" sz="1100" dirty="0">
                         <a:latin typeface="Malgun Gothic" charset="0"/>
                         <a:ea typeface="Malgun Gothic" charset="0"/>
                         <a:cs typeface="Malgun Gothic" charset="0"/>
@@ -22938,7 +23066,7 @@
                         <a:buNone/>
                       </a:pPr>
                       <a:r>
-                        <a:rPr lang="en-US" sz="1200" dirty="0">
+                        <a:rPr lang="en-US" sz="1100" dirty="0">
                           <a:solidFill>
                             <a:srgbClr val="1F2328"/>
                           </a:solidFill>
@@ -22948,7 +23076,7 @@
                         </a:rPr>
                         <a:t>공공데이터 파일</a:t>
                       </a:r>
-                      <a:endParaRPr lang="en-US" sz="1200" dirty="0">
+                      <a:endParaRPr lang="en-US" sz="1100" dirty="0">
                         <a:latin typeface="Malgun Gothic" charset="0"/>
                         <a:ea typeface="Malgun Gothic" charset="0"/>
                         <a:cs typeface="Malgun Gothic" charset="0"/>
@@ -23006,7 +23134,7 @@
                         <a:buNone/>
                       </a:pPr>
                       <a:r>
-                        <a:rPr lang="en-US" sz="1200" dirty="0">
+                        <a:rPr lang="en-US" sz="1100" dirty="0">
                           <a:solidFill>
                             <a:srgbClr val="1F2328"/>
                           </a:solidFill>
@@ -23016,7 +23144,7 @@
                         </a:rPr>
                         <a:t>2026-06-30</a:t>
                       </a:r>
-                      <a:endParaRPr lang="en-US" sz="1200" dirty="0">
+                      <a:endParaRPr lang="en-US" sz="1100" dirty="0">
                         <a:latin typeface="Malgun Gothic" charset="0"/>
                         <a:ea typeface="Malgun Gothic" charset="0"/>
                         <a:cs typeface="Malgun Gothic" charset="0"/>
@@ -23074,7 +23202,7 @@
                         <a:buNone/>
                       </a:pPr>
                       <a:r>
-                        <a:rPr lang="en-US" sz="1200" dirty="0">
+                        <a:rPr lang="en-US" sz="1100" dirty="0">
                           <a:solidFill>
                             <a:srgbClr val="1F2328"/>
                           </a:solidFill>
@@ -23084,7 +23212,7 @@
                         </a:rPr>
                         <a:t>367개</a:t>
                       </a:r>
-                      <a:endParaRPr lang="en-US" sz="1200" dirty="0">
+                      <a:endParaRPr lang="en-US" sz="1100" dirty="0">
                         <a:latin typeface="Malgun Gothic" charset="0"/>
                         <a:ea typeface="Malgun Gothic" charset="0"/>
                         <a:cs typeface="Malgun Gothic" charset="0"/>
@@ -23142,7 +23270,7 @@
                         <a:buNone/>
                       </a:pPr>
                       <a:r>
-                        <a:rPr lang="en-US" sz="1200" dirty="0">
+                        <a:rPr lang="en-US" sz="1100" dirty="0">
                           <a:solidFill>
                             <a:srgbClr val="1F2328"/>
                           </a:solidFill>
@@ -23152,7 +23280,7 @@
                         </a:rPr>
                         <a:t>275개 역</a:t>
                       </a:r>
-                      <a:endParaRPr lang="en-US" sz="1200" dirty="0">
+                      <a:endParaRPr lang="en-US" sz="1100" dirty="0">
                         <a:latin typeface="Malgun Gothic" charset="0"/>
                         <a:ea typeface="Malgun Gothic" charset="0"/>
                         <a:cs typeface="Malgun Gothic" charset="0"/>
@@ -23202,7 +23330,7 @@
                   </a:tcPr>
                 </a:tc>
               </a:tr>
-              <a:tr h="365760">
+              <a:tr h="301752">
                 <a:tc>
                   <a:txBody>
                     <a:bodyPr/>
@@ -23212,7 +23340,7 @@
                         <a:buNone/>
                       </a:pPr>
                       <a:r>
-                        <a:rPr lang="en-US" sz="1200" dirty="0">
+                        <a:rPr lang="en-US" sz="1100" dirty="0">
                           <a:solidFill>
                             <a:srgbClr val="1F2328"/>
                           </a:solidFill>
@@ -23222,7 +23350,7 @@
                         </a:rPr>
                         <a:t>법정동코드·행정동 연계</a:t>
                       </a:r>
-                      <a:endParaRPr lang="en-US" sz="1200" dirty="0">
+                      <a:endParaRPr lang="en-US" sz="1100" dirty="0">
                         <a:latin typeface="Malgun Gothic" charset="0"/>
                         <a:ea typeface="Malgun Gothic" charset="0"/>
                         <a:cs typeface="Malgun Gothic" charset="0"/>
@@ -23280,7 +23408,7 @@
                         <a:buNone/>
                       </a:pPr>
                       <a:r>
-                        <a:rPr lang="en-US" sz="1200" dirty="0">
+                        <a:rPr lang="en-US" sz="1100" dirty="0">
                           <a:solidFill>
                             <a:srgbClr val="1F2328"/>
                           </a:solidFill>
@@ -23290,7 +23418,7 @@
                         </a:rPr>
                         <a:t>공공데이터·행정안전부 파일</a:t>
                       </a:r>
-                      <a:endParaRPr lang="en-US" sz="1200" dirty="0">
+                      <a:endParaRPr lang="en-US" sz="1100" dirty="0">
                         <a:latin typeface="Malgun Gothic" charset="0"/>
                         <a:ea typeface="Malgun Gothic" charset="0"/>
                         <a:cs typeface="Malgun Gothic" charset="0"/>
@@ -23348,7 +23476,7 @@
                         <a:buNone/>
                       </a:pPr>
                       <a:r>
-                        <a:rPr lang="en-US" sz="1200" dirty="0">
+                        <a:rPr lang="en-US" sz="1100" dirty="0">
                           <a:solidFill>
                             <a:srgbClr val="1F2328"/>
                           </a:solidFill>
@@ -23358,7 +23486,7 @@
                         </a:rPr>
                         <a:t>2026-06-30 · 2026-09-30</a:t>
                       </a:r>
-                      <a:endParaRPr lang="en-US" sz="1200" dirty="0">
+                      <a:endParaRPr lang="en-US" sz="1100" dirty="0">
                         <a:latin typeface="Malgun Gothic" charset="0"/>
                         <a:ea typeface="Malgun Gothic" charset="0"/>
                         <a:cs typeface="Malgun Gothic" charset="0"/>
@@ -23416,7 +23544,7 @@
                         <a:buNone/>
                       </a:pPr>
                       <a:r>
-                        <a:rPr lang="en-US" sz="1200" dirty="0">
+                        <a:rPr lang="en-US" sz="1100" dirty="0">
                           <a:solidFill>
                             <a:srgbClr val="1F2328"/>
                           </a:solidFill>
@@ -23426,7 +23554,7 @@
                         </a:rPr>
                         <a:t>—</a:t>
                       </a:r>
-                      <a:endParaRPr lang="en-US" sz="1200" dirty="0">
+                      <a:endParaRPr lang="en-US" sz="1100" dirty="0">
                         <a:latin typeface="Malgun Gothic" charset="0"/>
                         <a:ea typeface="Malgun Gothic" charset="0"/>
                         <a:cs typeface="Malgun Gothic" charset="0"/>
@@ -23484,7 +23612,7 @@
                         <a:buNone/>
                       </a:pPr>
                       <a:r>
-                        <a:rPr lang="en-US" sz="1200" dirty="0">
+                        <a:rPr lang="en-US" sz="1100" dirty="0">
                           <a:solidFill>
                             <a:srgbClr val="1F2328"/>
                           </a:solidFill>
@@ -23494,7 +23622,691 @@
                         </a:rPr>
                         <a:t>30개 법정동 · 63개 행정동</a:t>
                       </a:r>
-                      <a:endParaRPr lang="en-US" sz="1200" dirty="0">
+                      <a:endParaRPr lang="en-US" sz="1100" dirty="0">
+                        <a:latin typeface="Malgun Gothic" charset="0"/>
+                        <a:ea typeface="Malgun Gothic" charset="0"/>
+                        <a:cs typeface="Malgun Gothic" charset="0"/>
+                      </a:endParaRPr>
+                    </a:p>
+                  </a:txBody>
+                  <a:tcPr marL="76200" marR="76200" marT="38100" marB="38100" anchor="ctr">
+                    <a:lnL w="6350" cap="flat" cmpd="sng" algn="ctr">
+                      <a:solidFill>
+                        <a:srgbClr val="D9DCE3"/>
+                      </a:solidFill>
+                      <a:prstDash val="solid"/>
+                      <a:round/>
+                      <a:headEnd type="none" w="med" len="med"/>
+                      <a:tailEnd type="none" w="med" len="med"/>
+                    </a:lnL>
+                    <a:lnR w="6350" cap="flat" cmpd="sng" algn="ctr">
+                      <a:solidFill>
+                        <a:srgbClr val="D9DCE3"/>
+                      </a:solidFill>
+                      <a:prstDash val="solid"/>
+                      <a:round/>
+                      <a:headEnd type="none" w="med" len="med"/>
+                      <a:tailEnd type="none" w="med" len="med"/>
+                    </a:lnR>
+                    <a:lnT w="6350" cap="flat" cmpd="sng" algn="ctr">
+                      <a:solidFill>
+                        <a:srgbClr val="D9DCE3"/>
+                      </a:solidFill>
+                      <a:prstDash val="solid"/>
+                      <a:round/>
+                      <a:headEnd type="none" w="med" len="med"/>
+                      <a:tailEnd type="none" w="med" len="med"/>
+                    </a:lnT>
+                    <a:lnB w="6350" cap="flat" cmpd="sng" algn="ctr">
+                      <a:solidFill>
+                        <a:srgbClr val="D9DCE3"/>
+                      </a:solidFill>
+                      <a:prstDash val="solid"/>
+                      <a:round/>
+                      <a:headEnd type="none" w="med" len="med"/>
+                      <a:tailEnd type="none" w="med" len="med"/>
+                    </a:lnB>
+                    <a:solidFill>
+                      <a:srgbClr val="FFFFFF"/>
+                    </a:solidFill>
+                  </a:tcPr>
+                </a:tc>
+              </a:tr>
+              <a:tr h="301752">
+                <a:tc>
+                  <a:txBody>
+                    <a:bodyPr/>
+                    <a:lstStyle/>
+                    <a:p>
+                      <a:pPr indent="0" marL="0">
+                        <a:buNone/>
+                      </a:pPr>
+                      <a:r>
+                        <a:rPr lang="en-US" sz="1100" dirty="0">
+                          <a:solidFill>
+                            <a:srgbClr val="1F2328"/>
+                          </a:solidFill>
+                          <a:latin typeface="Malgun Gothic" pitchFamily="34" charset="0"/>
+                          <a:ea typeface="Malgun Gothic" pitchFamily="34" charset="-122"/>
+                          <a:cs typeface="Malgun Gothic" pitchFamily="34" charset="-120"/>
+                        </a:rPr>
+                        <a:t>폐쇄말소대장 표제부</a:t>
+                      </a:r>
+                      <a:endParaRPr lang="en-US" sz="1100" dirty="0">
+                        <a:latin typeface="Malgun Gothic" charset="0"/>
+                        <a:ea typeface="Malgun Gothic" charset="0"/>
+                        <a:cs typeface="Malgun Gothic" charset="0"/>
+                      </a:endParaRPr>
+                    </a:p>
+                  </a:txBody>
+                  <a:tcPr marL="76200" marR="76200" marT="38100" marB="38100" anchor="ctr">
+                    <a:lnL w="6350" cap="flat" cmpd="sng" algn="ctr">
+                      <a:solidFill>
+                        <a:srgbClr val="D9DCE3"/>
+                      </a:solidFill>
+                      <a:prstDash val="solid"/>
+                      <a:round/>
+                      <a:headEnd type="none" w="med" len="med"/>
+                      <a:tailEnd type="none" w="med" len="med"/>
+                    </a:lnL>
+                    <a:lnR w="6350" cap="flat" cmpd="sng" algn="ctr">
+                      <a:solidFill>
+                        <a:srgbClr val="D9DCE3"/>
+                      </a:solidFill>
+                      <a:prstDash val="solid"/>
+                      <a:round/>
+                      <a:headEnd type="none" w="med" len="med"/>
+                      <a:tailEnd type="none" w="med" len="med"/>
+                    </a:lnR>
+                    <a:lnT w="6350" cap="flat" cmpd="sng" algn="ctr">
+                      <a:solidFill>
+                        <a:srgbClr val="D9DCE3"/>
+                      </a:solidFill>
+                      <a:prstDash val="solid"/>
+                      <a:round/>
+                      <a:headEnd type="none" w="med" len="med"/>
+                      <a:tailEnd type="none" w="med" len="med"/>
+                    </a:lnT>
+                    <a:lnB w="6350" cap="flat" cmpd="sng" algn="ctr">
+                      <a:solidFill>
+                        <a:srgbClr val="D9DCE3"/>
+                      </a:solidFill>
+                      <a:prstDash val="solid"/>
+                      <a:round/>
+                      <a:headEnd type="none" w="med" len="med"/>
+                      <a:tailEnd type="none" w="med" len="med"/>
+                    </a:lnB>
+                    <a:solidFill>
+                      <a:srgbClr val="F2F4F8"/>
+                    </a:solidFill>
+                  </a:tcPr>
+                </a:tc>
+                <a:tc>
+                  <a:txBody>
+                    <a:bodyPr/>
+                    <a:lstStyle/>
+                    <a:p>
+                      <a:pPr indent="0" marL="0">
+                        <a:buNone/>
+                      </a:pPr>
+                      <a:r>
+                        <a:rPr lang="en-US" sz="1100" dirty="0">
+                          <a:solidFill>
+                            <a:srgbClr val="1F2328"/>
+                          </a:solidFill>
+                          <a:latin typeface="Malgun Gothic" pitchFamily="34" charset="0"/>
+                          <a:ea typeface="Malgun Gothic" pitchFamily="34" charset="-122"/>
+                          <a:cs typeface="Malgun Gothic" pitchFamily="34" charset="-120"/>
+                        </a:rPr>
+                        <a:t>API(서울 열린데이터광장), 서울 전체</a:t>
+                      </a:r>
+                      <a:endParaRPr lang="en-US" sz="1100" dirty="0">
+                        <a:latin typeface="Malgun Gothic" charset="0"/>
+                        <a:ea typeface="Malgun Gothic" charset="0"/>
+                        <a:cs typeface="Malgun Gothic" charset="0"/>
+                      </a:endParaRPr>
+                    </a:p>
+                  </a:txBody>
+                  <a:tcPr marL="76200" marR="76200" marT="38100" marB="38100" anchor="ctr">
+                    <a:lnL w="6350" cap="flat" cmpd="sng" algn="ctr">
+                      <a:solidFill>
+                        <a:srgbClr val="D9DCE3"/>
+                      </a:solidFill>
+                      <a:prstDash val="solid"/>
+                      <a:round/>
+                      <a:headEnd type="none" w="med" len="med"/>
+                      <a:tailEnd type="none" w="med" len="med"/>
+                    </a:lnL>
+                    <a:lnR w="6350" cap="flat" cmpd="sng" algn="ctr">
+                      <a:solidFill>
+                        <a:srgbClr val="D9DCE3"/>
+                      </a:solidFill>
+                      <a:prstDash val="solid"/>
+                      <a:round/>
+                      <a:headEnd type="none" w="med" len="med"/>
+                      <a:tailEnd type="none" w="med" len="med"/>
+                    </a:lnR>
+                    <a:lnT w="6350" cap="flat" cmpd="sng" algn="ctr">
+                      <a:solidFill>
+                        <a:srgbClr val="D9DCE3"/>
+                      </a:solidFill>
+                      <a:prstDash val="solid"/>
+                      <a:round/>
+                      <a:headEnd type="none" w="med" len="med"/>
+                      <a:tailEnd type="none" w="med" len="med"/>
+                    </a:lnT>
+                    <a:lnB w="6350" cap="flat" cmpd="sng" algn="ctr">
+                      <a:solidFill>
+                        <a:srgbClr val="D9DCE3"/>
+                      </a:solidFill>
+                      <a:prstDash val="solid"/>
+                      <a:round/>
+                      <a:headEnd type="none" w="med" len="med"/>
+                      <a:tailEnd type="none" w="med" len="med"/>
+                    </a:lnB>
+                    <a:solidFill>
+                      <a:srgbClr val="F2F4F8"/>
+                    </a:solidFill>
+                  </a:tcPr>
+                </a:tc>
+                <a:tc>
+                  <a:txBody>
+                    <a:bodyPr/>
+                    <a:lstStyle/>
+                    <a:p>
+                      <a:pPr indent="0" marL="0">
+                        <a:buNone/>
+                      </a:pPr>
+                      <a:r>
+                        <a:rPr lang="en-US" sz="1100" dirty="0">
+                          <a:solidFill>
+                            <a:srgbClr val="1F2328"/>
+                          </a:solidFill>
+                          <a:latin typeface="Malgun Gothic" pitchFamily="34" charset="0"/>
+                          <a:ea typeface="Malgun Gothic" pitchFamily="34" charset="-122"/>
+                          <a:cs typeface="Malgun Gothic" pitchFamily="34" charset="-120"/>
+                        </a:rPr>
+                        <a:t>수집일 기준</a:t>
+                      </a:r>
+                      <a:endParaRPr lang="en-US" sz="1100" dirty="0">
+                        <a:latin typeface="Malgun Gothic" charset="0"/>
+                        <a:ea typeface="Malgun Gothic" charset="0"/>
+                        <a:cs typeface="Malgun Gothic" charset="0"/>
+                      </a:endParaRPr>
+                    </a:p>
+                  </a:txBody>
+                  <a:tcPr marL="76200" marR="76200" marT="38100" marB="38100" anchor="ctr">
+                    <a:lnL w="6350" cap="flat" cmpd="sng" algn="ctr">
+                      <a:solidFill>
+                        <a:srgbClr val="D9DCE3"/>
+                      </a:solidFill>
+                      <a:prstDash val="solid"/>
+                      <a:round/>
+                      <a:headEnd type="none" w="med" len="med"/>
+                      <a:tailEnd type="none" w="med" len="med"/>
+                    </a:lnL>
+                    <a:lnR w="6350" cap="flat" cmpd="sng" algn="ctr">
+                      <a:solidFill>
+                        <a:srgbClr val="D9DCE3"/>
+                      </a:solidFill>
+                      <a:prstDash val="solid"/>
+                      <a:round/>
+                      <a:headEnd type="none" w="med" len="med"/>
+                      <a:tailEnd type="none" w="med" len="med"/>
+                    </a:lnR>
+                    <a:lnT w="6350" cap="flat" cmpd="sng" algn="ctr">
+                      <a:solidFill>
+                        <a:srgbClr val="D9DCE3"/>
+                      </a:solidFill>
+                      <a:prstDash val="solid"/>
+                      <a:round/>
+                      <a:headEnd type="none" w="med" len="med"/>
+                      <a:tailEnd type="none" w="med" len="med"/>
+                    </a:lnT>
+                    <a:lnB w="6350" cap="flat" cmpd="sng" algn="ctr">
+                      <a:solidFill>
+                        <a:srgbClr val="D9DCE3"/>
+                      </a:solidFill>
+                      <a:prstDash val="solid"/>
+                      <a:round/>
+                      <a:headEnd type="none" w="med" len="med"/>
+                      <a:tailEnd type="none" w="med" len="med"/>
+                    </a:lnB>
+                    <a:solidFill>
+                      <a:srgbClr val="F2F4F8"/>
+                    </a:solidFill>
+                  </a:tcPr>
+                </a:tc>
+                <a:tc>
+                  <a:txBody>
+                    <a:bodyPr/>
+                    <a:lstStyle/>
+                    <a:p>
+                      <a:pPr indent="0" marL="0">
+                        <a:buNone/>
+                      </a:pPr>
+                      <a:r>
+                        <a:rPr lang="en-US" sz="1100" dirty="0">
+                          <a:solidFill>
+                            <a:srgbClr val="1F2328"/>
+                          </a:solidFill>
+                          <a:latin typeface="Malgun Gothic" pitchFamily="34" charset="0"/>
+                          <a:ea typeface="Malgun Gothic" pitchFamily="34" charset="-122"/>
+                          <a:cs typeface="Malgun Gothic" pitchFamily="34" charset="-120"/>
+                        </a:rPr>
+                        <a:t>383,716건</a:t>
+                      </a:r>
+                      <a:endParaRPr lang="en-US" sz="1100" dirty="0">
+                        <a:latin typeface="Malgun Gothic" charset="0"/>
+                        <a:ea typeface="Malgun Gothic" charset="0"/>
+                        <a:cs typeface="Malgun Gothic" charset="0"/>
+                      </a:endParaRPr>
+                    </a:p>
+                  </a:txBody>
+                  <a:tcPr marL="76200" marR="76200" marT="38100" marB="38100" anchor="ctr">
+                    <a:lnL w="6350" cap="flat" cmpd="sng" algn="ctr">
+                      <a:solidFill>
+                        <a:srgbClr val="D9DCE3"/>
+                      </a:solidFill>
+                      <a:prstDash val="solid"/>
+                      <a:round/>
+                      <a:headEnd type="none" w="med" len="med"/>
+                      <a:tailEnd type="none" w="med" len="med"/>
+                    </a:lnL>
+                    <a:lnR w="6350" cap="flat" cmpd="sng" algn="ctr">
+                      <a:solidFill>
+                        <a:srgbClr val="D9DCE3"/>
+                      </a:solidFill>
+                      <a:prstDash val="solid"/>
+                      <a:round/>
+                      <a:headEnd type="none" w="med" len="med"/>
+                      <a:tailEnd type="none" w="med" len="med"/>
+                    </a:lnR>
+                    <a:lnT w="6350" cap="flat" cmpd="sng" algn="ctr">
+                      <a:solidFill>
+                        <a:srgbClr val="D9DCE3"/>
+                      </a:solidFill>
+                      <a:prstDash val="solid"/>
+                      <a:round/>
+                      <a:headEnd type="none" w="med" len="med"/>
+                      <a:tailEnd type="none" w="med" len="med"/>
+                    </a:lnT>
+                    <a:lnB w="6350" cap="flat" cmpd="sng" algn="ctr">
+                      <a:solidFill>
+                        <a:srgbClr val="D9DCE3"/>
+                      </a:solidFill>
+                      <a:prstDash val="solid"/>
+                      <a:round/>
+                      <a:headEnd type="none" w="med" len="med"/>
+                      <a:tailEnd type="none" w="med" len="med"/>
+                    </a:lnB>
+                    <a:solidFill>
+                      <a:srgbClr val="F2F4F8"/>
+                    </a:solidFill>
+                  </a:tcPr>
+                </a:tc>
+                <a:tc>
+                  <a:txBody>
+                    <a:bodyPr/>
+                    <a:lstStyle/>
+                    <a:p>
+                      <a:pPr indent="0" marL="0">
+                        <a:buNone/>
+                      </a:pPr>
+                      <a:r>
+                        <a:rPr lang="en-US" sz="1100" dirty="0">
+                          <a:solidFill>
+                            <a:srgbClr val="1F2328"/>
+                          </a:solidFill>
+                          <a:latin typeface="Malgun Gothic" pitchFamily="34" charset="0"/>
+                          <a:ea typeface="Malgun Gothic" pitchFamily="34" charset="-122"/>
+                          <a:cs typeface="Malgun Gothic" pitchFamily="34" charset="-120"/>
+                        </a:rPr>
+                        <a:t>3개 구 49,074지번 · 철거 전 거래 523건 제외</a:t>
+                      </a:r>
+                      <a:endParaRPr lang="en-US" sz="1100" dirty="0">
+                        <a:latin typeface="Malgun Gothic" charset="0"/>
+                        <a:ea typeface="Malgun Gothic" charset="0"/>
+                        <a:cs typeface="Malgun Gothic" charset="0"/>
+                      </a:endParaRPr>
+                    </a:p>
+                  </a:txBody>
+                  <a:tcPr marL="76200" marR="76200" marT="38100" marB="38100" anchor="ctr">
+                    <a:lnL w="6350" cap="flat" cmpd="sng" algn="ctr">
+                      <a:solidFill>
+                        <a:srgbClr val="D9DCE3"/>
+                      </a:solidFill>
+                      <a:prstDash val="solid"/>
+                      <a:round/>
+                      <a:headEnd type="none" w="med" len="med"/>
+                      <a:tailEnd type="none" w="med" len="med"/>
+                    </a:lnL>
+                    <a:lnR w="6350" cap="flat" cmpd="sng" algn="ctr">
+                      <a:solidFill>
+                        <a:srgbClr val="D9DCE3"/>
+                      </a:solidFill>
+                      <a:prstDash val="solid"/>
+                      <a:round/>
+                      <a:headEnd type="none" w="med" len="med"/>
+                      <a:tailEnd type="none" w="med" len="med"/>
+                    </a:lnR>
+                    <a:lnT w="6350" cap="flat" cmpd="sng" algn="ctr">
+                      <a:solidFill>
+                        <a:srgbClr val="D9DCE3"/>
+                      </a:solidFill>
+                      <a:prstDash val="solid"/>
+                      <a:round/>
+                      <a:headEnd type="none" w="med" len="med"/>
+                      <a:tailEnd type="none" w="med" len="med"/>
+                    </a:lnT>
+                    <a:lnB w="6350" cap="flat" cmpd="sng" algn="ctr">
+                      <a:solidFill>
+                        <a:srgbClr val="D9DCE3"/>
+                      </a:solidFill>
+                      <a:prstDash val="solid"/>
+                      <a:round/>
+                      <a:headEnd type="none" w="med" len="med"/>
+                      <a:tailEnd type="none" w="med" len="med"/>
+                    </a:lnB>
+                    <a:solidFill>
+                      <a:srgbClr val="F2F4F8"/>
+                    </a:solidFill>
+                  </a:tcPr>
+                </a:tc>
+              </a:tr>
+              <a:tr h="301752">
+                <a:tc>
+                  <a:txBody>
+                    <a:bodyPr/>
+                    <a:lstStyle/>
+                    <a:p>
+                      <a:pPr indent="0" marL="0">
+                        <a:buNone/>
+                      </a:pPr>
+                      <a:r>
+                        <a:rPr lang="en-US" sz="1100" dirty="0">
+                          <a:solidFill>
+                            <a:srgbClr val="1F2328"/>
+                          </a:solidFill>
+                          <a:latin typeface="Malgun Gothic" pitchFamily="34" charset="0"/>
+                          <a:ea typeface="Malgun Gothic" pitchFamily="34" charset="-122"/>
+                          <a:cs typeface="Malgun Gothic" pitchFamily="34" charset="-120"/>
+                        </a:rPr>
+                        <a:t>부동산원 연립/다세대 매매 지수</a:t>
+                      </a:r>
+                      <a:endParaRPr lang="en-US" sz="1100" dirty="0">
+                        <a:latin typeface="Malgun Gothic" charset="0"/>
+                        <a:ea typeface="Malgun Gothic" charset="0"/>
+                        <a:cs typeface="Malgun Gothic" charset="0"/>
+                      </a:endParaRPr>
+                    </a:p>
+                  </a:txBody>
+                  <a:tcPr marL="76200" marR="76200" marT="38100" marB="38100" anchor="ctr">
+                    <a:lnL w="6350" cap="flat" cmpd="sng" algn="ctr">
+                      <a:solidFill>
+                        <a:srgbClr val="D9DCE3"/>
+                      </a:solidFill>
+                      <a:prstDash val="solid"/>
+                      <a:round/>
+                      <a:headEnd type="none" w="med" len="med"/>
+                      <a:tailEnd type="none" w="med" len="med"/>
+                    </a:lnL>
+                    <a:lnR w="6350" cap="flat" cmpd="sng" algn="ctr">
+                      <a:solidFill>
+                        <a:srgbClr val="D9DCE3"/>
+                      </a:solidFill>
+                      <a:prstDash val="solid"/>
+                      <a:round/>
+                      <a:headEnd type="none" w="med" len="med"/>
+                      <a:tailEnd type="none" w="med" len="med"/>
+                    </a:lnR>
+                    <a:lnT w="6350" cap="flat" cmpd="sng" algn="ctr">
+                      <a:solidFill>
+                        <a:srgbClr val="D9DCE3"/>
+                      </a:solidFill>
+                      <a:prstDash val="solid"/>
+                      <a:round/>
+                      <a:headEnd type="none" w="med" len="med"/>
+                      <a:tailEnd type="none" w="med" len="med"/>
+                    </a:lnT>
+                    <a:lnB w="6350" cap="flat" cmpd="sng" algn="ctr">
+                      <a:solidFill>
+                        <a:srgbClr val="D9DCE3"/>
+                      </a:solidFill>
+                      <a:prstDash val="solid"/>
+                      <a:round/>
+                      <a:headEnd type="none" w="med" len="med"/>
+                      <a:tailEnd type="none" w="med" len="med"/>
+                    </a:lnB>
+                    <a:solidFill>
+                      <a:srgbClr val="FFFFFF"/>
+                    </a:solidFill>
+                  </a:tcPr>
+                </a:tc>
+                <a:tc>
+                  <a:txBody>
+                    <a:bodyPr/>
+                    <a:lstStyle/>
+                    <a:p>
+                      <a:pPr indent="0" marL="0">
+                        <a:buNone/>
+                      </a:pPr>
+                      <a:r>
+                        <a:rPr lang="en-US" sz="1100" dirty="0">
+                          <a:solidFill>
+                            <a:srgbClr val="1F2328"/>
+                          </a:solidFill>
+                          <a:latin typeface="Malgun Gothic" pitchFamily="34" charset="0"/>
+                          <a:ea typeface="Malgun Gothic" pitchFamily="34" charset="-122"/>
+                          <a:cs typeface="Malgun Gothic" pitchFamily="34" charset="-120"/>
+                        </a:rPr>
+                        <a:t>API(R-ONE)</a:t>
+                      </a:r>
+                      <a:endParaRPr lang="en-US" sz="1100" dirty="0">
+                        <a:latin typeface="Malgun Gothic" charset="0"/>
+                        <a:ea typeface="Malgun Gothic" charset="0"/>
+                        <a:cs typeface="Malgun Gothic" charset="0"/>
+                      </a:endParaRPr>
+                    </a:p>
+                  </a:txBody>
+                  <a:tcPr marL="76200" marR="76200" marT="38100" marB="38100" anchor="ctr">
+                    <a:lnL w="6350" cap="flat" cmpd="sng" algn="ctr">
+                      <a:solidFill>
+                        <a:srgbClr val="D9DCE3"/>
+                      </a:solidFill>
+                      <a:prstDash val="solid"/>
+                      <a:round/>
+                      <a:headEnd type="none" w="med" len="med"/>
+                      <a:tailEnd type="none" w="med" len="med"/>
+                    </a:lnL>
+                    <a:lnR w="6350" cap="flat" cmpd="sng" algn="ctr">
+                      <a:solidFill>
+                        <a:srgbClr val="D9DCE3"/>
+                      </a:solidFill>
+                      <a:prstDash val="solid"/>
+                      <a:round/>
+                      <a:headEnd type="none" w="med" len="med"/>
+                      <a:tailEnd type="none" w="med" len="med"/>
+                    </a:lnR>
+                    <a:lnT w="6350" cap="flat" cmpd="sng" algn="ctr">
+                      <a:solidFill>
+                        <a:srgbClr val="D9DCE3"/>
+                      </a:solidFill>
+                      <a:prstDash val="solid"/>
+                      <a:round/>
+                      <a:headEnd type="none" w="med" len="med"/>
+                      <a:tailEnd type="none" w="med" len="med"/>
+                    </a:lnT>
+                    <a:lnB w="6350" cap="flat" cmpd="sng" algn="ctr">
+                      <a:solidFill>
+                        <a:srgbClr val="D9DCE3"/>
+                      </a:solidFill>
+                      <a:prstDash val="solid"/>
+                      <a:round/>
+                      <a:headEnd type="none" w="med" len="med"/>
+                      <a:tailEnd type="none" w="med" len="med"/>
+                    </a:lnB>
+                    <a:solidFill>
+                      <a:srgbClr val="FFFFFF"/>
+                    </a:solidFill>
+                  </a:tcPr>
+                </a:tc>
+                <a:tc>
+                  <a:txBody>
+                    <a:bodyPr/>
+                    <a:lstStyle/>
+                    <a:p>
+                      <a:pPr indent="0" marL="0">
+                        <a:buNone/>
+                      </a:pPr>
+                      <a:r>
+                        <a:rPr lang="en-US" sz="1100" dirty="0">
+                          <a:solidFill>
+                            <a:srgbClr val="1F2328"/>
+                          </a:solidFill>
+                          <a:latin typeface="Malgun Gothic" pitchFamily="34" charset="0"/>
+                          <a:ea typeface="Malgun Gothic" pitchFamily="34" charset="-122"/>
+                          <a:cs typeface="Malgun Gothic" pitchFamily="34" charset="-120"/>
+                        </a:rPr>
+                        <a:t>월간</a:t>
+                      </a:r>
+                      <a:endParaRPr lang="en-US" sz="1100" dirty="0">
+                        <a:latin typeface="Malgun Gothic" charset="0"/>
+                        <a:ea typeface="Malgun Gothic" charset="0"/>
+                        <a:cs typeface="Malgun Gothic" charset="0"/>
+                      </a:endParaRPr>
+                    </a:p>
+                  </a:txBody>
+                  <a:tcPr marL="76200" marR="76200" marT="38100" marB="38100" anchor="ctr">
+                    <a:lnL w="6350" cap="flat" cmpd="sng" algn="ctr">
+                      <a:solidFill>
+                        <a:srgbClr val="D9DCE3"/>
+                      </a:solidFill>
+                      <a:prstDash val="solid"/>
+                      <a:round/>
+                      <a:headEnd type="none" w="med" len="med"/>
+                      <a:tailEnd type="none" w="med" len="med"/>
+                    </a:lnL>
+                    <a:lnR w="6350" cap="flat" cmpd="sng" algn="ctr">
+                      <a:solidFill>
+                        <a:srgbClr val="D9DCE3"/>
+                      </a:solidFill>
+                      <a:prstDash val="solid"/>
+                      <a:round/>
+                      <a:headEnd type="none" w="med" len="med"/>
+                      <a:tailEnd type="none" w="med" len="med"/>
+                    </a:lnR>
+                    <a:lnT w="6350" cap="flat" cmpd="sng" algn="ctr">
+                      <a:solidFill>
+                        <a:srgbClr val="D9DCE3"/>
+                      </a:solidFill>
+                      <a:prstDash val="solid"/>
+                      <a:round/>
+                      <a:headEnd type="none" w="med" len="med"/>
+                      <a:tailEnd type="none" w="med" len="med"/>
+                    </a:lnT>
+                    <a:lnB w="6350" cap="flat" cmpd="sng" algn="ctr">
+                      <a:solidFill>
+                        <a:srgbClr val="D9DCE3"/>
+                      </a:solidFill>
+                      <a:prstDash val="solid"/>
+                      <a:round/>
+                      <a:headEnd type="none" w="med" len="med"/>
+                      <a:tailEnd type="none" w="med" len="med"/>
+                    </a:lnB>
+                    <a:solidFill>
+                      <a:srgbClr val="FFFFFF"/>
+                    </a:solidFill>
+                  </a:tcPr>
+                </a:tc>
+                <a:tc>
+                  <a:txBody>
+                    <a:bodyPr/>
+                    <a:lstStyle/>
+                    <a:p>
+                      <a:pPr indent="0" marL="0">
+                        <a:buNone/>
+                      </a:pPr>
+                      <a:r>
+                        <a:rPr lang="en-US" sz="1100" dirty="0">
+                          <a:solidFill>
+                            <a:srgbClr val="1F2328"/>
+                          </a:solidFill>
+                          <a:latin typeface="Malgun Gothic" pitchFamily="34" charset="0"/>
+                          <a:ea typeface="Malgun Gothic" pitchFamily="34" charset="-122"/>
+                          <a:cs typeface="Malgun Gothic" pitchFamily="34" charset="-120"/>
+                        </a:rPr>
+                        <a:t>873행</a:t>
+                      </a:r>
+                      <a:endParaRPr lang="en-US" sz="1100" dirty="0">
+                        <a:latin typeface="Malgun Gothic" charset="0"/>
+                        <a:ea typeface="Malgun Gothic" charset="0"/>
+                        <a:cs typeface="Malgun Gothic" charset="0"/>
+                      </a:endParaRPr>
+                    </a:p>
+                  </a:txBody>
+                  <a:tcPr marL="76200" marR="76200" marT="38100" marB="38100" anchor="ctr">
+                    <a:lnL w="6350" cap="flat" cmpd="sng" algn="ctr">
+                      <a:solidFill>
+                        <a:srgbClr val="D9DCE3"/>
+                      </a:solidFill>
+                      <a:prstDash val="solid"/>
+                      <a:round/>
+                      <a:headEnd type="none" w="med" len="med"/>
+                      <a:tailEnd type="none" w="med" len="med"/>
+                    </a:lnL>
+                    <a:lnR w="6350" cap="flat" cmpd="sng" algn="ctr">
+                      <a:solidFill>
+                        <a:srgbClr val="D9DCE3"/>
+                      </a:solidFill>
+                      <a:prstDash val="solid"/>
+                      <a:round/>
+                      <a:headEnd type="none" w="med" len="med"/>
+                      <a:tailEnd type="none" w="med" len="med"/>
+                    </a:lnR>
+                    <a:lnT w="6350" cap="flat" cmpd="sng" algn="ctr">
+                      <a:solidFill>
+                        <a:srgbClr val="D9DCE3"/>
+                      </a:solidFill>
+                      <a:prstDash val="solid"/>
+                      <a:round/>
+                      <a:headEnd type="none" w="med" len="med"/>
+                      <a:tailEnd type="none" w="med" len="med"/>
+                    </a:lnT>
+                    <a:lnB w="6350" cap="flat" cmpd="sng" algn="ctr">
+                      <a:solidFill>
+                        <a:srgbClr val="D9DCE3"/>
+                      </a:solidFill>
+                      <a:prstDash val="solid"/>
+                      <a:round/>
+                      <a:headEnd type="none" w="med" len="med"/>
+                      <a:tailEnd type="none" w="med" len="med"/>
+                    </a:lnB>
+                    <a:solidFill>
+                      <a:srgbClr val="FFFFFF"/>
+                    </a:solidFill>
+                  </a:tcPr>
+                </a:tc>
+                <a:tc>
+                  <a:txBody>
+                    <a:bodyPr/>
+                    <a:lstStyle/>
+                    <a:p>
+                      <a:pPr indent="0" marL="0">
+                        <a:buNone/>
+                      </a:pPr>
+                      <a:r>
+                        <a:rPr lang="en-US" sz="1100" dirty="0">
+                          <a:solidFill>
+                            <a:srgbClr val="1F2328"/>
+                          </a:solidFill>
+                          <a:latin typeface="Malgun Gothic" pitchFamily="34" charset="0"/>
+                          <a:ea typeface="Malgun Gothic" pitchFamily="34" charset="-122"/>
+                          <a:cs typeface="Malgun Gothic" pitchFamily="34" charset="-120"/>
+                        </a:rPr>
+                        <a:t>시점 지수 검증에만(부록 F)</a:t>
+                      </a:r>
+                      <a:endParaRPr lang="en-US" sz="1100" dirty="0">
                         <a:latin typeface="Malgun Gothic" charset="0"/>
                         <a:ea typeface="Malgun Gothic" charset="0"/>
                         <a:cs typeface="Malgun Gothic" charset="0"/>
@@ -23581,7 +24393,7 @@
                 <a:ea typeface="Malgun Gothic" pitchFamily="34" charset="-122"/>
                 <a:cs typeface="Malgun Gothic" pitchFamily="34" charset="-120"/>
               </a:rPr>
-              <a:t>유형: 다세대 30,551 · 연립 3,203 · 혼합 표기 132건(정제 후). 정제: 해제 2,188 · 낮은 이상치(수정 Z &lt; −3.5) 331 · 일괄 매매 합계 12 · 재건축 전 580 제외</a:t>
+              <a:t>유형: 다세대 30,135 · 연립 3,097 · 혼합 표기 131건(정제 후). 정제: 해제 2,188 · 낮은 이상치(수정 Z &lt; −3.5) 331 · 일괄 매매 합계 12 · 재건축 전 580 · 철거된 건물 523 제외</a:t>
             </a:r>
             <a:endParaRPr lang="en-US" sz="1100" dirty="0"/>
           </a:p>
@@ -31271,6 +32083,4603 @@
 </p:sld>
 </file>
 
+<file path=ppt/slides/slide27.xml><?xml version="1.0" encoding="utf-8"?>
+<p:sld xmlns:a="http://schemas.openxmlformats.org/drawingml/2006/main" xmlns:r="http://schemas.openxmlformats.org/officeDocument/2006/relationships" xmlns:p="http://schemas.openxmlformats.org/presentationml/2006/main">
+  <p:cSld name="Slide 27">
+    <p:spTree>
+      <p:nvGrpSpPr>
+        <p:cNvPr id="1" name=""/>
+        <p:cNvGrpSpPr/>
+        <p:nvPr/>
+      </p:nvGrpSpPr>
+      <p:grpSpPr>
+        <a:xfrm>
+          <a:off x="0" y="0"/>
+          <a:ext cx="0" cy="0"/>
+          <a:chOff x="0" y="0"/>
+          <a:chExt cx="0" cy="0"/>
+        </a:xfrm>
+      </p:grpSpPr>
+      <p:sp>
+        <p:nvSpPr>
+          <p:cNvPr id="2" name="Text 0"/>
+          <p:cNvSpPr/>
+          <p:nvPr>
+            <p:ph idx="101" type="body" hasCustomPrompt="1"/>
+          </p:nvPr>
+        </p:nvSpPr>
+        <p:spPr>
+          <a:xfrm>
+            <a:off x="548640" y="109728"/>
+            <a:ext cx="5486400" cy="274320"/>
+          </a:xfrm>
+          <a:prstGeom prst="rect">
+            <a:avLst/>
+          </a:prstGeom>
+          <a:noFill/>
+          <a:ln/>
+        </p:spPr>
+        <p:txBody>
+          <a:bodyPr wrap="square" lIns="0" tIns="0" rIns="0" bIns="0" rtlCol="0"/>
+          <a:lstStyle/>
+          <a:p>
+            <a:pPr indent="0" marL="0">
+              <a:buNone/>
+            </a:pPr>
+            <a:r>
+              <a:rPr lang="en-US" sz="1100" b="1" dirty="0">
+                <a:solidFill>
+                  <a:srgbClr val="EB6834"/>
+                </a:solidFill>
+                <a:latin typeface="Malgun Gothic" pitchFamily="34" charset="0"/>
+                <a:ea typeface="Malgun Gothic" pitchFamily="34" charset="-122"/>
+                <a:cs typeface="Malgun Gothic" pitchFamily="34" charset="-120"/>
+              </a:rPr>
+              <a:t>부록 G</a:t>
+            </a:r>
+            <a:endParaRPr lang="en-US" sz="1100" dirty="0"/>
+          </a:p>
+        </p:txBody>
+      </p:sp>
+      <p:sp>
+        <p:nvSpPr>
+          <p:cNvPr id="3" name="Text 0"/>
+          <p:cNvSpPr/>
+          <p:nvPr>
+            <p:ph idx="100" type="title" hasCustomPrompt="1"/>
+          </p:nvPr>
+        </p:nvSpPr>
+        <p:spPr>
+          <a:xfrm>
+            <a:off x="548640" y="320040"/>
+            <a:ext cx="11094415" cy="731520"/>
+          </a:xfrm>
+          <a:prstGeom prst="rect">
+            <a:avLst/>
+          </a:prstGeom>
+          <a:noFill/>
+          <a:ln/>
+        </p:spPr>
+        <p:txBody>
+          <a:bodyPr wrap="square" lIns="0" tIns="0" rIns="0" bIns="0" rtlCol="0" anchor="ctr"/>
+          <a:lstStyle/>
+          <a:p>
+            <a:pPr algn="l" indent="0" marL="0">
+              <a:buNone/>
+            </a:pPr>
+            <a:r>
+              <a:rPr lang="en-US" sz="2600" b="1" dirty="0">
+                <a:solidFill>
+                  <a:srgbClr val="1F2328"/>
+                </a:solidFill>
+                <a:latin typeface="Malgun Gothic" pitchFamily="34" charset="0"/>
+                <a:ea typeface="Malgun Gothic" pitchFamily="34" charset="-122"/>
+                <a:cs typeface="Malgun Gothic" pitchFamily="34" charset="-120"/>
+              </a:rPr>
+              <a:t>하우스머치 참고 비교 9건 — 입력·학습에는 쓰지 않음</a:t>
+            </a:r>
+            <a:endParaRPr lang="en-US" sz="2600" dirty="0"/>
+          </a:p>
+        </p:txBody>
+      </p:sp>
+      <p:graphicFrame>
+        <p:nvGraphicFramePr>
+          <p:cNvPr id="28" name="Table 0"/>
+          <p:cNvGraphicFramePr>
+            <a:graphicFrameLocks noGrp="1"/>
+          </p:cNvGraphicFramePr>
+          <p:nvPr>
+            <p:extLst>
+              <p:ext uri="{D42A27DB-BD31-4B8C-83A1-F6EECF244321}">
+                <p14:modId xmlns:p14="http://schemas.microsoft.com/office/powerpoint/2010/main" val="1579011935"/>
+              </p:ext>
+            </p:extLst>
+          </p:nvPr>
+        </p:nvGraphicFramePr>
+        <p:xfrm>
+          <a:off x="548640" y="1234440"/>
+          <a:ext cx="11094415" cy="914400"/>
+        </p:xfrm>
+        <a:graphic>
+          <a:graphicData uri="http://schemas.openxmlformats.org/drawingml/2006/table">
+            <a:tbl>
+              <a:tblPr/>
+              <a:tblGrid>
+                <a:gridCol w="4876495"/>
+                <a:gridCol w="3108960"/>
+                <a:gridCol w="3108960"/>
+              </a:tblGrid>
+              <a:tr h="457200">
+                <a:tc>
+                  <a:txBody>
+                    <a:bodyPr/>
+                    <a:lstStyle/>
+                    <a:p>
+                      <a:pPr indent="0" marL="0">
+                        <a:buNone/>
+                      </a:pPr>
+                      <a:endParaRPr lang="en-US" sz="1400" dirty="0">
+                        <a:latin typeface="Malgun Gothic" charset="0"/>
+                        <a:ea typeface="Malgun Gothic" charset="0"/>
+                        <a:cs typeface="Malgun Gothic" charset="0"/>
+                      </a:endParaRPr>
+                    </a:p>
+                  </a:txBody>
+                  <a:tcPr marL="76200" marR="76200" marT="38100" marB="38100" anchor="ctr">
+                    <a:lnL w="6350" cap="flat" cmpd="sng" algn="ctr">
+                      <a:solidFill>
+                        <a:srgbClr val="D9DCE3"/>
+                      </a:solidFill>
+                      <a:prstDash val="solid"/>
+                      <a:round/>
+                      <a:headEnd type="none" w="med" len="med"/>
+                      <a:tailEnd type="none" w="med" len="med"/>
+                    </a:lnL>
+                    <a:lnR w="6350" cap="flat" cmpd="sng" algn="ctr">
+                      <a:solidFill>
+                        <a:srgbClr val="D9DCE3"/>
+                      </a:solidFill>
+                      <a:prstDash val="solid"/>
+                      <a:round/>
+                      <a:headEnd type="none" w="med" len="med"/>
+                      <a:tailEnd type="none" w="med" len="med"/>
+                    </a:lnR>
+                    <a:lnT w="6350" cap="flat" cmpd="sng" algn="ctr">
+                      <a:solidFill>
+                        <a:srgbClr val="D9DCE3"/>
+                      </a:solidFill>
+                      <a:prstDash val="solid"/>
+                      <a:round/>
+                      <a:headEnd type="none" w="med" len="med"/>
+                      <a:tailEnd type="none" w="med" len="med"/>
+                    </a:lnT>
+                    <a:lnB w="6350" cap="flat" cmpd="sng" algn="ctr">
+                      <a:solidFill>
+                        <a:srgbClr val="D9DCE3"/>
+                      </a:solidFill>
+                      <a:prstDash val="solid"/>
+                      <a:round/>
+                      <a:headEnd type="none" w="med" len="med"/>
+                      <a:tailEnd type="none" w="med" len="med"/>
+                    </a:lnB>
+                    <a:solidFill>
+                      <a:srgbClr val="2C3A5C"/>
+                    </a:solidFill>
+                  </a:tcPr>
+                </a:tc>
+                <a:tc>
+                  <a:txBody>
+                    <a:bodyPr/>
+                    <a:lstStyle/>
+                    <a:p>
+                      <a:pPr indent="0" marL="0">
+                        <a:buNone/>
+                      </a:pPr>
+                      <a:r>
+                        <a:rPr lang="en-US" sz="1400" b="1" dirty="0">
+                          <a:solidFill>
+                            <a:srgbClr val="FFFFFF"/>
+                          </a:solidFill>
+                          <a:latin typeface="Malgun Gothic" pitchFamily="34" charset="0"/>
+                          <a:ea typeface="Malgun Gothic" pitchFamily="34" charset="-122"/>
+                          <a:cs typeface="Malgun Gothic" pitchFamily="34" charset="-120"/>
+                        </a:rPr>
+                        <a:t>우리</a:t>
+                      </a:r>
+                      <a:endParaRPr lang="en-US" sz="1400" dirty="0">
+                        <a:latin typeface="Malgun Gothic" charset="0"/>
+                        <a:ea typeface="Malgun Gothic" charset="0"/>
+                        <a:cs typeface="Malgun Gothic" charset="0"/>
+                      </a:endParaRPr>
+                    </a:p>
+                  </a:txBody>
+                  <a:tcPr marL="76200" marR="76200" marT="38100" marB="38100" anchor="ctr">
+                    <a:lnL w="6350" cap="flat" cmpd="sng" algn="ctr">
+                      <a:solidFill>
+                        <a:srgbClr val="D9DCE3"/>
+                      </a:solidFill>
+                      <a:prstDash val="solid"/>
+                      <a:round/>
+                      <a:headEnd type="none" w="med" len="med"/>
+                      <a:tailEnd type="none" w="med" len="med"/>
+                    </a:lnL>
+                    <a:lnR w="6350" cap="flat" cmpd="sng" algn="ctr">
+                      <a:solidFill>
+                        <a:srgbClr val="D9DCE3"/>
+                      </a:solidFill>
+                      <a:prstDash val="solid"/>
+                      <a:round/>
+                      <a:headEnd type="none" w="med" len="med"/>
+                      <a:tailEnd type="none" w="med" len="med"/>
+                    </a:lnR>
+                    <a:lnT w="6350" cap="flat" cmpd="sng" algn="ctr">
+                      <a:solidFill>
+                        <a:srgbClr val="D9DCE3"/>
+                      </a:solidFill>
+                      <a:prstDash val="solid"/>
+                      <a:round/>
+                      <a:headEnd type="none" w="med" len="med"/>
+                      <a:tailEnd type="none" w="med" len="med"/>
+                    </a:lnT>
+                    <a:lnB w="6350" cap="flat" cmpd="sng" algn="ctr">
+                      <a:solidFill>
+                        <a:srgbClr val="D9DCE3"/>
+                      </a:solidFill>
+                      <a:prstDash val="solid"/>
+                      <a:round/>
+                      <a:headEnd type="none" w="med" len="med"/>
+                      <a:tailEnd type="none" w="med" len="med"/>
+                    </a:lnB>
+                    <a:solidFill>
+                      <a:srgbClr val="2C3A5C"/>
+                    </a:solidFill>
+                  </a:tcPr>
+                </a:tc>
+                <a:tc>
+                  <a:txBody>
+                    <a:bodyPr/>
+                    <a:lstStyle/>
+                    <a:p>
+                      <a:pPr indent="0" marL="0">
+                        <a:buNone/>
+                      </a:pPr>
+                      <a:r>
+                        <a:rPr lang="en-US" sz="1400" b="1" dirty="0">
+                          <a:solidFill>
+                            <a:srgbClr val="FFFFFF"/>
+                          </a:solidFill>
+                          <a:latin typeface="Malgun Gothic" pitchFamily="34" charset="0"/>
+                          <a:ea typeface="Malgun Gothic" pitchFamily="34" charset="-122"/>
+                          <a:cs typeface="Malgun Gothic" pitchFamily="34" charset="-120"/>
+                        </a:rPr>
+                        <a:t>하우스머치</a:t>
+                      </a:r>
+                      <a:endParaRPr lang="en-US" sz="1400" dirty="0">
+                        <a:latin typeface="Malgun Gothic" charset="0"/>
+                        <a:ea typeface="Malgun Gothic" charset="0"/>
+                        <a:cs typeface="Malgun Gothic" charset="0"/>
+                      </a:endParaRPr>
+                    </a:p>
+                  </a:txBody>
+                  <a:tcPr marL="76200" marR="76200" marT="38100" marB="38100" anchor="ctr">
+                    <a:lnL w="6350" cap="flat" cmpd="sng" algn="ctr">
+                      <a:solidFill>
+                        <a:srgbClr val="D9DCE3"/>
+                      </a:solidFill>
+                      <a:prstDash val="solid"/>
+                      <a:round/>
+                      <a:headEnd type="none" w="med" len="med"/>
+                      <a:tailEnd type="none" w="med" len="med"/>
+                    </a:lnL>
+                    <a:lnR w="6350" cap="flat" cmpd="sng" algn="ctr">
+                      <a:solidFill>
+                        <a:srgbClr val="D9DCE3"/>
+                      </a:solidFill>
+                      <a:prstDash val="solid"/>
+                      <a:round/>
+                      <a:headEnd type="none" w="med" len="med"/>
+                      <a:tailEnd type="none" w="med" len="med"/>
+                    </a:lnR>
+                    <a:lnT w="6350" cap="flat" cmpd="sng" algn="ctr">
+                      <a:solidFill>
+                        <a:srgbClr val="D9DCE3"/>
+                      </a:solidFill>
+                      <a:prstDash val="solid"/>
+                      <a:round/>
+                      <a:headEnd type="none" w="med" len="med"/>
+                      <a:tailEnd type="none" w="med" len="med"/>
+                    </a:lnT>
+                    <a:lnB w="6350" cap="flat" cmpd="sng" algn="ctr">
+                      <a:solidFill>
+                        <a:srgbClr val="D9DCE3"/>
+                      </a:solidFill>
+                      <a:prstDash val="solid"/>
+                      <a:round/>
+                      <a:headEnd type="none" w="med" len="med"/>
+                      <a:tailEnd type="none" w="med" len="med"/>
+                    </a:lnB>
+                    <a:solidFill>
+                      <a:srgbClr val="2C3A5C"/>
+                    </a:solidFill>
+                  </a:tcPr>
+                </a:tc>
+              </a:tr>
+              <a:tr h="457200">
+                <a:tc>
+                  <a:txBody>
+                    <a:bodyPr/>
+                    <a:lstStyle/>
+                    <a:p>
+                      <a:pPr indent="0" marL="0">
+                        <a:buNone/>
+                      </a:pPr>
+                      <a:r>
+                        <a:rPr lang="en-US" sz="1400" dirty="0">
+                          <a:solidFill>
+                            <a:srgbClr val="1F2328"/>
+                          </a:solidFill>
+                          <a:latin typeface="Malgun Gothic" pitchFamily="34" charset="0"/>
+                          <a:ea typeface="Malgun Gothic" pitchFamily="34" charset="-122"/>
+                          <a:cs typeface="Malgun Gothic" pitchFamily="34" charset="-120"/>
+                        </a:rPr>
+                        <a:t>보통 차이(중앙값) — 9건 / 중개거래 7건</a:t>
+                      </a:r>
+                      <a:endParaRPr lang="en-US" sz="1400" dirty="0">
+                        <a:latin typeface="Malgun Gothic" charset="0"/>
+                        <a:ea typeface="Malgun Gothic" charset="0"/>
+                        <a:cs typeface="Malgun Gothic" charset="0"/>
+                      </a:endParaRPr>
+                    </a:p>
+                  </a:txBody>
+                  <a:tcPr marL="76200" marR="76200" marT="38100" marB="38100" anchor="ctr">
+                    <a:lnL w="6350" cap="flat" cmpd="sng" algn="ctr">
+                      <a:solidFill>
+                        <a:srgbClr val="D9DCE3"/>
+                      </a:solidFill>
+                      <a:prstDash val="solid"/>
+                      <a:round/>
+                      <a:headEnd type="none" w="med" len="med"/>
+                      <a:tailEnd type="none" w="med" len="med"/>
+                    </a:lnL>
+                    <a:lnR w="6350" cap="flat" cmpd="sng" algn="ctr">
+                      <a:solidFill>
+                        <a:srgbClr val="D9DCE3"/>
+                      </a:solidFill>
+                      <a:prstDash val="solid"/>
+                      <a:round/>
+                      <a:headEnd type="none" w="med" len="med"/>
+                      <a:tailEnd type="none" w="med" len="med"/>
+                    </a:lnR>
+                    <a:lnT w="6350" cap="flat" cmpd="sng" algn="ctr">
+                      <a:solidFill>
+                        <a:srgbClr val="D9DCE3"/>
+                      </a:solidFill>
+                      <a:prstDash val="solid"/>
+                      <a:round/>
+                      <a:headEnd type="none" w="med" len="med"/>
+                      <a:tailEnd type="none" w="med" len="med"/>
+                    </a:lnT>
+                    <a:lnB w="6350" cap="flat" cmpd="sng" algn="ctr">
+                      <a:solidFill>
+                        <a:srgbClr val="D9DCE3"/>
+                      </a:solidFill>
+                      <a:prstDash val="solid"/>
+                      <a:round/>
+                      <a:headEnd type="none" w="med" len="med"/>
+                      <a:tailEnd type="none" w="med" len="med"/>
+                    </a:lnB>
+                    <a:solidFill>
+                      <a:srgbClr val="FFFFFF"/>
+                    </a:solidFill>
+                  </a:tcPr>
+                </a:tc>
+                <a:tc>
+                  <a:txBody>
+                    <a:bodyPr/>
+                    <a:lstStyle/>
+                    <a:p>
+                      <a:pPr indent="0" marL="0">
+                        <a:buNone/>
+                      </a:pPr>
+                      <a:r>
+                        <a:rPr lang="en-US" sz="1400" dirty="0">
+                          <a:solidFill>
+                            <a:srgbClr val="1F2328"/>
+                          </a:solidFill>
+                          <a:latin typeface="Malgun Gothic" pitchFamily="34" charset="0"/>
+                          <a:ea typeface="Malgun Gothic" pitchFamily="34" charset="-122"/>
+                          <a:cs typeface="Malgun Gothic" pitchFamily="34" charset="-120"/>
+                        </a:rPr>
+                        <a:t>11.1% / 9.9%</a:t>
+                      </a:r>
+                      <a:endParaRPr lang="en-US" sz="1400" dirty="0">
+                        <a:latin typeface="Malgun Gothic" charset="0"/>
+                        <a:ea typeface="Malgun Gothic" charset="0"/>
+                        <a:cs typeface="Malgun Gothic" charset="0"/>
+                      </a:endParaRPr>
+                    </a:p>
+                  </a:txBody>
+                  <a:tcPr marL="76200" marR="76200" marT="38100" marB="38100" anchor="ctr">
+                    <a:lnL w="6350" cap="flat" cmpd="sng" algn="ctr">
+                      <a:solidFill>
+                        <a:srgbClr val="D9DCE3"/>
+                      </a:solidFill>
+                      <a:prstDash val="solid"/>
+                      <a:round/>
+                      <a:headEnd type="none" w="med" len="med"/>
+                      <a:tailEnd type="none" w="med" len="med"/>
+                    </a:lnL>
+                    <a:lnR w="6350" cap="flat" cmpd="sng" algn="ctr">
+                      <a:solidFill>
+                        <a:srgbClr val="D9DCE3"/>
+                      </a:solidFill>
+                      <a:prstDash val="solid"/>
+                      <a:round/>
+                      <a:headEnd type="none" w="med" len="med"/>
+                      <a:tailEnd type="none" w="med" len="med"/>
+                    </a:lnR>
+                    <a:lnT w="6350" cap="flat" cmpd="sng" algn="ctr">
+                      <a:solidFill>
+                        <a:srgbClr val="D9DCE3"/>
+                      </a:solidFill>
+                      <a:prstDash val="solid"/>
+                      <a:round/>
+                      <a:headEnd type="none" w="med" len="med"/>
+                      <a:tailEnd type="none" w="med" len="med"/>
+                    </a:lnT>
+                    <a:lnB w="6350" cap="flat" cmpd="sng" algn="ctr">
+                      <a:solidFill>
+                        <a:srgbClr val="D9DCE3"/>
+                      </a:solidFill>
+                      <a:prstDash val="solid"/>
+                      <a:round/>
+                      <a:headEnd type="none" w="med" len="med"/>
+                      <a:tailEnd type="none" w="med" len="med"/>
+                    </a:lnB>
+                    <a:solidFill>
+                      <a:srgbClr val="FFFFFF"/>
+                    </a:solidFill>
+                  </a:tcPr>
+                </a:tc>
+                <a:tc>
+                  <a:txBody>
+                    <a:bodyPr/>
+                    <a:lstStyle/>
+                    <a:p>
+                      <a:pPr indent="0" marL="0">
+                        <a:buNone/>
+                      </a:pPr>
+                      <a:r>
+                        <a:rPr lang="en-US" sz="1400" dirty="0">
+                          <a:solidFill>
+                            <a:srgbClr val="1F2328"/>
+                          </a:solidFill>
+                          <a:latin typeface="Malgun Gothic" pitchFamily="34" charset="0"/>
+                          <a:ea typeface="Malgun Gothic" pitchFamily="34" charset="-122"/>
+                          <a:cs typeface="Malgun Gothic" pitchFamily="34" charset="-120"/>
+                        </a:rPr>
+                        <a:t>5.6% / 4.8%</a:t>
+                      </a:r>
+                      <a:endParaRPr lang="en-US" sz="1400" dirty="0">
+                        <a:latin typeface="Malgun Gothic" charset="0"/>
+                        <a:ea typeface="Malgun Gothic" charset="0"/>
+                        <a:cs typeface="Malgun Gothic" charset="0"/>
+                      </a:endParaRPr>
+                    </a:p>
+                  </a:txBody>
+                  <a:tcPr marL="76200" marR="76200" marT="38100" marB="38100" anchor="ctr">
+                    <a:lnL w="6350" cap="flat" cmpd="sng" algn="ctr">
+                      <a:solidFill>
+                        <a:srgbClr val="D9DCE3"/>
+                      </a:solidFill>
+                      <a:prstDash val="solid"/>
+                      <a:round/>
+                      <a:headEnd type="none" w="med" len="med"/>
+                      <a:tailEnd type="none" w="med" len="med"/>
+                    </a:lnL>
+                    <a:lnR w="6350" cap="flat" cmpd="sng" algn="ctr">
+                      <a:solidFill>
+                        <a:srgbClr val="D9DCE3"/>
+                      </a:solidFill>
+                      <a:prstDash val="solid"/>
+                      <a:round/>
+                      <a:headEnd type="none" w="med" len="med"/>
+                      <a:tailEnd type="none" w="med" len="med"/>
+                    </a:lnR>
+                    <a:lnT w="6350" cap="flat" cmpd="sng" algn="ctr">
+                      <a:solidFill>
+                        <a:srgbClr val="D9DCE3"/>
+                      </a:solidFill>
+                      <a:prstDash val="solid"/>
+                      <a:round/>
+                      <a:headEnd type="none" w="med" len="med"/>
+                      <a:tailEnd type="none" w="med" len="med"/>
+                    </a:lnT>
+                    <a:lnB w="6350" cap="flat" cmpd="sng" algn="ctr">
+                      <a:solidFill>
+                        <a:srgbClr val="D9DCE3"/>
+                      </a:solidFill>
+                      <a:prstDash val="solid"/>
+                      <a:round/>
+                      <a:headEnd type="none" w="med" len="med"/>
+                      <a:tailEnd type="none" w="med" len="med"/>
+                    </a:lnB>
+                    <a:solidFill>
+                      <a:srgbClr val="FFFFFF"/>
+                    </a:solidFill>
+                  </a:tcPr>
+                </a:tc>
+              </a:tr>
+              <a:tr h="457200">
+                <a:tc>
+                  <a:txBody>
+                    <a:bodyPr/>
+                    <a:lstStyle/>
+                    <a:p>
+                      <a:pPr indent="0" marL="0">
+                        <a:buNone/>
+                      </a:pPr>
+                      <a:r>
+                        <a:rPr lang="en-US" sz="1400" dirty="0">
+                          <a:solidFill>
+                            <a:srgbClr val="1F2328"/>
+                          </a:solidFill>
+                          <a:latin typeface="Malgun Gothic" pitchFamily="34" charset="0"/>
+                          <a:ea typeface="Malgun Gothic" pitchFamily="34" charset="-122"/>
+                          <a:cs typeface="Malgun Gothic" pitchFamily="34" charset="-120"/>
+                        </a:rPr>
+                        <a:t>실거래가 ±20% 안 (9건)</a:t>
+                      </a:r>
+                      <a:endParaRPr lang="en-US" sz="1400" dirty="0">
+                        <a:latin typeface="Malgun Gothic" charset="0"/>
+                        <a:ea typeface="Malgun Gothic" charset="0"/>
+                        <a:cs typeface="Malgun Gothic" charset="0"/>
+                      </a:endParaRPr>
+                    </a:p>
+                  </a:txBody>
+                  <a:tcPr marL="76200" marR="76200" marT="38100" marB="38100" anchor="ctr">
+                    <a:lnL w="6350" cap="flat" cmpd="sng" algn="ctr">
+                      <a:solidFill>
+                        <a:srgbClr val="D9DCE3"/>
+                      </a:solidFill>
+                      <a:prstDash val="solid"/>
+                      <a:round/>
+                      <a:headEnd type="none" w="med" len="med"/>
+                      <a:tailEnd type="none" w="med" len="med"/>
+                    </a:lnL>
+                    <a:lnR w="6350" cap="flat" cmpd="sng" algn="ctr">
+                      <a:solidFill>
+                        <a:srgbClr val="D9DCE3"/>
+                      </a:solidFill>
+                      <a:prstDash val="solid"/>
+                      <a:round/>
+                      <a:headEnd type="none" w="med" len="med"/>
+                      <a:tailEnd type="none" w="med" len="med"/>
+                    </a:lnR>
+                    <a:lnT w="6350" cap="flat" cmpd="sng" algn="ctr">
+                      <a:solidFill>
+                        <a:srgbClr val="D9DCE3"/>
+                      </a:solidFill>
+                      <a:prstDash val="solid"/>
+                      <a:round/>
+                      <a:headEnd type="none" w="med" len="med"/>
+                      <a:tailEnd type="none" w="med" len="med"/>
+                    </a:lnT>
+                    <a:lnB w="6350" cap="flat" cmpd="sng" algn="ctr">
+                      <a:solidFill>
+                        <a:srgbClr val="D9DCE3"/>
+                      </a:solidFill>
+                      <a:prstDash val="solid"/>
+                      <a:round/>
+                      <a:headEnd type="none" w="med" len="med"/>
+                      <a:tailEnd type="none" w="med" len="med"/>
+                    </a:lnB>
+                    <a:solidFill>
+                      <a:srgbClr val="F2F4F8"/>
+                    </a:solidFill>
+                  </a:tcPr>
+                </a:tc>
+                <a:tc>
+                  <a:txBody>
+                    <a:bodyPr/>
+                    <a:lstStyle/>
+                    <a:p>
+                      <a:pPr indent="0" marL="0">
+                        <a:buNone/>
+                      </a:pPr>
+                      <a:r>
+                        <a:rPr lang="en-US" sz="1400" dirty="0">
+                          <a:solidFill>
+                            <a:srgbClr val="1F2328"/>
+                          </a:solidFill>
+                          <a:latin typeface="Malgun Gothic" pitchFamily="34" charset="0"/>
+                          <a:ea typeface="Malgun Gothic" pitchFamily="34" charset="-122"/>
+                          <a:cs typeface="Malgun Gothic" pitchFamily="34" charset="-120"/>
+                        </a:rPr>
+                        <a:t>6건</a:t>
+                      </a:r>
+                      <a:endParaRPr lang="en-US" sz="1400" dirty="0">
+                        <a:latin typeface="Malgun Gothic" charset="0"/>
+                        <a:ea typeface="Malgun Gothic" charset="0"/>
+                        <a:cs typeface="Malgun Gothic" charset="0"/>
+                      </a:endParaRPr>
+                    </a:p>
+                  </a:txBody>
+                  <a:tcPr marL="76200" marR="76200" marT="38100" marB="38100" anchor="ctr">
+                    <a:lnL w="6350" cap="flat" cmpd="sng" algn="ctr">
+                      <a:solidFill>
+                        <a:srgbClr val="D9DCE3"/>
+                      </a:solidFill>
+                      <a:prstDash val="solid"/>
+                      <a:round/>
+                      <a:headEnd type="none" w="med" len="med"/>
+                      <a:tailEnd type="none" w="med" len="med"/>
+                    </a:lnL>
+                    <a:lnR w="6350" cap="flat" cmpd="sng" algn="ctr">
+                      <a:solidFill>
+                        <a:srgbClr val="D9DCE3"/>
+                      </a:solidFill>
+                      <a:prstDash val="solid"/>
+                      <a:round/>
+                      <a:headEnd type="none" w="med" len="med"/>
+                      <a:tailEnd type="none" w="med" len="med"/>
+                    </a:lnR>
+                    <a:lnT w="6350" cap="flat" cmpd="sng" algn="ctr">
+                      <a:solidFill>
+                        <a:srgbClr val="D9DCE3"/>
+                      </a:solidFill>
+                      <a:prstDash val="solid"/>
+                      <a:round/>
+                      <a:headEnd type="none" w="med" len="med"/>
+                      <a:tailEnd type="none" w="med" len="med"/>
+                    </a:lnT>
+                    <a:lnB w="6350" cap="flat" cmpd="sng" algn="ctr">
+                      <a:solidFill>
+                        <a:srgbClr val="D9DCE3"/>
+                      </a:solidFill>
+                      <a:prstDash val="solid"/>
+                      <a:round/>
+                      <a:headEnd type="none" w="med" len="med"/>
+                      <a:tailEnd type="none" w="med" len="med"/>
+                    </a:lnB>
+                    <a:solidFill>
+                      <a:srgbClr val="F2F4F8"/>
+                    </a:solidFill>
+                  </a:tcPr>
+                </a:tc>
+                <a:tc>
+                  <a:txBody>
+                    <a:bodyPr/>
+                    <a:lstStyle/>
+                    <a:p>
+                      <a:pPr indent="0" marL="0">
+                        <a:buNone/>
+                      </a:pPr>
+                      <a:r>
+                        <a:rPr lang="en-US" sz="1400" dirty="0">
+                          <a:solidFill>
+                            <a:srgbClr val="1F2328"/>
+                          </a:solidFill>
+                          <a:latin typeface="Malgun Gothic" pitchFamily="34" charset="0"/>
+                          <a:ea typeface="Malgun Gothic" pitchFamily="34" charset="-122"/>
+                          <a:cs typeface="Malgun Gothic" pitchFamily="34" charset="-120"/>
+                        </a:rPr>
+                        <a:t>7건</a:t>
+                      </a:r>
+                      <a:endParaRPr lang="en-US" sz="1400" dirty="0">
+                        <a:latin typeface="Malgun Gothic" charset="0"/>
+                        <a:ea typeface="Malgun Gothic" charset="0"/>
+                        <a:cs typeface="Malgun Gothic" charset="0"/>
+                      </a:endParaRPr>
+                    </a:p>
+                  </a:txBody>
+                  <a:tcPr marL="76200" marR="76200" marT="38100" marB="38100" anchor="ctr">
+                    <a:lnL w="6350" cap="flat" cmpd="sng" algn="ctr">
+                      <a:solidFill>
+                        <a:srgbClr val="D9DCE3"/>
+                      </a:solidFill>
+                      <a:prstDash val="solid"/>
+                      <a:round/>
+                      <a:headEnd type="none" w="med" len="med"/>
+                      <a:tailEnd type="none" w="med" len="med"/>
+                    </a:lnL>
+                    <a:lnR w="6350" cap="flat" cmpd="sng" algn="ctr">
+                      <a:solidFill>
+                        <a:srgbClr val="D9DCE3"/>
+                      </a:solidFill>
+                      <a:prstDash val="solid"/>
+                      <a:round/>
+                      <a:headEnd type="none" w="med" len="med"/>
+                      <a:tailEnd type="none" w="med" len="med"/>
+                    </a:lnR>
+                    <a:lnT w="6350" cap="flat" cmpd="sng" algn="ctr">
+                      <a:solidFill>
+                        <a:srgbClr val="D9DCE3"/>
+                      </a:solidFill>
+                      <a:prstDash val="solid"/>
+                      <a:round/>
+                      <a:headEnd type="none" w="med" len="med"/>
+                      <a:tailEnd type="none" w="med" len="med"/>
+                    </a:lnT>
+                    <a:lnB w="6350" cap="flat" cmpd="sng" algn="ctr">
+                      <a:solidFill>
+                        <a:srgbClr val="D9DCE3"/>
+                      </a:solidFill>
+                      <a:prstDash val="solid"/>
+                      <a:round/>
+                      <a:headEnd type="none" w="med" len="med"/>
+                      <a:tailEnd type="none" w="med" len="med"/>
+                    </a:lnB>
+                    <a:solidFill>
+                      <a:srgbClr val="F2F4F8"/>
+                    </a:solidFill>
+                  </a:tcPr>
+                </a:tc>
+              </a:tr>
+              <a:tr h="457200">
+                <a:tc>
+                  <a:txBody>
+                    <a:bodyPr/>
+                    <a:lstStyle/>
+                    <a:p>
+                      <a:pPr indent="0" marL="0">
+                        <a:buNone/>
+                      </a:pPr>
+                      <a:r>
+                        <a:rPr lang="en-US" sz="1400" dirty="0">
+                          <a:solidFill>
+                            <a:srgbClr val="1F2328"/>
+                          </a:solidFill>
+                          <a:latin typeface="Malgun Gothic" pitchFamily="34" charset="0"/>
+                          <a:ea typeface="Malgun Gothic" pitchFamily="34" charset="-122"/>
+                          <a:cs typeface="Malgun Gothic" pitchFamily="34" charset="-120"/>
+                        </a:rPr>
+                        <a:t>실거래가가 범위 안 (9건)</a:t>
+                      </a:r>
+                      <a:endParaRPr lang="en-US" sz="1400" dirty="0">
+                        <a:latin typeface="Malgun Gothic" charset="0"/>
+                        <a:ea typeface="Malgun Gothic" charset="0"/>
+                        <a:cs typeface="Malgun Gothic" charset="0"/>
+                      </a:endParaRPr>
+                    </a:p>
+                  </a:txBody>
+                  <a:tcPr marL="76200" marR="76200" marT="38100" marB="38100" anchor="ctr">
+                    <a:lnL w="6350" cap="flat" cmpd="sng" algn="ctr">
+                      <a:solidFill>
+                        <a:srgbClr val="D9DCE3"/>
+                      </a:solidFill>
+                      <a:prstDash val="solid"/>
+                      <a:round/>
+                      <a:headEnd type="none" w="med" len="med"/>
+                      <a:tailEnd type="none" w="med" len="med"/>
+                    </a:lnL>
+                    <a:lnR w="6350" cap="flat" cmpd="sng" algn="ctr">
+                      <a:solidFill>
+                        <a:srgbClr val="D9DCE3"/>
+                      </a:solidFill>
+                      <a:prstDash val="solid"/>
+                      <a:round/>
+                      <a:headEnd type="none" w="med" len="med"/>
+                      <a:tailEnd type="none" w="med" len="med"/>
+                    </a:lnR>
+                    <a:lnT w="6350" cap="flat" cmpd="sng" algn="ctr">
+                      <a:solidFill>
+                        <a:srgbClr val="D9DCE3"/>
+                      </a:solidFill>
+                      <a:prstDash val="solid"/>
+                      <a:round/>
+                      <a:headEnd type="none" w="med" len="med"/>
+                      <a:tailEnd type="none" w="med" len="med"/>
+                    </a:lnT>
+                    <a:lnB w="6350" cap="flat" cmpd="sng" algn="ctr">
+                      <a:solidFill>
+                        <a:srgbClr val="D9DCE3"/>
+                      </a:solidFill>
+                      <a:prstDash val="solid"/>
+                      <a:round/>
+                      <a:headEnd type="none" w="med" len="med"/>
+                      <a:tailEnd type="none" w="med" len="med"/>
+                    </a:lnB>
+                    <a:solidFill>
+                      <a:srgbClr val="FFFFFF"/>
+                    </a:solidFill>
+                  </a:tcPr>
+                </a:tc>
+                <a:tc>
+                  <a:txBody>
+                    <a:bodyPr/>
+                    <a:lstStyle/>
+                    <a:p>
+                      <a:pPr indent="0" marL="0">
+                        <a:buNone/>
+                      </a:pPr>
+                      <a:r>
+                        <a:rPr lang="en-US" sz="1400" dirty="0">
+                          <a:solidFill>
+                            <a:srgbClr val="1F2328"/>
+                          </a:solidFill>
+                          <a:latin typeface="Malgun Gothic" pitchFamily="34" charset="0"/>
+                          <a:ea typeface="Malgun Gothic" pitchFamily="34" charset="-122"/>
+                          <a:cs typeface="Malgun Gothic" pitchFamily="34" charset="-120"/>
+                        </a:rPr>
+                        <a:t>7건 (80% 구간)</a:t>
+                      </a:r>
+                      <a:endParaRPr lang="en-US" sz="1400" dirty="0">
+                        <a:latin typeface="Malgun Gothic" charset="0"/>
+                        <a:ea typeface="Malgun Gothic" charset="0"/>
+                        <a:cs typeface="Malgun Gothic" charset="0"/>
+                      </a:endParaRPr>
+                    </a:p>
+                  </a:txBody>
+                  <a:tcPr marL="76200" marR="76200" marT="38100" marB="38100" anchor="ctr">
+                    <a:lnL w="6350" cap="flat" cmpd="sng" algn="ctr">
+                      <a:solidFill>
+                        <a:srgbClr val="D9DCE3"/>
+                      </a:solidFill>
+                      <a:prstDash val="solid"/>
+                      <a:round/>
+                      <a:headEnd type="none" w="med" len="med"/>
+                      <a:tailEnd type="none" w="med" len="med"/>
+                    </a:lnL>
+                    <a:lnR w="6350" cap="flat" cmpd="sng" algn="ctr">
+                      <a:solidFill>
+                        <a:srgbClr val="D9DCE3"/>
+                      </a:solidFill>
+                      <a:prstDash val="solid"/>
+                      <a:round/>
+                      <a:headEnd type="none" w="med" len="med"/>
+                      <a:tailEnd type="none" w="med" len="med"/>
+                    </a:lnR>
+                    <a:lnT w="6350" cap="flat" cmpd="sng" algn="ctr">
+                      <a:solidFill>
+                        <a:srgbClr val="D9DCE3"/>
+                      </a:solidFill>
+                      <a:prstDash val="solid"/>
+                      <a:round/>
+                      <a:headEnd type="none" w="med" len="med"/>
+                      <a:tailEnd type="none" w="med" len="med"/>
+                    </a:lnT>
+                    <a:lnB w="6350" cap="flat" cmpd="sng" algn="ctr">
+                      <a:solidFill>
+                        <a:srgbClr val="D9DCE3"/>
+                      </a:solidFill>
+                      <a:prstDash val="solid"/>
+                      <a:round/>
+                      <a:headEnd type="none" w="med" len="med"/>
+                      <a:tailEnd type="none" w="med" len="med"/>
+                    </a:lnB>
+                    <a:solidFill>
+                      <a:srgbClr val="FFFFFF"/>
+                    </a:solidFill>
+                  </a:tcPr>
+                </a:tc>
+                <a:tc>
+                  <a:txBody>
+                    <a:bodyPr/>
+                    <a:lstStyle/>
+                    <a:p>
+                      <a:pPr indent="0" marL="0">
+                        <a:buNone/>
+                      </a:pPr>
+                      <a:r>
+                        <a:rPr lang="en-US" sz="1400" dirty="0">
+                          <a:solidFill>
+                            <a:srgbClr val="1F2328"/>
+                          </a:solidFill>
+                          <a:latin typeface="Malgun Gothic" pitchFamily="34" charset="0"/>
+                          <a:ea typeface="Malgun Gothic" pitchFamily="34" charset="-122"/>
+                          <a:cs typeface="Malgun Gothic" pitchFamily="34" charset="-120"/>
+                        </a:rPr>
+                        <a:t>3건 (상하한시세)</a:t>
+                      </a:r>
+                      <a:endParaRPr lang="en-US" sz="1400" dirty="0">
+                        <a:latin typeface="Malgun Gothic" charset="0"/>
+                        <a:ea typeface="Malgun Gothic" charset="0"/>
+                        <a:cs typeface="Malgun Gothic" charset="0"/>
+                      </a:endParaRPr>
+                    </a:p>
+                  </a:txBody>
+                  <a:tcPr marL="76200" marR="76200" marT="38100" marB="38100" anchor="ctr">
+                    <a:lnL w="6350" cap="flat" cmpd="sng" algn="ctr">
+                      <a:solidFill>
+                        <a:srgbClr val="D9DCE3"/>
+                      </a:solidFill>
+                      <a:prstDash val="solid"/>
+                      <a:round/>
+                      <a:headEnd type="none" w="med" len="med"/>
+                      <a:tailEnd type="none" w="med" len="med"/>
+                    </a:lnL>
+                    <a:lnR w="6350" cap="flat" cmpd="sng" algn="ctr">
+                      <a:solidFill>
+                        <a:srgbClr val="D9DCE3"/>
+                      </a:solidFill>
+                      <a:prstDash val="solid"/>
+                      <a:round/>
+                      <a:headEnd type="none" w="med" len="med"/>
+                      <a:tailEnd type="none" w="med" len="med"/>
+                    </a:lnR>
+                    <a:lnT w="6350" cap="flat" cmpd="sng" algn="ctr">
+                      <a:solidFill>
+                        <a:srgbClr val="D9DCE3"/>
+                      </a:solidFill>
+                      <a:prstDash val="solid"/>
+                      <a:round/>
+                      <a:headEnd type="none" w="med" len="med"/>
+                      <a:tailEnd type="none" w="med" len="med"/>
+                    </a:lnT>
+                    <a:lnB w="6350" cap="flat" cmpd="sng" algn="ctr">
+                      <a:solidFill>
+                        <a:srgbClr val="D9DCE3"/>
+                      </a:solidFill>
+                      <a:prstDash val="solid"/>
+                      <a:round/>
+                      <a:headEnd type="none" w="med" len="med"/>
+                      <a:tailEnd type="none" w="med" len="med"/>
+                    </a:lnB>
+                    <a:solidFill>
+                      <a:srgbClr val="FFFFFF"/>
+                    </a:solidFill>
+                  </a:tcPr>
+                </a:tc>
+              </a:tr>
+            </a:tbl>
+          </a:graphicData>
+        </a:graphic>
+      </p:graphicFrame>
+      <p:graphicFrame>
+        <p:nvGraphicFramePr>
+          <p:cNvPr id="55" name="Table 1"/>
+          <p:cNvGraphicFramePr>
+            <a:graphicFrameLocks noGrp="1"/>
+          </p:cNvGraphicFramePr>
+          <p:nvPr>
+            <p:extLst>
+              <p:ext uri="{D42A27DB-BD31-4B8C-83A1-F6EECF244321}">
+                <p14:modId xmlns:p14="http://schemas.microsoft.com/office/powerpoint/2010/main" val="1579011935"/>
+              </p:ext>
+            </p:extLst>
+          </p:nvPr>
+        </p:nvGraphicFramePr>
+        <p:xfrm>
+          <a:off x="548640" y="3291840"/>
+          <a:ext cx="6675120" cy="914400"/>
+        </p:xfrm>
+        <a:graphic>
+          <a:graphicData uri="http://schemas.openxmlformats.org/drawingml/2006/table">
+            <a:tbl>
+              <a:tblPr/>
+              <a:tblGrid>
+                <a:gridCol w="1920240"/>
+                <a:gridCol w="1371600"/>
+                <a:gridCol w="1005840"/>
+                <a:gridCol w="1463040"/>
+                <a:gridCol w="914400"/>
+              </a:tblGrid>
+              <a:tr h="274320">
+                <a:tc>
+                  <a:txBody>
+                    <a:bodyPr/>
+                    <a:lstStyle/>
+                    <a:p>
+                      <a:pPr indent="0" marL="0">
+                        <a:buNone/>
+                      </a:pPr>
+                      <a:r>
+                        <a:rPr lang="en-US" sz="1100" b="1" dirty="0">
+                          <a:solidFill>
+                            <a:srgbClr val="FFFFFF"/>
+                          </a:solidFill>
+                          <a:latin typeface="Malgun Gothic" pitchFamily="34" charset="0"/>
+                          <a:ea typeface="Malgun Gothic" pitchFamily="34" charset="-122"/>
+                          <a:cs typeface="Malgun Gothic" pitchFamily="34" charset="-120"/>
+                        </a:rPr>
+                        <a:t>주소</a:t>
+                      </a:r>
+                      <a:endParaRPr lang="en-US" sz="1100" dirty="0">
+                        <a:latin typeface="Malgun Gothic" charset="0"/>
+                        <a:ea typeface="Malgun Gothic" charset="0"/>
+                        <a:cs typeface="Malgun Gothic" charset="0"/>
+                      </a:endParaRPr>
+                    </a:p>
+                  </a:txBody>
+                  <a:tcPr marL="76200" marR="76200" marT="38100" marB="38100" anchor="ctr">
+                    <a:lnL w="6350" cap="flat" cmpd="sng" algn="ctr">
+                      <a:solidFill>
+                        <a:srgbClr val="D9DCE3"/>
+                      </a:solidFill>
+                      <a:prstDash val="solid"/>
+                      <a:round/>
+                      <a:headEnd type="none" w="med" len="med"/>
+                      <a:tailEnd type="none" w="med" len="med"/>
+                    </a:lnL>
+                    <a:lnR w="6350" cap="flat" cmpd="sng" algn="ctr">
+                      <a:solidFill>
+                        <a:srgbClr val="D9DCE3"/>
+                      </a:solidFill>
+                      <a:prstDash val="solid"/>
+                      <a:round/>
+                      <a:headEnd type="none" w="med" len="med"/>
+                      <a:tailEnd type="none" w="med" len="med"/>
+                    </a:lnR>
+                    <a:lnT w="6350" cap="flat" cmpd="sng" algn="ctr">
+                      <a:solidFill>
+                        <a:srgbClr val="D9DCE3"/>
+                      </a:solidFill>
+                      <a:prstDash val="solid"/>
+                      <a:round/>
+                      <a:headEnd type="none" w="med" len="med"/>
+                      <a:tailEnd type="none" w="med" len="med"/>
+                    </a:lnT>
+                    <a:lnB w="6350" cap="flat" cmpd="sng" algn="ctr">
+                      <a:solidFill>
+                        <a:srgbClr val="D9DCE3"/>
+                      </a:solidFill>
+                      <a:prstDash val="solid"/>
+                      <a:round/>
+                      <a:headEnd type="none" w="med" len="med"/>
+                      <a:tailEnd type="none" w="med" len="med"/>
+                    </a:lnB>
+                    <a:solidFill>
+                      <a:srgbClr val="2C3A5C"/>
+                    </a:solidFill>
+                  </a:tcPr>
+                </a:tc>
+                <a:tc>
+                  <a:txBody>
+                    <a:bodyPr/>
+                    <a:lstStyle/>
+                    <a:p>
+                      <a:pPr indent="0" marL="0">
+                        <a:buNone/>
+                      </a:pPr>
+                      <a:r>
+                        <a:rPr lang="en-US" sz="1100" b="1" dirty="0">
+                          <a:solidFill>
+                            <a:srgbClr val="FFFFFF"/>
+                          </a:solidFill>
+                          <a:latin typeface="Malgun Gothic" pitchFamily="34" charset="0"/>
+                          <a:ea typeface="Malgun Gothic" pitchFamily="34" charset="-122"/>
+                          <a:cs typeface="Malgun Gothic" pitchFamily="34" charset="-120"/>
+                        </a:rPr>
+                        <a:t>거래</a:t>
+                      </a:r>
+                      <a:endParaRPr lang="en-US" sz="1100" dirty="0">
+                        <a:latin typeface="Malgun Gothic" charset="0"/>
+                        <a:ea typeface="Malgun Gothic" charset="0"/>
+                        <a:cs typeface="Malgun Gothic" charset="0"/>
+                      </a:endParaRPr>
+                    </a:p>
+                  </a:txBody>
+                  <a:tcPr marL="76200" marR="76200" marT="38100" marB="38100" anchor="ctr">
+                    <a:lnL w="6350" cap="flat" cmpd="sng" algn="ctr">
+                      <a:solidFill>
+                        <a:srgbClr val="D9DCE3"/>
+                      </a:solidFill>
+                      <a:prstDash val="solid"/>
+                      <a:round/>
+                      <a:headEnd type="none" w="med" len="med"/>
+                      <a:tailEnd type="none" w="med" len="med"/>
+                    </a:lnL>
+                    <a:lnR w="6350" cap="flat" cmpd="sng" algn="ctr">
+                      <a:solidFill>
+                        <a:srgbClr val="D9DCE3"/>
+                      </a:solidFill>
+                      <a:prstDash val="solid"/>
+                      <a:round/>
+                      <a:headEnd type="none" w="med" len="med"/>
+                      <a:tailEnd type="none" w="med" len="med"/>
+                    </a:lnR>
+                    <a:lnT w="6350" cap="flat" cmpd="sng" algn="ctr">
+                      <a:solidFill>
+                        <a:srgbClr val="D9DCE3"/>
+                      </a:solidFill>
+                      <a:prstDash val="solid"/>
+                      <a:round/>
+                      <a:headEnd type="none" w="med" len="med"/>
+                      <a:tailEnd type="none" w="med" len="med"/>
+                    </a:lnT>
+                    <a:lnB w="6350" cap="flat" cmpd="sng" algn="ctr">
+                      <a:solidFill>
+                        <a:srgbClr val="D9DCE3"/>
+                      </a:solidFill>
+                      <a:prstDash val="solid"/>
+                      <a:round/>
+                      <a:headEnd type="none" w="med" len="med"/>
+                      <a:tailEnd type="none" w="med" len="med"/>
+                    </a:lnB>
+                    <a:solidFill>
+                      <a:srgbClr val="2C3A5C"/>
+                    </a:solidFill>
+                  </a:tcPr>
+                </a:tc>
+                <a:tc>
+                  <a:txBody>
+                    <a:bodyPr/>
+                    <a:lstStyle/>
+                    <a:p>
+                      <a:pPr indent="0" marL="0">
+                        <a:buNone/>
+                      </a:pPr>
+                      <a:r>
+                        <a:rPr lang="en-US" sz="1100" b="1" dirty="0">
+                          <a:solidFill>
+                            <a:srgbClr val="FFFFFF"/>
+                          </a:solidFill>
+                          <a:latin typeface="Malgun Gothic" pitchFamily="34" charset="0"/>
+                          <a:ea typeface="Malgun Gothic" pitchFamily="34" charset="-122"/>
+                          <a:cs typeface="Malgun Gothic" pitchFamily="34" charset="-120"/>
+                        </a:rPr>
+                        <a:t>실거래가</a:t>
+                      </a:r>
+                      <a:endParaRPr lang="en-US" sz="1100" dirty="0">
+                        <a:latin typeface="Malgun Gothic" charset="0"/>
+                        <a:ea typeface="Malgun Gothic" charset="0"/>
+                        <a:cs typeface="Malgun Gothic" charset="0"/>
+                      </a:endParaRPr>
+                    </a:p>
+                  </a:txBody>
+                  <a:tcPr marL="76200" marR="76200" marT="38100" marB="38100" anchor="ctr">
+                    <a:lnL w="6350" cap="flat" cmpd="sng" algn="ctr">
+                      <a:solidFill>
+                        <a:srgbClr val="D9DCE3"/>
+                      </a:solidFill>
+                      <a:prstDash val="solid"/>
+                      <a:round/>
+                      <a:headEnd type="none" w="med" len="med"/>
+                      <a:tailEnd type="none" w="med" len="med"/>
+                    </a:lnL>
+                    <a:lnR w="6350" cap="flat" cmpd="sng" algn="ctr">
+                      <a:solidFill>
+                        <a:srgbClr val="D9DCE3"/>
+                      </a:solidFill>
+                      <a:prstDash val="solid"/>
+                      <a:round/>
+                      <a:headEnd type="none" w="med" len="med"/>
+                      <a:tailEnd type="none" w="med" len="med"/>
+                    </a:lnR>
+                    <a:lnT w="6350" cap="flat" cmpd="sng" algn="ctr">
+                      <a:solidFill>
+                        <a:srgbClr val="D9DCE3"/>
+                      </a:solidFill>
+                      <a:prstDash val="solid"/>
+                      <a:round/>
+                      <a:headEnd type="none" w="med" len="med"/>
+                      <a:tailEnd type="none" w="med" len="med"/>
+                    </a:lnT>
+                    <a:lnB w="6350" cap="flat" cmpd="sng" algn="ctr">
+                      <a:solidFill>
+                        <a:srgbClr val="D9DCE3"/>
+                      </a:solidFill>
+                      <a:prstDash val="solid"/>
+                      <a:round/>
+                      <a:headEnd type="none" w="med" len="med"/>
+                      <a:tailEnd type="none" w="med" len="med"/>
+                    </a:lnB>
+                    <a:solidFill>
+                      <a:srgbClr val="2C3A5C"/>
+                    </a:solidFill>
+                  </a:tcPr>
+                </a:tc>
+                <a:tc>
+                  <a:txBody>
+                    <a:bodyPr/>
+                    <a:lstStyle/>
+                    <a:p>
+                      <a:pPr indent="0" marL="0">
+                        <a:buNone/>
+                      </a:pPr>
+                      <a:r>
+                        <a:rPr lang="en-US" sz="1100" b="1" dirty="0">
+                          <a:solidFill>
+                            <a:srgbClr val="FFFFFF"/>
+                          </a:solidFill>
+                          <a:latin typeface="Malgun Gothic" pitchFamily="34" charset="0"/>
+                          <a:ea typeface="Malgun Gothic" pitchFamily="34" charset="-122"/>
+                          <a:cs typeface="Malgun Gothic" pitchFamily="34" charset="-120"/>
+                        </a:rPr>
+                        <a:t>우리 추정 (신뢰도)</a:t>
+                      </a:r>
+                      <a:endParaRPr lang="en-US" sz="1100" dirty="0">
+                        <a:latin typeface="Malgun Gothic" charset="0"/>
+                        <a:ea typeface="Malgun Gothic" charset="0"/>
+                        <a:cs typeface="Malgun Gothic" charset="0"/>
+                      </a:endParaRPr>
+                    </a:p>
+                  </a:txBody>
+                  <a:tcPr marL="76200" marR="76200" marT="38100" marB="38100" anchor="ctr">
+                    <a:lnL w="6350" cap="flat" cmpd="sng" algn="ctr">
+                      <a:solidFill>
+                        <a:srgbClr val="D9DCE3"/>
+                      </a:solidFill>
+                      <a:prstDash val="solid"/>
+                      <a:round/>
+                      <a:headEnd type="none" w="med" len="med"/>
+                      <a:tailEnd type="none" w="med" len="med"/>
+                    </a:lnL>
+                    <a:lnR w="6350" cap="flat" cmpd="sng" algn="ctr">
+                      <a:solidFill>
+                        <a:srgbClr val="D9DCE3"/>
+                      </a:solidFill>
+                      <a:prstDash val="solid"/>
+                      <a:round/>
+                      <a:headEnd type="none" w="med" len="med"/>
+                      <a:tailEnd type="none" w="med" len="med"/>
+                    </a:lnR>
+                    <a:lnT w="6350" cap="flat" cmpd="sng" algn="ctr">
+                      <a:solidFill>
+                        <a:srgbClr val="D9DCE3"/>
+                      </a:solidFill>
+                      <a:prstDash val="solid"/>
+                      <a:round/>
+                      <a:headEnd type="none" w="med" len="med"/>
+                      <a:tailEnd type="none" w="med" len="med"/>
+                    </a:lnT>
+                    <a:lnB w="6350" cap="flat" cmpd="sng" algn="ctr">
+                      <a:solidFill>
+                        <a:srgbClr val="D9DCE3"/>
+                      </a:solidFill>
+                      <a:prstDash val="solid"/>
+                      <a:round/>
+                      <a:headEnd type="none" w="med" len="med"/>
+                      <a:tailEnd type="none" w="med" len="med"/>
+                    </a:lnB>
+                    <a:solidFill>
+                      <a:srgbClr val="2C3A5C"/>
+                    </a:solidFill>
+                  </a:tcPr>
+                </a:tc>
+                <a:tc>
+                  <a:txBody>
+                    <a:bodyPr/>
+                    <a:lstStyle/>
+                    <a:p>
+                      <a:pPr indent="0" marL="0">
+                        <a:buNone/>
+                      </a:pPr>
+                      <a:r>
+                        <a:rPr lang="en-US" sz="1100" b="1" dirty="0">
+                          <a:solidFill>
+                            <a:srgbClr val="FFFFFF"/>
+                          </a:solidFill>
+                          <a:latin typeface="Malgun Gothic" pitchFamily="34" charset="0"/>
+                          <a:ea typeface="Malgun Gothic" pitchFamily="34" charset="-122"/>
+                          <a:cs typeface="Malgun Gothic" pitchFamily="34" charset="-120"/>
+                        </a:rPr>
+                        <a:t>우리 오차</a:t>
+                      </a:r>
+                      <a:endParaRPr lang="en-US" sz="1100" dirty="0">
+                        <a:latin typeface="Malgun Gothic" charset="0"/>
+                        <a:ea typeface="Malgun Gothic" charset="0"/>
+                        <a:cs typeface="Malgun Gothic" charset="0"/>
+                      </a:endParaRPr>
+                    </a:p>
+                  </a:txBody>
+                  <a:tcPr marL="76200" marR="76200" marT="38100" marB="38100" anchor="ctr">
+                    <a:lnL w="6350" cap="flat" cmpd="sng" algn="ctr">
+                      <a:solidFill>
+                        <a:srgbClr val="D9DCE3"/>
+                      </a:solidFill>
+                      <a:prstDash val="solid"/>
+                      <a:round/>
+                      <a:headEnd type="none" w="med" len="med"/>
+                      <a:tailEnd type="none" w="med" len="med"/>
+                    </a:lnL>
+                    <a:lnR w="6350" cap="flat" cmpd="sng" algn="ctr">
+                      <a:solidFill>
+                        <a:srgbClr val="D9DCE3"/>
+                      </a:solidFill>
+                      <a:prstDash val="solid"/>
+                      <a:round/>
+                      <a:headEnd type="none" w="med" len="med"/>
+                      <a:tailEnd type="none" w="med" len="med"/>
+                    </a:lnR>
+                    <a:lnT w="6350" cap="flat" cmpd="sng" algn="ctr">
+                      <a:solidFill>
+                        <a:srgbClr val="D9DCE3"/>
+                      </a:solidFill>
+                      <a:prstDash val="solid"/>
+                      <a:round/>
+                      <a:headEnd type="none" w="med" len="med"/>
+                      <a:tailEnd type="none" w="med" len="med"/>
+                    </a:lnT>
+                    <a:lnB w="6350" cap="flat" cmpd="sng" algn="ctr">
+                      <a:solidFill>
+                        <a:srgbClr val="D9DCE3"/>
+                      </a:solidFill>
+                      <a:prstDash val="solid"/>
+                      <a:round/>
+                      <a:headEnd type="none" w="med" len="med"/>
+                      <a:tailEnd type="none" w="med" len="med"/>
+                    </a:lnB>
+                    <a:solidFill>
+                      <a:srgbClr val="2C3A5C"/>
+                    </a:solidFill>
+                  </a:tcPr>
+                </a:tc>
+              </a:tr>
+              <a:tr h="274320">
+                <a:tc>
+                  <a:txBody>
+                    <a:bodyPr/>
+                    <a:lstStyle/>
+                    <a:p>
+                      <a:pPr indent="0" marL="0">
+                        <a:buNone/>
+                      </a:pPr>
+                      <a:r>
+                        <a:rPr lang="en-US" sz="1100" dirty="0">
+                          <a:solidFill>
+                            <a:srgbClr val="1F2328"/>
+                          </a:solidFill>
+                          <a:latin typeface="Malgun Gothic" pitchFamily="34" charset="0"/>
+                          <a:ea typeface="Malgun Gothic" pitchFamily="34" charset="-122"/>
+                          <a:cs typeface="Malgun Gothic" pitchFamily="34" charset="-120"/>
+                        </a:rPr>
+                        <a:t>화곡동 362-79 6층</a:t>
+                      </a:r>
+                      <a:endParaRPr lang="en-US" sz="1100" dirty="0">
+                        <a:latin typeface="Malgun Gothic" charset="0"/>
+                        <a:ea typeface="Malgun Gothic" charset="0"/>
+                        <a:cs typeface="Malgun Gothic" charset="0"/>
+                      </a:endParaRPr>
+                    </a:p>
+                  </a:txBody>
+                  <a:tcPr marL="76200" marR="76200" marT="38100" marB="38100" anchor="ctr">
+                    <a:lnL w="6350" cap="flat" cmpd="sng" algn="ctr">
+                      <a:solidFill>
+                        <a:srgbClr val="D9DCE3"/>
+                      </a:solidFill>
+                      <a:prstDash val="solid"/>
+                      <a:round/>
+                      <a:headEnd type="none" w="med" len="med"/>
+                      <a:tailEnd type="none" w="med" len="med"/>
+                    </a:lnL>
+                    <a:lnR w="6350" cap="flat" cmpd="sng" algn="ctr">
+                      <a:solidFill>
+                        <a:srgbClr val="D9DCE3"/>
+                      </a:solidFill>
+                      <a:prstDash val="solid"/>
+                      <a:round/>
+                      <a:headEnd type="none" w="med" len="med"/>
+                      <a:tailEnd type="none" w="med" len="med"/>
+                    </a:lnR>
+                    <a:lnT w="6350" cap="flat" cmpd="sng" algn="ctr">
+                      <a:solidFill>
+                        <a:srgbClr val="D9DCE3"/>
+                      </a:solidFill>
+                      <a:prstDash val="solid"/>
+                      <a:round/>
+                      <a:headEnd type="none" w="med" len="med"/>
+                      <a:tailEnd type="none" w="med" len="med"/>
+                    </a:lnT>
+                    <a:lnB w="6350" cap="flat" cmpd="sng" algn="ctr">
+                      <a:solidFill>
+                        <a:srgbClr val="D9DCE3"/>
+                      </a:solidFill>
+                      <a:prstDash val="solid"/>
+                      <a:round/>
+                      <a:headEnd type="none" w="med" len="med"/>
+                      <a:tailEnd type="none" w="med" len="med"/>
+                    </a:lnB>
+                    <a:solidFill>
+                      <a:srgbClr val="FFFFFF"/>
+                    </a:solidFill>
+                  </a:tcPr>
+                </a:tc>
+                <a:tc>
+                  <a:txBody>
+                    <a:bodyPr/>
+                    <a:lstStyle/>
+                    <a:p>
+                      <a:pPr indent="0" marL="0">
+                        <a:buNone/>
+                      </a:pPr>
+                      <a:r>
+                        <a:rPr lang="en-US" sz="1100" dirty="0">
+                          <a:solidFill>
+                            <a:srgbClr val="1F2328"/>
+                          </a:solidFill>
+                          <a:latin typeface="Malgun Gothic" pitchFamily="34" charset="0"/>
+                          <a:ea typeface="Malgun Gothic" pitchFamily="34" charset="-122"/>
+                          <a:cs typeface="Malgun Gothic" pitchFamily="34" charset="-120"/>
+                        </a:rPr>
+                        <a:t>중개 2026-09</a:t>
+                      </a:r>
+                      <a:endParaRPr lang="en-US" sz="1100" dirty="0">
+                        <a:latin typeface="Malgun Gothic" charset="0"/>
+                        <a:ea typeface="Malgun Gothic" charset="0"/>
+                        <a:cs typeface="Malgun Gothic" charset="0"/>
+                      </a:endParaRPr>
+                    </a:p>
+                  </a:txBody>
+                  <a:tcPr marL="76200" marR="76200" marT="38100" marB="38100" anchor="ctr">
+                    <a:lnL w="6350" cap="flat" cmpd="sng" algn="ctr">
+                      <a:solidFill>
+                        <a:srgbClr val="D9DCE3"/>
+                      </a:solidFill>
+                      <a:prstDash val="solid"/>
+                      <a:round/>
+                      <a:headEnd type="none" w="med" len="med"/>
+                      <a:tailEnd type="none" w="med" len="med"/>
+                    </a:lnL>
+                    <a:lnR w="6350" cap="flat" cmpd="sng" algn="ctr">
+                      <a:solidFill>
+                        <a:srgbClr val="D9DCE3"/>
+                      </a:solidFill>
+                      <a:prstDash val="solid"/>
+                      <a:round/>
+                      <a:headEnd type="none" w="med" len="med"/>
+                      <a:tailEnd type="none" w="med" len="med"/>
+                    </a:lnR>
+                    <a:lnT w="6350" cap="flat" cmpd="sng" algn="ctr">
+                      <a:solidFill>
+                        <a:srgbClr val="D9DCE3"/>
+                      </a:solidFill>
+                      <a:prstDash val="solid"/>
+                      <a:round/>
+                      <a:headEnd type="none" w="med" len="med"/>
+                      <a:tailEnd type="none" w="med" len="med"/>
+                    </a:lnT>
+                    <a:lnB w="6350" cap="flat" cmpd="sng" algn="ctr">
+                      <a:solidFill>
+                        <a:srgbClr val="D9DCE3"/>
+                      </a:solidFill>
+                      <a:prstDash val="solid"/>
+                      <a:round/>
+                      <a:headEnd type="none" w="med" len="med"/>
+                      <a:tailEnd type="none" w="med" len="med"/>
+                    </a:lnB>
+                    <a:solidFill>
+                      <a:srgbClr val="FFFFFF"/>
+                    </a:solidFill>
+                  </a:tcPr>
+                </a:tc>
+                <a:tc>
+                  <a:txBody>
+                    <a:bodyPr/>
+                    <a:lstStyle/>
+                    <a:p>
+                      <a:pPr indent="0" marL="0">
+                        <a:buNone/>
+                      </a:pPr>
+                      <a:r>
+                        <a:rPr lang="en-US" sz="1100" dirty="0">
+                          <a:solidFill>
+                            <a:srgbClr val="1F2328"/>
+                          </a:solidFill>
+                          <a:latin typeface="Malgun Gothic" pitchFamily="34" charset="0"/>
+                          <a:ea typeface="Malgun Gothic" pitchFamily="34" charset="-122"/>
+                          <a:cs typeface="Malgun Gothic" pitchFamily="34" charset="-120"/>
+                        </a:rPr>
+                        <a:t>2.15억</a:t>
+                      </a:r>
+                      <a:endParaRPr lang="en-US" sz="1100" dirty="0">
+                        <a:latin typeface="Malgun Gothic" charset="0"/>
+                        <a:ea typeface="Malgun Gothic" charset="0"/>
+                        <a:cs typeface="Malgun Gothic" charset="0"/>
+                      </a:endParaRPr>
+                    </a:p>
+                  </a:txBody>
+                  <a:tcPr marL="76200" marR="76200" marT="38100" marB="38100" anchor="ctr">
+                    <a:lnL w="6350" cap="flat" cmpd="sng" algn="ctr">
+                      <a:solidFill>
+                        <a:srgbClr val="D9DCE3"/>
+                      </a:solidFill>
+                      <a:prstDash val="solid"/>
+                      <a:round/>
+                      <a:headEnd type="none" w="med" len="med"/>
+                      <a:tailEnd type="none" w="med" len="med"/>
+                    </a:lnL>
+                    <a:lnR w="6350" cap="flat" cmpd="sng" algn="ctr">
+                      <a:solidFill>
+                        <a:srgbClr val="D9DCE3"/>
+                      </a:solidFill>
+                      <a:prstDash val="solid"/>
+                      <a:round/>
+                      <a:headEnd type="none" w="med" len="med"/>
+                      <a:tailEnd type="none" w="med" len="med"/>
+                    </a:lnR>
+                    <a:lnT w="6350" cap="flat" cmpd="sng" algn="ctr">
+                      <a:solidFill>
+                        <a:srgbClr val="D9DCE3"/>
+                      </a:solidFill>
+                      <a:prstDash val="solid"/>
+                      <a:round/>
+                      <a:headEnd type="none" w="med" len="med"/>
+                      <a:tailEnd type="none" w="med" len="med"/>
+                    </a:lnT>
+                    <a:lnB w="6350" cap="flat" cmpd="sng" algn="ctr">
+                      <a:solidFill>
+                        <a:srgbClr val="D9DCE3"/>
+                      </a:solidFill>
+                      <a:prstDash val="solid"/>
+                      <a:round/>
+                      <a:headEnd type="none" w="med" len="med"/>
+                      <a:tailEnd type="none" w="med" len="med"/>
+                    </a:lnB>
+                    <a:solidFill>
+                      <a:srgbClr val="FFFFFF"/>
+                    </a:solidFill>
+                  </a:tcPr>
+                </a:tc>
+                <a:tc>
+                  <a:txBody>
+                    <a:bodyPr/>
+                    <a:lstStyle/>
+                    <a:p>
+                      <a:pPr indent="0" marL="0">
+                        <a:buNone/>
+                      </a:pPr>
+                      <a:r>
+                        <a:rPr lang="en-US" sz="1100" dirty="0">
+                          <a:solidFill>
+                            <a:srgbClr val="1F2328"/>
+                          </a:solidFill>
+                          <a:latin typeface="Malgun Gothic" pitchFamily="34" charset="0"/>
+                          <a:ea typeface="Malgun Gothic" pitchFamily="34" charset="-122"/>
+                          <a:cs typeface="Malgun Gothic" pitchFamily="34" charset="-120"/>
+                        </a:rPr>
+                        <a:t>2.04억 (0.83)</a:t>
+                      </a:r>
+                      <a:endParaRPr lang="en-US" sz="1100" dirty="0">
+                        <a:latin typeface="Malgun Gothic" charset="0"/>
+                        <a:ea typeface="Malgun Gothic" charset="0"/>
+                        <a:cs typeface="Malgun Gothic" charset="0"/>
+                      </a:endParaRPr>
+                    </a:p>
+                  </a:txBody>
+                  <a:tcPr marL="76200" marR="76200" marT="38100" marB="38100" anchor="ctr">
+                    <a:lnL w="6350" cap="flat" cmpd="sng" algn="ctr">
+                      <a:solidFill>
+                        <a:srgbClr val="D9DCE3"/>
+                      </a:solidFill>
+                      <a:prstDash val="solid"/>
+                      <a:round/>
+                      <a:headEnd type="none" w="med" len="med"/>
+                      <a:tailEnd type="none" w="med" len="med"/>
+                    </a:lnL>
+                    <a:lnR w="6350" cap="flat" cmpd="sng" algn="ctr">
+                      <a:solidFill>
+                        <a:srgbClr val="D9DCE3"/>
+                      </a:solidFill>
+                      <a:prstDash val="solid"/>
+                      <a:round/>
+                      <a:headEnd type="none" w="med" len="med"/>
+                      <a:tailEnd type="none" w="med" len="med"/>
+                    </a:lnR>
+                    <a:lnT w="6350" cap="flat" cmpd="sng" algn="ctr">
+                      <a:solidFill>
+                        <a:srgbClr val="D9DCE3"/>
+                      </a:solidFill>
+                      <a:prstDash val="solid"/>
+                      <a:round/>
+                      <a:headEnd type="none" w="med" len="med"/>
+                      <a:tailEnd type="none" w="med" len="med"/>
+                    </a:lnT>
+                    <a:lnB w="6350" cap="flat" cmpd="sng" algn="ctr">
+                      <a:solidFill>
+                        <a:srgbClr val="D9DCE3"/>
+                      </a:solidFill>
+                      <a:prstDash val="solid"/>
+                      <a:round/>
+                      <a:headEnd type="none" w="med" len="med"/>
+                      <a:tailEnd type="none" w="med" len="med"/>
+                    </a:lnB>
+                    <a:solidFill>
+                      <a:srgbClr val="FFFFFF"/>
+                    </a:solidFill>
+                  </a:tcPr>
+                </a:tc>
+                <a:tc>
+                  <a:txBody>
+                    <a:bodyPr/>
+                    <a:lstStyle/>
+                    <a:p>
+                      <a:pPr indent="0" marL="0">
+                        <a:buNone/>
+                      </a:pPr>
+                      <a:r>
+                        <a:rPr lang="en-US" sz="1100" dirty="0">
+                          <a:solidFill>
+                            <a:srgbClr val="1F2328"/>
+                          </a:solidFill>
+                          <a:latin typeface="Malgun Gothic" pitchFamily="34" charset="0"/>
+                          <a:ea typeface="Malgun Gothic" pitchFamily="34" charset="-122"/>
+                          <a:cs typeface="Malgun Gothic" pitchFamily="34" charset="-120"/>
+                        </a:rPr>
+                        <a:t>−5.0%</a:t>
+                      </a:r>
+                      <a:endParaRPr lang="en-US" sz="1100" dirty="0">
+                        <a:latin typeface="Malgun Gothic" charset="0"/>
+                        <a:ea typeface="Malgun Gothic" charset="0"/>
+                        <a:cs typeface="Malgun Gothic" charset="0"/>
+                      </a:endParaRPr>
+                    </a:p>
+                  </a:txBody>
+                  <a:tcPr marL="76200" marR="76200" marT="38100" marB="38100" anchor="ctr">
+                    <a:lnL w="6350" cap="flat" cmpd="sng" algn="ctr">
+                      <a:solidFill>
+                        <a:srgbClr val="D9DCE3"/>
+                      </a:solidFill>
+                      <a:prstDash val="solid"/>
+                      <a:round/>
+                      <a:headEnd type="none" w="med" len="med"/>
+                      <a:tailEnd type="none" w="med" len="med"/>
+                    </a:lnL>
+                    <a:lnR w="6350" cap="flat" cmpd="sng" algn="ctr">
+                      <a:solidFill>
+                        <a:srgbClr val="D9DCE3"/>
+                      </a:solidFill>
+                      <a:prstDash val="solid"/>
+                      <a:round/>
+                      <a:headEnd type="none" w="med" len="med"/>
+                      <a:tailEnd type="none" w="med" len="med"/>
+                    </a:lnR>
+                    <a:lnT w="6350" cap="flat" cmpd="sng" algn="ctr">
+                      <a:solidFill>
+                        <a:srgbClr val="D9DCE3"/>
+                      </a:solidFill>
+                      <a:prstDash val="solid"/>
+                      <a:round/>
+                      <a:headEnd type="none" w="med" len="med"/>
+                      <a:tailEnd type="none" w="med" len="med"/>
+                    </a:lnT>
+                    <a:lnB w="6350" cap="flat" cmpd="sng" algn="ctr">
+                      <a:solidFill>
+                        <a:srgbClr val="D9DCE3"/>
+                      </a:solidFill>
+                      <a:prstDash val="solid"/>
+                      <a:round/>
+                      <a:headEnd type="none" w="med" len="med"/>
+                      <a:tailEnd type="none" w="med" len="med"/>
+                    </a:lnB>
+                    <a:solidFill>
+                      <a:srgbClr val="FFFFFF"/>
+                    </a:solidFill>
+                  </a:tcPr>
+                </a:tc>
+              </a:tr>
+              <a:tr h="274320">
+                <a:tc>
+                  <a:txBody>
+                    <a:bodyPr/>
+                    <a:lstStyle/>
+                    <a:p>
+                      <a:pPr indent="0" marL="0">
+                        <a:buNone/>
+                      </a:pPr>
+                      <a:r>
+                        <a:rPr lang="en-US" sz="1100" dirty="0">
+                          <a:solidFill>
+                            <a:srgbClr val="1F2328"/>
+                          </a:solidFill>
+                          <a:latin typeface="Malgun Gothic" pitchFamily="34" charset="0"/>
+                          <a:ea typeface="Malgun Gothic" pitchFamily="34" charset="-122"/>
+                          <a:cs typeface="Malgun Gothic" pitchFamily="34" charset="-120"/>
+                        </a:rPr>
+                        <a:t>화곡동 811-9 1층</a:t>
+                      </a:r>
+                      <a:endParaRPr lang="en-US" sz="1100" dirty="0">
+                        <a:latin typeface="Malgun Gothic" charset="0"/>
+                        <a:ea typeface="Malgun Gothic" charset="0"/>
+                        <a:cs typeface="Malgun Gothic" charset="0"/>
+                      </a:endParaRPr>
+                    </a:p>
+                  </a:txBody>
+                  <a:tcPr marL="76200" marR="76200" marT="38100" marB="38100" anchor="ctr">
+                    <a:lnL w="6350" cap="flat" cmpd="sng" algn="ctr">
+                      <a:solidFill>
+                        <a:srgbClr val="D9DCE3"/>
+                      </a:solidFill>
+                      <a:prstDash val="solid"/>
+                      <a:round/>
+                      <a:headEnd type="none" w="med" len="med"/>
+                      <a:tailEnd type="none" w="med" len="med"/>
+                    </a:lnL>
+                    <a:lnR w="6350" cap="flat" cmpd="sng" algn="ctr">
+                      <a:solidFill>
+                        <a:srgbClr val="D9DCE3"/>
+                      </a:solidFill>
+                      <a:prstDash val="solid"/>
+                      <a:round/>
+                      <a:headEnd type="none" w="med" len="med"/>
+                      <a:tailEnd type="none" w="med" len="med"/>
+                    </a:lnR>
+                    <a:lnT w="6350" cap="flat" cmpd="sng" algn="ctr">
+                      <a:solidFill>
+                        <a:srgbClr val="D9DCE3"/>
+                      </a:solidFill>
+                      <a:prstDash val="solid"/>
+                      <a:round/>
+                      <a:headEnd type="none" w="med" len="med"/>
+                      <a:tailEnd type="none" w="med" len="med"/>
+                    </a:lnT>
+                    <a:lnB w="6350" cap="flat" cmpd="sng" algn="ctr">
+                      <a:solidFill>
+                        <a:srgbClr val="D9DCE3"/>
+                      </a:solidFill>
+                      <a:prstDash val="solid"/>
+                      <a:round/>
+                      <a:headEnd type="none" w="med" len="med"/>
+                      <a:tailEnd type="none" w="med" len="med"/>
+                    </a:lnB>
+                    <a:solidFill>
+                      <a:srgbClr val="F2F4F8"/>
+                    </a:solidFill>
+                  </a:tcPr>
+                </a:tc>
+                <a:tc>
+                  <a:txBody>
+                    <a:bodyPr/>
+                    <a:lstStyle/>
+                    <a:p>
+                      <a:pPr indent="0" marL="0">
+                        <a:buNone/>
+                      </a:pPr>
+                      <a:r>
+                        <a:rPr lang="en-US" sz="1100" dirty="0">
+                          <a:solidFill>
+                            <a:srgbClr val="1F2328"/>
+                          </a:solidFill>
+                          <a:latin typeface="Malgun Gothic" pitchFamily="34" charset="0"/>
+                          <a:ea typeface="Malgun Gothic" pitchFamily="34" charset="-122"/>
+                          <a:cs typeface="Malgun Gothic" pitchFamily="34" charset="-120"/>
+                        </a:rPr>
+                        <a:t>중개 2026-06</a:t>
+                      </a:r>
+                      <a:endParaRPr lang="en-US" sz="1100" dirty="0">
+                        <a:latin typeface="Malgun Gothic" charset="0"/>
+                        <a:ea typeface="Malgun Gothic" charset="0"/>
+                        <a:cs typeface="Malgun Gothic" charset="0"/>
+                      </a:endParaRPr>
+                    </a:p>
+                  </a:txBody>
+                  <a:tcPr marL="76200" marR="76200" marT="38100" marB="38100" anchor="ctr">
+                    <a:lnL w="6350" cap="flat" cmpd="sng" algn="ctr">
+                      <a:solidFill>
+                        <a:srgbClr val="D9DCE3"/>
+                      </a:solidFill>
+                      <a:prstDash val="solid"/>
+                      <a:round/>
+                      <a:headEnd type="none" w="med" len="med"/>
+                      <a:tailEnd type="none" w="med" len="med"/>
+                    </a:lnL>
+                    <a:lnR w="6350" cap="flat" cmpd="sng" algn="ctr">
+                      <a:solidFill>
+                        <a:srgbClr val="D9DCE3"/>
+                      </a:solidFill>
+                      <a:prstDash val="solid"/>
+                      <a:round/>
+                      <a:headEnd type="none" w="med" len="med"/>
+                      <a:tailEnd type="none" w="med" len="med"/>
+                    </a:lnR>
+                    <a:lnT w="6350" cap="flat" cmpd="sng" algn="ctr">
+                      <a:solidFill>
+                        <a:srgbClr val="D9DCE3"/>
+                      </a:solidFill>
+                      <a:prstDash val="solid"/>
+                      <a:round/>
+                      <a:headEnd type="none" w="med" len="med"/>
+                      <a:tailEnd type="none" w="med" len="med"/>
+                    </a:lnT>
+                    <a:lnB w="6350" cap="flat" cmpd="sng" algn="ctr">
+                      <a:solidFill>
+                        <a:srgbClr val="D9DCE3"/>
+                      </a:solidFill>
+                      <a:prstDash val="solid"/>
+                      <a:round/>
+                      <a:headEnd type="none" w="med" len="med"/>
+                      <a:tailEnd type="none" w="med" len="med"/>
+                    </a:lnB>
+                    <a:solidFill>
+                      <a:srgbClr val="F2F4F8"/>
+                    </a:solidFill>
+                  </a:tcPr>
+                </a:tc>
+                <a:tc>
+                  <a:txBody>
+                    <a:bodyPr/>
+                    <a:lstStyle/>
+                    <a:p>
+                      <a:pPr indent="0" marL="0">
+                        <a:buNone/>
+                      </a:pPr>
+                      <a:r>
+                        <a:rPr lang="en-US" sz="1100" dirty="0">
+                          <a:solidFill>
+                            <a:srgbClr val="1F2328"/>
+                          </a:solidFill>
+                          <a:latin typeface="Malgun Gothic" pitchFamily="34" charset="0"/>
+                          <a:ea typeface="Malgun Gothic" pitchFamily="34" charset="-122"/>
+                          <a:cs typeface="Malgun Gothic" pitchFamily="34" charset="-120"/>
+                        </a:rPr>
+                        <a:t>2.60억</a:t>
+                      </a:r>
+                      <a:endParaRPr lang="en-US" sz="1100" dirty="0">
+                        <a:latin typeface="Malgun Gothic" charset="0"/>
+                        <a:ea typeface="Malgun Gothic" charset="0"/>
+                        <a:cs typeface="Malgun Gothic" charset="0"/>
+                      </a:endParaRPr>
+                    </a:p>
+                  </a:txBody>
+                  <a:tcPr marL="76200" marR="76200" marT="38100" marB="38100" anchor="ctr">
+                    <a:lnL w="6350" cap="flat" cmpd="sng" algn="ctr">
+                      <a:solidFill>
+                        <a:srgbClr val="D9DCE3"/>
+                      </a:solidFill>
+                      <a:prstDash val="solid"/>
+                      <a:round/>
+                      <a:headEnd type="none" w="med" len="med"/>
+                      <a:tailEnd type="none" w="med" len="med"/>
+                    </a:lnL>
+                    <a:lnR w="6350" cap="flat" cmpd="sng" algn="ctr">
+                      <a:solidFill>
+                        <a:srgbClr val="D9DCE3"/>
+                      </a:solidFill>
+                      <a:prstDash val="solid"/>
+                      <a:round/>
+                      <a:headEnd type="none" w="med" len="med"/>
+                      <a:tailEnd type="none" w="med" len="med"/>
+                    </a:lnR>
+                    <a:lnT w="6350" cap="flat" cmpd="sng" algn="ctr">
+                      <a:solidFill>
+                        <a:srgbClr val="D9DCE3"/>
+                      </a:solidFill>
+                      <a:prstDash val="solid"/>
+                      <a:round/>
+                      <a:headEnd type="none" w="med" len="med"/>
+                      <a:tailEnd type="none" w="med" len="med"/>
+                    </a:lnT>
+                    <a:lnB w="6350" cap="flat" cmpd="sng" algn="ctr">
+                      <a:solidFill>
+                        <a:srgbClr val="D9DCE3"/>
+                      </a:solidFill>
+                      <a:prstDash val="solid"/>
+                      <a:round/>
+                      <a:headEnd type="none" w="med" len="med"/>
+                      <a:tailEnd type="none" w="med" len="med"/>
+                    </a:lnB>
+                    <a:solidFill>
+                      <a:srgbClr val="F2F4F8"/>
+                    </a:solidFill>
+                  </a:tcPr>
+                </a:tc>
+                <a:tc>
+                  <a:txBody>
+                    <a:bodyPr/>
+                    <a:lstStyle/>
+                    <a:p>
+                      <a:pPr indent="0" marL="0">
+                        <a:buNone/>
+                      </a:pPr>
+                      <a:r>
+                        <a:rPr lang="en-US" sz="1100" dirty="0">
+                          <a:solidFill>
+                            <a:srgbClr val="1F2328"/>
+                          </a:solidFill>
+                          <a:latin typeface="Malgun Gothic" pitchFamily="34" charset="0"/>
+                          <a:ea typeface="Malgun Gothic" pitchFamily="34" charset="-122"/>
+                          <a:cs typeface="Malgun Gothic" pitchFamily="34" charset="-120"/>
+                        </a:rPr>
+                        <a:t>2.31억 (0.78)</a:t>
+                      </a:r>
+                      <a:endParaRPr lang="en-US" sz="1100" dirty="0">
+                        <a:latin typeface="Malgun Gothic" charset="0"/>
+                        <a:ea typeface="Malgun Gothic" charset="0"/>
+                        <a:cs typeface="Malgun Gothic" charset="0"/>
+                      </a:endParaRPr>
+                    </a:p>
+                  </a:txBody>
+                  <a:tcPr marL="76200" marR="76200" marT="38100" marB="38100" anchor="ctr">
+                    <a:lnL w="6350" cap="flat" cmpd="sng" algn="ctr">
+                      <a:solidFill>
+                        <a:srgbClr val="D9DCE3"/>
+                      </a:solidFill>
+                      <a:prstDash val="solid"/>
+                      <a:round/>
+                      <a:headEnd type="none" w="med" len="med"/>
+                      <a:tailEnd type="none" w="med" len="med"/>
+                    </a:lnL>
+                    <a:lnR w="6350" cap="flat" cmpd="sng" algn="ctr">
+                      <a:solidFill>
+                        <a:srgbClr val="D9DCE3"/>
+                      </a:solidFill>
+                      <a:prstDash val="solid"/>
+                      <a:round/>
+                      <a:headEnd type="none" w="med" len="med"/>
+                      <a:tailEnd type="none" w="med" len="med"/>
+                    </a:lnR>
+                    <a:lnT w="6350" cap="flat" cmpd="sng" algn="ctr">
+                      <a:solidFill>
+                        <a:srgbClr val="D9DCE3"/>
+                      </a:solidFill>
+                      <a:prstDash val="solid"/>
+                      <a:round/>
+                      <a:headEnd type="none" w="med" len="med"/>
+                      <a:tailEnd type="none" w="med" len="med"/>
+                    </a:lnT>
+                    <a:lnB w="6350" cap="flat" cmpd="sng" algn="ctr">
+                      <a:solidFill>
+                        <a:srgbClr val="D9DCE3"/>
+                      </a:solidFill>
+                      <a:prstDash val="solid"/>
+                      <a:round/>
+                      <a:headEnd type="none" w="med" len="med"/>
+                      <a:tailEnd type="none" w="med" len="med"/>
+                    </a:lnB>
+                    <a:solidFill>
+                      <a:srgbClr val="F2F4F8"/>
+                    </a:solidFill>
+                  </a:tcPr>
+                </a:tc>
+                <a:tc>
+                  <a:txBody>
+                    <a:bodyPr/>
+                    <a:lstStyle/>
+                    <a:p>
+                      <a:pPr indent="0" marL="0">
+                        <a:buNone/>
+                      </a:pPr>
+                      <a:r>
+                        <a:rPr lang="en-US" sz="1100" dirty="0">
+                          <a:solidFill>
+                            <a:srgbClr val="1F2328"/>
+                          </a:solidFill>
+                          <a:latin typeface="Malgun Gothic" pitchFamily="34" charset="0"/>
+                          <a:ea typeface="Malgun Gothic" pitchFamily="34" charset="-122"/>
+                          <a:cs typeface="Malgun Gothic" pitchFamily="34" charset="-120"/>
+                        </a:rPr>
+                        <a:t>−11.1%</a:t>
+                      </a:r>
+                      <a:endParaRPr lang="en-US" sz="1100" dirty="0">
+                        <a:latin typeface="Malgun Gothic" charset="0"/>
+                        <a:ea typeface="Malgun Gothic" charset="0"/>
+                        <a:cs typeface="Malgun Gothic" charset="0"/>
+                      </a:endParaRPr>
+                    </a:p>
+                  </a:txBody>
+                  <a:tcPr marL="76200" marR="76200" marT="38100" marB="38100" anchor="ctr">
+                    <a:lnL w="6350" cap="flat" cmpd="sng" algn="ctr">
+                      <a:solidFill>
+                        <a:srgbClr val="D9DCE3"/>
+                      </a:solidFill>
+                      <a:prstDash val="solid"/>
+                      <a:round/>
+                      <a:headEnd type="none" w="med" len="med"/>
+                      <a:tailEnd type="none" w="med" len="med"/>
+                    </a:lnL>
+                    <a:lnR w="6350" cap="flat" cmpd="sng" algn="ctr">
+                      <a:solidFill>
+                        <a:srgbClr val="D9DCE3"/>
+                      </a:solidFill>
+                      <a:prstDash val="solid"/>
+                      <a:round/>
+                      <a:headEnd type="none" w="med" len="med"/>
+                      <a:tailEnd type="none" w="med" len="med"/>
+                    </a:lnR>
+                    <a:lnT w="6350" cap="flat" cmpd="sng" algn="ctr">
+                      <a:solidFill>
+                        <a:srgbClr val="D9DCE3"/>
+                      </a:solidFill>
+                      <a:prstDash val="solid"/>
+                      <a:round/>
+                      <a:headEnd type="none" w="med" len="med"/>
+                      <a:tailEnd type="none" w="med" len="med"/>
+                    </a:lnT>
+                    <a:lnB w="6350" cap="flat" cmpd="sng" algn="ctr">
+                      <a:solidFill>
+                        <a:srgbClr val="D9DCE3"/>
+                      </a:solidFill>
+                      <a:prstDash val="solid"/>
+                      <a:round/>
+                      <a:headEnd type="none" w="med" len="med"/>
+                      <a:tailEnd type="none" w="med" len="med"/>
+                    </a:lnB>
+                    <a:solidFill>
+                      <a:srgbClr val="F2F4F8"/>
+                    </a:solidFill>
+                  </a:tcPr>
+                </a:tc>
+              </a:tr>
+              <a:tr h="274320">
+                <a:tc>
+                  <a:txBody>
+                    <a:bodyPr/>
+                    <a:lstStyle/>
+                    <a:p>
+                      <a:pPr indent="0" marL="0">
+                        <a:buNone/>
+                      </a:pPr>
+                      <a:r>
+                        <a:rPr lang="en-US" sz="1100" dirty="0">
+                          <a:solidFill>
+                            <a:srgbClr val="1F2328"/>
+                          </a:solidFill>
+                          <a:latin typeface="Malgun Gothic" pitchFamily="34" charset="0"/>
+                          <a:ea typeface="Malgun Gothic" pitchFamily="34" charset="-122"/>
+                          <a:cs typeface="Malgun Gothic" pitchFamily="34" charset="-120"/>
+                        </a:rPr>
+                        <a:t>화곡동 1016-19 4층</a:t>
+                      </a:r>
+                      <a:endParaRPr lang="en-US" sz="1100" dirty="0">
+                        <a:latin typeface="Malgun Gothic" charset="0"/>
+                        <a:ea typeface="Malgun Gothic" charset="0"/>
+                        <a:cs typeface="Malgun Gothic" charset="0"/>
+                      </a:endParaRPr>
+                    </a:p>
+                  </a:txBody>
+                  <a:tcPr marL="76200" marR="76200" marT="38100" marB="38100" anchor="ctr">
+                    <a:lnL w="6350" cap="flat" cmpd="sng" algn="ctr">
+                      <a:solidFill>
+                        <a:srgbClr val="D9DCE3"/>
+                      </a:solidFill>
+                      <a:prstDash val="solid"/>
+                      <a:round/>
+                      <a:headEnd type="none" w="med" len="med"/>
+                      <a:tailEnd type="none" w="med" len="med"/>
+                    </a:lnL>
+                    <a:lnR w="6350" cap="flat" cmpd="sng" algn="ctr">
+                      <a:solidFill>
+                        <a:srgbClr val="D9DCE3"/>
+                      </a:solidFill>
+                      <a:prstDash val="solid"/>
+                      <a:round/>
+                      <a:headEnd type="none" w="med" len="med"/>
+                      <a:tailEnd type="none" w="med" len="med"/>
+                    </a:lnR>
+                    <a:lnT w="6350" cap="flat" cmpd="sng" algn="ctr">
+                      <a:solidFill>
+                        <a:srgbClr val="D9DCE3"/>
+                      </a:solidFill>
+                      <a:prstDash val="solid"/>
+                      <a:round/>
+                      <a:headEnd type="none" w="med" len="med"/>
+                      <a:tailEnd type="none" w="med" len="med"/>
+                    </a:lnT>
+                    <a:lnB w="6350" cap="flat" cmpd="sng" algn="ctr">
+                      <a:solidFill>
+                        <a:srgbClr val="D9DCE3"/>
+                      </a:solidFill>
+                      <a:prstDash val="solid"/>
+                      <a:round/>
+                      <a:headEnd type="none" w="med" len="med"/>
+                      <a:tailEnd type="none" w="med" len="med"/>
+                    </a:lnB>
+                    <a:solidFill>
+                      <a:srgbClr val="FFFFFF"/>
+                    </a:solidFill>
+                  </a:tcPr>
+                </a:tc>
+                <a:tc>
+                  <a:txBody>
+                    <a:bodyPr/>
+                    <a:lstStyle/>
+                    <a:p>
+                      <a:pPr indent="0" marL="0">
+                        <a:buNone/>
+                      </a:pPr>
+                      <a:r>
+                        <a:rPr lang="en-US" sz="1100" dirty="0">
+                          <a:solidFill>
+                            <a:srgbClr val="1F2328"/>
+                          </a:solidFill>
+                          <a:latin typeface="Malgun Gothic" pitchFamily="34" charset="0"/>
+                          <a:ea typeface="Malgun Gothic" pitchFamily="34" charset="-122"/>
+                          <a:cs typeface="Malgun Gothic" pitchFamily="34" charset="-120"/>
+                        </a:rPr>
+                        <a:t>중개 2026-08</a:t>
+                      </a:r>
+                      <a:endParaRPr lang="en-US" sz="1100" dirty="0">
+                        <a:latin typeface="Malgun Gothic" charset="0"/>
+                        <a:ea typeface="Malgun Gothic" charset="0"/>
+                        <a:cs typeface="Malgun Gothic" charset="0"/>
+                      </a:endParaRPr>
+                    </a:p>
+                  </a:txBody>
+                  <a:tcPr marL="76200" marR="76200" marT="38100" marB="38100" anchor="ctr">
+                    <a:lnL w="6350" cap="flat" cmpd="sng" algn="ctr">
+                      <a:solidFill>
+                        <a:srgbClr val="D9DCE3"/>
+                      </a:solidFill>
+                      <a:prstDash val="solid"/>
+                      <a:round/>
+                      <a:headEnd type="none" w="med" len="med"/>
+                      <a:tailEnd type="none" w="med" len="med"/>
+                    </a:lnL>
+                    <a:lnR w="6350" cap="flat" cmpd="sng" algn="ctr">
+                      <a:solidFill>
+                        <a:srgbClr val="D9DCE3"/>
+                      </a:solidFill>
+                      <a:prstDash val="solid"/>
+                      <a:round/>
+                      <a:headEnd type="none" w="med" len="med"/>
+                      <a:tailEnd type="none" w="med" len="med"/>
+                    </a:lnR>
+                    <a:lnT w="6350" cap="flat" cmpd="sng" algn="ctr">
+                      <a:solidFill>
+                        <a:srgbClr val="D9DCE3"/>
+                      </a:solidFill>
+                      <a:prstDash val="solid"/>
+                      <a:round/>
+                      <a:headEnd type="none" w="med" len="med"/>
+                      <a:tailEnd type="none" w="med" len="med"/>
+                    </a:lnT>
+                    <a:lnB w="6350" cap="flat" cmpd="sng" algn="ctr">
+                      <a:solidFill>
+                        <a:srgbClr val="D9DCE3"/>
+                      </a:solidFill>
+                      <a:prstDash val="solid"/>
+                      <a:round/>
+                      <a:headEnd type="none" w="med" len="med"/>
+                      <a:tailEnd type="none" w="med" len="med"/>
+                    </a:lnB>
+                    <a:solidFill>
+                      <a:srgbClr val="FFFFFF"/>
+                    </a:solidFill>
+                  </a:tcPr>
+                </a:tc>
+                <a:tc>
+                  <a:txBody>
+                    <a:bodyPr/>
+                    <a:lstStyle/>
+                    <a:p>
+                      <a:pPr indent="0" marL="0">
+                        <a:buNone/>
+                      </a:pPr>
+                      <a:r>
+                        <a:rPr lang="en-US" sz="1100" dirty="0">
+                          <a:solidFill>
+                            <a:srgbClr val="1F2328"/>
+                          </a:solidFill>
+                          <a:latin typeface="Malgun Gothic" pitchFamily="34" charset="0"/>
+                          <a:ea typeface="Malgun Gothic" pitchFamily="34" charset="-122"/>
+                          <a:cs typeface="Malgun Gothic" pitchFamily="34" charset="-120"/>
+                        </a:rPr>
+                        <a:t>2.70억</a:t>
+                      </a:r>
+                      <a:endParaRPr lang="en-US" sz="1100" dirty="0">
+                        <a:latin typeface="Malgun Gothic" charset="0"/>
+                        <a:ea typeface="Malgun Gothic" charset="0"/>
+                        <a:cs typeface="Malgun Gothic" charset="0"/>
+                      </a:endParaRPr>
+                    </a:p>
+                  </a:txBody>
+                  <a:tcPr marL="76200" marR="76200" marT="38100" marB="38100" anchor="ctr">
+                    <a:lnL w="6350" cap="flat" cmpd="sng" algn="ctr">
+                      <a:solidFill>
+                        <a:srgbClr val="D9DCE3"/>
+                      </a:solidFill>
+                      <a:prstDash val="solid"/>
+                      <a:round/>
+                      <a:headEnd type="none" w="med" len="med"/>
+                      <a:tailEnd type="none" w="med" len="med"/>
+                    </a:lnL>
+                    <a:lnR w="6350" cap="flat" cmpd="sng" algn="ctr">
+                      <a:solidFill>
+                        <a:srgbClr val="D9DCE3"/>
+                      </a:solidFill>
+                      <a:prstDash val="solid"/>
+                      <a:round/>
+                      <a:headEnd type="none" w="med" len="med"/>
+                      <a:tailEnd type="none" w="med" len="med"/>
+                    </a:lnR>
+                    <a:lnT w="6350" cap="flat" cmpd="sng" algn="ctr">
+                      <a:solidFill>
+                        <a:srgbClr val="D9DCE3"/>
+                      </a:solidFill>
+                      <a:prstDash val="solid"/>
+                      <a:round/>
+                      <a:headEnd type="none" w="med" len="med"/>
+                      <a:tailEnd type="none" w="med" len="med"/>
+                    </a:lnT>
+                    <a:lnB w="6350" cap="flat" cmpd="sng" algn="ctr">
+                      <a:solidFill>
+                        <a:srgbClr val="D9DCE3"/>
+                      </a:solidFill>
+                      <a:prstDash val="solid"/>
+                      <a:round/>
+                      <a:headEnd type="none" w="med" len="med"/>
+                      <a:tailEnd type="none" w="med" len="med"/>
+                    </a:lnB>
+                    <a:solidFill>
+                      <a:srgbClr val="FFFFFF"/>
+                    </a:solidFill>
+                  </a:tcPr>
+                </a:tc>
+                <a:tc>
+                  <a:txBody>
+                    <a:bodyPr/>
+                    <a:lstStyle/>
+                    <a:p>
+                      <a:pPr indent="0" marL="0">
+                        <a:buNone/>
+                      </a:pPr>
+                      <a:r>
+                        <a:rPr lang="en-US" sz="1100" dirty="0">
+                          <a:solidFill>
+                            <a:srgbClr val="1F2328"/>
+                          </a:solidFill>
+                          <a:latin typeface="Malgun Gothic" pitchFamily="34" charset="0"/>
+                          <a:ea typeface="Malgun Gothic" pitchFamily="34" charset="-122"/>
+                          <a:cs typeface="Malgun Gothic" pitchFamily="34" charset="-120"/>
+                        </a:rPr>
+                        <a:t>2.97억 (0.69)</a:t>
+                      </a:r>
+                      <a:endParaRPr lang="en-US" sz="1100" dirty="0">
+                        <a:latin typeface="Malgun Gothic" charset="0"/>
+                        <a:ea typeface="Malgun Gothic" charset="0"/>
+                        <a:cs typeface="Malgun Gothic" charset="0"/>
+                      </a:endParaRPr>
+                    </a:p>
+                  </a:txBody>
+                  <a:tcPr marL="76200" marR="76200" marT="38100" marB="38100" anchor="ctr">
+                    <a:lnL w="6350" cap="flat" cmpd="sng" algn="ctr">
+                      <a:solidFill>
+                        <a:srgbClr val="D9DCE3"/>
+                      </a:solidFill>
+                      <a:prstDash val="solid"/>
+                      <a:round/>
+                      <a:headEnd type="none" w="med" len="med"/>
+                      <a:tailEnd type="none" w="med" len="med"/>
+                    </a:lnL>
+                    <a:lnR w="6350" cap="flat" cmpd="sng" algn="ctr">
+                      <a:solidFill>
+                        <a:srgbClr val="D9DCE3"/>
+                      </a:solidFill>
+                      <a:prstDash val="solid"/>
+                      <a:round/>
+                      <a:headEnd type="none" w="med" len="med"/>
+                      <a:tailEnd type="none" w="med" len="med"/>
+                    </a:lnR>
+                    <a:lnT w="6350" cap="flat" cmpd="sng" algn="ctr">
+                      <a:solidFill>
+                        <a:srgbClr val="D9DCE3"/>
+                      </a:solidFill>
+                      <a:prstDash val="solid"/>
+                      <a:round/>
+                      <a:headEnd type="none" w="med" len="med"/>
+                      <a:tailEnd type="none" w="med" len="med"/>
+                    </a:lnT>
+                    <a:lnB w="6350" cap="flat" cmpd="sng" algn="ctr">
+                      <a:solidFill>
+                        <a:srgbClr val="D9DCE3"/>
+                      </a:solidFill>
+                      <a:prstDash val="solid"/>
+                      <a:round/>
+                      <a:headEnd type="none" w="med" len="med"/>
+                      <a:tailEnd type="none" w="med" len="med"/>
+                    </a:lnB>
+                    <a:solidFill>
+                      <a:srgbClr val="FFFFFF"/>
+                    </a:solidFill>
+                  </a:tcPr>
+                </a:tc>
+                <a:tc>
+                  <a:txBody>
+                    <a:bodyPr/>
+                    <a:lstStyle/>
+                    <a:p>
+                      <a:pPr indent="0" marL="0">
+                        <a:buNone/>
+                      </a:pPr>
+                      <a:r>
+                        <a:rPr lang="en-US" sz="1100" dirty="0">
+                          <a:solidFill>
+                            <a:srgbClr val="1F2328"/>
+                          </a:solidFill>
+                          <a:latin typeface="Malgun Gothic" pitchFamily="34" charset="0"/>
+                          <a:ea typeface="Malgun Gothic" pitchFamily="34" charset="-122"/>
+                          <a:cs typeface="Malgun Gothic" pitchFamily="34" charset="-120"/>
+                        </a:rPr>
+                        <a:t>+9.9%</a:t>
+                      </a:r>
+                      <a:endParaRPr lang="en-US" sz="1100" dirty="0">
+                        <a:latin typeface="Malgun Gothic" charset="0"/>
+                        <a:ea typeface="Malgun Gothic" charset="0"/>
+                        <a:cs typeface="Malgun Gothic" charset="0"/>
+                      </a:endParaRPr>
+                    </a:p>
+                  </a:txBody>
+                  <a:tcPr marL="76200" marR="76200" marT="38100" marB="38100" anchor="ctr">
+                    <a:lnL w="6350" cap="flat" cmpd="sng" algn="ctr">
+                      <a:solidFill>
+                        <a:srgbClr val="D9DCE3"/>
+                      </a:solidFill>
+                      <a:prstDash val="solid"/>
+                      <a:round/>
+                      <a:headEnd type="none" w="med" len="med"/>
+                      <a:tailEnd type="none" w="med" len="med"/>
+                    </a:lnL>
+                    <a:lnR w="6350" cap="flat" cmpd="sng" algn="ctr">
+                      <a:solidFill>
+                        <a:srgbClr val="D9DCE3"/>
+                      </a:solidFill>
+                      <a:prstDash val="solid"/>
+                      <a:round/>
+                      <a:headEnd type="none" w="med" len="med"/>
+                      <a:tailEnd type="none" w="med" len="med"/>
+                    </a:lnR>
+                    <a:lnT w="6350" cap="flat" cmpd="sng" algn="ctr">
+                      <a:solidFill>
+                        <a:srgbClr val="D9DCE3"/>
+                      </a:solidFill>
+                      <a:prstDash val="solid"/>
+                      <a:round/>
+                      <a:headEnd type="none" w="med" len="med"/>
+                      <a:tailEnd type="none" w="med" len="med"/>
+                    </a:lnT>
+                    <a:lnB w="6350" cap="flat" cmpd="sng" algn="ctr">
+                      <a:solidFill>
+                        <a:srgbClr val="D9DCE3"/>
+                      </a:solidFill>
+                      <a:prstDash val="solid"/>
+                      <a:round/>
+                      <a:headEnd type="none" w="med" len="med"/>
+                      <a:tailEnd type="none" w="med" len="med"/>
+                    </a:lnB>
+                    <a:solidFill>
+                      <a:srgbClr val="FFFFFF"/>
+                    </a:solidFill>
+                  </a:tcPr>
+                </a:tc>
+              </a:tr>
+              <a:tr h="274320">
+                <a:tc>
+                  <a:txBody>
+                    <a:bodyPr/>
+                    <a:lstStyle/>
+                    <a:p>
+                      <a:pPr indent="0" marL="0">
+                        <a:buNone/>
+                      </a:pPr>
+                      <a:r>
+                        <a:rPr lang="en-US" sz="1100" dirty="0">
+                          <a:solidFill>
+                            <a:srgbClr val="1F2328"/>
+                          </a:solidFill>
+                          <a:latin typeface="Malgun Gothic" pitchFamily="34" charset="0"/>
+                          <a:ea typeface="Malgun Gothic" pitchFamily="34" charset="-122"/>
+                          <a:cs typeface="Malgun Gothic" pitchFamily="34" charset="-120"/>
+                        </a:rPr>
+                        <a:t>봉천동 218-42 1층</a:t>
+                      </a:r>
+                      <a:endParaRPr lang="en-US" sz="1100" dirty="0">
+                        <a:latin typeface="Malgun Gothic" charset="0"/>
+                        <a:ea typeface="Malgun Gothic" charset="0"/>
+                        <a:cs typeface="Malgun Gothic" charset="0"/>
+                      </a:endParaRPr>
+                    </a:p>
+                  </a:txBody>
+                  <a:tcPr marL="76200" marR="76200" marT="38100" marB="38100" anchor="ctr">
+                    <a:lnL w="6350" cap="flat" cmpd="sng" algn="ctr">
+                      <a:solidFill>
+                        <a:srgbClr val="D9DCE3"/>
+                      </a:solidFill>
+                      <a:prstDash val="solid"/>
+                      <a:round/>
+                      <a:headEnd type="none" w="med" len="med"/>
+                      <a:tailEnd type="none" w="med" len="med"/>
+                    </a:lnL>
+                    <a:lnR w="6350" cap="flat" cmpd="sng" algn="ctr">
+                      <a:solidFill>
+                        <a:srgbClr val="D9DCE3"/>
+                      </a:solidFill>
+                      <a:prstDash val="solid"/>
+                      <a:round/>
+                      <a:headEnd type="none" w="med" len="med"/>
+                      <a:tailEnd type="none" w="med" len="med"/>
+                    </a:lnR>
+                    <a:lnT w="6350" cap="flat" cmpd="sng" algn="ctr">
+                      <a:solidFill>
+                        <a:srgbClr val="D9DCE3"/>
+                      </a:solidFill>
+                      <a:prstDash val="solid"/>
+                      <a:round/>
+                      <a:headEnd type="none" w="med" len="med"/>
+                      <a:tailEnd type="none" w="med" len="med"/>
+                    </a:lnT>
+                    <a:lnB w="6350" cap="flat" cmpd="sng" algn="ctr">
+                      <a:solidFill>
+                        <a:srgbClr val="D9DCE3"/>
+                      </a:solidFill>
+                      <a:prstDash val="solid"/>
+                      <a:round/>
+                      <a:headEnd type="none" w="med" len="med"/>
+                      <a:tailEnd type="none" w="med" len="med"/>
+                    </a:lnB>
+                    <a:solidFill>
+                      <a:srgbClr val="F2F4F8"/>
+                    </a:solidFill>
+                  </a:tcPr>
+                </a:tc>
+                <a:tc>
+                  <a:txBody>
+                    <a:bodyPr/>
+                    <a:lstStyle/>
+                    <a:p>
+                      <a:pPr indent="0" marL="0">
+                        <a:buNone/>
+                      </a:pPr>
+                      <a:r>
+                        <a:rPr lang="en-US" sz="1100" dirty="0">
+                          <a:solidFill>
+                            <a:srgbClr val="1F2328"/>
+                          </a:solidFill>
+                          <a:latin typeface="Malgun Gothic" pitchFamily="34" charset="0"/>
+                          <a:ea typeface="Malgun Gothic" pitchFamily="34" charset="-122"/>
+                          <a:cs typeface="Malgun Gothic" pitchFamily="34" charset="-120"/>
+                        </a:rPr>
+                        <a:t>중개 2026-08</a:t>
+                      </a:r>
+                      <a:endParaRPr lang="en-US" sz="1100" dirty="0">
+                        <a:latin typeface="Malgun Gothic" charset="0"/>
+                        <a:ea typeface="Malgun Gothic" charset="0"/>
+                        <a:cs typeface="Malgun Gothic" charset="0"/>
+                      </a:endParaRPr>
+                    </a:p>
+                  </a:txBody>
+                  <a:tcPr marL="76200" marR="76200" marT="38100" marB="38100" anchor="ctr">
+                    <a:lnL w="6350" cap="flat" cmpd="sng" algn="ctr">
+                      <a:solidFill>
+                        <a:srgbClr val="D9DCE3"/>
+                      </a:solidFill>
+                      <a:prstDash val="solid"/>
+                      <a:round/>
+                      <a:headEnd type="none" w="med" len="med"/>
+                      <a:tailEnd type="none" w="med" len="med"/>
+                    </a:lnL>
+                    <a:lnR w="6350" cap="flat" cmpd="sng" algn="ctr">
+                      <a:solidFill>
+                        <a:srgbClr val="D9DCE3"/>
+                      </a:solidFill>
+                      <a:prstDash val="solid"/>
+                      <a:round/>
+                      <a:headEnd type="none" w="med" len="med"/>
+                      <a:tailEnd type="none" w="med" len="med"/>
+                    </a:lnR>
+                    <a:lnT w="6350" cap="flat" cmpd="sng" algn="ctr">
+                      <a:solidFill>
+                        <a:srgbClr val="D9DCE3"/>
+                      </a:solidFill>
+                      <a:prstDash val="solid"/>
+                      <a:round/>
+                      <a:headEnd type="none" w="med" len="med"/>
+                      <a:tailEnd type="none" w="med" len="med"/>
+                    </a:lnT>
+                    <a:lnB w="6350" cap="flat" cmpd="sng" algn="ctr">
+                      <a:solidFill>
+                        <a:srgbClr val="D9DCE3"/>
+                      </a:solidFill>
+                      <a:prstDash val="solid"/>
+                      <a:round/>
+                      <a:headEnd type="none" w="med" len="med"/>
+                      <a:tailEnd type="none" w="med" len="med"/>
+                    </a:lnB>
+                    <a:solidFill>
+                      <a:srgbClr val="F2F4F8"/>
+                    </a:solidFill>
+                  </a:tcPr>
+                </a:tc>
+                <a:tc>
+                  <a:txBody>
+                    <a:bodyPr/>
+                    <a:lstStyle/>
+                    <a:p>
+                      <a:pPr indent="0" marL="0">
+                        <a:buNone/>
+                      </a:pPr>
+                      <a:r>
+                        <a:rPr lang="en-US" sz="1100" dirty="0">
+                          <a:solidFill>
+                            <a:srgbClr val="1F2328"/>
+                          </a:solidFill>
+                          <a:latin typeface="Malgun Gothic" pitchFamily="34" charset="0"/>
+                          <a:ea typeface="Malgun Gothic" pitchFamily="34" charset="-122"/>
+                          <a:cs typeface="Malgun Gothic" pitchFamily="34" charset="-120"/>
+                        </a:rPr>
+                        <a:t>6.35억</a:t>
+                      </a:r>
+                      <a:endParaRPr lang="en-US" sz="1100" dirty="0">
+                        <a:latin typeface="Malgun Gothic" charset="0"/>
+                        <a:ea typeface="Malgun Gothic" charset="0"/>
+                        <a:cs typeface="Malgun Gothic" charset="0"/>
+                      </a:endParaRPr>
+                    </a:p>
+                  </a:txBody>
+                  <a:tcPr marL="76200" marR="76200" marT="38100" marB="38100" anchor="ctr">
+                    <a:lnL w="6350" cap="flat" cmpd="sng" algn="ctr">
+                      <a:solidFill>
+                        <a:srgbClr val="D9DCE3"/>
+                      </a:solidFill>
+                      <a:prstDash val="solid"/>
+                      <a:round/>
+                      <a:headEnd type="none" w="med" len="med"/>
+                      <a:tailEnd type="none" w="med" len="med"/>
+                    </a:lnL>
+                    <a:lnR w="6350" cap="flat" cmpd="sng" algn="ctr">
+                      <a:solidFill>
+                        <a:srgbClr val="D9DCE3"/>
+                      </a:solidFill>
+                      <a:prstDash val="solid"/>
+                      <a:round/>
+                      <a:headEnd type="none" w="med" len="med"/>
+                      <a:tailEnd type="none" w="med" len="med"/>
+                    </a:lnR>
+                    <a:lnT w="6350" cap="flat" cmpd="sng" algn="ctr">
+                      <a:solidFill>
+                        <a:srgbClr val="D9DCE3"/>
+                      </a:solidFill>
+                      <a:prstDash val="solid"/>
+                      <a:round/>
+                      <a:headEnd type="none" w="med" len="med"/>
+                      <a:tailEnd type="none" w="med" len="med"/>
+                    </a:lnT>
+                    <a:lnB w="6350" cap="flat" cmpd="sng" algn="ctr">
+                      <a:solidFill>
+                        <a:srgbClr val="D9DCE3"/>
+                      </a:solidFill>
+                      <a:prstDash val="solid"/>
+                      <a:round/>
+                      <a:headEnd type="none" w="med" len="med"/>
+                      <a:tailEnd type="none" w="med" len="med"/>
+                    </a:lnB>
+                    <a:solidFill>
+                      <a:srgbClr val="F2F4F8"/>
+                    </a:solidFill>
+                  </a:tcPr>
+                </a:tc>
+                <a:tc>
+                  <a:txBody>
+                    <a:bodyPr/>
+                    <a:lstStyle/>
+                    <a:p>
+                      <a:pPr indent="0" marL="0">
+                        <a:buNone/>
+                      </a:pPr>
+                      <a:r>
+                        <a:rPr lang="en-US" sz="1100" dirty="0">
+                          <a:solidFill>
+                            <a:srgbClr val="1F2328"/>
+                          </a:solidFill>
+                          <a:latin typeface="Malgun Gothic" pitchFamily="34" charset="0"/>
+                          <a:ea typeface="Malgun Gothic" pitchFamily="34" charset="-122"/>
+                          <a:cs typeface="Malgun Gothic" pitchFamily="34" charset="-120"/>
+                        </a:rPr>
+                        <a:t>5.93억 (0.88)</a:t>
+                      </a:r>
+                      <a:endParaRPr lang="en-US" sz="1100" dirty="0">
+                        <a:latin typeface="Malgun Gothic" charset="0"/>
+                        <a:ea typeface="Malgun Gothic" charset="0"/>
+                        <a:cs typeface="Malgun Gothic" charset="0"/>
+                      </a:endParaRPr>
+                    </a:p>
+                  </a:txBody>
+                  <a:tcPr marL="76200" marR="76200" marT="38100" marB="38100" anchor="ctr">
+                    <a:lnL w="6350" cap="flat" cmpd="sng" algn="ctr">
+                      <a:solidFill>
+                        <a:srgbClr val="D9DCE3"/>
+                      </a:solidFill>
+                      <a:prstDash val="solid"/>
+                      <a:round/>
+                      <a:headEnd type="none" w="med" len="med"/>
+                      <a:tailEnd type="none" w="med" len="med"/>
+                    </a:lnL>
+                    <a:lnR w="6350" cap="flat" cmpd="sng" algn="ctr">
+                      <a:solidFill>
+                        <a:srgbClr val="D9DCE3"/>
+                      </a:solidFill>
+                      <a:prstDash val="solid"/>
+                      <a:round/>
+                      <a:headEnd type="none" w="med" len="med"/>
+                      <a:tailEnd type="none" w="med" len="med"/>
+                    </a:lnR>
+                    <a:lnT w="6350" cap="flat" cmpd="sng" algn="ctr">
+                      <a:solidFill>
+                        <a:srgbClr val="D9DCE3"/>
+                      </a:solidFill>
+                      <a:prstDash val="solid"/>
+                      <a:round/>
+                      <a:headEnd type="none" w="med" len="med"/>
+                      <a:tailEnd type="none" w="med" len="med"/>
+                    </a:lnT>
+                    <a:lnB w="6350" cap="flat" cmpd="sng" algn="ctr">
+                      <a:solidFill>
+                        <a:srgbClr val="D9DCE3"/>
+                      </a:solidFill>
+                      <a:prstDash val="solid"/>
+                      <a:round/>
+                      <a:headEnd type="none" w="med" len="med"/>
+                      <a:tailEnd type="none" w="med" len="med"/>
+                    </a:lnB>
+                    <a:solidFill>
+                      <a:srgbClr val="F2F4F8"/>
+                    </a:solidFill>
+                  </a:tcPr>
+                </a:tc>
+                <a:tc>
+                  <a:txBody>
+                    <a:bodyPr/>
+                    <a:lstStyle/>
+                    <a:p>
+                      <a:pPr indent="0" marL="0">
+                        <a:buNone/>
+                      </a:pPr>
+                      <a:r>
+                        <a:rPr lang="en-US" sz="1100" dirty="0">
+                          <a:solidFill>
+                            <a:srgbClr val="1F2328"/>
+                          </a:solidFill>
+                          <a:latin typeface="Malgun Gothic" pitchFamily="34" charset="0"/>
+                          <a:ea typeface="Malgun Gothic" pitchFamily="34" charset="-122"/>
+                          <a:cs typeface="Malgun Gothic" pitchFamily="34" charset="-120"/>
+                        </a:rPr>
+                        <a:t>−6.6%</a:t>
+                      </a:r>
+                      <a:endParaRPr lang="en-US" sz="1100" dirty="0">
+                        <a:latin typeface="Malgun Gothic" charset="0"/>
+                        <a:ea typeface="Malgun Gothic" charset="0"/>
+                        <a:cs typeface="Malgun Gothic" charset="0"/>
+                      </a:endParaRPr>
+                    </a:p>
+                  </a:txBody>
+                  <a:tcPr marL="76200" marR="76200" marT="38100" marB="38100" anchor="ctr">
+                    <a:lnL w="6350" cap="flat" cmpd="sng" algn="ctr">
+                      <a:solidFill>
+                        <a:srgbClr val="D9DCE3"/>
+                      </a:solidFill>
+                      <a:prstDash val="solid"/>
+                      <a:round/>
+                      <a:headEnd type="none" w="med" len="med"/>
+                      <a:tailEnd type="none" w="med" len="med"/>
+                    </a:lnL>
+                    <a:lnR w="6350" cap="flat" cmpd="sng" algn="ctr">
+                      <a:solidFill>
+                        <a:srgbClr val="D9DCE3"/>
+                      </a:solidFill>
+                      <a:prstDash val="solid"/>
+                      <a:round/>
+                      <a:headEnd type="none" w="med" len="med"/>
+                      <a:tailEnd type="none" w="med" len="med"/>
+                    </a:lnR>
+                    <a:lnT w="6350" cap="flat" cmpd="sng" algn="ctr">
+                      <a:solidFill>
+                        <a:srgbClr val="D9DCE3"/>
+                      </a:solidFill>
+                      <a:prstDash val="solid"/>
+                      <a:round/>
+                      <a:headEnd type="none" w="med" len="med"/>
+                      <a:tailEnd type="none" w="med" len="med"/>
+                    </a:lnT>
+                    <a:lnB w="6350" cap="flat" cmpd="sng" algn="ctr">
+                      <a:solidFill>
+                        <a:srgbClr val="D9DCE3"/>
+                      </a:solidFill>
+                      <a:prstDash val="solid"/>
+                      <a:round/>
+                      <a:headEnd type="none" w="med" len="med"/>
+                      <a:tailEnd type="none" w="med" len="med"/>
+                    </a:lnB>
+                    <a:solidFill>
+                      <a:srgbClr val="F2F4F8"/>
+                    </a:solidFill>
+                  </a:tcPr>
+                </a:tc>
+              </a:tr>
+              <a:tr h="274320">
+                <a:tc>
+                  <a:txBody>
+                    <a:bodyPr/>
+                    <a:lstStyle/>
+                    <a:p>
+                      <a:pPr indent="0" marL="0">
+                        <a:buNone/>
+                      </a:pPr>
+                      <a:r>
+                        <a:rPr lang="en-US" sz="1100" dirty="0">
+                          <a:solidFill>
+                            <a:srgbClr val="1F2328"/>
+                          </a:solidFill>
+                          <a:latin typeface="Malgun Gothic" pitchFamily="34" charset="0"/>
+                          <a:ea typeface="Malgun Gothic" pitchFamily="34" charset="-122"/>
+                          <a:cs typeface="Malgun Gothic" pitchFamily="34" charset="-120"/>
+                        </a:rPr>
+                        <a:t>신림동 98-242 3층</a:t>
+                      </a:r>
+                      <a:endParaRPr lang="en-US" sz="1100" dirty="0">
+                        <a:latin typeface="Malgun Gothic" charset="0"/>
+                        <a:ea typeface="Malgun Gothic" charset="0"/>
+                        <a:cs typeface="Malgun Gothic" charset="0"/>
+                      </a:endParaRPr>
+                    </a:p>
+                  </a:txBody>
+                  <a:tcPr marL="76200" marR="76200" marT="38100" marB="38100" anchor="ctr">
+                    <a:lnL w="6350" cap="flat" cmpd="sng" algn="ctr">
+                      <a:solidFill>
+                        <a:srgbClr val="D9DCE3"/>
+                      </a:solidFill>
+                      <a:prstDash val="solid"/>
+                      <a:round/>
+                      <a:headEnd type="none" w="med" len="med"/>
+                      <a:tailEnd type="none" w="med" len="med"/>
+                    </a:lnL>
+                    <a:lnR w="6350" cap="flat" cmpd="sng" algn="ctr">
+                      <a:solidFill>
+                        <a:srgbClr val="D9DCE3"/>
+                      </a:solidFill>
+                      <a:prstDash val="solid"/>
+                      <a:round/>
+                      <a:headEnd type="none" w="med" len="med"/>
+                      <a:tailEnd type="none" w="med" len="med"/>
+                    </a:lnR>
+                    <a:lnT w="6350" cap="flat" cmpd="sng" algn="ctr">
+                      <a:solidFill>
+                        <a:srgbClr val="D9DCE3"/>
+                      </a:solidFill>
+                      <a:prstDash val="solid"/>
+                      <a:round/>
+                      <a:headEnd type="none" w="med" len="med"/>
+                      <a:tailEnd type="none" w="med" len="med"/>
+                    </a:lnT>
+                    <a:lnB w="6350" cap="flat" cmpd="sng" algn="ctr">
+                      <a:solidFill>
+                        <a:srgbClr val="D9DCE3"/>
+                      </a:solidFill>
+                      <a:prstDash val="solid"/>
+                      <a:round/>
+                      <a:headEnd type="none" w="med" len="med"/>
+                      <a:tailEnd type="none" w="med" len="med"/>
+                    </a:lnB>
+                    <a:solidFill>
+                      <a:srgbClr val="FFFFFF"/>
+                    </a:solidFill>
+                  </a:tcPr>
+                </a:tc>
+                <a:tc>
+                  <a:txBody>
+                    <a:bodyPr/>
+                    <a:lstStyle/>
+                    <a:p>
+                      <a:pPr indent="0" marL="0">
+                        <a:buNone/>
+                      </a:pPr>
+                      <a:r>
+                        <a:rPr lang="en-US" sz="1100" dirty="0">
+                          <a:solidFill>
+                            <a:srgbClr val="1F2328"/>
+                          </a:solidFill>
+                          <a:latin typeface="Malgun Gothic" pitchFamily="34" charset="0"/>
+                          <a:ea typeface="Malgun Gothic" pitchFamily="34" charset="-122"/>
+                          <a:cs typeface="Malgun Gothic" pitchFamily="34" charset="-120"/>
+                        </a:rPr>
+                        <a:t>직거래 2026-05</a:t>
+                      </a:r>
+                      <a:endParaRPr lang="en-US" sz="1100" dirty="0">
+                        <a:latin typeface="Malgun Gothic" charset="0"/>
+                        <a:ea typeface="Malgun Gothic" charset="0"/>
+                        <a:cs typeface="Malgun Gothic" charset="0"/>
+                      </a:endParaRPr>
+                    </a:p>
+                  </a:txBody>
+                  <a:tcPr marL="76200" marR="76200" marT="38100" marB="38100" anchor="ctr">
+                    <a:lnL w="6350" cap="flat" cmpd="sng" algn="ctr">
+                      <a:solidFill>
+                        <a:srgbClr val="D9DCE3"/>
+                      </a:solidFill>
+                      <a:prstDash val="solid"/>
+                      <a:round/>
+                      <a:headEnd type="none" w="med" len="med"/>
+                      <a:tailEnd type="none" w="med" len="med"/>
+                    </a:lnL>
+                    <a:lnR w="6350" cap="flat" cmpd="sng" algn="ctr">
+                      <a:solidFill>
+                        <a:srgbClr val="D9DCE3"/>
+                      </a:solidFill>
+                      <a:prstDash val="solid"/>
+                      <a:round/>
+                      <a:headEnd type="none" w="med" len="med"/>
+                      <a:tailEnd type="none" w="med" len="med"/>
+                    </a:lnR>
+                    <a:lnT w="6350" cap="flat" cmpd="sng" algn="ctr">
+                      <a:solidFill>
+                        <a:srgbClr val="D9DCE3"/>
+                      </a:solidFill>
+                      <a:prstDash val="solid"/>
+                      <a:round/>
+                      <a:headEnd type="none" w="med" len="med"/>
+                      <a:tailEnd type="none" w="med" len="med"/>
+                    </a:lnT>
+                    <a:lnB w="6350" cap="flat" cmpd="sng" algn="ctr">
+                      <a:solidFill>
+                        <a:srgbClr val="D9DCE3"/>
+                      </a:solidFill>
+                      <a:prstDash val="solid"/>
+                      <a:round/>
+                      <a:headEnd type="none" w="med" len="med"/>
+                      <a:tailEnd type="none" w="med" len="med"/>
+                    </a:lnB>
+                    <a:solidFill>
+                      <a:srgbClr val="FFFFFF"/>
+                    </a:solidFill>
+                  </a:tcPr>
+                </a:tc>
+                <a:tc>
+                  <a:txBody>
+                    <a:bodyPr/>
+                    <a:lstStyle/>
+                    <a:p>
+                      <a:pPr indent="0" marL="0">
+                        <a:buNone/>
+                      </a:pPr>
+                      <a:r>
+                        <a:rPr lang="en-US" sz="1100" dirty="0">
+                          <a:solidFill>
+                            <a:srgbClr val="1F2328"/>
+                          </a:solidFill>
+                          <a:latin typeface="Malgun Gothic" pitchFamily="34" charset="0"/>
+                          <a:ea typeface="Malgun Gothic" pitchFamily="34" charset="-122"/>
+                          <a:cs typeface="Malgun Gothic" pitchFamily="34" charset="-120"/>
+                        </a:rPr>
+                        <a:t>1.20억</a:t>
+                      </a:r>
+                      <a:endParaRPr lang="en-US" sz="1100" dirty="0">
+                        <a:latin typeface="Malgun Gothic" charset="0"/>
+                        <a:ea typeface="Malgun Gothic" charset="0"/>
+                        <a:cs typeface="Malgun Gothic" charset="0"/>
+                      </a:endParaRPr>
+                    </a:p>
+                  </a:txBody>
+                  <a:tcPr marL="76200" marR="76200" marT="38100" marB="38100" anchor="ctr">
+                    <a:lnL w="6350" cap="flat" cmpd="sng" algn="ctr">
+                      <a:solidFill>
+                        <a:srgbClr val="D9DCE3"/>
+                      </a:solidFill>
+                      <a:prstDash val="solid"/>
+                      <a:round/>
+                      <a:headEnd type="none" w="med" len="med"/>
+                      <a:tailEnd type="none" w="med" len="med"/>
+                    </a:lnL>
+                    <a:lnR w="6350" cap="flat" cmpd="sng" algn="ctr">
+                      <a:solidFill>
+                        <a:srgbClr val="D9DCE3"/>
+                      </a:solidFill>
+                      <a:prstDash val="solid"/>
+                      <a:round/>
+                      <a:headEnd type="none" w="med" len="med"/>
+                      <a:tailEnd type="none" w="med" len="med"/>
+                    </a:lnR>
+                    <a:lnT w="6350" cap="flat" cmpd="sng" algn="ctr">
+                      <a:solidFill>
+                        <a:srgbClr val="D9DCE3"/>
+                      </a:solidFill>
+                      <a:prstDash val="solid"/>
+                      <a:round/>
+                      <a:headEnd type="none" w="med" len="med"/>
+                      <a:tailEnd type="none" w="med" len="med"/>
+                    </a:lnT>
+                    <a:lnB w="6350" cap="flat" cmpd="sng" algn="ctr">
+                      <a:solidFill>
+                        <a:srgbClr val="D9DCE3"/>
+                      </a:solidFill>
+                      <a:prstDash val="solid"/>
+                      <a:round/>
+                      <a:headEnd type="none" w="med" len="med"/>
+                      <a:tailEnd type="none" w="med" len="med"/>
+                    </a:lnB>
+                    <a:solidFill>
+                      <a:srgbClr val="FFFFFF"/>
+                    </a:solidFill>
+                  </a:tcPr>
+                </a:tc>
+                <a:tc>
+                  <a:txBody>
+                    <a:bodyPr/>
+                    <a:lstStyle/>
+                    <a:p>
+                      <a:pPr indent="0" marL="0">
+                        <a:buNone/>
+                      </a:pPr>
+                      <a:r>
+                        <a:rPr lang="en-US" sz="1100" dirty="0">
+                          <a:solidFill>
+                            <a:srgbClr val="1F2328"/>
+                          </a:solidFill>
+                          <a:latin typeface="Malgun Gothic" pitchFamily="34" charset="0"/>
+                          <a:ea typeface="Malgun Gothic" pitchFamily="34" charset="-122"/>
+                          <a:cs typeface="Malgun Gothic" pitchFamily="34" charset="-120"/>
+                        </a:rPr>
+                        <a:t>1.86억 (0.78)</a:t>
+                      </a:r>
+                      <a:endParaRPr lang="en-US" sz="1100" dirty="0">
+                        <a:latin typeface="Malgun Gothic" charset="0"/>
+                        <a:ea typeface="Malgun Gothic" charset="0"/>
+                        <a:cs typeface="Malgun Gothic" charset="0"/>
+                      </a:endParaRPr>
+                    </a:p>
+                  </a:txBody>
+                  <a:tcPr marL="76200" marR="76200" marT="38100" marB="38100" anchor="ctr">
+                    <a:lnL w="6350" cap="flat" cmpd="sng" algn="ctr">
+                      <a:solidFill>
+                        <a:srgbClr val="D9DCE3"/>
+                      </a:solidFill>
+                      <a:prstDash val="solid"/>
+                      <a:round/>
+                      <a:headEnd type="none" w="med" len="med"/>
+                      <a:tailEnd type="none" w="med" len="med"/>
+                    </a:lnL>
+                    <a:lnR w="6350" cap="flat" cmpd="sng" algn="ctr">
+                      <a:solidFill>
+                        <a:srgbClr val="D9DCE3"/>
+                      </a:solidFill>
+                      <a:prstDash val="solid"/>
+                      <a:round/>
+                      <a:headEnd type="none" w="med" len="med"/>
+                      <a:tailEnd type="none" w="med" len="med"/>
+                    </a:lnR>
+                    <a:lnT w="6350" cap="flat" cmpd="sng" algn="ctr">
+                      <a:solidFill>
+                        <a:srgbClr val="D9DCE3"/>
+                      </a:solidFill>
+                      <a:prstDash val="solid"/>
+                      <a:round/>
+                      <a:headEnd type="none" w="med" len="med"/>
+                      <a:tailEnd type="none" w="med" len="med"/>
+                    </a:lnT>
+                    <a:lnB w="6350" cap="flat" cmpd="sng" algn="ctr">
+                      <a:solidFill>
+                        <a:srgbClr val="D9DCE3"/>
+                      </a:solidFill>
+                      <a:prstDash val="solid"/>
+                      <a:round/>
+                      <a:headEnd type="none" w="med" len="med"/>
+                      <a:tailEnd type="none" w="med" len="med"/>
+                    </a:lnB>
+                    <a:solidFill>
+                      <a:srgbClr val="FFFFFF"/>
+                    </a:solidFill>
+                  </a:tcPr>
+                </a:tc>
+                <a:tc>
+                  <a:txBody>
+                    <a:bodyPr/>
+                    <a:lstStyle/>
+                    <a:p>
+                      <a:pPr indent="0" marL="0">
+                        <a:buNone/>
+                      </a:pPr>
+                      <a:r>
+                        <a:rPr lang="en-US" sz="1100" dirty="0">
+                          <a:solidFill>
+                            <a:srgbClr val="1F2328"/>
+                          </a:solidFill>
+                          <a:latin typeface="Malgun Gothic" pitchFamily="34" charset="0"/>
+                          <a:ea typeface="Malgun Gothic" pitchFamily="34" charset="-122"/>
+                          <a:cs typeface="Malgun Gothic" pitchFamily="34" charset="-120"/>
+                        </a:rPr>
+                        <a:t>+55.0%</a:t>
+                      </a:r>
+                      <a:endParaRPr lang="en-US" sz="1100" dirty="0">
+                        <a:latin typeface="Malgun Gothic" charset="0"/>
+                        <a:ea typeface="Malgun Gothic" charset="0"/>
+                        <a:cs typeface="Malgun Gothic" charset="0"/>
+                      </a:endParaRPr>
+                    </a:p>
+                  </a:txBody>
+                  <a:tcPr marL="76200" marR="76200" marT="38100" marB="38100" anchor="ctr">
+                    <a:lnL w="6350" cap="flat" cmpd="sng" algn="ctr">
+                      <a:solidFill>
+                        <a:srgbClr val="D9DCE3"/>
+                      </a:solidFill>
+                      <a:prstDash val="solid"/>
+                      <a:round/>
+                      <a:headEnd type="none" w="med" len="med"/>
+                      <a:tailEnd type="none" w="med" len="med"/>
+                    </a:lnL>
+                    <a:lnR w="6350" cap="flat" cmpd="sng" algn="ctr">
+                      <a:solidFill>
+                        <a:srgbClr val="D9DCE3"/>
+                      </a:solidFill>
+                      <a:prstDash val="solid"/>
+                      <a:round/>
+                      <a:headEnd type="none" w="med" len="med"/>
+                      <a:tailEnd type="none" w="med" len="med"/>
+                    </a:lnR>
+                    <a:lnT w="6350" cap="flat" cmpd="sng" algn="ctr">
+                      <a:solidFill>
+                        <a:srgbClr val="D9DCE3"/>
+                      </a:solidFill>
+                      <a:prstDash val="solid"/>
+                      <a:round/>
+                      <a:headEnd type="none" w="med" len="med"/>
+                      <a:tailEnd type="none" w="med" len="med"/>
+                    </a:lnT>
+                    <a:lnB w="6350" cap="flat" cmpd="sng" algn="ctr">
+                      <a:solidFill>
+                        <a:srgbClr val="D9DCE3"/>
+                      </a:solidFill>
+                      <a:prstDash val="solid"/>
+                      <a:round/>
+                      <a:headEnd type="none" w="med" len="med"/>
+                      <a:tailEnd type="none" w="med" len="med"/>
+                    </a:lnB>
+                    <a:solidFill>
+                      <a:srgbClr val="FFFFFF"/>
+                    </a:solidFill>
+                  </a:tcPr>
+                </a:tc>
+              </a:tr>
+              <a:tr h="274320">
+                <a:tc>
+                  <a:txBody>
+                    <a:bodyPr/>
+                    <a:lstStyle/>
+                    <a:p>
+                      <a:pPr indent="0" marL="0">
+                        <a:buNone/>
+                      </a:pPr>
+                      <a:r>
+                        <a:rPr lang="en-US" sz="1100" dirty="0">
+                          <a:solidFill>
+                            <a:srgbClr val="1F2328"/>
+                          </a:solidFill>
+                          <a:latin typeface="Malgun Gothic" pitchFamily="34" charset="0"/>
+                          <a:ea typeface="Malgun Gothic" pitchFamily="34" charset="-122"/>
+                          <a:cs typeface="Malgun Gothic" pitchFamily="34" charset="-120"/>
+                        </a:rPr>
+                        <a:t>신림동 409-184 3층</a:t>
+                      </a:r>
+                      <a:endParaRPr lang="en-US" sz="1100" dirty="0">
+                        <a:latin typeface="Malgun Gothic" charset="0"/>
+                        <a:ea typeface="Malgun Gothic" charset="0"/>
+                        <a:cs typeface="Malgun Gothic" charset="0"/>
+                      </a:endParaRPr>
+                    </a:p>
+                  </a:txBody>
+                  <a:tcPr marL="76200" marR="76200" marT="38100" marB="38100" anchor="ctr">
+                    <a:lnL w="6350" cap="flat" cmpd="sng" algn="ctr">
+                      <a:solidFill>
+                        <a:srgbClr val="D9DCE3"/>
+                      </a:solidFill>
+                      <a:prstDash val="solid"/>
+                      <a:round/>
+                      <a:headEnd type="none" w="med" len="med"/>
+                      <a:tailEnd type="none" w="med" len="med"/>
+                    </a:lnL>
+                    <a:lnR w="6350" cap="flat" cmpd="sng" algn="ctr">
+                      <a:solidFill>
+                        <a:srgbClr val="D9DCE3"/>
+                      </a:solidFill>
+                      <a:prstDash val="solid"/>
+                      <a:round/>
+                      <a:headEnd type="none" w="med" len="med"/>
+                      <a:tailEnd type="none" w="med" len="med"/>
+                    </a:lnR>
+                    <a:lnT w="6350" cap="flat" cmpd="sng" algn="ctr">
+                      <a:solidFill>
+                        <a:srgbClr val="D9DCE3"/>
+                      </a:solidFill>
+                      <a:prstDash val="solid"/>
+                      <a:round/>
+                      <a:headEnd type="none" w="med" len="med"/>
+                      <a:tailEnd type="none" w="med" len="med"/>
+                    </a:lnT>
+                    <a:lnB w="6350" cap="flat" cmpd="sng" algn="ctr">
+                      <a:solidFill>
+                        <a:srgbClr val="D9DCE3"/>
+                      </a:solidFill>
+                      <a:prstDash val="solid"/>
+                      <a:round/>
+                      <a:headEnd type="none" w="med" len="med"/>
+                      <a:tailEnd type="none" w="med" len="med"/>
+                    </a:lnB>
+                    <a:solidFill>
+                      <a:srgbClr val="F2F4F8"/>
+                    </a:solidFill>
+                  </a:tcPr>
+                </a:tc>
+                <a:tc>
+                  <a:txBody>
+                    <a:bodyPr/>
+                    <a:lstStyle/>
+                    <a:p>
+                      <a:pPr indent="0" marL="0">
+                        <a:buNone/>
+                      </a:pPr>
+                      <a:r>
+                        <a:rPr lang="en-US" sz="1100" dirty="0">
+                          <a:solidFill>
+                            <a:srgbClr val="1F2328"/>
+                          </a:solidFill>
+                          <a:latin typeface="Malgun Gothic" pitchFamily="34" charset="0"/>
+                          <a:ea typeface="Malgun Gothic" pitchFamily="34" charset="-122"/>
+                          <a:cs typeface="Malgun Gothic" pitchFamily="34" charset="-120"/>
+                        </a:rPr>
+                        <a:t>중개 2026-07</a:t>
+                      </a:r>
+                      <a:endParaRPr lang="en-US" sz="1100" dirty="0">
+                        <a:latin typeface="Malgun Gothic" charset="0"/>
+                        <a:ea typeface="Malgun Gothic" charset="0"/>
+                        <a:cs typeface="Malgun Gothic" charset="0"/>
+                      </a:endParaRPr>
+                    </a:p>
+                  </a:txBody>
+                  <a:tcPr marL="76200" marR="76200" marT="38100" marB="38100" anchor="ctr">
+                    <a:lnL w="6350" cap="flat" cmpd="sng" algn="ctr">
+                      <a:solidFill>
+                        <a:srgbClr val="D9DCE3"/>
+                      </a:solidFill>
+                      <a:prstDash val="solid"/>
+                      <a:round/>
+                      <a:headEnd type="none" w="med" len="med"/>
+                      <a:tailEnd type="none" w="med" len="med"/>
+                    </a:lnL>
+                    <a:lnR w="6350" cap="flat" cmpd="sng" algn="ctr">
+                      <a:solidFill>
+                        <a:srgbClr val="D9DCE3"/>
+                      </a:solidFill>
+                      <a:prstDash val="solid"/>
+                      <a:round/>
+                      <a:headEnd type="none" w="med" len="med"/>
+                      <a:tailEnd type="none" w="med" len="med"/>
+                    </a:lnR>
+                    <a:lnT w="6350" cap="flat" cmpd="sng" algn="ctr">
+                      <a:solidFill>
+                        <a:srgbClr val="D9DCE3"/>
+                      </a:solidFill>
+                      <a:prstDash val="solid"/>
+                      <a:round/>
+                      <a:headEnd type="none" w="med" len="med"/>
+                      <a:tailEnd type="none" w="med" len="med"/>
+                    </a:lnT>
+                    <a:lnB w="6350" cap="flat" cmpd="sng" algn="ctr">
+                      <a:solidFill>
+                        <a:srgbClr val="D9DCE3"/>
+                      </a:solidFill>
+                      <a:prstDash val="solid"/>
+                      <a:round/>
+                      <a:headEnd type="none" w="med" len="med"/>
+                      <a:tailEnd type="none" w="med" len="med"/>
+                    </a:lnB>
+                    <a:solidFill>
+                      <a:srgbClr val="F2F4F8"/>
+                    </a:solidFill>
+                  </a:tcPr>
+                </a:tc>
+                <a:tc>
+                  <a:txBody>
+                    <a:bodyPr/>
+                    <a:lstStyle/>
+                    <a:p>
+                      <a:pPr indent="0" marL="0">
+                        <a:buNone/>
+                      </a:pPr>
+                      <a:r>
+                        <a:rPr lang="en-US" sz="1100" dirty="0">
+                          <a:solidFill>
+                            <a:srgbClr val="1F2328"/>
+                          </a:solidFill>
+                          <a:latin typeface="Malgun Gothic" pitchFamily="34" charset="0"/>
+                          <a:ea typeface="Malgun Gothic" pitchFamily="34" charset="-122"/>
+                          <a:cs typeface="Malgun Gothic" pitchFamily="34" charset="-120"/>
+                        </a:rPr>
+                        <a:t>3.75억</a:t>
+                      </a:r>
+                      <a:endParaRPr lang="en-US" sz="1100" dirty="0">
+                        <a:latin typeface="Malgun Gothic" charset="0"/>
+                        <a:ea typeface="Malgun Gothic" charset="0"/>
+                        <a:cs typeface="Malgun Gothic" charset="0"/>
+                      </a:endParaRPr>
+                    </a:p>
+                  </a:txBody>
+                  <a:tcPr marL="76200" marR="76200" marT="38100" marB="38100" anchor="ctr">
+                    <a:lnL w="6350" cap="flat" cmpd="sng" algn="ctr">
+                      <a:solidFill>
+                        <a:srgbClr val="D9DCE3"/>
+                      </a:solidFill>
+                      <a:prstDash val="solid"/>
+                      <a:round/>
+                      <a:headEnd type="none" w="med" len="med"/>
+                      <a:tailEnd type="none" w="med" len="med"/>
+                    </a:lnL>
+                    <a:lnR w="6350" cap="flat" cmpd="sng" algn="ctr">
+                      <a:solidFill>
+                        <a:srgbClr val="D9DCE3"/>
+                      </a:solidFill>
+                      <a:prstDash val="solid"/>
+                      <a:round/>
+                      <a:headEnd type="none" w="med" len="med"/>
+                      <a:tailEnd type="none" w="med" len="med"/>
+                    </a:lnR>
+                    <a:lnT w="6350" cap="flat" cmpd="sng" algn="ctr">
+                      <a:solidFill>
+                        <a:srgbClr val="D9DCE3"/>
+                      </a:solidFill>
+                      <a:prstDash val="solid"/>
+                      <a:round/>
+                      <a:headEnd type="none" w="med" len="med"/>
+                      <a:tailEnd type="none" w="med" len="med"/>
+                    </a:lnT>
+                    <a:lnB w="6350" cap="flat" cmpd="sng" algn="ctr">
+                      <a:solidFill>
+                        <a:srgbClr val="D9DCE3"/>
+                      </a:solidFill>
+                      <a:prstDash val="solid"/>
+                      <a:round/>
+                      <a:headEnd type="none" w="med" len="med"/>
+                      <a:tailEnd type="none" w="med" len="med"/>
+                    </a:lnB>
+                    <a:solidFill>
+                      <a:srgbClr val="F2F4F8"/>
+                    </a:solidFill>
+                  </a:tcPr>
+                </a:tc>
+                <a:tc>
+                  <a:txBody>
+                    <a:bodyPr/>
+                    <a:lstStyle/>
+                    <a:p>
+                      <a:pPr indent="0" marL="0">
+                        <a:buNone/>
+                      </a:pPr>
+                      <a:r>
+                        <a:rPr lang="en-US" sz="1100" dirty="0">
+                          <a:solidFill>
+                            <a:srgbClr val="1F2328"/>
+                          </a:solidFill>
+                          <a:latin typeface="Malgun Gothic" pitchFamily="34" charset="0"/>
+                          <a:ea typeface="Malgun Gothic" pitchFamily="34" charset="-122"/>
+                          <a:cs typeface="Malgun Gothic" pitchFamily="34" charset="-120"/>
+                        </a:rPr>
+                        <a:t>3.34억 (0.64)</a:t>
+                      </a:r>
+                      <a:endParaRPr lang="en-US" sz="1100" dirty="0">
+                        <a:latin typeface="Malgun Gothic" charset="0"/>
+                        <a:ea typeface="Malgun Gothic" charset="0"/>
+                        <a:cs typeface="Malgun Gothic" charset="0"/>
+                      </a:endParaRPr>
+                    </a:p>
+                  </a:txBody>
+                  <a:tcPr marL="76200" marR="76200" marT="38100" marB="38100" anchor="ctr">
+                    <a:lnL w="6350" cap="flat" cmpd="sng" algn="ctr">
+                      <a:solidFill>
+                        <a:srgbClr val="D9DCE3"/>
+                      </a:solidFill>
+                      <a:prstDash val="solid"/>
+                      <a:round/>
+                      <a:headEnd type="none" w="med" len="med"/>
+                      <a:tailEnd type="none" w="med" len="med"/>
+                    </a:lnL>
+                    <a:lnR w="6350" cap="flat" cmpd="sng" algn="ctr">
+                      <a:solidFill>
+                        <a:srgbClr val="D9DCE3"/>
+                      </a:solidFill>
+                      <a:prstDash val="solid"/>
+                      <a:round/>
+                      <a:headEnd type="none" w="med" len="med"/>
+                      <a:tailEnd type="none" w="med" len="med"/>
+                    </a:lnR>
+                    <a:lnT w="6350" cap="flat" cmpd="sng" algn="ctr">
+                      <a:solidFill>
+                        <a:srgbClr val="D9DCE3"/>
+                      </a:solidFill>
+                      <a:prstDash val="solid"/>
+                      <a:round/>
+                      <a:headEnd type="none" w="med" len="med"/>
+                      <a:tailEnd type="none" w="med" len="med"/>
+                    </a:lnT>
+                    <a:lnB w="6350" cap="flat" cmpd="sng" algn="ctr">
+                      <a:solidFill>
+                        <a:srgbClr val="D9DCE3"/>
+                      </a:solidFill>
+                      <a:prstDash val="solid"/>
+                      <a:round/>
+                      <a:headEnd type="none" w="med" len="med"/>
+                      <a:tailEnd type="none" w="med" len="med"/>
+                    </a:lnB>
+                    <a:solidFill>
+                      <a:srgbClr val="F2F4F8"/>
+                    </a:solidFill>
+                  </a:tcPr>
+                </a:tc>
+                <a:tc>
+                  <a:txBody>
+                    <a:bodyPr/>
+                    <a:lstStyle/>
+                    <a:p>
+                      <a:pPr indent="0" marL="0">
+                        <a:buNone/>
+                      </a:pPr>
+                      <a:r>
+                        <a:rPr lang="en-US" sz="1100" dirty="0">
+                          <a:solidFill>
+                            <a:srgbClr val="1F2328"/>
+                          </a:solidFill>
+                          <a:latin typeface="Malgun Gothic" pitchFamily="34" charset="0"/>
+                          <a:ea typeface="Malgun Gothic" pitchFamily="34" charset="-122"/>
+                          <a:cs typeface="Malgun Gothic" pitchFamily="34" charset="-120"/>
+                        </a:rPr>
+                        <a:t>−11.1%</a:t>
+                      </a:r>
+                      <a:endParaRPr lang="en-US" sz="1100" dirty="0">
+                        <a:latin typeface="Malgun Gothic" charset="0"/>
+                        <a:ea typeface="Malgun Gothic" charset="0"/>
+                        <a:cs typeface="Malgun Gothic" charset="0"/>
+                      </a:endParaRPr>
+                    </a:p>
+                  </a:txBody>
+                  <a:tcPr marL="76200" marR="76200" marT="38100" marB="38100" anchor="ctr">
+                    <a:lnL w="6350" cap="flat" cmpd="sng" algn="ctr">
+                      <a:solidFill>
+                        <a:srgbClr val="D9DCE3"/>
+                      </a:solidFill>
+                      <a:prstDash val="solid"/>
+                      <a:round/>
+                      <a:headEnd type="none" w="med" len="med"/>
+                      <a:tailEnd type="none" w="med" len="med"/>
+                    </a:lnL>
+                    <a:lnR w="6350" cap="flat" cmpd="sng" algn="ctr">
+                      <a:solidFill>
+                        <a:srgbClr val="D9DCE3"/>
+                      </a:solidFill>
+                      <a:prstDash val="solid"/>
+                      <a:round/>
+                      <a:headEnd type="none" w="med" len="med"/>
+                      <a:tailEnd type="none" w="med" len="med"/>
+                    </a:lnR>
+                    <a:lnT w="6350" cap="flat" cmpd="sng" algn="ctr">
+                      <a:solidFill>
+                        <a:srgbClr val="D9DCE3"/>
+                      </a:solidFill>
+                      <a:prstDash val="solid"/>
+                      <a:round/>
+                      <a:headEnd type="none" w="med" len="med"/>
+                      <a:tailEnd type="none" w="med" len="med"/>
+                    </a:lnT>
+                    <a:lnB w="6350" cap="flat" cmpd="sng" algn="ctr">
+                      <a:solidFill>
+                        <a:srgbClr val="D9DCE3"/>
+                      </a:solidFill>
+                      <a:prstDash val="solid"/>
+                      <a:round/>
+                      <a:headEnd type="none" w="med" len="med"/>
+                      <a:tailEnd type="none" w="med" len="med"/>
+                    </a:lnB>
+                    <a:solidFill>
+                      <a:srgbClr val="F2F4F8"/>
+                    </a:solidFill>
+                  </a:tcPr>
+                </a:tc>
+              </a:tr>
+              <a:tr h="274320">
+                <a:tc>
+                  <a:txBody>
+                    <a:bodyPr/>
+                    <a:lstStyle/>
+                    <a:p>
+                      <a:pPr indent="0" marL="0">
+                        <a:buNone/>
+                      </a:pPr>
+                      <a:r>
+                        <a:rPr lang="en-US" sz="1100" dirty="0">
+                          <a:solidFill>
+                            <a:srgbClr val="1F2328"/>
+                          </a:solidFill>
+                          <a:latin typeface="Malgun Gothic" pitchFamily="34" charset="0"/>
+                          <a:ea typeface="Malgun Gothic" pitchFamily="34" charset="-122"/>
+                          <a:cs typeface="Malgun Gothic" pitchFamily="34" charset="-120"/>
+                        </a:rPr>
+                        <a:t>개포동 1195-3 3층</a:t>
+                      </a:r>
+                      <a:endParaRPr lang="en-US" sz="1100" dirty="0">
+                        <a:latin typeface="Malgun Gothic" charset="0"/>
+                        <a:ea typeface="Malgun Gothic" charset="0"/>
+                        <a:cs typeface="Malgun Gothic" charset="0"/>
+                      </a:endParaRPr>
+                    </a:p>
+                  </a:txBody>
+                  <a:tcPr marL="76200" marR="76200" marT="38100" marB="38100" anchor="ctr">
+                    <a:lnL w="6350" cap="flat" cmpd="sng" algn="ctr">
+                      <a:solidFill>
+                        <a:srgbClr val="D9DCE3"/>
+                      </a:solidFill>
+                      <a:prstDash val="solid"/>
+                      <a:round/>
+                      <a:headEnd type="none" w="med" len="med"/>
+                      <a:tailEnd type="none" w="med" len="med"/>
+                    </a:lnL>
+                    <a:lnR w="6350" cap="flat" cmpd="sng" algn="ctr">
+                      <a:solidFill>
+                        <a:srgbClr val="D9DCE3"/>
+                      </a:solidFill>
+                      <a:prstDash val="solid"/>
+                      <a:round/>
+                      <a:headEnd type="none" w="med" len="med"/>
+                      <a:tailEnd type="none" w="med" len="med"/>
+                    </a:lnR>
+                    <a:lnT w="6350" cap="flat" cmpd="sng" algn="ctr">
+                      <a:solidFill>
+                        <a:srgbClr val="D9DCE3"/>
+                      </a:solidFill>
+                      <a:prstDash val="solid"/>
+                      <a:round/>
+                      <a:headEnd type="none" w="med" len="med"/>
+                      <a:tailEnd type="none" w="med" len="med"/>
+                    </a:lnT>
+                    <a:lnB w="6350" cap="flat" cmpd="sng" algn="ctr">
+                      <a:solidFill>
+                        <a:srgbClr val="D9DCE3"/>
+                      </a:solidFill>
+                      <a:prstDash val="solid"/>
+                      <a:round/>
+                      <a:headEnd type="none" w="med" len="med"/>
+                      <a:tailEnd type="none" w="med" len="med"/>
+                    </a:lnB>
+                    <a:solidFill>
+                      <a:srgbClr val="FFFFFF"/>
+                    </a:solidFill>
+                  </a:tcPr>
+                </a:tc>
+                <a:tc>
+                  <a:txBody>
+                    <a:bodyPr/>
+                    <a:lstStyle/>
+                    <a:p>
+                      <a:pPr indent="0" marL="0">
+                        <a:buNone/>
+                      </a:pPr>
+                      <a:r>
+                        <a:rPr lang="en-US" sz="1100" dirty="0">
+                          <a:solidFill>
+                            <a:srgbClr val="1F2328"/>
+                          </a:solidFill>
+                          <a:latin typeface="Malgun Gothic" pitchFamily="34" charset="0"/>
+                          <a:ea typeface="Malgun Gothic" pitchFamily="34" charset="-122"/>
+                          <a:cs typeface="Malgun Gothic" pitchFamily="34" charset="-120"/>
+                        </a:rPr>
+                        <a:t>중개 2026-08</a:t>
+                      </a:r>
+                      <a:endParaRPr lang="en-US" sz="1100" dirty="0">
+                        <a:latin typeface="Malgun Gothic" charset="0"/>
+                        <a:ea typeface="Malgun Gothic" charset="0"/>
+                        <a:cs typeface="Malgun Gothic" charset="0"/>
+                      </a:endParaRPr>
+                    </a:p>
+                  </a:txBody>
+                  <a:tcPr marL="76200" marR="76200" marT="38100" marB="38100" anchor="ctr">
+                    <a:lnL w="6350" cap="flat" cmpd="sng" algn="ctr">
+                      <a:solidFill>
+                        <a:srgbClr val="D9DCE3"/>
+                      </a:solidFill>
+                      <a:prstDash val="solid"/>
+                      <a:round/>
+                      <a:headEnd type="none" w="med" len="med"/>
+                      <a:tailEnd type="none" w="med" len="med"/>
+                    </a:lnL>
+                    <a:lnR w="6350" cap="flat" cmpd="sng" algn="ctr">
+                      <a:solidFill>
+                        <a:srgbClr val="D9DCE3"/>
+                      </a:solidFill>
+                      <a:prstDash val="solid"/>
+                      <a:round/>
+                      <a:headEnd type="none" w="med" len="med"/>
+                      <a:tailEnd type="none" w="med" len="med"/>
+                    </a:lnR>
+                    <a:lnT w="6350" cap="flat" cmpd="sng" algn="ctr">
+                      <a:solidFill>
+                        <a:srgbClr val="D9DCE3"/>
+                      </a:solidFill>
+                      <a:prstDash val="solid"/>
+                      <a:round/>
+                      <a:headEnd type="none" w="med" len="med"/>
+                      <a:tailEnd type="none" w="med" len="med"/>
+                    </a:lnT>
+                    <a:lnB w="6350" cap="flat" cmpd="sng" algn="ctr">
+                      <a:solidFill>
+                        <a:srgbClr val="D9DCE3"/>
+                      </a:solidFill>
+                      <a:prstDash val="solid"/>
+                      <a:round/>
+                      <a:headEnd type="none" w="med" len="med"/>
+                      <a:tailEnd type="none" w="med" len="med"/>
+                    </a:lnB>
+                    <a:solidFill>
+                      <a:srgbClr val="FFFFFF"/>
+                    </a:solidFill>
+                  </a:tcPr>
+                </a:tc>
+                <a:tc>
+                  <a:txBody>
+                    <a:bodyPr/>
+                    <a:lstStyle/>
+                    <a:p>
+                      <a:pPr indent="0" marL="0">
+                        <a:buNone/>
+                      </a:pPr>
+                      <a:r>
+                        <a:rPr lang="en-US" sz="1100" dirty="0">
+                          <a:solidFill>
+                            <a:srgbClr val="1F2328"/>
+                          </a:solidFill>
+                          <a:latin typeface="Malgun Gothic" pitchFamily="34" charset="0"/>
+                          <a:ea typeface="Malgun Gothic" pitchFamily="34" charset="-122"/>
+                          <a:cs typeface="Malgun Gothic" pitchFamily="34" charset="-120"/>
+                        </a:rPr>
+                        <a:t>5.78억</a:t>
+                      </a:r>
+                      <a:endParaRPr lang="en-US" sz="1100" dirty="0">
+                        <a:latin typeface="Malgun Gothic" charset="0"/>
+                        <a:ea typeface="Malgun Gothic" charset="0"/>
+                        <a:cs typeface="Malgun Gothic" charset="0"/>
+                      </a:endParaRPr>
+                    </a:p>
+                  </a:txBody>
+                  <a:tcPr marL="76200" marR="76200" marT="38100" marB="38100" anchor="ctr">
+                    <a:lnL w="6350" cap="flat" cmpd="sng" algn="ctr">
+                      <a:solidFill>
+                        <a:srgbClr val="D9DCE3"/>
+                      </a:solidFill>
+                      <a:prstDash val="solid"/>
+                      <a:round/>
+                      <a:headEnd type="none" w="med" len="med"/>
+                      <a:tailEnd type="none" w="med" len="med"/>
+                    </a:lnL>
+                    <a:lnR w="6350" cap="flat" cmpd="sng" algn="ctr">
+                      <a:solidFill>
+                        <a:srgbClr val="D9DCE3"/>
+                      </a:solidFill>
+                      <a:prstDash val="solid"/>
+                      <a:round/>
+                      <a:headEnd type="none" w="med" len="med"/>
+                      <a:tailEnd type="none" w="med" len="med"/>
+                    </a:lnR>
+                    <a:lnT w="6350" cap="flat" cmpd="sng" algn="ctr">
+                      <a:solidFill>
+                        <a:srgbClr val="D9DCE3"/>
+                      </a:solidFill>
+                      <a:prstDash val="solid"/>
+                      <a:round/>
+                      <a:headEnd type="none" w="med" len="med"/>
+                      <a:tailEnd type="none" w="med" len="med"/>
+                    </a:lnT>
+                    <a:lnB w="6350" cap="flat" cmpd="sng" algn="ctr">
+                      <a:solidFill>
+                        <a:srgbClr val="D9DCE3"/>
+                      </a:solidFill>
+                      <a:prstDash val="solid"/>
+                      <a:round/>
+                      <a:headEnd type="none" w="med" len="med"/>
+                      <a:tailEnd type="none" w="med" len="med"/>
+                    </a:lnB>
+                    <a:solidFill>
+                      <a:srgbClr val="FFFFFF"/>
+                    </a:solidFill>
+                  </a:tcPr>
+                </a:tc>
+                <a:tc>
+                  <a:txBody>
+                    <a:bodyPr/>
+                    <a:lstStyle/>
+                    <a:p>
+                      <a:pPr indent="0" marL="0">
+                        <a:buNone/>
+                      </a:pPr>
+                      <a:r>
+                        <a:rPr lang="en-US" sz="1100" dirty="0">
+                          <a:solidFill>
+                            <a:srgbClr val="1F2328"/>
+                          </a:solidFill>
+                          <a:latin typeface="Malgun Gothic" pitchFamily="34" charset="0"/>
+                          <a:ea typeface="Malgun Gothic" pitchFamily="34" charset="-122"/>
+                          <a:cs typeface="Malgun Gothic" pitchFamily="34" charset="-120"/>
+                        </a:rPr>
+                        <a:t>5.37억 (0.86)</a:t>
+                      </a:r>
+                      <a:endParaRPr lang="en-US" sz="1100" dirty="0">
+                        <a:latin typeface="Malgun Gothic" charset="0"/>
+                        <a:ea typeface="Malgun Gothic" charset="0"/>
+                        <a:cs typeface="Malgun Gothic" charset="0"/>
+                      </a:endParaRPr>
+                    </a:p>
+                  </a:txBody>
+                  <a:tcPr marL="76200" marR="76200" marT="38100" marB="38100" anchor="ctr">
+                    <a:lnL w="6350" cap="flat" cmpd="sng" algn="ctr">
+                      <a:solidFill>
+                        <a:srgbClr val="D9DCE3"/>
+                      </a:solidFill>
+                      <a:prstDash val="solid"/>
+                      <a:round/>
+                      <a:headEnd type="none" w="med" len="med"/>
+                      <a:tailEnd type="none" w="med" len="med"/>
+                    </a:lnL>
+                    <a:lnR w="6350" cap="flat" cmpd="sng" algn="ctr">
+                      <a:solidFill>
+                        <a:srgbClr val="D9DCE3"/>
+                      </a:solidFill>
+                      <a:prstDash val="solid"/>
+                      <a:round/>
+                      <a:headEnd type="none" w="med" len="med"/>
+                      <a:tailEnd type="none" w="med" len="med"/>
+                    </a:lnR>
+                    <a:lnT w="6350" cap="flat" cmpd="sng" algn="ctr">
+                      <a:solidFill>
+                        <a:srgbClr val="D9DCE3"/>
+                      </a:solidFill>
+                      <a:prstDash val="solid"/>
+                      <a:round/>
+                      <a:headEnd type="none" w="med" len="med"/>
+                      <a:tailEnd type="none" w="med" len="med"/>
+                    </a:lnT>
+                    <a:lnB w="6350" cap="flat" cmpd="sng" algn="ctr">
+                      <a:solidFill>
+                        <a:srgbClr val="D9DCE3"/>
+                      </a:solidFill>
+                      <a:prstDash val="solid"/>
+                      <a:round/>
+                      <a:headEnd type="none" w="med" len="med"/>
+                      <a:tailEnd type="none" w="med" len="med"/>
+                    </a:lnB>
+                    <a:solidFill>
+                      <a:srgbClr val="FFFFFF"/>
+                    </a:solidFill>
+                  </a:tcPr>
+                </a:tc>
+                <a:tc>
+                  <a:txBody>
+                    <a:bodyPr/>
+                    <a:lstStyle/>
+                    <a:p>
+                      <a:pPr indent="0" marL="0">
+                        <a:buNone/>
+                      </a:pPr>
+                      <a:r>
+                        <a:rPr lang="en-US" sz="1100" dirty="0">
+                          <a:solidFill>
+                            <a:srgbClr val="1F2328"/>
+                          </a:solidFill>
+                          <a:latin typeface="Malgun Gothic" pitchFamily="34" charset="0"/>
+                          <a:ea typeface="Malgun Gothic" pitchFamily="34" charset="-122"/>
+                          <a:cs typeface="Malgun Gothic" pitchFamily="34" charset="-120"/>
+                        </a:rPr>
+                        <a:t>−7.0%</a:t>
+                      </a:r>
+                      <a:endParaRPr lang="en-US" sz="1100" dirty="0">
+                        <a:latin typeface="Malgun Gothic" charset="0"/>
+                        <a:ea typeface="Malgun Gothic" charset="0"/>
+                        <a:cs typeface="Malgun Gothic" charset="0"/>
+                      </a:endParaRPr>
+                    </a:p>
+                  </a:txBody>
+                  <a:tcPr marL="76200" marR="76200" marT="38100" marB="38100" anchor="ctr">
+                    <a:lnL w="6350" cap="flat" cmpd="sng" algn="ctr">
+                      <a:solidFill>
+                        <a:srgbClr val="D9DCE3"/>
+                      </a:solidFill>
+                      <a:prstDash val="solid"/>
+                      <a:round/>
+                      <a:headEnd type="none" w="med" len="med"/>
+                      <a:tailEnd type="none" w="med" len="med"/>
+                    </a:lnL>
+                    <a:lnR w="6350" cap="flat" cmpd="sng" algn="ctr">
+                      <a:solidFill>
+                        <a:srgbClr val="D9DCE3"/>
+                      </a:solidFill>
+                      <a:prstDash val="solid"/>
+                      <a:round/>
+                      <a:headEnd type="none" w="med" len="med"/>
+                      <a:tailEnd type="none" w="med" len="med"/>
+                    </a:lnR>
+                    <a:lnT w="6350" cap="flat" cmpd="sng" algn="ctr">
+                      <a:solidFill>
+                        <a:srgbClr val="D9DCE3"/>
+                      </a:solidFill>
+                      <a:prstDash val="solid"/>
+                      <a:round/>
+                      <a:headEnd type="none" w="med" len="med"/>
+                      <a:tailEnd type="none" w="med" len="med"/>
+                    </a:lnT>
+                    <a:lnB w="6350" cap="flat" cmpd="sng" algn="ctr">
+                      <a:solidFill>
+                        <a:srgbClr val="D9DCE3"/>
+                      </a:solidFill>
+                      <a:prstDash val="solid"/>
+                      <a:round/>
+                      <a:headEnd type="none" w="med" len="med"/>
+                      <a:tailEnd type="none" w="med" len="med"/>
+                    </a:lnB>
+                    <a:solidFill>
+                      <a:srgbClr val="FFFFFF"/>
+                    </a:solidFill>
+                  </a:tcPr>
+                </a:tc>
+              </a:tr>
+              <a:tr h="274320">
+                <a:tc>
+                  <a:txBody>
+                    <a:bodyPr/>
+                    <a:lstStyle/>
+                    <a:p>
+                      <a:pPr indent="0" marL="0">
+                        <a:buNone/>
+                      </a:pPr>
+                      <a:r>
+                        <a:rPr lang="en-US" sz="1100" dirty="0">
+                          <a:solidFill>
+                            <a:srgbClr val="1F2328"/>
+                          </a:solidFill>
+                          <a:latin typeface="Malgun Gothic" pitchFamily="34" charset="0"/>
+                          <a:ea typeface="Malgun Gothic" pitchFamily="34" charset="-122"/>
+                          <a:cs typeface="Malgun Gothic" pitchFamily="34" charset="-120"/>
+                        </a:rPr>
+                        <a:t>청담동 69-19 2층</a:t>
+                      </a:r>
+                      <a:endParaRPr lang="en-US" sz="1100" dirty="0">
+                        <a:latin typeface="Malgun Gothic" charset="0"/>
+                        <a:ea typeface="Malgun Gothic" charset="0"/>
+                        <a:cs typeface="Malgun Gothic" charset="0"/>
+                      </a:endParaRPr>
+                    </a:p>
+                  </a:txBody>
+                  <a:tcPr marL="76200" marR="76200" marT="38100" marB="38100" anchor="ctr">
+                    <a:lnL w="6350" cap="flat" cmpd="sng" algn="ctr">
+                      <a:solidFill>
+                        <a:srgbClr val="D9DCE3"/>
+                      </a:solidFill>
+                      <a:prstDash val="solid"/>
+                      <a:round/>
+                      <a:headEnd type="none" w="med" len="med"/>
+                      <a:tailEnd type="none" w="med" len="med"/>
+                    </a:lnL>
+                    <a:lnR w="6350" cap="flat" cmpd="sng" algn="ctr">
+                      <a:solidFill>
+                        <a:srgbClr val="D9DCE3"/>
+                      </a:solidFill>
+                      <a:prstDash val="solid"/>
+                      <a:round/>
+                      <a:headEnd type="none" w="med" len="med"/>
+                      <a:tailEnd type="none" w="med" len="med"/>
+                    </a:lnR>
+                    <a:lnT w="6350" cap="flat" cmpd="sng" algn="ctr">
+                      <a:solidFill>
+                        <a:srgbClr val="D9DCE3"/>
+                      </a:solidFill>
+                      <a:prstDash val="solid"/>
+                      <a:round/>
+                      <a:headEnd type="none" w="med" len="med"/>
+                      <a:tailEnd type="none" w="med" len="med"/>
+                    </a:lnT>
+                    <a:lnB w="6350" cap="flat" cmpd="sng" algn="ctr">
+                      <a:solidFill>
+                        <a:srgbClr val="D9DCE3"/>
+                      </a:solidFill>
+                      <a:prstDash val="solid"/>
+                      <a:round/>
+                      <a:headEnd type="none" w="med" len="med"/>
+                      <a:tailEnd type="none" w="med" len="med"/>
+                    </a:lnB>
+                    <a:solidFill>
+                      <a:srgbClr val="F2F4F8"/>
+                    </a:solidFill>
+                  </a:tcPr>
+                </a:tc>
+                <a:tc>
+                  <a:txBody>
+                    <a:bodyPr/>
+                    <a:lstStyle/>
+                    <a:p>
+                      <a:pPr indent="0" marL="0">
+                        <a:buNone/>
+                      </a:pPr>
+                      <a:r>
+                        <a:rPr lang="en-US" sz="1100" dirty="0">
+                          <a:solidFill>
+                            <a:srgbClr val="1F2328"/>
+                          </a:solidFill>
+                          <a:latin typeface="Malgun Gothic" pitchFamily="34" charset="0"/>
+                          <a:ea typeface="Malgun Gothic" pitchFamily="34" charset="-122"/>
+                          <a:cs typeface="Malgun Gothic" pitchFamily="34" charset="-120"/>
+                        </a:rPr>
+                        <a:t>직거래 2026-04</a:t>
+                      </a:r>
+                      <a:endParaRPr lang="en-US" sz="1100" dirty="0">
+                        <a:latin typeface="Malgun Gothic" charset="0"/>
+                        <a:ea typeface="Malgun Gothic" charset="0"/>
+                        <a:cs typeface="Malgun Gothic" charset="0"/>
+                      </a:endParaRPr>
+                    </a:p>
+                  </a:txBody>
+                  <a:tcPr marL="76200" marR="76200" marT="38100" marB="38100" anchor="ctr">
+                    <a:lnL w="6350" cap="flat" cmpd="sng" algn="ctr">
+                      <a:solidFill>
+                        <a:srgbClr val="D9DCE3"/>
+                      </a:solidFill>
+                      <a:prstDash val="solid"/>
+                      <a:round/>
+                      <a:headEnd type="none" w="med" len="med"/>
+                      <a:tailEnd type="none" w="med" len="med"/>
+                    </a:lnL>
+                    <a:lnR w="6350" cap="flat" cmpd="sng" algn="ctr">
+                      <a:solidFill>
+                        <a:srgbClr val="D9DCE3"/>
+                      </a:solidFill>
+                      <a:prstDash val="solid"/>
+                      <a:round/>
+                      <a:headEnd type="none" w="med" len="med"/>
+                      <a:tailEnd type="none" w="med" len="med"/>
+                    </a:lnR>
+                    <a:lnT w="6350" cap="flat" cmpd="sng" algn="ctr">
+                      <a:solidFill>
+                        <a:srgbClr val="D9DCE3"/>
+                      </a:solidFill>
+                      <a:prstDash val="solid"/>
+                      <a:round/>
+                      <a:headEnd type="none" w="med" len="med"/>
+                      <a:tailEnd type="none" w="med" len="med"/>
+                    </a:lnT>
+                    <a:lnB w="6350" cap="flat" cmpd="sng" algn="ctr">
+                      <a:solidFill>
+                        <a:srgbClr val="D9DCE3"/>
+                      </a:solidFill>
+                      <a:prstDash val="solid"/>
+                      <a:round/>
+                      <a:headEnd type="none" w="med" len="med"/>
+                      <a:tailEnd type="none" w="med" len="med"/>
+                    </a:lnB>
+                    <a:solidFill>
+                      <a:srgbClr val="F2F4F8"/>
+                    </a:solidFill>
+                  </a:tcPr>
+                </a:tc>
+                <a:tc>
+                  <a:txBody>
+                    <a:bodyPr/>
+                    <a:lstStyle/>
+                    <a:p>
+                      <a:pPr indent="0" marL="0">
+                        <a:buNone/>
+                      </a:pPr>
+                      <a:r>
+                        <a:rPr lang="en-US" sz="1100" dirty="0">
+                          <a:solidFill>
+                            <a:srgbClr val="1F2328"/>
+                          </a:solidFill>
+                          <a:latin typeface="Malgun Gothic" pitchFamily="34" charset="0"/>
+                          <a:ea typeface="Malgun Gothic" pitchFamily="34" charset="-122"/>
+                          <a:cs typeface="Malgun Gothic" pitchFamily="34" charset="-120"/>
+                        </a:rPr>
+                        <a:t>3.87억</a:t>
+                      </a:r>
+                      <a:endParaRPr lang="en-US" sz="1100" dirty="0">
+                        <a:latin typeface="Malgun Gothic" charset="0"/>
+                        <a:ea typeface="Malgun Gothic" charset="0"/>
+                        <a:cs typeface="Malgun Gothic" charset="0"/>
+                      </a:endParaRPr>
+                    </a:p>
+                  </a:txBody>
+                  <a:tcPr marL="76200" marR="76200" marT="38100" marB="38100" anchor="ctr">
+                    <a:lnL w="6350" cap="flat" cmpd="sng" algn="ctr">
+                      <a:solidFill>
+                        <a:srgbClr val="D9DCE3"/>
+                      </a:solidFill>
+                      <a:prstDash val="solid"/>
+                      <a:round/>
+                      <a:headEnd type="none" w="med" len="med"/>
+                      <a:tailEnd type="none" w="med" len="med"/>
+                    </a:lnL>
+                    <a:lnR w="6350" cap="flat" cmpd="sng" algn="ctr">
+                      <a:solidFill>
+                        <a:srgbClr val="D9DCE3"/>
+                      </a:solidFill>
+                      <a:prstDash val="solid"/>
+                      <a:round/>
+                      <a:headEnd type="none" w="med" len="med"/>
+                      <a:tailEnd type="none" w="med" len="med"/>
+                    </a:lnR>
+                    <a:lnT w="6350" cap="flat" cmpd="sng" algn="ctr">
+                      <a:solidFill>
+                        <a:srgbClr val="D9DCE3"/>
+                      </a:solidFill>
+                      <a:prstDash val="solid"/>
+                      <a:round/>
+                      <a:headEnd type="none" w="med" len="med"/>
+                      <a:tailEnd type="none" w="med" len="med"/>
+                    </a:lnT>
+                    <a:lnB w="6350" cap="flat" cmpd="sng" algn="ctr">
+                      <a:solidFill>
+                        <a:srgbClr val="D9DCE3"/>
+                      </a:solidFill>
+                      <a:prstDash val="solid"/>
+                      <a:round/>
+                      <a:headEnd type="none" w="med" len="med"/>
+                      <a:tailEnd type="none" w="med" len="med"/>
+                    </a:lnB>
+                    <a:solidFill>
+                      <a:srgbClr val="F2F4F8"/>
+                    </a:solidFill>
+                  </a:tcPr>
+                </a:tc>
+                <a:tc>
+                  <a:txBody>
+                    <a:bodyPr/>
+                    <a:lstStyle/>
+                    <a:p>
+                      <a:pPr indent="0" marL="0">
+                        <a:buNone/>
+                      </a:pPr>
+                      <a:r>
+                        <a:rPr lang="en-US" sz="1100" dirty="0">
+                          <a:solidFill>
+                            <a:srgbClr val="1F2328"/>
+                          </a:solidFill>
+                          <a:latin typeface="Malgun Gothic" pitchFamily="34" charset="0"/>
+                          <a:ea typeface="Malgun Gothic" pitchFamily="34" charset="-122"/>
+                          <a:cs typeface="Malgun Gothic" pitchFamily="34" charset="-120"/>
+                        </a:rPr>
+                        <a:t>7.41억 (0.74)</a:t>
+                      </a:r>
+                      <a:endParaRPr lang="en-US" sz="1100" dirty="0">
+                        <a:latin typeface="Malgun Gothic" charset="0"/>
+                        <a:ea typeface="Malgun Gothic" charset="0"/>
+                        <a:cs typeface="Malgun Gothic" charset="0"/>
+                      </a:endParaRPr>
+                    </a:p>
+                  </a:txBody>
+                  <a:tcPr marL="76200" marR="76200" marT="38100" marB="38100" anchor="ctr">
+                    <a:lnL w="6350" cap="flat" cmpd="sng" algn="ctr">
+                      <a:solidFill>
+                        <a:srgbClr val="D9DCE3"/>
+                      </a:solidFill>
+                      <a:prstDash val="solid"/>
+                      <a:round/>
+                      <a:headEnd type="none" w="med" len="med"/>
+                      <a:tailEnd type="none" w="med" len="med"/>
+                    </a:lnL>
+                    <a:lnR w="6350" cap="flat" cmpd="sng" algn="ctr">
+                      <a:solidFill>
+                        <a:srgbClr val="D9DCE3"/>
+                      </a:solidFill>
+                      <a:prstDash val="solid"/>
+                      <a:round/>
+                      <a:headEnd type="none" w="med" len="med"/>
+                      <a:tailEnd type="none" w="med" len="med"/>
+                    </a:lnR>
+                    <a:lnT w="6350" cap="flat" cmpd="sng" algn="ctr">
+                      <a:solidFill>
+                        <a:srgbClr val="D9DCE3"/>
+                      </a:solidFill>
+                      <a:prstDash val="solid"/>
+                      <a:round/>
+                      <a:headEnd type="none" w="med" len="med"/>
+                      <a:tailEnd type="none" w="med" len="med"/>
+                    </a:lnT>
+                    <a:lnB w="6350" cap="flat" cmpd="sng" algn="ctr">
+                      <a:solidFill>
+                        <a:srgbClr val="D9DCE3"/>
+                      </a:solidFill>
+                      <a:prstDash val="solid"/>
+                      <a:round/>
+                      <a:headEnd type="none" w="med" len="med"/>
+                      <a:tailEnd type="none" w="med" len="med"/>
+                    </a:lnB>
+                    <a:solidFill>
+                      <a:srgbClr val="F2F4F8"/>
+                    </a:solidFill>
+                  </a:tcPr>
+                </a:tc>
+                <a:tc>
+                  <a:txBody>
+                    <a:bodyPr/>
+                    <a:lstStyle/>
+                    <a:p>
+                      <a:pPr indent="0" marL="0">
+                        <a:buNone/>
+                      </a:pPr>
+                      <a:r>
+                        <a:rPr lang="en-US" sz="1100" dirty="0">
+                          <a:solidFill>
+                            <a:srgbClr val="1F2328"/>
+                          </a:solidFill>
+                          <a:latin typeface="Malgun Gothic" pitchFamily="34" charset="0"/>
+                          <a:ea typeface="Malgun Gothic" pitchFamily="34" charset="-122"/>
+                          <a:cs typeface="Malgun Gothic" pitchFamily="34" charset="-120"/>
+                        </a:rPr>
+                        <a:t>+91.4%</a:t>
+                      </a:r>
+                      <a:endParaRPr lang="en-US" sz="1100" dirty="0">
+                        <a:latin typeface="Malgun Gothic" charset="0"/>
+                        <a:ea typeface="Malgun Gothic" charset="0"/>
+                        <a:cs typeface="Malgun Gothic" charset="0"/>
+                      </a:endParaRPr>
+                    </a:p>
+                  </a:txBody>
+                  <a:tcPr marL="76200" marR="76200" marT="38100" marB="38100" anchor="ctr">
+                    <a:lnL w="6350" cap="flat" cmpd="sng" algn="ctr">
+                      <a:solidFill>
+                        <a:srgbClr val="D9DCE3"/>
+                      </a:solidFill>
+                      <a:prstDash val="solid"/>
+                      <a:round/>
+                      <a:headEnd type="none" w="med" len="med"/>
+                      <a:tailEnd type="none" w="med" len="med"/>
+                    </a:lnL>
+                    <a:lnR w="6350" cap="flat" cmpd="sng" algn="ctr">
+                      <a:solidFill>
+                        <a:srgbClr val="D9DCE3"/>
+                      </a:solidFill>
+                      <a:prstDash val="solid"/>
+                      <a:round/>
+                      <a:headEnd type="none" w="med" len="med"/>
+                      <a:tailEnd type="none" w="med" len="med"/>
+                    </a:lnR>
+                    <a:lnT w="6350" cap="flat" cmpd="sng" algn="ctr">
+                      <a:solidFill>
+                        <a:srgbClr val="D9DCE3"/>
+                      </a:solidFill>
+                      <a:prstDash val="solid"/>
+                      <a:round/>
+                      <a:headEnd type="none" w="med" len="med"/>
+                      <a:tailEnd type="none" w="med" len="med"/>
+                    </a:lnT>
+                    <a:lnB w="6350" cap="flat" cmpd="sng" algn="ctr">
+                      <a:solidFill>
+                        <a:srgbClr val="D9DCE3"/>
+                      </a:solidFill>
+                      <a:prstDash val="solid"/>
+                      <a:round/>
+                      <a:headEnd type="none" w="med" len="med"/>
+                      <a:tailEnd type="none" w="med" len="med"/>
+                    </a:lnB>
+                    <a:solidFill>
+                      <a:srgbClr val="F2F4F8"/>
+                    </a:solidFill>
+                  </a:tcPr>
+                </a:tc>
+              </a:tr>
+              <a:tr h="274320">
+                <a:tc>
+                  <a:txBody>
+                    <a:bodyPr/>
+                    <a:lstStyle/>
+                    <a:p>
+                      <a:pPr indent="0" marL="0">
+                        <a:buNone/>
+                      </a:pPr>
+                      <a:r>
+                        <a:rPr lang="en-US" sz="1100" dirty="0">
+                          <a:solidFill>
+                            <a:srgbClr val="1F2328"/>
+                          </a:solidFill>
+                          <a:latin typeface="Malgun Gothic" pitchFamily="34" charset="0"/>
+                          <a:ea typeface="Malgun Gothic" pitchFamily="34" charset="-122"/>
+                          <a:cs typeface="Malgun Gothic" pitchFamily="34" charset="-120"/>
+                        </a:rPr>
+                        <a:t>역삼동 751-8 5층</a:t>
+                      </a:r>
+                      <a:endParaRPr lang="en-US" sz="1100" dirty="0">
+                        <a:latin typeface="Malgun Gothic" charset="0"/>
+                        <a:ea typeface="Malgun Gothic" charset="0"/>
+                        <a:cs typeface="Malgun Gothic" charset="0"/>
+                      </a:endParaRPr>
+                    </a:p>
+                  </a:txBody>
+                  <a:tcPr marL="76200" marR="76200" marT="38100" marB="38100" anchor="ctr">
+                    <a:lnL w="6350" cap="flat" cmpd="sng" algn="ctr">
+                      <a:solidFill>
+                        <a:srgbClr val="D9DCE3"/>
+                      </a:solidFill>
+                      <a:prstDash val="solid"/>
+                      <a:round/>
+                      <a:headEnd type="none" w="med" len="med"/>
+                      <a:tailEnd type="none" w="med" len="med"/>
+                    </a:lnL>
+                    <a:lnR w="6350" cap="flat" cmpd="sng" algn="ctr">
+                      <a:solidFill>
+                        <a:srgbClr val="D9DCE3"/>
+                      </a:solidFill>
+                      <a:prstDash val="solid"/>
+                      <a:round/>
+                      <a:headEnd type="none" w="med" len="med"/>
+                      <a:tailEnd type="none" w="med" len="med"/>
+                    </a:lnR>
+                    <a:lnT w="6350" cap="flat" cmpd="sng" algn="ctr">
+                      <a:solidFill>
+                        <a:srgbClr val="D9DCE3"/>
+                      </a:solidFill>
+                      <a:prstDash val="solid"/>
+                      <a:round/>
+                      <a:headEnd type="none" w="med" len="med"/>
+                      <a:tailEnd type="none" w="med" len="med"/>
+                    </a:lnT>
+                    <a:lnB w="6350" cap="flat" cmpd="sng" algn="ctr">
+                      <a:solidFill>
+                        <a:srgbClr val="D9DCE3"/>
+                      </a:solidFill>
+                      <a:prstDash val="solid"/>
+                      <a:round/>
+                      <a:headEnd type="none" w="med" len="med"/>
+                      <a:tailEnd type="none" w="med" len="med"/>
+                    </a:lnB>
+                    <a:solidFill>
+                      <a:srgbClr val="FFFFFF"/>
+                    </a:solidFill>
+                  </a:tcPr>
+                </a:tc>
+                <a:tc>
+                  <a:txBody>
+                    <a:bodyPr/>
+                    <a:lstStyle/>
+                    <a:p>
+                      <a:pPr indent="0" marL="0">
+                        <a:buNone/>
+                      </a:pPr>
+                      <a:r>
+                        <a:rPr lang="en-US" sz="1100" dirty="0">
+                          <a:solidFill>
+                            <a:srgbClr val="1F2328"/>
+                          </a:solidFill>
+                          <a:latin typeface="Malgun Gothic" pitchFamily="34" charset="0"/>
+                          <a:ea typeface="Malgun Gothic" pitchFamily="34" charset="-122"/>
+                          <a:cs typeface="Malgun Gothic" pitchFamily="34" charset="-120"/>
+                        </a:rPr>
+                        <a:t>중개 2026-01</a:t>
+                      </a:r>
+                      <a:endParaRPr lang="en-US" sz="1100" dirty="0">
+                        <a:latin typeface="Malgun Gothic" charset="0"/>
+                        <a:ea typeface="Malgun Gothic" charset="0"/>
+                        <a:cs typeface="Malgun Gothic" charset="0"/>
+                      </a:endParaRPr>
+                    </a:p>
+                  </a:txBody>
+                  <a:tcPr marL="76200" marR="76200" marT="38100" marB="38100" anchor="ctr">
+                    <a:lnL w="6350" cap="flat" cmpd="sng" algn="ctr">
+                      <a:solidFill>
+                        <a:srgbClr val="D9DCE3"/>
+                      </a:solidFill>
+                      <a:prstDash val="solid"/>
+                      <a:round/>
+                      <a:headEnd type="none" w="med" len="med"/>
+                      <a:tailEnd type="none" w="med" len="med"/>
+                    </a:lnL>
+                    <a:lnR w="6350" cap="flat" cmpd="sng" algn="ctr">
+                      <a:solidFill>
+                        <a:srgbClr val="D9DCE3"/>
+                      </a:solidFill>
+                      <a:prstDash val="solid"/>
+                      <a:round/>
+                      <a:headEnd type="none" w="med" len="med"/>
+                      <a:tailEnd type="none" w="med" len="med"/>
+                    </a:lnR>
+                    <a:lnT w="6350" cap="flat" cmpd="sng" algn="ctr">
+                      <a:solidFill>
+                        <a:srgbClr val="D9DCE3"/>
+                      </a:solidFill>
+                      <a:prstDash val="solid"/>
+                      <a:round/>
+                      <a:headEnd type="none" w="med" len="med"/>
+                      <a:tailEnd type="none" w="med" len="med"/>
+                    </a:lnT>
+                    <a:lnB w="6350" cap="flat" cmpd="sng" algn="ctr">
+                      <a:solidFill>
+                        <a:srgbClr val="D9DCE3"/>
+                      </a:solidFill>
+                      <a:prstDash val="solid"/>
+                      <a:round/>
+                      <a:headEnd type="none" w="med" len="med"/>
+                      <a:tailEnd type="none" w="med" len="med"/>
+                    </a:lnB>
+                    <a:solidFill>
+                      <a:srgbClr val="FFFFFF"/>
+                    </a:solidFill>
+                  </a:tcPr>
+                </a:tc>
+                <a:tc>
+                  <a:txBody>
+                    <a:bodyPr/>
+                    <a:lstStyle/>
+                    <a:p>
+                      <a:pPr indent="0" marL="0">
+                        <a:buNone/>
+                      </a:pPr>
+                      <a:r>
+                        <a:rPr lang="en-US" sz="1100" dirty="0">
+                          <a:solidFill>
+                            <a:srgbClr val="1F2328"/>
+                          </a:solidFill>
+                          <a:latin typeface="Malgun Gothic" pitchFamily="34" charset="0"/>
+                          <a:ea typeface="Malgun Gothic" pitchFamily="34" charset="-122"/>
+                          <a:cs typeface="Malgun Gothic" pitchFamily="34" charset="-120"/>
+                        </a:rPr>
+                        <a:t>5.20억</a:t>
+                      </a:r>
+                      <a:endParaRPr lang="en-US" sz="1100" dirty="0">
+                        <a:latin typeface="Malgun Gothic" charset="0"/>
+                        <a:ea typeface="Malgun Gothic" charset="0"/>
+                        <a:cs typeface="Malgun Gothic" charset="0"/>
+                      </a:endParaRPr>
+                    </a:p>
+                  </a:txBody>
+                  <a:tcPr marL="76200" marR="76200" marT="38100" marB="38100" anchor="ctr">
+                    <a:lnL w="6350" cap="flat" cmpd="sng" algn="ctr">
+                      <a:solidFill>
+                        <a:srgbClr val="D9DCE3"/>
+                      </a:solidFill>
+                      <a:prstDash val="solid"/>
+                      <a:round/>
+                      <a:headEnd type="none" w="med" len="med"/>
+                      <a:tailEnd type="none" w="med" len="med"/>
+                    </a:lnL>
+                    <a:lnR w="6350" cap="flat" cmpd="sng" algn="ctr">
+                      <a:solidFill>
+                        <a:srgbClr val="D9DCE3"/>
+                      </a:solidFill>
+                      <a:prstDash val="solid"/>
+                      <a:round/>
+                      <a:headEnd type="none" w="med" len="med"/>
+                      <a:tailEnd type="none" w="med" len="med"/>
+                    </a:lnR>
+                    <a:lnT w="6350" cap="flat" cmpd="sng" algn="ctr">
+                      <a:solidFill>
+                        <a:srgbClr val="D9DCE3"/>
+                      </a:solidFill>
+                      <a:prstDash val="solid"/>
+                      <a:round/>
+                      <a:headEnd type="none" w="med" len="med"/>
+                      <a:tailEnd type="none" w="med" len="med"/>
+                    </a:lnT>
+                    <a:lnB w="6350" cap="flat" cmpd="sng" algn="ctr">
+                      <a:solidFill>
+                        <a:srgbClr val="D9DCE3"/>
+                      </a:solidFill>
+                      <a:prstDash val="solid"/>
+                      <a:round/>
+                      <a:headEnd type="none" w="med" len="med"/>
+                      <a:tailEnd type="none" w="med" len="med"/>
+                    </a:lnB>
+                    <a:solidFill>
+                      <a:srgbClr val="FFFFFF"/>
+                    </a:solidFill>
+                  </a:tcPr>
+                </a:tc>
+                <a:tc>
+                  <a:txBody>
+                    <a:bodyPr/>
+                    <a:lstStyle/>
+                    <a:p>
+                      <a:pPr indent="0" marL="0">
+                        <a:buNone/>
+                      </a:pPr>
+                      <a:r>
+                        <a:rPr lang="en-US" sz="1100" dirty="0">
+                          <a:solidFill>
+                            <a:srgbClr val="1F2328"/>
+                          </a:solidFill>
+                          <a:latin typeface="Malgun Gothic" pitchFamily="34" charset="0"/>
+                          <a:ea typeface="Malgun Gothic" pitchFamily="34" charset="-122"/>
+                          <a:cs typeface="Malgun Gothic" pitchFamily="34" charset="-120"/>
+                        </a:rPr>
+                        <a:t>6.41억 (0.58)</a:t>
+                      </a:r>
+                      <a:endParaRPr lang="en-US" sz="1100" dirty="0">
+                        <a:latin typeface="Malgun Gothic" charset="0"/>
+                        <a:ea typeface="Malgun Gothic" charset="0"/>
+                        <a:cs typeface="Malgun Gothic" charset="0"/>
+                      </a:endParaRPr>
+                    </a:p>
+                  </a:txBody>
+                  <a:tcPr marL="76200" marR="76200" marT="38100" marB="38100" anchor="ctr">
+                    <a:lnL w="6350" cap="flat" cmpd="sng" algn="ctr">
+                      <a:solidFill>
+                        <a:srgbClr val="D9DCE3"/>
+                      </a:solidFill>
+                      <a:prstDash val="solid"/>
+                      <a:round/>
+                      <a:headEnd type="none" w="med" len="med"/>
+                      <a:tailEnd type="none" w="med" len="med"/>
+                    </a:lnL>
+                    <a:lnR w="6350" cap="flat" cmpd="sng" algn="ctr">
+                      <a:solidFill>
+                        <a:srgbClr val="D9DCE3"/>
+                      </a:solidFill>
+                      <a:prstDash val="solid"/>
+                      <a:round/>
+                      <a:headEnd type="none" w="med" len="med"/>
+                      <a:tailEnd type="none" w="med" len="med"/>
+                    </a:lnR>
+                    <a:lnT w="6350" cap="flat" cmpd="sng" algn="ctr">
+                      <a:solidFill>
+                        <a:srgbClr val="D9DCE3"/>
+                      </a:solidFill>
+                      <a:prstDash val="solid"/>
+                      <a:round/>
+                      <a:headEnd type="none" w="med" len="med"/>
+                      <a:tailEnd type="none" w="med" len="med"/>
+                    </a:lnT>
+                    <a:lnB w="6350" cap="flat" cmpd="sng" algn="ctr">
+                      <a:solidFill>
+                        <a:srgbClr val="D9DCE3"/>
+                      </a:solidFill>
+                      <a:prstDash val="solid"/>
+                      <a:round/>
+                      <a:headEnd type="none" w="med" len="med"/>
+                      <a:tailEnd type="none" w="med" len="med"/>
+                    </a:lnB>
+                    <a:solidFill>
+                      <a:srgbClr val="FFFFFF"/>
+                    </a:solidFill>
+                  </a:tcPr>
+                </a:tc>
+                <a:tc>
+                  <a:txBody>
+                    <a:bodyPr/>
+                    <a:lstStyle/>
+                    <a:p>
+                      <a:pPr indent="0" marL="0">
+                        <a:buNone/>
+                      </a:pPr>
+                      <a:r>
+                        <a:rPr lang="en-US" sz="1100" dirty="0">
+                          <a:solidFill>
+                            <a:srgbClr val="1F2328"/>
+                          </a:solidFill>
+                          <a:latin typeface="Malgun Gothic" pitchFamily="34" charset="0"/>
+                          <a:ea typeface="Malgun Gothic" pitchFamily="34" charset="-122"/>
+                          <a:cs typeface="Malgun Gothic" pitchFamily="34" charset="-120"/>
+                        </a:rPr>
+                        <a:t>+23.3%</a:t>
+                      </a:r>
+                      <a:endParaRPr lang="en-US" sz="1100" dirty="0">
+                        <a:latin typeface="Malgun Gothic" charset="0"/>
+                        <a:ea typeface="Malgun Gothic" charset="0"/>
+                        <a:cs typeface="Malgun Gothic" charset="0"/>
+                      </a:endParaRPr>
+                    </a:p>
+                  </a:txBody>
+                  <a:tcPr marL="76200" marR="76200" marT="38100" marB="38100" anchor="ctr">
+                    <a:lnL w="6350" cap="flat" cmpd="sng" algn="ctr">
+                      <a:solidFill>
+                        <a:srgbClr val="D9DCE3"/>
+                      </a:solidFill>
+                      <a:prstDash val="solid"/>
+                      <a:round/>
+                      <a:headEnd type="none" w="med" len="med"/>
+                      <a:tailEnd type="none" w="med" len="med"/>
+                    </a:lnL>
+                    <a:lnR w="6350" cap="flat" cmpd="sng" algn="ctr">
+                      <a:solidFill>
+                        <a:srgbClr val="D9DCE3"/>
+                      </a:solidFill>
+                      <a:prstDash val="solid"/>
+                      <a:round/>
+                      <a:headEnd type="none" w="med" len="med"/>
+                      <a:tailEnd type="none" w="med" len="med"/>
+                    </a:lnR>
+                    <a:lnT w="6350" cap="flat" cmpd="sng" algn="ctr">
+                      <a:solidFill>
+                        <a:srgbClr val="D9DCE3"/>
+                      </a:solidFill>
+                      <a:prstDash val="solid"/>
+                      <a:round/>
+                      <a:headEnd type="none" w="med" len="med"/>
+                      <a:tailEnd type="none" w="med" len="med"/>
+                    </a:lnT>
+                    <a:lnB w="6350" cap="flat" cmpd="sng" algn="ctr">
+                      <a:solidFill>
+                        <a:srgbClr val="D9DCE3"/>
+                      </a:solidFill>
+                      <a:prstDash val="solid"/>
+                      <a:round/>
+                      <a:headEnd type="none" w="med" len="med"/>
+                      <a:tailEnd type="none" w="med" len="med"/>
+                    </a:lnB>
+                    <a:solidFill>
+                      <a:srgbClr val="FFFFFF"/>
+                    </a:solidFill>
+                  </a:tcPr>
+                </a:tc>
+              </a:tr>
+            </a:tbl>
+          </a:graphicData>
+        </a:graphic>
+      </p:graphicFrame>
+      <p:sp>
+        <p:nvSpPr>
+          <p:cNvPr id="6" name="Text 2"/>
+          <p:cNvSpPr txBox="1"/>
+          <p:nvPr/>
+        </p:nvSpPr>
+        <p:spPr>
+          <a:xfrm>
+            <a:off x="7498080" y="3291840"/>
+            <a:ext cx="4144975" cy="2926080"/>
+          </a:xfrm>
+          <a:prstGeom prst="rect">
+            <a:avLst/>
+          </a:prstGeom>
+          <a:noFill/>
+          <a:ln/>
+        </p:spPr>
+        <p:txBody>
+          <a:bodyPr wrap="square" lIns="0" tIns="0" rIns="0" bIns="0" rtlCol="0" anchor="t"/>
+          <a:lstStyle/>
+          <a:p>
+            <a:pPr marL="177800" indent="-177800">
+              <a:spcAft>
+                <a:spcPts val="600"/>
+              </a:spcAft>
+              <a:buSzPct val="100000"/>
+              <a:buChar char="•"/>
+            </a:pPr>
+            <a:r>
+              <a:rPr lang="en-US" sz="1200" dirty="0">
+                <a:solidFill>
+                  <a:srgbClr val="1F2328"/>
+                </a:solidFill>
+                <a:latin typeface="Malgun Gothic" pitchFamily="34" charset="0"/>
+                <a:ea typeface="Malgun Gothic" pitchFamily="34" charset="-122"/>
+                <a:cs typeface="Malgun Gothic" pitchFamily="34" charset="-120"/>
+              </a:rPr>
+              <a:t>이 9건에서는 하우스머치가 더 가깝다. 다만 공정한 대결은 아니다: 우리 값은 그 거래를 빼고 낸 추정이고, 하우스머치는 그 거래를 알고 낸 값일 수 있다(조회 화면 거래사례에 포함). 기준일 뒤 거래 1건(첫 줄)도 하우스머치가 더 가까웠다</a:t>
+            </a:r>
+            <a:endParaRPr lang="en-US" sz="1200" dirty="0"/>
+          </a:p>
+          <a:p>
+            <a:pPr marL="177800" indent="-177800">
+              <a:spcAft>
+                <a:spcPts val="600"/>
+              </a:spcAft>
+              <a:buSzPct val="100000"/>
+              <a:buChar char="•"/>
+            </a:pPr>
+            <a:r>
+              <a:rPr lang="en-US" sz="1200" dirty="0">
+                <a:solidFill>
+                  <a:srgbClr val="1F2328"/>
+                </a:solidFill>
+                <a:latin typeface="Malgun Gothic" pitchFamily="34" charset="0"/>
+                <a:ea typeface="Malgun Gothic" pitchFamily="34" charset="-122"/>
+                <a:cs typeface="Malgun Gothic" pitchFamily="34" charset="-120"/>
+              </a:rPr>
+              <a:t>직거래 2건은 둘 다 높게 추정했고 우리 오차가 더 크다 — 공시가격 대비 싸게 거래된 집이 크게 틀리는 원인과 같다(5장)</a:t>
+            </a:r>
+            <a:endParaRPr lang="en-US" sz="1200" dirty="0"/>
+          </a:p>
+          <a:p>
+            <a:pPr marL="177800" indent="-177800">
+              <a:spcAft>
+                <a:spcPts val="600"/>
+              </a:spcAft>
+              <a:buSzPct val="100000"/>
+              <a:buChar char="•"/>
+            </a:pPr>
+            <a:r>
+              <a:rPr lang="en-US" sz="1200" dirty="0">
+                <a:solidFill>
+                  <a:srgbClr val="1F2328"/>
+                </a:solidFill>
+                <a:latin typeface="Malgun Gothic" pitchFamily="34" charset="0"/>
+                <a:ea typeface="Malgun Gothic" pitchFamily="34" charset="-122"/>
+                <a:cs typeface="Malgun Gothic" pitchFamily="34" charset="-120"/>
+              </a:rPr>
+              <a:t>우리 신뢰도가 가장 낮은 역삼동(0.58)이 중개거래 중 가장 많이 틀렸다</a:t>
+            </a:r>
+            <a:endParaRPr lang="en-US" sz="1200" dirty="0"/>
+          </a:p>
+          <a:p>
+            <a:pPr marL="177800" indent="-177800">
+              <a:spcAft>
+                <a:spcPts val="600"/>
+              </a:spcAft>
+              <a:buSzPct val="100000"/>
+              <a:buChar char="•"/>
+            </a:pPr>
+            <a:r>
+              <a:rPr lang="en-US" sz="1200" dirty="0">
+                <a:solidFill>
+                  <a:srgbClr val="1F2328"/>
+                </a:solidFill>
+                <a:latin typeface="Malgun Gothic" pitchFamily="34" charset="0"/>
+                <a:ea typeface="Malgun Gothic" pitchFamily="34" charset="-122"/>
+                <a:cs typeface="Malgun Gothic" pitchFamily="34" charset="-120"/>
+              </a:rPr>
+              <a:t>하우스머치 상하한은 좁아 실거래가가 3건만 들어갔다</a:t>
+            </a:r>
+            <a:endParaRPr lang="en-US" sz="1200" dirty="0"/>
+          </a:p>
+        </p:txBody>
+      </p:sp>
+      <p:sp>
+        <p:nvSpPr>
+          <p:cNvPr id="7" name="Text 3"/>
+          <p:cNvSpPr txBox="1"/>
+          <p:nvPr/>
+        </p:nvSpPr>
+        <p:spPr>
+          <a:xfrm>
+            <a:off x="548640" y="6355080"/>
+            <a:ext cx="10180015" cy="320040"/>
+          </a:xfrm>
+          <a:prstGeom prst="rect">
+            <a:avLst/>
+          </a:prstGeom>
+          <a:noFill/>
+          <a:ln/>
+        </p:spPr>
+        <p:txBody>
+          <a:bodyPr wrap="square" lIns="0" tIns="0" rIns="0" bIns="0" rtlCol="0" anchor="ctr"/>
+          <a:lstStyle/>
+          <a:p>
+            <a:pPr indent="0" marL="0">
+              <a:buNone/>
+            </a:pPr>
+            <a:r>
+              <a:rPr lang="en-US" sz="1000" dirty="0">
+                <a:solidFill>
+                  <a:srgbClr val="8A8984"/>
+                </a:solidFill>
+                <a:latin typeface="Malgun Gothic" pitchFamily="34" charset="0"/>
+                <a:ea typeface="Malgun Gothic" pitchFamily="34" charset="-122"/>
+                <a:cs typeface="Malgun Gothic" pitchFamily="34" charset="-120"/>
+              </a:rPr>
+              <a:t>9건은 권역 × 신뢰도 높음·중간·낮음에서 무작위(시드 7), 하우스머치는 직접 조회(2026-10-08, 기준일 2026-09-01). 건별 하우스머치 값은 이용약관(저작권·복제 금지)에 따라 싣지 않음 · 출처: 하우스머치, docs/의사결정/1008_04</a:t>
+            </a:r>
+            <a:endParaRPr lang="en-US" sz="1000" dirty="0"/>
+          </a:p>
+        </p:txBody>
+      </p:sp>
+      <p:sp>
+        <p:nvSpPr>
+          <p:cNvPr id="25" name="Slide Number Placeholder 0"/>
+          <p:cNvSpPr>
+            <a:spLocks noGrp="1"/>
+          </p:cNvSpPr>
+          <p:nvPr>
+            <p:ph type="sldNum" sz="quarter" idx="4294967295"/>
+          </p:nvPr>
+        </p:nvSpPr>
+        <p:spPr>
+          <a:xfrm>
+            <a:off x="11277295" y="6446520"/>
+            <a:ext cx="457200" cy="274320"/>
+          </a:xfrm>
+          <a:prstGeom prst="rect">
+            <a:avLst/>
+          </a:prstGeom>
+          <a:extLst>
+            <a:ext uri="{C572A759-6A51-4108-AA02-DFA0A04FC94B}">
+              <ma14:wrappingTextBoxFlag xmlns:ma14="http://schemas.microsoft.com/office/mac/drawingml/2011/main" val="0"/>
+            </a:ext>
+          </a:extLst>
+        </p:spPr>
+        <p:txBody>
+          <a:bodyPr/>
+          <a:lstStyle>
+            <a:lvl1pPr>
+              <a:defRPr sz="1000">
+                <a:solidFill>
+                  <a:srgbClr val="8A8984"/>
+                </a:solidFill>
+                <a:latin typeface="Malgun Gothic"/>
+                <a:ea typeface="Malgun Gothic"/>
+                <a:cs typeface="Malgun Gothic"/>
+              </a:defRPr>
+            </a:lvl1pPr>
+          </a:lstStyle>
+          <a:p>
+            <a:pPr algn="r"/>
+            <a:fld id="{F7021451-1387-4CA6-816F-3879F97B5CBC}" type="slidenum">
+              <a:rPr b="0" lang="en-US"/>
+              <a:t>27</a:t>
+            </a:fld>
+            <a:endParaRPr lang="en-US"/>
+          </a:p>
+        </p:txBody>
+      </p:sp>
+    </p:spTree>
+  </p:cSld>
+  <p:clrMapOvr>
+    <a:masterClrMapping/>
+  </p:clrMapOvr>
+</p:sld>
+</file>
+
 <file path=ppt/slides/slide3.xml><?xml version="1.0" encoding="utf-8"?>
 <p:sld xmlns:a="http://schemas.openxmlformats.org/drawingml/2006/main" xmlns:r="http://schemas.openxmlformats.org/officeDocument/2006/relationships" xmlns:p="http://schemas.openxmlformats.org/presentationml/2006/main">
   <p:cSld name="Slide 3">
@@ -31910,7 +37319,7 @@
                 <a:ea typeface="Malgun Gothic" pitchFamily="34" charset="-122"/>
                 <a:cs typeface="Malgun Gothic" pitchFamily="34" charset="-120"/>
               </a:rPr>
-              <a:t>위 막대처럼 하한~상한. 실제 가격이 10번 중 8번은 이 안에 들어오도록 계산 — 실제로 78~82%</a:t>
+              <a:t>위 막대처럼 하한~상한. 실제 가격이 10번 중 8번은 이 안에 들어오도록 계산 — 실제로 77~83%</a:t>
             </a:r>
             <a:endParaRPr lang="en-US" sz="1300" dirty="0"/>
           </a:p>
@@ -33621,7 +39030,7 @@
                 <a:ea typeface="Malgun Gothic" pitchFamily="34" charset="-122"/>
                 <a:cs typeface="Malgun Gothic" pitchFamily="34" charset="-120"/>
               </a:rPr>
-              <a:t>건축물대장</a:t>
+              <a:t>건축물대장(현행·말소)</a:t>
             </a:r>
             <a:endParaRPr lang="en-US" sz="2000" dirty="0"/>
           </a:p>
@@ -33660,7 +39069,7 @@
                 <a:ea typeface="Malgun Gothic" pitchFamily="34" charset="-122"/>
                 <a:cs typeface="Malgun Gothic" pitchFamily="34" charset="-120"/>
               </a:rPr>
-              <a:t>언제 지었나, 승강기·층수·세대수</a:t>
+              <a:t>언제 지었나, 승강기·층수, 헐린 건물</a:t>
             </a:r>
             <a:endParaRPr lang="en-US" sz="1400" dirty="0"/>
           </a:p>
@@ -33699,7 +39108,7 @@
                 <a:ea typeface="Malgun Gothic" pitchFamily="34" charset="-122"/>
                 <a:cs typeface="Malgun Gothic" pitchFamily="34" charset="-120"/>
               </a:rPr>
-              <a:t>9,928개 건물</a:t>
+              <a:t>9,928개 지번 + 말소 49,074건</a:t>
             </a:r>
             <a:endParaRPr lang="en-US" sz="1300" dirty="0"/>
           </a:p>

--- a/presentation/AVM_발표.pptx
+++ b/presentation/AVM_발표.pptx
@@ -11968,7 +11968,7 @@
                 <a:ea typeface="Malgun Gothic" pitchFamily="34" charset="-122"/>
                 <a:cs typeface="Malgun Gothic" pitchFamily="34" charset="-120"/>
               </a:rPr>
-              <a:t>결정마다 선택지·이유를 문서로(23건)</a:t>
+              <a:t>결정마다 선택지·이유를 문서로(24건)</a:t>
             </a:r>
             <a:endParaRPr lang="en-US" sz="1300" dirty="0"/>
           </a:p>
@@ -12010,7 +12010,7 @@
                 <a:ea typeface="Malgun Gothic" pitchFamily="34" charset="-122"/>
                 <a:cs typeface="Malgun Gothic" pitchFamily="34" charset="-120"/>
               </a:rPr>
-              <a:t>AI의 결과는 내가 확인한 뒤 반영 — PR 19건</a:t>
+              <a:t>AI의 결과는 내가 확인한 뒤 반영 — PR 20건</a:t>
             </a:r>
             <a:endParaRPr lang="en-US" sz="1300" dirty="0"/>
           </a:p>
